--- a/02-PROFESORADO/03-PRESENTACIONES/POR-SESION/h1/S208-estructura-minima-de-un-programa-java-presentacion.pptx
+++ b/02-PROFESORADO/03-PRESENTACIONES/POR-SESION/h1/S208-estructura-minima-de-un-programa-java-presentacion.pptx
@@ -11,6 +11,8 @@
     <p:sldId id="259" r:id="rId10"/>
     <p:sldId id="260" r:id="rId11"/>
     <p:sldId id="261" r:id="rId12"/>
+    <p:sldId id="262" r:id="rId13"/>
+    <p:sldId id="263" r:id="rId14"/>
   </p:sldIdLst>
   <p:sldSz cx="12191695" cy="6858000" type="screen4x3"/>
   <p:notesSz cx="6858000" cy="9144000"/>
@@ -3145,7 +3147,7 @@
         <p:spPr>
           <a:xfrm>
             <a:off x="0" y="0"/>
-            <a:ext cx="228600" cy="6858000"/>
+            <a:ext cx="256032" cy="6858000"/>
           </a:xfrm>
           <a:prstGeom prst="rect">
             <a:avLst/>
@@ -3187,8 +3189,8 @@
         </p:nvSpPr>
         <p:spPr>
           <a:xfrm>
-            <a:off x="640080" y="566928"/>
-            <a:ext cx="1828800" cy="566928"/>
+            <a:off x="658368" y="566928"/>
+            <a:ext cx="1874519" cy="566928"/>
           </a:xfrm>
           <a:prstGeom prst="roundRect">
             <a:avLst/>
@@ -3197,7 +3199,9 @@
             <a:srgbClr val="2F5BA8"/>
           </a:solidFill>
           <a:ln>
-            <a:noFill/>
+            <a:solidFill>
+              <a:srgbClr val="2F5BA8"/>
+            </a:solidFill>
           </a:ln>
         </p:spPr>
         <p:style>
@@ -3230,8 +3234,8 @@
         </p:nvSpPr>
         <p:spPr>
           <a:xfrm>
-            <a:off x="713232" y="676656"/>
-            <a:ext cx="1682496" cy="256032"/>
+            <a:off x="731520" y="685800"/>
+            <a:ext cx="1719072" cy="228600"/>
           </a:xfrm>
           <a:prstGeom prst="rect">
             <a:avLst/>
@@ -3239,7 +3243,7 @@
           <a:noFill/>
         </p:spPr>
         <p:txBody>
-          <a:bodyPr wrap="square" lIns="36576" rIns="36576" tIns="27432" bIns="27432">
+          <a:bodyPr wrap="square" lIns="45720" rIns="45720" tIns="36576" bIns="36576" anchor="t">
             <a:spAutoFit/>
           </a:bodyPr>
           <a:lstStyle/>
@@ -3266,8 +3270,8 @@
         </p:nvSpPr>
         <p:spPr>
           <a:xfrm>
-            <a:off x="658368" y="1536192"/>
-            <a:ext cx="10789920" cy="1645920"/>
+            <a:off x="685800" y="1481328"/>
+            <a:ext cx="10789920" cy="1691640"/>
           </a:xfrm>
           <a:prstGeom prst="rect">
             <a:avLst/>
@@ -3275,7 +3279,7 @@
           <a:noFill/>
         </p:spPr>
         <p:txBody>
-          <a:bodyPr wrap="square" lIns="36576" rIns="36576" tIns="27432" bIns="27432">
+          <a:bodyPr wrap="square" lIns="45720" rIns="45720" tIns="36576" bIns="36576" anchor="t">
             <a:spAutoFit/>
           </a:bodyPr>
           <a:lstStyle/>
@@ -3302,8 +3306,8 @@
         </p:nvSpPr>
         <p:spPr>
           <a:xfrm>
-            <a:off x="685800" y="3822191"/>
-            <a:ext cx="6766560" cy="384048"/>
+            <a:off x="713232" y="3703320"/>
+            <a:ext cx="10424160" cy="411480"/>
           </a:xfrm>
           <a:prstGeom prst="rect">
             <a:avLst/>
@@ -3311,7 +3315,7 @@
           <a:noFill/>
         </p:spPr>
         <p:txBody>
-          <a:bodyPr wrap="square" lIns="36576" rIns="36576" tIns="27432" bIns="27432">
+          <a:bodyPr wrap="square" lIns="45720" rIns="45720" tIns="36576" bIns="36576" anchor="t">
             <a:spAutoFit/>
           </a:bodyPr>
           <a:lstStyle/>
@@ -3325,7 +3329,7 @@
               </a:defRPr>
             </a:pPr>
             <a:r>
-              <a:t>H1  ·  45 minutos</a:t>
+              <a:t>H1 · 45 minutos</a:t>
             </a:r>
           </a:p>
         </p:txBody>
@@ -3338,8 +3342,8 @@
         </p:nvSpPr>
         <p:spPr>
           <a:xfrm>
-            <a:off x="685800" y="5074920"/>
-            <a:ext cx="10241280" cy="640080"/>
+            <a:off x="713232" y="4315968"/>
+            <a:ext cx="10241280" cy="502920"/>
           </a:xfrm>
           <a:prstGeom prst="rect">
             <a:avLst/>
@@ -3347,13 +3351,13 @@
           <a:noFill/>
         </p:spPr>
         <p:txBody>
-          <a:bodyPr wrap="square" lIns="36576" rIns="36576" tIns="27432" bIns="27432">
+          <a:bodyPr wrap="square" lIns="45720" rIns="45720" tIns="36576" bIns="36576" anchor="t">
             <a:spAutoFit/>
           </a:bodyPr>
           <a:lstStyle/>
           <a:p>
             <a:pPr algn="l">
-              <a:defRPr sz="2400" b="0">
+              <a:defRPr sz="1900" b="0">
                 <a:solidFill>
                   <a:srgbClr val="FFFFFF"/>
                 </a:solidFill>
@@ -3361,7 +3365,7 @@
               </a:defRPr>
             </a:pPr>
             <a:r>
-              <a:t>Hoy construiremos una evidencia que puedas comprobar y explicar.</a:t>
+              <a:t>Fase HEXA: Investigar — aprender lo necesario</a:t>
             </a:r>
           </a:p>
         </p:txBody>
@@ -3374,7 +3378,7 @@
         </p:nvSpPr>
         <p:spPr>
           <a:xfrm>
-            <a:off x="685800" y="6272784"/>
+            <a:off x="713232" y="6272784"/>
             <a:ext cx="10607040" cy="201168"/>
           </a:xfrm>
           <a:prstGeom prst="rect">
@@ -3383,7 +3387,7 @@
           <a:noFill/>
         </p:spPr>
         <p:txBody>
-          <a:bodyPr wrap="square" lIns="36576" rIns="36576" tIns="27432" bIns="27432">
+          <a:bodyPr wrap="square" lIns="45720" rIns="45720" tIns="36576" bIns="36576" anchor="t">
             <a:spAutoFit/>
           </a:bodyPr>
           <a:lstStyle/>
@@ -3514,8 +3518,8 @@
         </p:nvSpPr>
         <p:spPr>
           <a:xfrm>
-            <a:off x="502920" y="310896"/>
-            <a:ext cx="5029200" cy="256032"/>
+            <a:off x="502920" y="274320"/>
+            <a:ext cx="5486400" cy="256032"/>
           </a:xfrm>
           <a:prstGeom prst="rect">
             <a:avLst/>
@@ -3523,7 +3527,7 @@
           <a:noFill/>
         </p:spPr>
         <p:txBody>
-          <a:bodyPr wrap="square" lIns="36576" rIns="36576" tIns="27432" bIns="27432">
+          <a:bodyPr wrap="square" lIns="45720" rIns="45720" tIns="36576" bIns="36576" anchor="t">
             <a:spAutoFit/>
           </a:bodyPr>
           <a:lstStyle/>
@@ -3550,7 +3554,7 @@
         </p:nvSpPr>
         <p:spPr>
           <a:xfrm>
-            <a:off x="502920" y="621792"/>
+            <a:off x="502920" y="603504"/>
             <a:ext cx="11064240" cy="530352"/>
           </a:xfrm>
           <a:prstGeom prst="rect">
@@ -3559,7 +3563,7 @@
           <a:noFill/>
         </p:spPr>
         <p:txBody>
-          <a:bodyPr wrap="square" lIns="36576" rIns="36576" tIns="27432" bIns="27432">
+          <a:bodyPr wrap="square" lIns="45720" rIns="45720" tIns="36576" bIns="36576" anchor="t">
             <a:spAutoFit/>
           </a:bodyPr>
           <a:lstStyle/>
@@ -3573,7 +3577,7 @@
               </a:defRPr>
             </a:pPr>
             <a:r>
-              <a:t>Qué vamos a conseguir</a:t>
+              <a:t>Qué debe conseguirse</a:t>
             </a:r>
           </a:p>
         </p:txBody>
@@ -3638,7 +3642,7 @@
           <a:noFill/>
         </p:spPr>
         <p:txBody>
-          <a:bodyPr wrap="square" lIns="36576" rIns="36576" tIns="27432" bIns="27432">
+          <a:bodyPr wrap="square" lIns="45720" rIns="45720" tIns="36576" bIns="36576" anchor="t">
             <a:spAutoFit/>
           </a:bodyPr>
           <a:lstStyle/>
@@ -3665,8 +3669,8 @@
         </p:nvSpPr>
         <p:spPr>
           <a:xfrm>
-            <a:off x="594360" y="1417320"/>
-            <a:ext cx="5349240" cy="4343400"/>
+            <a:off x="594360" y="1389888"/>
+            <a:ext cx="5184648" cy="4297680"/>
           </a:xfrm>
           <a:prstGeom prst="roundRect">
             <a:avLst/>
@@ -3676,7 +3680,7 @@
           </a:solidFill>
           <a:ln>
             <a:solidFill>
-              <a:srgbClr val="EBEEF2"/>
+              <a:srgbClr val="E5E9EF"/>
             </a:solidFill>
           </a:ln>
         </p:spPr>
@@ -3711,7 +3715,7 @@
         <p:spPr>
           <a:xfrm>
             <a:off x="822960" y="1618488"/>
-            <a:ext cx="438912" cy="411480"/>
+            <a:ext cx="4727448" cy="3840480"/>
           </a:xfrm>
           <a:prstGeom prst="rect">
             <a:avLst/>
@@ -3719,107 +3723,35 @@
           <a:noFill/>
         </p:spPr>
         <p:txBody>
-          <a:bodyPr wrap="square" lIns="36576" rIns="36576" tIns="27432" bIns="27432">
+          <a:bodyPr wrap="square" lIns="45720" rIns="45720" tIns="36576" bIns="36576" anchor="t">
             <a:spAutoFit/>
           </a:bodyPr>
           <a:lstStyle/>
           <a:p>
-            <a:pPr algn="ctr">
-              <a:defRPr sz="2400" b="1">
-                <a:solidFill>
-                  <a:srgbClr val="2F5BA8"/>
+            <a:pPr algn="l">
+              <a:defRPr sz="2100" b="1">
+                <a:solidFill>
+                  <a:srgbClr val="1C2330"/>
                 </a:solidFill>
                 <a:latin typeface="Aptos"/>
               </a:defRPr>
             </a:pPr>
             <a:r>
-              <a:t>01</a:t>
-            </a:r>
-          </a:p>
-        </p:txBody>
-      </p:sp>
-      <p:sp>
-        <p:nvSpPr>
-          <p:cNvPr id="10" name="TextBox 9"/>
-          <p:cNvSpPr txBox="1"/>
-          <p:nvPr/>
-        </p:nvSpPr>
-        <p:spPr>
-          <a:xfrm>
-            <a:off x="1344168" y="1645920"/>
-            <a:ext cx="4389120" cy="365760"/>
-          </a:xfrm>
-          <a:prstGeom prst="rect">
-            <a:avLst/>
-          </a:prstGeom>
-          <a:noFill/>
-        </p:spPr>
-        <p:txBody>
-          <a:bodyPr wrap="square" lIns="36576" rIns="36576" tIns="27432" bIns="27432">
-            <a:spAutoFit/>
-          </a:bodyPr>
-          <a:lstStyle/>
-          <a:p>
-            <a:pPr algn="l">
-              <a:defRPr sz="1700" b="1">
-                <a:solidFill>
-                  <a:srgbClr val="2F5BA8"/>
-                </a:solidFill>
-                <a:latin typeface="Aptos"/>
-              </a:defRPr>
-            </a:pPr>
-            <a:r>
-              <a:t>Hoy vas a…</a:t>
-            </a:r>
-          </a:p>
-        </p:txBody>
-      </p:sp>
-      <p:sp>
-        <p:nvSpPr>
-          <p:cNvPr id="11" name="TextBox 10"/>
-          <p:cNvSpPr txBox="1"/>
-          <p:nvPr/>
-        </p:nvSpPr>
-        <p:spPr>
-          <a:xfrm>
-            <a:off x="868680" y="2286000"/>
-            <a:ext cx="4800600" cy="3246120"/>
-          </a:xfrm>
-          <a:prstGeom prst="rect">
-            <a:avLst/>
-          </a:prstGeom>
-          <a:noFill/>
-        </p:spPr>
-        <p:txBody>
-          <a:bodyPr wrap="square" lIns="36576" rIns="36576" tIns="27432" bIns="27432">
-            <a:spAutoFit/>
-          </a:bodyPr>
-          <a:lstStyle/>
-          <a:p>
-            <a:pPr algn="l">
-              <a:defRPr sz="2200" b="0">
-                <a:solidFill>
-                  <a:srgbClr val="1C2330"/>
-                </a:solidFill>
-                <a:latin typeface="Aptos"/>
-              </a:defRPr>
-            </a:pPr>
-            <a:r>
-              <a:t>Entender clase Main y método main.</a:t>
-            </a:r>
-          </a:p>
-        </p:txBody>
-      </p:sp>
-      <p:sp>
-        <p:nvSpPr>
-          <p:cNvPr id="12" name="Rounded Rectangle 11"/>
+              <a:t>Objetivo: Entender clase Main y método main.</a:t>
+            </a:r>
+          </a:p>
+        </p:txBody>
+      </p:sp>
+      <p:sp>
+        <p:nvSpPr>
+          <p:cNvPr id="10" name="Rounded Rectangle 9"/>
           <p:cNvSpPr/>
           <p:nvPr/>
         </p:nvSpPr>
         <p:spPr>
           <a:xfrm>
-            <a:off x="6236208" y="1417320"/>
-            <a:ext cx="5349240" cy="4343400"/>
+            <a:off x="6035040" y="1389888"/>
+            <a:ext cx="5184648" cy="4297680"/>
           </a:xfrm>
           <a:prstGeom prst="roundRect">
             <a:avLst/>
@@ -3829,7 +3761,7 @@
           </a:solidFill>
           <a:ln>
             <a:solidFill>
-              <a:srgbClr val="EBEEF2"/>
+              <a:srgbClr val="E5E9EF"/>
             </a:solidFill>
           </a:ln>
         </p:spPr>
@@ -3857,14 +3789,14 @@
       </p:sp>
       <p:sp>
         <p:nvSpPr>
-          <p:cNvPr id="13" name="TextBox 12"/>
+          <p:cNvPr id="11" name="TextBox 10"/>
           <p:cNvSpPr txBox="1"/>
           <p:nvPr/>
         </p:nvSpPr>
         <p:spPr>
           <a:xfrm>
-            <a:off x="6464808" y="1618488"/>
-            <a:ext cx="438912" cy="411480"/>
+            <a:off x="6263640" y="1618488"/>
+            <a:ext cx="4727448" cy="3840480"/>
           </a:xfrm>
           <a:prstGeom prst="rect">
             <a:avLst/>
@@ -3872,93 +3804,21 @@
           <a:noFill/>
         </p:spPr>
         <p:txBody>
-          <a:bodyPr wrap="square" lIns="36576" rIns="36576" tIns="27432" bIns="27432">
+          <a:bodyPr wrap="square" lIns="45720" rIns="45720" tIns="36576" bIns="36576" anchor="t">
             <a:spAutoFit/>
           </a:bodyPr>
           <a:lstStyle/>
           <a:p>
-            <a:pPr algn="ctr">
-              <a:defRPr sz="2400" b="1">
-                <a:solidFill>
-                  <a:srgbClr val="2F5BA8"/>
+            <a:pPr algn="l">
+              <a:defRPr sz="2100" b="1">
+                <a:solidFill>
+                  <a:srgbClr val="1C2330"/>
                 </a:solidFill>
                 <a:latin typeface="Aptos"/>
               </a:defRPr>
             </a:pPr>
             <a:r>
-              <a:t>02</a:t>
-            </a:r>
-          </a:p>
-        </p:txBody>
-      </p:sp>
-      <p:sp>
-        <p:nvSpPr>
-          <p:cNvPr id="14" name="TextBox 13"/>
-          <p:cNvSpPr txBox="1"/>
-          <p:nvPr/>
-        </p:nvSpPr>
-        <p:spPr>
-          <a:xfrm>
-            <a:off x="6986016" y="1645920"/>
-            <a:ext cx="4389120" cy="365760"/>
-          </a:xfrm>
-          <a:prstGeom prst="rect">
-            <a:avLst/>
-          </a:prstGeom>
-          <a:noFill/>
-        </p:spPr>
-        <p:txBody>
-          <a:bodyPr wrap="square" lIns="36576" rIns="36576" tIns="27432" bIns="27432">
-            <a:spAutoFit/>
-          </a:bodyPr>
-          <a:lstStyle/>
-          <a:p>
-            <a:pPr algn="l">
-              <a:defRPr sz="1700" b="1">
-                <a:solidFill>
-                  <a:srgbClr val="2F5BA8"/>
-                </a:solidFill>
-                <a:latin typeface="Aptos"/>
-              </a:defRPr>
-            </a:pPr>
-            <a:r>
-              <a:t>Debe quedar…</a:t>
-            </a:r>
-          </a:p>
-        </p:txBody>
-      </p:sp>
-      <p:sp>
-        <p:nvSpPr>
-          <p:cNvPr id="15" name="TextBox 14"/>
-          <p:cNvSpPr txBox="1"/>
-          <p:nvPr/>
-        </p:nvSpPr>
-        <p:spPr>
-          <a:xfrm>
-            <a:off x="6510528" y="2286000"/>
-            <a:ext cx="4800600" cy="3246120"/>
-          </a:xfrm>
-          <a:prstGeom prst="rect">
-            <a:avLst/>
-          </a:prstGeom>
-          <a:noFill/>
-        </p:spPr>
-        <p:txBody>
-          <a:bodyPr wrap="square" lIns="36576" rIns="36576" tIns="27432" bIns="27432">
-            <a:spAutoFit/>
-          </a:bodyPr>
-          <a:lstStyle/>
-          <a:p>
-            <a:pPr algn="l">
-              <a:defRPr sz="2200" b="0">
-                <a:solidFill>
-                  <a:srgbClr val="1C2330"/>
-                </a:solidFill>
-                <a:latin typeface="Aptos"/>
-              </a:defRPr>
-            </a:pPr>
-            <a:r>
-              <a:t>Código que compila con varios mensajes por pantalla.</a:t>
+              <a:t>Evidencia: Código que compila con varios mensajes por pantalla.</a:t>
             </a:r>
           </a:p>
         </p:txBody>
@@ -4075,8 +3935,8 @@
         </p:nvSpPr>
         <p:spPr>
           <a:xfrm>
-            <a:off x="502920" y="310896"/>
-            <a:ext cx="5029200" cy="256032"/>
+            <a:off x="502920" y="274320"/>
+            <a:ext cx="5486400" cy="256032"/>
           </a:xfrm>
           <a:prstGeom prst="rect">
             <a:avLst/>
@@ -4084,7 +3944,7 @@
           <a:noFill/>
         </p:spPr>
         <p:txBody>
-          <a:bodyPr wrap="square" lIns="36576" rIns="36576" tIns="27432" bIns="27432">
+          <a:bodyPr wrap="square" lIns="45720" rIns="45720" tIns="36576" bIns="36576" anchor="t">
             <a:spAutoFit/>
           </a:bodyPr>
           <a:lstStyle/>
@@ -4098,7 +3958,7 @@
               </a:defRPr>
             </a:pPr>
             <a:r>
-              <a:t>PASO A PASO</a:t>
+              <a:t>RITMO DE LA SESIÓN</a:t>
             </a:r>
           </a:p>
         </p:txBody>
@@ -4111,7 +3971,7 @@
         </p:nvSpPr>
         <p:spPr>
           <a:xfrm>
-            <a:off x="502920" y="621792"/>
+            <a:off x="502920" y="603504"/>
             <a:ext cx="11064240" cy="530352"/>
           </a:xfrm>
           <a:prstGeom prst="rect">
@@ -4120,7 +3980,7 @@
           <a:noFill/>
         </p:spPr>
         <p:txBody>
-          <a:bodyPr wrap="square" lIns="36576" rIns="36576" tIns="27432" bIns="27432">
+          <a:bodyPr wrap="square" lIns="45720" rIns="45720" tIns="36576" bIns="36576" anchor="t">
             <a:spAutoFit/>
           </a:bodyPr>
           <a:lstStyle/>
@@ -4134,7 +3994,7 @@
               </a:defRPr>
             </a:pPr>
             <a:r>
-              <a:t>Ruta de trabajo</a:t>
+              <a:t>Secuencia de aula</a:t>
             </a:r>
           </a:p>
         </p:txBody>
@@ -4199,7 +4059,7 @@
           <a:noFill/>
         </p:spPr>
         <p:txBody>
-          <a:bodyPr wrap="square" lIns="36576" rIns="36576" tIns="27432" bIns="27432">
+          <a:bodyPr wrap="square" lIns="45720" rIns="45720" tIns="36576" bIns="36576" anchor="t">
             <a:spAutoFit/>
           </a:bodyPr>
           <a:lstStyle/>
@@ -4226,8 +4086,8 @@
         </p:nvSpPr>
         <p:spPr>
           <a:xfrm>
-            <a:off x="685800" y="1325880"/>
-            <a:ext cx="502920" cy="502920"/>
+            <a:off x="658368" y="1280160"/>
+            <a:ext cx="475488" cy="475488"/>
           </a:xfrm>
           <a:prstGeom prst="ellipse">
             <a:avLst/>
@@ -4269,8 +4129,8 @@
         </p:nvSpPr>
         <p:spPr>
           <a:xfrm>
-            <a:off x="685800" y="1435607"/>
-            <a:ext cx="502920" cy="201168"/>
+            <a:off x="658368" y="1380744"/>
+            <a:ext cx="475488" cy="201168"/>
           </a:xfrm>
           <a:prstGeom prst="rect">
             <a:avLst/>
@@ -4278,13 +4138,13 @@
           <a:noFill/>
         </p:spPr>
         <p:txBody>
-          <a:bodyPr wrap="square" lIns="36576" rIns="36576" tIns="27432" bIns="27432">
+          <a:bodyPr wrap="square" lIns="45720" rIns="45720" tIns="36576" bIns="36576" anchor="t">
             <a:spAutoFit/>
           </a:bodyPr>
           <a:lstStyle/>
           <a:p>
             <a:pPr algn="ctr">
-              <a:defRPr sz="1400" b="1">
+              <a:defRPr sz="1300" b="1">
                 <a:solidFill>
                   <a:srgbClr val="FFFFFF"/>
                 </a:solidFill>
@@ -4305,8 +4165,8 @@
         </p:nvSpPr>
         <p:spPr>
           <a:xfrm>
-            <a:off x="1417320" y="1344168"/>
-            <a:ext cx="9875520" cy="548640"/>
+            <a:off x="1389888" y="1261872"/>
+            <a:ext cx="10058400" cy="772668"/>
           </a:xfrm>
           <a:prstGeom prst="rect">
             <a:avLst/>
@@ -4314,13 +4174,13 @@
           <a:noFill/>
         </p:spPr>
         <p:txBody>
-          <a:bodyPr wrap="square" lIns="36576" rIns="36576" tIns="27432" bIns="27432">
+          <a:bodyPr wrap="square" lIns="45720" rIns="45720" tIns="36576" bIns="36576" anchor="t">
             <a:spAutoFit/>
           </a:bodyPr>
           <a:lstStyle/>
           <a:p>
             <a:pPr algn="l">
-              <a:defRPr sz="2000" b="0">
+              <a:defRPr sz="1400" b="0">
                 <a:solidFill>
                   <a:srgbClr val="1C2330"/>
                 </a:solidFill>
@@ -4328,7 +4188,7 @@
               </a:defRPr>
             </a:pPr>
             <a:r>
-              <a:t>Lee el objetivo y escribe con tus palabras qué debe quedar terminado.</a:t>
+              <a:t>0–5 min — Presentar objetivo, producto y evidencia de hoy.</a:t>
             </a:r>
           </a:p>
         </p:txBody>
@@ -4341,8 +4201,8 @@
         </p:nvSpPr>
         <p:spPr>
           <a:xfrm>
-            <a:off x="685800" y="2258568"/>
-            <a:ext cx="502920" cy="502920"/>
+            <a:off x="658368" y="2125979"/>
+            <a:ext cx="475488" cy="475488"/>
           </a:xfrm>
           <a:prstGeom prst="ellipse">
             <a:avLst/>
@@ -4384,8 +4244,8 @@
         </p:nvSpPr>
         <p:spPr>
           <a:xfrm>
-            <a:off x="685800" y="2368296"/>
-            <a:ext cx="502920" cy="201168"/>
+            <a:off x="658368" y="2226563"/>
+            <a:ext cx="475488" cy="201168"/>
           </a:xfrm>
           <a:prstGeom prst="rect">
             <a:avLst/>
@@ -4393,13 +4253,13 @@
           <a:noFill/>
         </p:spPr>
         <p:txBody>
-          <a:bodyPr wrap="square" lIns="36576" rIns="36576" tIns="27432" bIns="27432">
+          <a:bodyPr wrap="square" lIns="45720" rIns="45720" tIns="36576" bIns="36576" anchor="t">
             <a:spAutoFit/>
           </a:bodyPr>
           <a:lstStyle/>
           <a:p>
             <a:pPr algn="ctr">
-              <a:defRPr sz="1400" b="1">
+              <a:defRPr sz="1300" b="1">
                 <a:solidFill>
                   <a:srgbClr val="FFFFFF"/>
                 </a:solidFill>
@@ -4420,8 +4280,8 @@
         </p:nvSpPr>
         <p:spPr>
           <a:xfrm>
-            <a:off x="1417320" y="2276856"/>
-            <a:ext cx="9875520" cy="548640"/>
+            <a:off x="1389888" y="2107691"/>
+            <a:ext cx="10058400" cy="772668"/>
           </a:xfrm>
           <a:prstGeom prst="rect">
             <a:avLst/>
@@ -4429,13 +4289,13 @@
           <a:noFill/>
         </p:spPr>
         <p:txBody>
-          <a:bodyPr wrap="square" lIns="36576" rIns="36576" tIns="27432" bIns="27432">
+          <a:bodyPr wrap="square" lIns="45720" rIns="45720" tIns="36576" bIns="36576" anchor="t">
             <a:spAutoFit/>
           </a:bodyPr>
           <a:lstStyle/>
           <a:p>
             <a:pPr algn="l">
-              <a:defRPr sz="2000" b="0">
+              <a:defRPr sz="1400" b="0">
                 <a:solidFill>
                   <a:srgbClr val="1C2330"/>
                 </a:solidFill>
@@ -4443,7 +4303,7 @@
               </a:defRPr>
             </a:pPr>
             <a:r>
-              <a:t>Atiende al ejemplo breve y anota una predicción, duda o decisión.</a:t>
+              <a:t>5–13 min — Explicación breve: Java organiza el código en clases; main es el punto de entrada.</a:t>
             </a:r>
           </a:p>
         </p:txBody>
@@ -4456,8 +4316,8 @@
         </p:nvSpPr>
         <p:spPr>
           <a:xfrm>
-            <a:off x="685800" y="3191256"/>
-            <a:ext cx="502920" cy="502920"/>
+            <a:off x="658368" y="2971799"/>
+            <a:ext cx="475488" cy="475488"/>
           </a:xfrm>
           <a:prstGeom prst="ellipse">
             <a:avLst/>
@@ -4499,8 +4359,8 @@
         </p:nvSpPr>
         <p:spPr>
           <a:xfrm>
-            <a:off x="685800" y="3300984"/>
-            <a:ext cx="502920" cy="201168"/>
+            <a:off x="658368" y="3072383"/>
+            <a:ext cx="475488" cy="201168"/>
           </a:xfrm>
           <a:prstGeom prst="rect">
             <a:avLst/>
@@ -4508,13 +4368,13 @@
           <a:noFill/>
         </p:spPr>
         <p:txBody>
-          <a:bodyPr wrap="square" lIns="36576" rIns="36576" tIns="27432" bIns="27432">
+          <a:bodyPr wrap="square" lIns="45720" rIns="45720" tIns="36576" bIns="36576" anchor="t">
             <a:spAutoFit/>
           </a:bodyPr>
           <a:lstStyle/>
           <a:p>
             <a:pPr algn="ctr">
-              <a:defRPr sz="1400" b="1">
+              <a:defRPr sz="1300" b="1">
                 <a:solidFill>
                   <a:srgbClr val="FFFFFF"/>
                 </a:solidFill>
@@ -4535,8 +4395,8 @@
         </p:nvSpPr>
         <p:spPr>
           <a:xfrm>
-            <a:off x="1417320" y="3209544"/>
-            <a:ext cx="9875520" cy="548640"/>
+            <a:off x="1389888" y="2953511"/>
+            <a:ext cx="10058400" cy="772668"/>
           </a:xfrm>
           <a:prstGeom prst="rect">
             <a:avLst/>
@@ -4544,13 +4404,13 @@
           <a:noFill/>
         </p:spPr>
         <p:txBody>
-          <a:bodyPr wrap="square" lIns="36576" rIns="36576" tIns="27432" bIns="27432">
+          <a:bodyPr wrap="square" lIns="45720" rIns="45720" tIns="36576" bIns="36576" anchor="t">
             <a:spAutoFit/>
           </a:bodyPr>
           <a:lstStyle/>
           <a:p>
             <a:pPr algn="l">
-              <a:defRPr sz="2000" b="0">
+              <a:defRPr sz="1400" b="0">
                 <a:solidFill>
                   <a:srgbClr val="1C2330"/>
                 </a:solidFill>
@@ -4558,7 +4418,7 @@
               </a:defRPr>
             </a:pPr>
             <a:r>
-              <a:t>Realiza esta tarea: Reescribir un programa mínimo y señalar dónde empieza.</a:t>
+              <a:t>13–18 min — Demostración o ejemplo: Señala línea a línea public class Main y public static void main.</a:t>
             </a:r>
           </a:p>
         </p:txBody>
@@ -4571,8 +4431,8 @@
         </p:nvSpPr>
         <p:spPr>
           <a:xfrm>
-            <a:off x="685800" y="4123944"/>
-            <a:ext cx="502920" cy="502920"/>
+            <a:off x="658368" y="3817620"/>
+            <a:ext cx="475488" cy="475488"/>
           </a:xfrm>
           <a:prstGeom prst="ellipse">
             <a:avLst/>
@@ -4614,8 +4474,8 @@
         </p:nvSpPr>
         <p:spPr>
           <a:xfrm>
-            <a:off x="685800" y="4233672"/>
-            <a:ext cx="502920" cy="201168"/>
+            <a:off x="658368" y="3918204"/>
+            <a:ext cx="475488" cy="201168"/>
           </a:xfrm>
           <a:prstGeom prst="rect">
             <a:avLst/>
@@ -4623,13 +4483,13 @@
           <a:noFill/>
         </p:spPr>
         <p:txBody>
-          <a:bodyPr wrap="square" lIns="36576" rIns="36576" tIns="27432" bIns="27432">
+          <a:bodyPr wrap="square" lIns="45720" rIns="45720" tIns="36576" bIns="36576" anchor="t">
             <a:spAutoFit/>
           </a:bodyPr>
           <a:lstStyle/>
           <a:p>
             <a:pPr algn="ctr">
-              <a:defRPr sz="1400" b="1">
+              <a:defRPr sz="1300" b="1">
                 <a:solidFill>
                   <a:srgbClr val="FFFFFF"/>
                 </a:solidFill>
@@ -4650,8 +4510,8 @@
         </p:nvSpPr>
         <p:spPr>
           <a:xfrm>
-            <a:off x="1417320" y="4142231"/>
-            <a:ext cx="9875520" cy="548640"/>
+            <a:off x="1389888" y="3799332"/>
+            <a:ext cx="10058400" cy="772668"/>
           </a:xfrm>
           <a:prstGeom prst="rect">
             <a:avLst/>
@@ -4659,13 +4519,13 @@
           <a:noFill/>
         </p:spPr>
         <p:txBody>
-          <a:bodyPr wrap="square" lIns="36576" rIns="36576" tIns="27432" bIns="27432">
+          <a:bodyPr wrap="square" lIns="45720" rIns="45720" tIns="36576" bIns="36576" anchor="t">
             <a:spAutoFit/>
           </a:bodyPr>
           <a:lstStyle/>
           <a:p>
             <a:pPr algn="l">
-              <a:defRPr sz="2000" b="0">
+              <a:defRPr sz="1400" b="0">
                 <a:solidFill>
                   <a:srgbClr val="1C2330"/>
                 </a:solidFill>
@@ -4673,7 +4533,7 @@
               </a:defRPr>
             </a:pPr>
             <a:r>
-              <a:t>Comprueba el resultado con una prueba observable; no basta con decir “funciona”.</a:t>
+              <a:t>18–35 min — Trabajo del alumnado: Reescribir un programa mínimo y señalar dónde empieza.</a:t>
             </a:r>
           </a:p>
         </p:txBody>
@@ -4686,8 +4546,8 @@
         </p:nvSpPr>
         <p:spPr>
           <a:xfrm>
-            <a:off x="685800" y="5056631"/>
-            <a:ext cx="502920" cy="502920"/>
+            <a:off x="658368" y="4663440"/>
+            <a:ext cx="475488" cy="475488"/>
           </a:xfrm>
           <a:prstGeom prst="ellipse">
             <a:avLst/>
@@ -4729,8 +4589,8 @@
         </p:nvSpPr>
         <p:spPr>
           <a:xfrm>
-            <a:off x="685800" y="5166359"/>
-            <a:ext cx="502920" cy="201168"/>
+            <a:off x="658368" y="4764024"/>
+            <a:ext cx="475488" cy="201168"/>
           </a:xfrm>
           <a:prstGeom prst="rect">
             <a:avLst/>
@@ -4738,13 +4598,13 @@
           <a:noFill/>
         </p:spPr>
         <p:txBody>
-          <a:bodyPr wrap="square" lIns="36576" rIns="36576" tIns="27432" bIns="27432">
+          <a:bodyPr wrap="square" lIns="45720" rIns="45720" tIns="36576" bIns="36576" anchor="t">
             <a:spAutoFit/>
           </a:bodyPr>
           <a:lstStyle/>
           <a:p>
             <a:pPr algn="ctr">
-              <a:defRPr sz="1400" b="1">
+              <a:defRPr sz="1300" b="1">
                 <a:solidFill>
                   <a:srgbClr val="FFFFFF"/>
                 </a:solidFill>
@@ -4765,8 +4625,8 @@
         </p:nvSpPr>
         <p:spPr>
           <a:xfrm>
-            <a:off x="1417320" y="5074919"/>
-            <a:ext cx="9875520" cy="548640"/>
+            <a:off x="1389888" y="4645152"/>
+            <a:ext cx="10058400" cy="772668"/>
           </a:xfrm>
           <a:prstGeom prst="rect">
             <a:avLst/>
@@ -4774,13 +4634,13 @@
           <a:noFill/>
         </p:spPr>
         <p:txBody>
-          <a:bodyPr wrap="square" lIns="36576" rIns="36576" tIns="27432" bIns="27432">
+          <a:bodyPr wrap="square" lIns="45720" rIns="45720" tIns="36576" bIns="36576" anchor="t">
             <a:spAutoFit/>
           </a:bodyPr>
           <a:lstStyle/>
           <a:p>
             <a:pPr algn="l">
-              <a:defRPr sz="2000" b="0">
+              <a:defRPr sz="1400" b="0">
                 <a:solidFill>
                   <a:srgbClr val="1C2330"/>
                 </a:solidFill>
@@ -4788,7 +4648,122 @@
               </a:defRPr>
             </a:pPr>
             <a:r>
-              <a:t>Guarda o entrega la evidencia indicada y prepárate para explicarla.</a:t>
+              <a:t>35–40 min — Comprobar la evidencia con una explicación o prueba breve.</a:t>
+            </a:r>
+          </a:p>
+        </p:txBody>
+      </p:sp>
+      <p:sp>
+        <p:nvSpPr>
+          <p:cNvPr id="23" name="Oval 22"/>
+          <p:cNvSpPr/>
+          <p:nvPr/>
+        </p:nvSpPr>
+        <p:spPr>
+          <a:xfrm>
+            <a:off x="658368" y="5509259"/>
+            <a:ext cx="475488" cy="475488"/>
+          </a:xfrm>
+          <a:prstGeom prst="ellipse">
+            <a:avLst/>
+          </a:prstGeom>
+          <a:solidFill>
+            <a:srgbClr val="2F5BA8"/>
+          </a:solidFill>
+          <a:ln>
+            <a:noFill/>
+          </a:ln>
+        </p:spPr>
+        <p:style>
+          <a:lnRef idx="1">
+            <a:schemeClr val="accent1"/>
+          </a:lnRef>
+          <a:fillRef idx="3">
+            <a:schemeClr val="accent1"/>
+          </a:fillRef>
+          <a:effectRef idx="2">
+            <a:schemeClr val="accent1"/>
+          </a:effectRef>
+          <a:fontRef idx="minor">
+            <a:schemeClr val="lt1"/>
+          </a:fontRef>
+        </p:style>
+        <p:txBody>
+          <a:bodyPr rtlCol="0" anchor="ctr"/>
+          <a:lstStyle/>
+          <a:p>
+            <a:pPr algn="ctr"/>
+          </a:p>
+        </p:txBody>
+      </p:sp>
+      <p:sp>
+        <p:nvSpPr>
+          <p:cNvPr id="24" name="TextBox 23"/>
+          <p:cNvSpPr txBox="1"/>
+          <p:nvPr/>
+        </p:nvSpPr>
+        <p:spPr>
+          <a:xfrm>
+            <a:off x="658368" y="5609844"/>
+            <a:ext cx="475488" cy="201168"/>
+          </a:xfrm>
+          <a:prstGeom prst="rect">
+            <a:avLst/>
+          </a:prstGeom>
+          <a:noFill/>
+        </p:spPr>
+        <p:txBody>
+          <a:bodyPr wrap="square" lIns="45720" rIns="45720" tIns="36576" bIns="36576" anchor="t">
+            <a:spAutoFit/>
+          </a:bodyPr>
+          <a:lstStyle/>
+          <a:p>
+            <a:pPr algn="ctr">
+              <a:defRPr sz="1300" b="1">
+                <a:solidFill>
+                  <a:srgbClr val="FFFFFF"/>
+                </a:solidFill>
+                <a:latin typeface="Aptos"/>
+              </a:defRPr>
+            </a:pPr>
+            <a:r>
+              <a:t>6</a:t>
+            </a:r>
+          </a:p>
+        </p:txBody>
+      </p:sp>
+      <p:sp>
+        <p:nvSpPr>
+          <p:cNvPr id="25" name="TextBox 24"/>
+          <p:cNvSpPr txBox="1"/>
+          <p:nvPr/>
+        </p:nvSpPr>
+        <p:spPr>
+          <a:xfrm>
+            <a:off x="1389888" y="5490972"/>
+            <a:ext cx="10058400" cy="772668"/>
+          </a:xfrm>
+          <a:prstGeom prst="rect">
+            <a:avLst/>
+          </a:prstGeom>
+          <a:noFill/>
+        </p:spPr>
+        <p:txBody>
+          <a:bodyPr wrap="square" lIns="45720" rIns="45720" tIns="36576" bIns="36576" anchor="t">
+            <a:spAutoFit/>
+          </a:bodyPr>
+          <a:lstStyle/>
+          <a:p>
+            <a:pPr algn="l">
+              <a:defRPr sz="1400" b="0">
+                <a:solidFill>
+                  <a:srgbClr val="1C2330"/>
+                </a:solidFill>
+                <a:latin typeface="Aptos"/>
+              </a:defRPr>
+            </a:pPr>
+            <a:r>
+              <a:t>40–45 min — Cierre: Microdefensa: señalar en el código dónde empieza el programa.</a:t>
             </a:r>
           </a:p>
         </p:txBody>
@@ -4905,8 +4880,8 @@
         </p:nvSpPr>
         <p:spPr>
           <a:xfrm>
-            <a:off x="502920" y="310896"/>
-            <a:ext cx="5029200" cy="256032"/>
+            <a:off x="502920" y="274320"/>
+            <a:ext cx="5486400" cy="256032"/>
           </a:xfrm>
           <a:prstGeom prst="rect">
             <a:avLst/>
@@ -4914,7 +4889,7 @@
           <a:noFill/>
         </p:spPr>
         <p:txBody>
-          <a:bodyPr wrap="square" lIns="36576" rIns="36576" tIns="27432" bIns="27432">
+          <a:bodyPr wrap="square" lIns="45720" rIns="45720" tIns="36576" bIns="36576" anchor="t">
             <a:spAutoFit/>
           </a:bodyPr>
           <a:lstStyle/>
@@ -4928,7 +4903,7 @@
               </a:defRPr>
             </a:pPr>
             <a:r>
-              <a:t>COMPRENDER Y APLICAR</a:t>
+              <a:t>COMPRENDER Y TRANSFERIR</a:t>
             </a:r>
           </a:p>
         </p:txBody>
@@ -4941,7 +4916,7 @@
         </p:nvSpPr>
         <p:spPr>
           <a:xfrm>
-            <a:off x="502920" y="621792"/>
+            <a:off x="502920" y="603504"/>
             <a:ext cx="11064240" cy="530352"/>
           </a:xfrm>
           <a:prstGeom prst="rect">
@@ -4950,7 +4925,7 @@
           <a:noFill/>
         </p:spPr>
         <p:txBody>
-          <a:bodyPr wrap="square" lIns="36576" rIns="36576" tIns="27432" bIns="27432">
+          <a:bodyPr wrap="square" lIns="45720" rIns="45720" tIns="36576" bIns="36576" anchor="t">
             <a:spAutoFit/>
           </a:bodyPr>
           <a:lstStyle/>
@@ -4964,7 +4939,7 @@
               </a:defRPr>
             </a:pPr>
             <a:r>
-              <a:t>Claves para avanzar</a:t>
+              <a:t>Idea clave y puesta en práctica</a:t>
             </a:r>
           </a:p>
         </p:txBody>
@@ -5029,7 +5004,7 @@
           <a:noFill/>
         </p:spPr>
         <p:txBody>
-          <a:bodyPr wrap="square" lIns="36576" rIns="36576" tIns="27432" bIns="27432">
+          <a:bodyPr wrap="square" lIns="45720" rIns="45720" tIns="36576" bIns="36576" anchor="t">
             <a:spAutoFit/>
           </a:bodyPr>
           <a:lstStyle/>
@@ -5056,8 +5031,8 @@
         </p:nvSpPr>
         <p:spPr>
           <a:xfrm>
-            <a:off x="594360" y="1325880"/>
-            <a:ext cx="5257800" cy="4526280"/>
+            <a:off x="621792" y="1325880"/>
+            <a:ext cx="5285232" cy="4736592"/>
           </a:xfrm>
           <a:prstGeom prst="roundRect">
             <a:avLst/>
@@ -5067,7 +5042,7 @@
           </a:solidFill>
           <a:ln>
             <a:solidFill>
-              <a:srgbClr val="EBEEF2"/>
+              <a:srgbClr val="E5E9EF"/>
             </a:solidFill>
           </a:ln>
         </p:spPr>
@@ -5095,25 +5070,98 @@
       </p:sp>
       <p:sp>
         <p:nvSpPr>
-          <p:cNvPr id="9" name="Rounded Rectangle 8"/>
+          <p:cNvPr id="9" name="TextBox 8"/>
+          <p:cNvSpPr txBox="1"/>
+          <p:nvPr/>
+        </p:nvSpPr>
+        <p:spPr>
+          <a:xfrm>
+            <a:off x="932688" y="1627632"/>
+            <a:ext cx="2011680" cy="329184"/>
+          </a:xfrm>
+          <a:prstGeom prst="rect">
+            <a:avLst/>
+          </a:prstGeom>
+          <a:noFill/>
+        </p:spPr>
+        <p:txBody>
+          <a:bodyPr wrap="square" lIns="45720" rIns="45720" tIns="36576" bIns="36576" anchor="t">
+            <a:spAutoFit/>
+          </a:bodyPr>
+          <a:lstStyle/>
+          <a:p>
+            <a:pPr algn="l">
+              <a:defRPr sz="1300" b="1">
+                <a:solidFill>
+                  <a:srgbClr val="2F5BA8"/>
+                </a:solidFill>
+                <a:latin typeface="Aptos"/>
+              </a:defRPr>
+            </a:pPr>
+            <a:r>
+              <a:t>IDEA CLAVE</a:t>
+            </a:r>
+          </a:p>
+        </p:txBody>
+      </p:sp>
+      <p:sp>
+        <p:nvSpPr>
+          <p:cNvPr id="10" name="TextBox 9"/>
+          <p:cNvSpPr txBox="1"/>
+          <p:nvPr/>
+        </p:nvSpPr>
+        <p:spPr>
+          <a:xfrm>
+            <a:off x="932688" y="2176272"/>
+            <a:ext cx="4617720" cy="3429000"/>
+          </a:xfrm>
+          <a:prstGeom prst="rect">
+            <a:avLst/>
+          </a:prstGeom>
+          <a:noFill/>
+        </p:spPr>
+        <p:txBody>
+          <a:bodyPr wrap="square" lIns="73152" rIns="45720" tIns="36576">
+            <a:spAutoFit/>
+          </a:bodyPr>
+          <a:lstStyle/>
+          <a:p>
+            <a:pPr>
+              <a:spcAft>
+                <a:spcPts val="900"/>
+              </a:spcAft>
+              <a:defRPr sz="2300">
+                <a:solidFill>
+                  <a:srgbClr val="1C2330"/>
+                </a:solidFill>
+                <a:latin typeface="Aptos"/>
+              </a:defRPr>
+            </a:pPr>
+            <a:r>
+              <a:t>•  public class Main, public static void main(String[] args) y orden de ejecución.</a:t>
+            </a:r>
+          </a:p>
+        </p:txBody>
+      </p:sp>
+      <p:sp>
+        <p:nvSpPr>
+          <p:cNvPr id="11" name="Rounded Rectangle 10"/>
           <p:cNvSpPr/>
           <p:nvPr/>
         </p:nvSpPr>
         <p:spPr>
           <a:xfrm>
             <a:off x="6172200" y="1325880"/>
-            <a:ext cx="5413248" cy="4526280"/>
+            <a:ext cx="5394960" cy="4736592"/>
           </a:xfrm>
           <a:prstGeom prst="roundRect">
             <a:avLst/>
           </a:prstGeom>
           <a:solidFill>
-            <a:srgbClr val="FFFFFF"/>
+            <a:srgbClr val="121824"/>
           </a:solidFill>
           <a:ln>
-            <a:solidFill>
-              <a:srgbClr val="EBEEF2"/>
-            </a:solidFill>
+            <a:noFill/>
           </a:ln>
         </p:spPr>
         <p:style>
@@ -5140,14 +5188,14 @@
       </p:sp>
       <p:sp>
         <p:nvSpPr>
-          <p:cNvPr id="10" name="TextBox 9"/>
+          <p:cNvPr id="12" name="TextBox 11"/>
           <p:cNvSpPr txBox="1"/>
           <p:nvPr/>
         </p:nvSpPr>
         <p:spPr>
           <a:xfrm>
-            <a:off x="868680" y="1600200"/>
-            <a:ext cx="4663440" cy="365760"/>
+            <a:off x="6492240" y="1627632"/>
+            <a:ext cx="2194560" cy="329184"/>
           </a:xfrm>
           <a:prstGeom prst="rect">
             <a:avLst/>
@@ -5155,13 +5203,13 @@
           <a:noFill/>
         </p:spPr>
         <p:txBody>
-          <a:bodyPr wrap="square" lIns="36576" rIns="36576" tIns="27432" bIns="27432">
+          <a:bodyPr wrap="square" lIns="45720" rIns="45720" tIns="36576" bIns="36576" anchor="t">
             <a:spAutoFit/>
           </a:bodyPr>
           <a:lstStyle/>
           <a:p>
             <a:pPr algn="l">
-              <a:defRPr sz="1600" b="1">
+              <a:defRPr sz="1300" b="1">
                 <a:solidFill>
                   <a:srgbClr val="2F5BA8"/>
                 </a:solidFill>
@@ -5169,21 +5217,21 @@
               </a:defRPr>
             </a:pPr>
             <a:r>
-              <a:t>IDEAS CLAVE</a:t>
-            </a:r>
-          </a:p>
-        </p:txBody>
-      </p:sp>
-      <p:sp>
-        <p:nvSpPr>
-          <p:cNvPr id="11" name="TextBox 10"/>
+              <a:t>EN PRÁCTICA</a:t>
+            </a:r>
+          </a:p>
+        </p:txBody>
+      </p:sp>
+      <p:sp>
+        <p:nvSpPr>
+          <p:cNvPr id="13" name="TextBox 12"/>
           <p:cNvSpPr txBox="1"/>
           <p:nvPr/>
         </p:nvSpPr>
         <p:spPr>
           <a:xfrm>
-            <a:off x="868680" y="2121408"/>
-            <a:ext cx="4572000" cy="3337560"/>
+            <a:off x="6492240" y="2176272"/>
+            <a:ext cx="4617720" cy="3429000"/>
           </a:xfrm>
           <a:prstGeom prst="rect">
             <a:avLst/>
@@ -5198,118 +5246,11 @@
           <a:p>
             <a:pPr>
               <a:spcAft>
-                <a:spcPts val="1000"/>
+                <a:spcPts val="900"/>
               </a:spcAft>
-              <a:defRPr sz="1800">
-                <a:solidFill>
-                  <a:srgbClr val="1C2330"/>
-                </a:solidFill>
-                <a:latin typeface="Aptos"/>
-              </a:defRPr>
-            </a:pPr>
-            <a:r>
-              <a:t>•  public class Main, public static void main(String[] args) y orden de ejecución.</a:t>
-            </a:r>
-          </a:p>
-          <a:p>
-            <a:pPr>
-              <a:spcAft>
-                <a:spcPts val="1000"/>
-              </a:spcAft>
-              <a:defRPr sz="1800">
-                <a:solidFill>
-                  <a:srgbClr val="1C2330"/>
-                </a:solidFill>
-                <a:latin typeface="Aptos"/>
-              </a:defRPr>
-            </a:pPr>
-            <a:r>
-              <a:t>•  Guion breve sugerido:</a:t>
-            </a:r>
-          </a:p>
-          <a:p>
-            <a:pPr>
-              <a:spcAft>
-                <a:spcPts val="1000"/>
-              </a:spcAft>
-              <a:defRPr sz="1800">
-                <a:solidFill>
-                  <a:srgbClr val="1C2330"/>
-                </a:solidFill>
-                <a:latin typeface="Aptos"/>
-              </a:defRPr>
-            </a:pPr>
-            <a:r>
-              <a:t>•  &gt; Hoy necesitamos comprender y practicar lo justo para producir una evidencia verificable. Primero observaremos un ejemplo, después trabajaréis y al final cada pers…</a:t>
-            </a:r>
-          </a:p>
-        </p:txBody>
-      </p:sp>
-      <p:sp>
-        <p:nvSpPr>
-          <p:cNvPr id="12" name="TextBox 11"/>
-          <p:cNvSpPr txBox="1"/>
-          <p:nvPr/>
-        </p:nvSpPr>
-        <p:spPr>
-          <a:xfrm>
-            <a:off x="6446520" y="1600200"/>
-            <a:ext cx="4572000" cy="365760"/>
-          </a:xfrm>
-          <a:prstGeom prst="rect">
-            <a:avLst/>
-          </a:prstGeom>
-          <a:noFill/>
-        </p:spPr>
-        <p:txBody>
-          <a:bodyPr wrap="square" lIns="36576" rIns="36576" tIns="27432" bIns="27432">
-            <a:spAutoFit/>
-          </a:bodyPr>
-          <a:lstStyle/>
-          <a:p>
-            <a:pPr algn="l">
-              <a:defRPr sz="1600" b="1">
-                <a:solidFill>
-                  <a:srgbClr val="2F5BA8"/>
-                </a:solidFill>
-                <a:latin typeface="Aptos"/>
-              </a:defRPr>
-            </a:pPr>
-            <a:r>
-              <a:t>ACTIVIDAD CENTRAL</a:t>
-            </a:r>
-          </a:p>
-        </p:txBody>
-      </p:sp>
-      <p:sp>
-        <p:nvSpPr>
-          <p:cNvPr id="13" name="TextBox 12"/>
-          <p:cNvSpPr txBox="1"/>
-          <p:nvPr/>
-        </p:nvSpPr>
-        <p:spPr>
-          <a:xfrm>
-            <a:off x="6446520" y="2121408"/>
-            <a:ext cx="4617720" cy="3337560"/>
-          </a:xfrm>
-          <a:prstGeom prst="rect">
-            <a:avLst/>
-          </a:prstGeom>
-          <a:noFill/>
-        </p:spPr>
-        <p:txBody>
-          <a:bodyPr wrap="square" lIns="73152" rIns="45720" tIns="36576">
-            <a:spAutoFit/>
-          </a:bodyPr>
-          <a:lstStyle/>
-          <a:p>
-            <a:pPr>
-              <a:spcAft>
-                <a:spcPts val="1000"/>
-              </a:spcAft>
-              <a:defRPr sz="1800">
-                <a:solidFill>
-                  <a:srgbClr val="1C2330"/>
+              <a:defRPr sz="2300">
+                <a:solidFill>
+                  <a:srgbClr val="FFFFFF"/>
                 </a:solidFill>
                 <a:latin typeface="Aptos"/>
               </a:defRPr>
@@ -5432,8 +5373,8 @@
         </p:nvSpPr>
         <p:spPr>
           <a:xfrm>
-            <a:off x="502920" y="310896"/>
-            <a:ext cx="5029200" cy="256032"/>
+            <a:off x="502920" y="274320"/>
+            <a:ext cx="5486400" cy="256032"/>
           </a:xfrm>
           <a:prstGeom prst="rect">
             <a:avLst/>
@@ -5441,7 +5382,7 @@
           <a:noFill/>
         </p:spPr>
         <p:txBody>
-          <a:bodyPr wrap="square" lIns="36576" rIns="36576" tIns="27432" bIns="27432">
+          <a:bodyPr wrap="square" lIns="45720" rIns="45720" tIns="36576" bIns="36576" anchor="t">
             <a:spAutoFit/>
           </a:bodyPr>
           <a:lstStyle/>
@@ -5455,7 +5396,7 @@
               </a:defRPr>
             </a:pPr>
             <a:r>
-              <a:t>EVIDENCIA MÍNIMA</a:t>
+              <a:t>APLICAR Y DECIDIR</a:t>
             </a:r>
           </a:p>
         </p:txBody>
@@ -5468,7 +5409,7 @@
         </p:nvSpPr>
         <p:spPr>
           <a:xfrm>
-            <a:off x="502920" y="621792"/>
+            <a:off x="502920" y="603504"/>
             <a:ext cx="11064240" cy="530352"/>
           </a:xfrm>
           <a:prstGeom prst="rect">
@@ -5477,7 +5418,7 @@
           <a:noFill/>
         </p:spPr>
         <p:txBody>
-          <a:bodyPr wrap="square" lIns="36576" rIns="36576" tIns="27432" bIns="27432">
+          <a:bodyPr wrap="square" lIns="45720" rIns="45720" tIns="36576" bIns="36576" anchor="t">
             <a:spAutoFit/>
           </a:bodyPr>
           <a:lstStyle/>
@@ -5491,7 +5432,7 @@
               </a:defRPr>
             </a:pPr>
             <a:r>
-              <a:t>Antes de salir, comprueba</a:t>
+              <a:t>Actividad central</a:t>
             </a:r>
           </a:p>
         </p:txBody>
@@ -5556,7 +5497,7 @@
           <a:noFill/>
         </p:spPr>
         <p:txBody>
-          <a:bodyPr wrap="square" lIns="36576" rIns="36576" tIns="27432" bIns="27432">
+          <a:bodyPr wrap="square" lIns="45720" rIns="45720" tIns="36576" bIns="36576" anchor="t">
             <a:spAutoFit/>
           </a:bodyPr>
           <a:lstStyle/>
@@ -5583,8 +5524,8 @@
         </p:nvSpPr>
         <p:spPr>
           <a:xfrm>
-            <a:off x="713232" y="1371600"/>
-            <a:ext cx="420624" cy="420624"/>
+            <a:off x="658368" y="1307592"/>
+            <a:ext cx="10835640" cy="2226564"/>
           </a:xfrm>
           <a:prstGeom prst="roundRect">
             <a:avLst/>
@@ -5594,7 +5535,7 @@
           </a:solidFill>
           <a:ln>
             <a:solidFill>
-              <a:srgbClr val="2F5BA8"/>
+              <a:srgbClr val="E5E9EF"/>
             </a:solidFill>
           </a:ln>
         </p:spPr>
@@ -5628,8 +5569,8 @@
         </p:nvSpPr>
         <p:spPr>
           <a:xfrm>
-            <a:off x="1389888" y="1362456"/>
-            <a:ext cx="9784080" cy="594360"/>
+            <a:off x="850392" y="1453895"/>
+            <a:ext cx="685800" cy="384048"/>
           </a:xfrm>
           <a:prstGeom prst="rect">
             <a:avLst/>
@@ -5637,12 +5578,48 @@
           <a:noFill/>
         </p:spPr>
         <p:txBody>
-          <a:bodyPr wrap="square" lIns="36576" rIns="36576" tIns="27432" bIns="27432">
+          <a:bodyPr wrap="square" lIns="45720" rIns="45720" tIns="36576" bIns="36576" anchor="t">
             <a:spAutoFit/>
           </a:bodyPr>
           <a:lstStyle/>
           <a:p>
             <a:pPr algn="l">
+              <a:defRPr sz="1200" b="1">
+                <a:solidFill>
+                  <a:srgbClr val="2F5BA8"/>
+                </a:solidFill>
+                <a:latin typeface="Aptos"/>
+              </a:defRPr>
+            </a:pPr>
+            <a:r>
+              <a:t>PASO 1</a:t>
+            </a:r>
+          </a:p>
+        </p:txBody>
+      </p:sp>
+      <p:sp>
+        <p:nvSpPr>
+          <p:cNvPr id="10" name="TextBox 9"/>
+          <p:cNvSpPr txBox="1"/>
+          <p:nvPr/>
+        </p:nvSpPr>
+        <p:spPr>
+          <a:xfrm>
+            <a:off x="1664208" y="1417319"/>
+            <a:ext cx="9464040" cy="2007108"/>
+          </a:xfrm>
+          <a:prstGeom prst="rect">
+            <a:avLst/>
+          </a:prstGeom>
+          <a:noFill/>
+        </p:spPr>
+        <p:txBody>
+          <a:bodyPr wrap="square" lIns="45720" rIns="45720" tIns="36576" bIns="36576" anchor="t">
+            <a:spAutoFit/>
+          </a:bodyPr>
+          <a:lstStyle/>
+          <a:p>
+            <a:pPr algn="l">
               <a:defRPr sz="2000" b="0">
                 <a:solidFill>
                   <a:srgbClr val="1C2330"/>
@@ -5651,21 +5628,21 @@
               </a:defRPr>
             </a:pPr>
             <a:r>
-              <a:t>He producido o actualizado: Código que compila con varios mensajes por pantalla.</a:t>
-            </a:r>
-          </a:p>
-        </p:txBody>
-      </p:sp>
-      <p:sp>
-        <p:nvSpPr>
-          <p:cNvPr id="10" name="Rounded Rectangle 9"/>
+              <a:t>Escribir un programa mínimo sin copiar y ejecutarlo.</a:t>
+            </a:r>
+          </a:p>
+        </p:txBody>
+      </p:sp>
+      <p:sp>
+        <p:nvSpPr>
+          <p:cNvPr id="11" name="Rounded Rectangle 10"/>
           <p:cNvSpPr/>
           <p:nvPr/>
         </p:nvSpPr>
         <p:spPr>
           <a:xfrm>
-            <a:off x="713232" y="2267712"/>
-            <a:ext cx="420624" cy="420624"/>
+            <a:off x="658368" y="3776472"/>
+            <a:ext cx="10835640" cy="2226564"/>
           </a:xfrm>
           <a:prstGeom prst="roundRect">
             <a:avLst/>
@@ -5675,7 +5652,7 @@
           </a:solidFill>
           <a:ln>
             <a:solidFill>
-              <a:srgbClr val="2F5BA8"/>
+              <a:srgbClr val="E5E9EF"/>
             </a:solidFill>
           </a:ln>
         </p:spPr>
@@ -5703,14 +5680,14 @@
       </p:sp>
       <p:sp>
         <p:nvSpPr>
-          <p:cNvPr id="11" name="TextBox 10"/>
+          <p:cNvPr id="12" name="TextBox 11"/>
           <p:cNvSpPr txBox="1"/>
           <p:nvPr/>
         </p:nvSpPr>
         <p:spPr>
           <a:xfrm>
-            <a:off x="1389888" y="2258568"/>
-            <a:ext cx="9784080" cy="594360"/>
+            <a:off x="850392" y="3922776"/>
+            <a:ext cx="685800" cy="384048"/>
           </a:xfrm>
           <a:prstGeom prst="rect">
             <a:avLst/>
@@ -5718,67 +5695,22 @@
           <a:noFill/>
         </p:spPr>
         <p:txBody>
-          <a:bodyPr wrap="square" lIns="36576" rIns="36576" tIns="27432" bIns="27432">
+          <a:bodyPr wrap="square" lIns="45720" rIns="45720" tIns="36576" bIns="36576" anchor="t">
             <a:spAutoFit/>
           </a:bodyPr>
           <a:lstStyle/>
           <a:p>
             <a:pPr algn="l">
-              <a:defRPr sz="2000" b="0">
-                <a:solidFill>
-                  <a:srgbClr val="1C2330"/>
+              <a:defRPr sz="1200" b="1">
+                <a:solidFill>
+                  <a:srgbClr val="2F5BA8"/>
                 </a:solidFill>
                 <a:latin typeface="Aptos"/>
               </a:defRPr>
             </a:pPr>
             <a:r>
-              <a:t>Puedo señalar dónde está.</a:t>
-            </a:r>
-          </a:p>
-        </p:txBody>
-      </p:sp>
-      <p:sp>
-        <p:nvSpPr>
-          <p:cNvPr id="12" name="Rounded Rectangle 11"/>
-          <p:cNvSpPr/>
-          <p:nvPr/>
-        </p:nvSpPr>
-        <p:spPr>
-          <a:xfrm>
-            <a:off x="713232" y="3163824"/>
-            <a:ext cx="420624" cy="420624"/>
-          </a:xfrm>
-          <a:prstGeom prst="roundRect">
-            <a:avLst/>
-          </a:prstGeom>
-          <a:solidFill>
-            <a:srgbClr val="FFFFFF"/>
-          </a:solidFill>
-          <a:ln>
-            <a:solidFill>
-              <a:srgbClr val="2F5BA8"/>
-            </a:solidFill>
-          </a:ln>
-        </p:spPr>
-        <p:style>
-          <a:lnRef idx="1">
-            <a:schemeClr val="accent1"/>
-          </a:lnRef>
-          <a:fillRef idx="3">
-            <a:schemeClr val="accent1"/>
-          </a:fillRef>
-          <a:effectRef idx="2">
-            <a:schemeClr val="accent1"/>
-          </a:effectRef>
-          <a:fontRef idx="minor">
-            <a:schemeClr val="lt1"/>
-          </a:fontRef>
-        </p:style>
-        <p:txBody>
-          <a:bodyPr rtlCol="0" anchor="ctr"/>
-          <a:lstStyle/>
-          <a:p>
-            <a:pPr algn="ctr"/>
+              <a:t>PASO 2</a:t>
+            </a:r>
           </a:p>
         </p:txBody>
       </p:sp>
@@ -5790,8 +5722,8 @@
         </p:nvSpPr>
         <p:spPr>
           <a:xfrm>
-            <a:off x="1389888" y="3154680"/>
-            <a:ext cx="9784080" cy="594360"/>
+            <a:off x="1664208" y="3886200"/>
+            <a:ext cx="9464040" cy="2007108"/>
           </a:xfrm>
           <a:prstGeom prst="rect">
             <a:avLst/>
@@ -5799,7 +5731,7 @@
           <a:noFill/>
         </p:spPr>
         <p:txBody>
-          <a:bodyPr wrap="square" lIns="36576" rIns="36576" tIns="27432" bIns="27432">
+          <a:bodyPr wrap="square" lIns="45720" rIns="45720" tIns="36576" bIns="36576" anchor="t">
             <a:spAutoFit/>
           </a:bodyPr>
           <a:lstStyle/>
@@ -5813,205 +5745,7 @@
               </a:defRPr>
             </a:pPr>
             <a:r>
-              <a:t>Puedo explicar una decisión tomada.</a:t>
-            </a:r>
-          </a:p>
-        </p:txBody>
-      </p:sp>
-      <p:sp>
-        <p:nvSpPr>
-          <p:cNvPr id="14" name="Rounded Rectangle 13"/>
-          <p:cNvSpPr/>
-          <p:nvPr/>
-        </p:nvSpPr>
-        <p:spPr>
-          <a:xfrm>
-            <a:off x="713232" y="4059935"/>
-            <a:ext cx="420624" cy="420624"/>
-          </a:xfrm>
-          <a:prstGeom prst="roundRect">
-            <a:avLst/>
-          </a:prstGeom>
-          <a:solidFill>
-            <a:srgbClr val="FFFFFF"/>
-          </a:solidFill>
-          <a:ln>
-            <a:solidFill>
-              <a:srgbClr val="2F5BA8"/>
-            </a:solidFill>
-          </a:ln>
-        </p:spPr>
-        <p:style>
-          <a:lnRef idx="1">
-            <a:schemeClr val="accent1"/>
-          </a:lnRef>
-          <a:fillRef idx="3">
-            <a:schemeClr val="accent1"/>
-          </a:fillRef>
-          <a:effectRef idx="2">
-            <a:schemeClr val="accent1"/>
-          </a:effectRef>
-          <a:fontRef idx="minor">
-            <a:schemeClr val="lt1"/>
-          </a:fontRef>
-        </p:style>
-        <p:txBody>
-          <a:bodyPr rtlCol="0" anchor="ctr"/>
-          <a:lstStyle/>
-          <a:p>
-            <a:pPr algn="ctr"/>
-          </a:p>
-        </p:txBody>
-      </p:sp>
-      <p:sp>
-        <p:nvSpPr>
-          <p:cNvPr id="15" name="TextBox 14"/>
-          <p:cNvSpPr txBox="1"/>
-          <p:nvPr/>
-        </p:nvSpPr>
-        <p:spPr>
-          <a:xfrm>
-            <a:off x="1389888" y="4050791"/>
-            <a:ext cx="9784080" cy="594360"/>
-          </a:xfrm>
-          <a:prstGeom prst="rect">
-            <a:avLst/>
-          </a:prstGeom>
-          <a:noFill/>
-        </p:spPr>
-        <p:txBody>
-          <a:bodyPr wrap="square" lIns="36576" rIns="36576" tIns="27432" bIns="27432">
-            <a:spAutoFit/>
-          </a:bodyPr>
-          <a:lstStyle/>
-          <a:p>
-            <a:pPr algn="l">
-              <a:defRPr sz="2000" b="0">
-                <a:solidFill>
-                  <a:srgbClr val="1C2330"/>
-                </a:solidFill>
-                <a:latin typeface="Aptos"/>
-              </a:defRPr>
-            </a:pPr>
-            <a:r>
-              <a:t>Puedo mostrar una prueba o comprobación.</a:t>
-            </a:r>
-          </a:p>
-        </p:txBody>
-      </p:sp>
-      <p:sp>
-        <p:nvSpPr>
-          <p:cNvPr id="16" name="Rounded Rectangle 15"/>
-          <p:cNvSpPr/>
-          <p:nvPr/>
-        </p:nvSpPr>
-        <p:spPr>
-          <a:xfrm>
-            <a:off x="713232" y="4956048"/>
-            <a:ext cx="420624" cy="420624"/>
-          </a:xfrm>
-          <a:prstGeom prst="roundRect">
-            <a:avLst/>
-          </a:prstGeom>
-          <a:solidFill>
-            <a:srgbClr val="FFFFFF"/>
-          </a:solidFill>
-          <a:ln>
-            <a:solidFill>
-              <a:srgbClr val="2F5BA8"/>
-            </a:solidFill>
-          </a:ln>
-        </p:spPr>
-        <p:style>
-          <a:lnRef idx="1">
-            <a:schemeClr val="accent1"/>
-          </a:lnRef>
-          <a:fillRef idx="3">
-            <a:schemeClr val="accent1"/>
-          </a:fillRef>
-          <a:effectRef idx="2">
-            <a:schemeClr val="accent1"/>
-          </a:effectRef>
-          <a:fontRef idx="minor">
-            <a:schemeClr val="lt1"/>
-          </a:fontRef>
-        </p:style>
-        <p:txBody>
-          <a:bodyPr rtlCol="0" anchor="ctr"/>
-          <a:lstStyle/>
-          <a:p>
-            <a:pPr algn="ctr"/>
-          </a:p>
-        </p:txBody>
-      </p:sp>
-      <p:sp>
-        <p:nvSpPr>
-          <p:cNvPr id="17" name="TextBox 16"/>
-          <p:cNvSpPr txBox="1"/>
-          <p:nvPr/>
-        </p:nvSpPr>
-        <p:spPr>
-          <a:xfrm>
-            <a:off x="1389888" y="4946904"/>
-            <a:ext cx="9784080" cy="594360"/>
-          </a:xfrm>
-          <a:prstGeom prst="rect">
-            <a:avLst/>
-          </a:prstGeom>
-          <a:noFill/>
-        </p:spPr>
-        <p:txBody>
-          <a:bodyPr wrap="square" lIns="36576" rIns="36576" tIns="27432" bIns="27432">
-            <a:spAutoFit/>
-          </a:bodyPr>
-          <a:lstStyle/>
-          <a:p>
-            <a:pPr algn="l">
-              <a:defRPr sz="2000" b="0">
-                <a:solidFill>
-                  <a:srgbClr val="1C2330"/>
-                </a:solidFill>
-                <a:latin typeface="Aptos"/>
-              </a:defRPr>
-            </a:pPr>
-            <a:r>
-              <a:t>He registrado mi aportación individual si el trabajo era de equipo.</a:t>
-            </a:r>
-          </a:p>
-        </p:txBody>
-      </p:sp>
-      <p:sp>
-        <p:nvSpPr>
-          <p:cNvPr id="18" name="TextBox 17"/>
-          <p:cNvSpPr txBox="1"/>
-          <p:nvPr/>
-        </p:nvSpPr>
-        <p:spPr>
-          <a:xfrm>
-            <a:off x="731520" y="5925312"/>
-            <a:ext cx="10789920" cy="274320"/>
-          </a:xfrm>
-          <a:prstGeom prst="rect">
-            <a:avLst/>
-          </a:prstGeom>
-          <a:noFill/>
-        </p:spPr>
-        <p:txBody>
-          <a:bodyPr wrap="square" lIns="36576" rIns="36576" tIns="27432" bIns="27432">
-            <a:spAutoFit/>
-          </a:bodyPr>
-          <a:lstStyle/>
-          <a:p>
-            <a:pPr algn="l">
-              <a:defRPr sz="1200" b="0">
-                <a:solidFill>
-                  <a:srgbClr val="586270"/>
-                </a:solidFill>
-                <a:latin typeface="Aptos"/>
-              </a:defRPr>
-            </a:pPr>
-            <a:r>
-              <a:t>Necesitas: Un ordenador por estudiante o pareja, con JDK e IntelliJ disponibles y el proyecto del hito accesible. · Proyector solo si habrá demostración colectiva; la defensa puede realizarse directamente en el equipo.</a:t>
+              <a:t>Comprueba y registra la evidencia: Código que compila con varios mensajes por pantalla.</a:t>
             </a:r>
           </a:p>
         </p:txBody>
@@ -6128,8 +5862,8 @@
         </p:nvSpPr>
         <p:spPr>
           <a:xfrm>
-            <a:off x="502920" y="310896"/>
-            <a:ext cx="5029200" cy="256032"/>
+            <a:off x="502920" y="274320"/>
+            <a:ext cx="5486400" cy="256032"/>
           </a:xfrm>
           <a:prstGeom prst="rect">
             <a:avLst/>
@@ -6137,7 +5871,7 @@
           <a:noFill/>
         </p:spPr>
         <p:txBody>
-          <a:bodyPr wrap="square" lIns="36576" rIns="36576" tIns="27432" bIns="27432">
+          <a:bodyPr wrap="square" lIns="45720" rIns="45720" tIns="36576" bIns="36576" anchor="t">
             <a:spAutoFit/>
           </a:bodyPr>
           <a:lstStyle/>
@@ -6151,7 +5885,7 @@
               </a:defRPr>
             </a:pPr>
             <a:r>
-              <a:t>COMPRUEBA Y EXPLICA</a:t>
+              <a:t>COMPROBAR</a:t>
             </a:r>
           </a:p>
         </p:txBody>
@@ -6164,7 +5898,7 @@
         </p:nvSpPr>
         <p:spPr>
           <a:xfrm>
-            <a:off x="502920" y="621792"/>
+            <a:off x="502920" y="603504"/>
             <a:ext cx="11064240" cy="530352"/>
           </a:xfrm>
           <a:prstGeom prst="rect">
@@ -6173,7 +5907,7 @@
           <a:noFill/>
         </p:spPr>
         <p:txBody>
-          <a:bodyPr wrap="square" lIns="36576" rIns="36576" tIns="27432" bIns="27432">
+          <a:bodyPr wrap="square" lIns="45720" rIns="45720" tIns="36576" bIns="36576" anchor="t">
             <a:spAutoFit/>
           </a:bodyPr>
           <a:lstStyle/>
@@ -6187,7 +5921,7 @@
               </a:defRPr>
             </a:pPr>
             <a:r>
-              <a:t>Cierre de la sesión</a:t>
+              <a:t>Evidencia y comprobación</a:t>
             </a:r>
           </a:p>
         </p:txBody>
@@ -6252,7 +5986,7 @@
           <a:noFill/>
         </p:spPr>
         <p:txBody>
-          <a:bodyPr wrap="square" lIns="36576" rIns="36576" tIns="27432" bIns="27432">
+          <a:bodyPr wrap="square" lIns="45720" rIns="45720" tIns="36576" bIns="36576" anchor="t">
             <a:spAutoFit/>
           </a:bodyPr>
           <a:lstStyle/>
@@ -6279,10 +6013,476 @@
         </p:nvSpPr>
         <p:spPr>
           <a:xfrm>
-            <a:off x="621792" y="1298448"/>
-            <a:ext cx="10927080" cy="1965960"/>
+            <a:off x="713232" y="1298448"/>
+            <a:ext cx="420624" cy="420624"/>
           </a:xfrm>
           <a:prstGeom prst="roundRect">
+            <a:avLst/>
+          </a:prstGeom>
+          <a:solidFill>
+            <a:srgbClr val="FFFFFF"/>
+          </a:solidFill>
+          <a:ln>
+            <a:solidFill>
+              <a:srgbClr val="2F5BA8"/>
+            </a:solidFill>
+          </a:ln>
+        </p:spPr>
+        <p:style>
+          <a:lnRef idx="1">
+            <a:schemeClr val="accent1"/>
+          </a:lnRef>
+          <a:fillRef idx="3">
+            <a:schemeClr val="accent1"/>
+          </a:fillRef>
+          <a:effectRef idx="2">
+            <a:schemeClr val="accent1"/>
+          </a:effectRef>
+          <a:fontRef idx="minor">
+            <a:schemeClr val="lt1"/>
+          </a:fontRef>
+        </p:style>
+        <p:txBody>
+          <a:bodyPr rtlCol="0" anchor="ctr"/>
+          <a:lstStyle/>
+          <a:p>
+            <a:pPr algn="ctr"/>
+          </a:p>
+        </p:txBody>
+      </p:sp>
+      <p:sp>
+        <p:nvSpPr>
+          <p:cNvPr id="9" name="TextBox 8"/>
+          <p:cNvSpPr txBox="1"/>
+          <p:nvPr/>
+        </p:nvSpPr>
+        <p:spPr>
+          <a:xfrm>
+            <a:off x="1389888" y="1280160"/>
+            <a:ext cx="9829800" cy="960120"/>
+          </a:xfrm>
+          <a:prstGeom prst="rect">
+            <a:avLst/>
+          </a:prstGeom>
+          <a:noFill/>
+        </p:spPr>
+        <p:txBody>
+          <a:bodyPr wrap="square" lIns="45720" rIns="45720" tIns="36576" bIns="36576" anchor="t">
+            <a:spAutoFit/>
+          </a:bodyPr>
+          <a:lstStyle/>
+          <a:p>
+            <a:pPr algn="l">
+              <a:defRPr sz="1900" b="0">
+                <a:solidFill>
+                  <a:srgbClr val="1C2330"/>
+                </a:solidFill>
+                <a:latin typeface="Aptos"/>
+              </a:defRPr>
+            </a:pPr>
+            <a:r>
+              <a:t>He producido o actualizado: Código que compila con varios mensajes por pantalla.</a:t>
+            </a:r>
+          </a:p>
+        </p:txBody>
+      </p:sp>
+      <p:sp>
+        <p:nvSpPr>
+          <p:cNvPr id="10" name="Rounded Rectangle 9"/>
+          <p:cNvSpPr/>
+          <p:nvPr/>
+        </p:nvSpPr>
+        <p:spPr>
+          <a:xfrm>
+            <a:off x="713232" y="2295144"/>
+            <a:ext cx="420624" cy="420624"/>
+          </a:xfrm>
+          <a:prstGeom prst="roundRect">
+            <a:avLst/>
+          </a:prstGeom>
+          <a:solidFill>
+            <a:srgbClr val="FFFFFF"/>
+          </a:solidFill>
+          <a:ln>
+            <a:solidFill>
+              <a:srgbClr val="2F5BA8"/>
+            </a:solidFill>
+          </a:ln>
+        </p:spPr>
+        <p:style>
+          <a:lnRef idx="1">
+            <a:schemeClr val="accent1"/>
+          </a:lnRef>
+          <a:fillRef idx="3">
+            <a:schemeClr val="accent1"/>
+          </a:fillRef>
+          <a:effectRef idx="2">
+            <a:schemeClr val="accent1"/>
+          </a:effectRef>
+          <a:fontRef idx="minor">
+            <a:schemeClr val="lt1"/>
+          </a:fontRef>
+        </p:style>
+        <p:txBody>
+          <a:bodyPr rtlCol="0" anchor="ctr"/>
+          <a:lstStyle/>
+          <a:p>
+            <a:pPr algn="ctr"/>
+          </a:p>
+        </p:txBody>
+      </p:sp>
+      <p:sp>
+        <p:nvSpPr>
+          <p:cNvPr id="11" name="TextBox 10"/>
+          <p:cNvSpPr txBox="1"/>
+          <p:nvPr/>
+        </p:nvSpPr>
+        <p:spPr>
+          <a:xfrm>
+            <a:off x="1389888" y="2276856"/>
+            <a:ext cx="9829800" cy="960120"/>
+          </a:xfrm>
+          <a:prstGeom prst="rect">
+            <a:avLst/>
+          </a:prstGeom>
+          <a:noFill/>
+        </p:spPr>
+        <p:txBody>
+          <a:bodyPr wrap="square" lIns="45720" rIns="45720" tIns="36576" bIns="36576" anchor="t">
+            <a:spAutoFit/>
+          </a:bodyPr>
+          <a:lstStyle/>
+          <a:p>
+            <a:pPr algn="l">
+              <a:defRPr sz="1900" b="0">
+                <a:solidFill>
+                  <a:srgbClr val="1C2330"/>
+                </a:solidFill>
+                <a:latin typeface="Aptos"/>
+              </a:defRPr>
+            </a:pPr>
+            <a:r>
+              <a:t>Puedo señalar dónde está.</a:t>
+            </a:r>
+          </a:p>
+        </p:txBody>
+      </p:sp>
+      <p:sp>
+        <p:nvSpPr>
+          <p:cNvPr id="12" name="Rounded Rectangle 11"/>
+          <p:cNvSpPr/>
+          <p:nvPr/>
+        </p:nvSpPr>
+        <p:spPr>
+          <a:xfrm>
+            <a:off x="713232" y="3291839"/>
+            <a:ext cx="420624" cy="420624"/>
+          </a:xfrm>
+          <a:prstGeom prst="roundRect">
+            <a:avLst/>
+          </a:prstGeom>
+          <a:solidFill>
+            <a:srgbClr val="FFFFFF"/>
+          </a:solidFill>
+          <a:ln>
+            <a:solidFill>
+              <a:srgbClr val="2F5BA8"/>
+            </a:solidFill>
+          </a:ln>
+        </p:spPr>
+        <p:style>
+          <a:lnRef idx="1">
+            <a:schemeClr val="accent1"/>
+          </a:lnRef>
+          <a:fillRef idx="3">
+            <a:schemeClr val="accent1"/>
+          </a:fillRef>
+          <a:effectRef idx="2">
+            <a:schemeClr val="accent1"/>
+          </a:effectRef>
+          <a:fontRef idx="minor">
+            <a:schemeClr val="lt1"/>
+          </a:fontRef>
+        </p:style>
+        <p:txBody>
+          <a:bodyPr rtlCol="0" anchor="ctr"/>
+          <a:lstStyle/>
+          <a:p>
+            <a:pPr algn="ctr"/>
+          </a:p>
+        </p:txBody>
+      </p:sp>
+      <p:sp>
+        <p:nvSpPr>
+          <p:cNvPr id="13" name="TextBox 12"/>
+          <p:cNvSpPr txBox="1"/>
+          <p:nvPr/>
+        </p:nvSpPr>
+        <p:spPr>
+          <a:xfrm>
+            <a:off x="1389888" y="3273551"/>
+            <a:ext cx="9829800" cy="960120"/>
+          </a:xfrm>
+          <a:prstGeom prst="rect">
+            <a:avLst/>
+          </a:prstGeom>
+          <a:noFill/>
+        </p:spPr>
+        <p:txBody>
+          <a:bodyPr wrap="square" lIns="45720" rIns="45720" tIns="36576" bIns="36576" anchor="t">
+            <a:spAutoFit/>
+          </a:bodyPr>
+          <a:lstStyle/>
+          <a:p>
+            <a:pPr algn="l">
+              <a:defRPr sz="1900" b="0">
+                <a:solidFill>
+                  <a:srgbClr val="1C2330"/>
+                </a:solidFill>
+                <a:latin typeface="Aptos"/>
+              </a:defRPr>
+            </a:pPr>
+            <a:r>
+              <a:t>Puedo explicar una decisión tomada.</a:t>
+            </a:r>
+          </a:p>
+        </p:txBody>
+      </p:sp>
+      <p:sp>
+        <p:nvSpPr>
+          <p:cNvPr id="14" name="Rounded Rectangle 13"/>
+          <p:cNvSpPr/>
+          <p:nvPr/>
+        </p:nvSpPr>
+        <p:spPr>
+          <a:xfrm>
+            <a:off x="713232" y="4288536"/>
+            <a:ext cx="420624" cy="420624"/>
+          </a:xfrm>
+          <a:prstGeom prst="roundRect">
+            <a:avLst/>
+          </a:prstGeom>
+          <a:solidFill>
+            <a:srgbClr val="FFFFFF"/>
+          </a:solidFill>
+          <a:ln>
+            <a:solidFill>
+              <a:srgbClr val="2F5BA8"/>
+            </a:solidFill>
+          </a:ln>
+        </p:spPr>
+        <p:style>
+          <a:lnRef idx="1">
+            <a:schemeClr val="accent1"/>
+          </a:lnRef>
+          <a:fillRef idx="3">
+            <a:schemeClr val="accent1"/>
+          </a:fillRef>
+          <a:effectRef idx="2">
+            <a:schemeClr val="accent1"/>
+          </a:effectRef>
+          <a:fontRef idx="minor">
+            <a:schemeClr val="lt1"/>
+          </a:fontRef>
+        </p:style>
+        <p:txBody>
+          <a:bodyPr rtlCol="0" anchor="ctr"/>
+          <a:lstStyle/>
+          <a:p>
+            <a:pPr algn="ctr"/>
+          </a:p>
+        </p:txBody>
+      </p:sp>
+      <p:sp>
+        <p:nvSpPr>
+          <p:cNvPr id="15" name="TextBox 14"/>
+          <p:cNvSpPr txBox="1"/>
+          <p:nvPr/>
+        </p:nvSpPr>
+        <p:spPr>
+          <a:xfrm>
+            <a:off x="1389888" y="4270248"/>
+            <a:ext cx="9829800" cy="960120"/>
+          </a:xfrm>
+          <a:prstGeom prst="rect">
+            <a:avLst/>
+          </a:prstGeom>
+          <a:noFill/>
+        </p:spPr>
+        <p:txBody>
+          <a:bodyPr wrap="square" lIns="45720" rIns="45720" tIns="36576" bIns="36576" anchor="t">
+            <a:spAutoFit/>
+          </a:bodyPr>
+          <a:lstStyle/>
+          <a:p>
+            <a:pPr algn="l">
+              <a:defRPr sz="1900" b="0">
+                <a:solidFill>
+                  <a:srgbClr val="1C2330"/>
+                </a:solidFill>
+                <a:latin typeface="Aptos"/>
+              </a:defRPr>
+            </a:pPr>
+            <a:r>
+              <a:t>Puedo mostrar una prueba o comprobación.</a:t>
+            </a:r>
+          </a:p>
+        </p:txBody>
+      </p:sp>
+      <p:sp>
+        <p:nvSpPr>
+          <p:cNvPr id="16" name="Rounded Rectangle 15"/>
+          <p:cNvSpPr/>
+          <p:nvPr/>
+        </p:nvSpPr>
+        <p:spPr>
+          <a:xfrm>
+            <a:off x="713232" y="5285231"/>
+            <a:ext cx="420624" cy="420624"/>
+          </a:xfrm>
+          <a:prstGeom prst="roundRect">
+            <a:avLst/>
+          </a:prstGeom>
+          <a:solidFill>
+            <a:srgbClr val="FFFFFF"/>
+          </a:solidFill>
+          <a:ln>
+            <a:solidFill>
+              <a:srgbClr val="2F5BA8"/>
+            </a:solidFill>
+          </a:ln>
+        </p:spPr>
+        <p:style>
+          <a:lnRef idx="1">
+            <a:schemeClr val="accent1"/>
+          </a:lnRef>
+          <a:fillRef idx="3">
+            <a:schemeClr val="accent1"/>
+          </a:fillRef>
+          <a:effectRef idx="2">
+            <a:schemeClr val="accent1"/>
+          </a:effectRef>
+          <a:fontRef idx="minor">
+            <a:schemeClr val="lt1"/>
+          </a:fontRef>
+        </p:style>
+        <p:txBody>
+          <a:bodyPr rtlCol="0" anchor="ctr"/>
+          <a:lstStyle/>
+          <a:p>
+            <a:pPr algn="ctr"/>
+          </a:p>
+        </p:txBody>
+      </p:sp>
+      <p:sp>
+        <p:nvSpPr>
+          <p:cNvPr id="17" name="TextBox 16"/>
+          <p:cNvSpPr txBox="1"/>
+          <p:nvPr/>
+        </p:nvSpPr>
+        <p:spPr>
+          <a:xfrm>
+            <a:off x="1389888" y="5266944"/>
+            <a:ext cx="9829800" cy="960120"/>
+          </a:xfrm>
+          <a:prstGeom prst="rect">
+            <a:avLst/>
+          </a:prstGeom>
+          <a:noFill/>
+        </p:spPr>
+        <p:txBody>
+          <a:bodyPr wrap="square" lIns="45720" rIns="45720" tIns="36576" bIns="36576" anchor="t">
+            <a:spAutoFit/>
+          </a:bodyPr>
+          <a:lstStyle/>
+          <a:p>
+            <a:pPr algn="l">
+              <a:defRPr sz="1900" b="0">
+                <a:solidFill>
+                  <a:srgbClr val="1C2330"/>
+                </a:solidFill>
+                <a:latin typeface="Aptos"/>
+              </a:defRPr>
+            </a:pPr>
+            <a:r>
+              <a:t>He registrado mi aportación individual si el trabajo era de equipo.</a:t>
+            </a:r>
+          </a:p>
+        </p:txBody>
+      </p:sp>
+    </p:spTree>
+  </p:cSld>
+  <p:clrMapOvr>
+    <a:masterClrMapping/>
+  </p:clrMapOvr>
+</p:sld>
+</file>
+
+<file path=ppt/slides/slide7.xml><?xml version="1.0" encoding="utf-8"?>
+<p:sld xmlns:a="http://schemas.openxmlformats.org/drawingml/2006/main" xmlns:p="http://schemas.openxmlformats.org/presentationml/2006/main" xmlns:r="http://schemas.openxmlformats.org/officeDocument/2006/relationships">
+  <p:cSld>
+    <p:spTree>
+      <p:nvGrpSpPr>
+        <p:cNvPr id="1" name=""/>
+        <p:cNvGrpSpPr/>
+        <p:nvPr/>
+      </p:nvGrpSpPr>
+      <p:grpSpPr/>
+      <p:sp>
+        <p:nvSpPr>
+          <p:cNvPr id="2" name="Rectangle 1"/>
+          <p:cNvSpPr/>
+          <p:nvPr/>
+        </p:nvSpPr>
+        <p:spPr>
+          <a:xfrm>
+            <a:off x="0" y="0"/>
+            <a:ext cx="12191695" cy="6858000"/>
+          </a:xfrm>
+          <a:prstGeom prst="rect">
+            <a:avLst/>
+          </a:prstGeom>
+          <a:solidFill>
+            <a:srgbClr val="F9F7F2"/>
+          </a:solidFill>
+          <a:ln>
+            <a:noFill/>
+          </a:ln>
+        </p:spPr>
+        <p:style>
+          <a:lnRef idx="1">
+            <a:schemeClr val="accent1"/>
+          </a:lnRef>
+          <a:fillRef idx="3">
+            <a:schemeClr val="accent1"/>
+          </a:fillRef>
+          <a:effectRef idx="2">
+            <a:schemeClr val="accent1"/>
+          </a:effectRef>
+          <a:fontRef idx="minor">
+            <a:schemeClr val="lt1"/>
+          </a:fontRef>
+        </p:style>
+        <p:txBody>
+          <a:bodyPr rtlCol="0" anchor="ctr"/>
+          <a:lstStyle/>
+          <a:p>
+            <a:pPr algn="ctr"/>
+          </a:p>
+        </p:txBody>
+      </p:sp>
+      <p:sp>
+        <p:nvSpPr>
+          <p:cNvPr id="3" name="Rectangle 2"/>
+          <p:cNvSpPr/>
+          <p:nvPr/>
+        </p:nvSpPr>
+        <p:spPr>
+          <a:xfrm>
+            <a:off x="0" y="0"/>
+            <a:ext cx="164592" cy="6858000"/>
+          </a:xfrm>
+          <a:prstGeom prst="rect">
             <a:avLst/>
           </a:prstGeom>
           <a:solidFill>
@@ -6316,14 +6516,14 @@
       </p:sp>
       <p:sp>
         <p:nvSpPr>
-          <p:cNvPr id="9" name="TextBox 8"/>
+          <p:cNvPr id="4" name="TextBox 3"/>
           <p:cNvSpPr txBox="1"/>
           <p:nvPr/>
         </p:nvSpPr>
         <p:spPr>
           <a:xfrm>
-            <a:off x="960120" y="1618488"/>
-            <a:ext cx="10195560" cy="320040"/>
+            <a:off x="502920" y="274320"/>
+            <a:ext cx="5486400" cy="256032"/>
           </a:xfrm>
           <a:prstGeom prst="rect">
             <a:avLst/>
@@ -6331,35 +6531,35 @@
           <a:noFill/>
         </p:spPr>
         <p:txBody>
-          <a:bodyPr wrap="square" lIns="36576" rIns="36576" tIns="27432" bIns="27432">
+          <a:bodyPr wrap="square" lIns="45720" rIns="45720" tIns="36576" bIns="36576" anchor="t">
             <a:spAutoFit/>
           </a:bodyPr>
           <a:lstStyle/>
           <a:p>
             <a:pPr algn="l">
-              <a:defRPr sz="1400" b="1">
-                <a:solidFill>
-                  <a:srgbClr val="FFFFFF"/>
+              <a:defRPr sz="1000" b="1">
+                <a:solidFill>
+                  <a:srgbClr val="2F5BA8"/>
                 </a:solidFill>
                 <a:latin typeface="Aptos"/>
               </a:defRPr>
             </a:pPr>
             <a:r>
-              <a:t>PREGUNTA DE SALIDA</a:t>
-            </a:r>
-          </a:p>
-        </p:txBody>
-      </p:sp>
-      <p:sp>
-        <p:nvSpPr>
-          <p:cNvPr id="10" name="TextBox 9"/>
+              <a:t>LÍMITES QUE PROTEGEN EL APRENDIZAJE</a:t>
+            </a:r>
+          </a:p>
+        </p:txBody>
+      </p:sp>
+      <p:sp>
+        <p:nvSpPr>
+          <p:cNvPr id="5" name="TextBox 4"/>
           <p:cNvSpPr txBox="1"/>
           <p:nvPr/>
         </p:nvSpPr>
         <p:spPr>
           <a:xfrm>
-            <a:off x="960120" y="2057400"/>
-            <a:ext cx="10058400" cy="822960"/>
+            <a:off x="502920" y="603504"/>
+            <a:ext cx="11064240" cy="530352"/>
           </a:xfrm>
           <a:prstGeom prst="rect">
             <a:avLst/>
@@ -6367,35 +6567,78 @@
           <a:noFill/>
         </p:spPr>
         <p:txBody>
-          <a:bodyPr wrap="square" lIns="36576" rIns="36576" tIns="27432" bIns="27432">
+          <a:bodyPr wrap="square" lIns="45720" rIns="45720" tIns="36576" bIns="36576" anchor="t">
             <a:spAutoFit/>
           </a:bodyPr>
           <a:lstStyle/>
           <a:p>
             <a:pPr algn="l">
-              <a:defRPr sz="2700" b="1">
-                <a:solidFill>
-                  <a:srgbClr val="FFFFFF"/>
+              <a:defRPr sz="2800" b="1">
+                <a:solidFill>
+                  <a:srgbClr val="1C2330"/>
                 </a:solidFill>
                 <a:latin typeface="Aptos"/>
               </a:defRPr>
             </a:pPr>
             <a:r>
-              <a:t>Microdefensa: señalar en el código dónde empieza el programa.</a:t>
-            </a:r>
-          </a:p>
-        </p:txBody>
-      </p:sp>
-      <p:sp>
-        <p:nvSpPr>
-          <p:cNvPr id="11" name="TextBox 10"/>
+              <a:t>Seguridad y uso responsable</a:t>
+            </a:r>
+          </a:p>
+        </p:txBody>
+      </p:sp>
+      <p:sp>
+        <p:nvSpPr>
+          <p:cNvPr id="6" name="Rectangle 5"/>
+          <p:cNvSpPr/>
+          <p:nvPr/>
+        </p:nvSpPr>
+        <p:spPr>
+          <a:xfrm>
+            <a:off x="0" y="6601968"/>
+            <a:ext cx="12191695" cy="256032"/>
+          </a:xfrm>
+          <a:prstGeom prst="rect">
+            <a:avLst/>
+          </a:prstGeom>
+          <a:solidFill>
+            <a:srgbClr val="2F5BA8"/>
+          </a:solidFill>
+          <a:ln>
+            <a:noFill/>
+          </a:ln>
+        </p:spPr>
+        <p:style>
+          <a:lnRef idx="1">
+            <a:schemeClr val="accent1"/>
+          </a:lnRef>
+          <a:fillRef idx="3">
+            <a:schemeClr val="accent1"/>
+          </a:fillRef>
+          <a:effectRef idx="2">
+            <a:schemeClr val="accent1"/>
+          </a:effectRef>
+          <a:fontRef idx="minor">
+            <a:schemeClr val="lt1"/>
+          </a:fontRef>
+        </p:style>
+        <p:txBody>
+          <a:bodyPr rtlCol="0" anchor="ctr"/>
+          <a:lstStyle/>
+          <a:p>
+            <a:pPr algn="ctr"/>
+          </a:p>
+        </p:txBody>
+      </p:sp>
+      <p:sp>
+        <p:nvSpPr>
+          <p:cNvPr id="7" name="TextBox 6"/>
           <p:cNvSpPr txBox="1"/>
           <p:nvPr/>
         </p:nvSpPr>
         <p:spPr>
           <a:xfrm>
-            <a:off x="713232" y="3703320"/>
-            <a:ext cx="3749039" cy="320040"/>
+            <a:off x="411480" y="6629400"/>
+            <a:ext cx="11247120" cy="164592"/>
           </a:xfrm>
           <a:prstGeom prst="rect">
             <a:avLst/>
@@ -6403,106 +6646,35 @@
           <a:noFill/>
         </p:spPr>
         <p:txBody>
-          <a:bodyPr wrap="square" lIns="36576" rIns="36576" tIns="27432" bIns="27432">
+          <a:bodyPr wrap="square" lIns="45720" rIns="45720" tIns="36576" bIns="36576" anchor="t">
             <a:spAutoFit/>
           </a:bodyPr>
           <a:lstStyle/>
           <a:p>
             <a:pPr algn="l">
-              <a:defRPr sz="1500" b="1">
-                <a:solidFill>
-                  <a:srgbClr val="2F5BA8"/>
+              <a:defRPr sz="900" b="0">
+                <a:solidFill>
+                  <a:srgbClr val="FFFFFF"/>
                 </a:solidFill>
                 <a:latin typeface="Aptos"/>
               </a:defRPr>
             </a:pPr>
             <a:r>
-              <a:t>RECUERDA</a:t>
-            </a:r>
-          </a:p>
-        </p:txBody>
-      </p:sp>
-      <p:sp>
-        <p:nvSpPr>
-          <p:cNvPr id="12" name="TextBox 11"/>
-          <p:cNvSpPr txBox="1"/>
-          <p:nvPr/>
-        </p:nvSpPr>
-        <p:spPr>
-          <a:xfrm>
-            <a:off x="713232" y="4114800"/>
-            <a:ext cx="6583680" cy="1691640"/>
-          </a:xfrm>
-          <a:prstGeom prst="rect">
-            <a:avLst/>
-          </a:prstGeom>
-          <a:noFill/>
-        </p:spPr>
-        <p:txBody>
-          <a:bodyPr wrap="square" lIns="73152" rIns="45720" tIns="36576">
-            <a:spAutoFit/>
-          </a:bodyPr>
-          <a:lstStyle/>
-          <a:p>
-            <a:pPr>
-              <a:spcAft>
-                <a:spcPts val="1000"/>
-              </a:spcAft>
-              <a:defRPr sz="1700">
-                <a:solidFill>
-                  <a:srgbClr val="1C2330"/>
-                </a:solidFill>
-                <a:latin typeface="Aptos"/>
-              </a:defRPr>
-            </a:pPr>
-            <a:r>
-              <a:t>•  Trabaja únicamente con datos ficticios.</a:t>
-            </a:r>
-          </a:p>
-          <a:p>
-            <a:pPr>
-              <a:spcAft>
-                <a:spcPts val="1000"/>
-              </a:spcAft>
-              <a:defRPr sz="1700">
-                <a:solidFill>
-                  <a:srgbClr val="1C2330"/>
-                </a:solidFill>
-                <a:latin typeface="Aptos"/>
-              </a:defRPr>
-            </a:pPr>
-            <a:r>
-              <a:t>•  No escribas contraseñas, tokens, claves API ni datos personales.</a:t>
-            </a:r>
-          </a:p>
-          <a:p>
-            <a:pPr>
-              <a:spcAft>
-                <a:spcPts val="1000"/>
-              </a:spcAft>
-              <a:defRPr sz="1700">
-                <a:solidFill>
-                  <a:srgbClr val="1C2330"/>
-                </a:solidFill>
-                <a:latin typeface="Aptos"/>
-              </a:defRPr>
-            </a:pPr>
-            <a:r>
-              <a:t>•  Si utilizas IA en un uso permitido, registra qué pediste, qué recibiste, qué cambiaste y cómo lo comprobaste.</a:t>
-            </a:r>
-          </a:p>
-        </p:txBody>
-      </p:sp>
-      <p:sp>
-        <p:nvSpPr>
-          <p:cNvPr id="13" name="Rounded Rectangle 12"/>
+              <a:t>MiniJarvis · 1.º DAW · Sesión 208 · H1</a:t>
+            </a:r>
+          </a:p>
+        </p:txBody>
+      </p:sp>
+      <p:sp>
+        <p:nvSpPr>
+          <p:cNvPr id="8" name="Rounded Rectangle 7"/>
           <p:cNvSpPr/>
           <p:nvPr/>
         </p:nvSpPr>
         <p:spPr>
           <a:xfrm>
-            <a:off x="7726679" y="3794760"/>
-            <a:ext cx="3703320" cy="1600200"/>
+            <a:off x="621792" y="1298448"/>
+            <a:ext cx="5230368" cy="2176272"/>
           </a:xfrm>
           <a:prstGeom prst="roundRect">
             <a:avLst/>
@@ -6512,7 +6684,7 @@
           </a:solidFill>
           <a:ln>
             <a:solidFill>
-              <a:srgbClr val="EBEEF2"/>
+              <a:srgbClr val="E5E9EF"/>
             </a:solidFill>
           </a:ln>
         </p:spPr>
@@ -6540,14 +6712,57 @@
       </p:sp>
       <p:sp>
         <p:nvSpPr>
-          <p:cNvPr id="14" name="TextBox 13"/>
+          <p:cNvPr id="9" name="Rounded Rectangle 8"/>
+          <p:cNvSpPr/>
+          <p:nvPr/>
+        </p:nvSpPr>
+        <p:spPr>
+          <a:xfrm>
+            <a:off x="841248" y="1527048"/>
+            <a:ext cx="237744" cy="1719072"/>
+          </a:xfrm>
+          <a:prstGeom prst="roundRect">
+            <a:avLst/>
+          </a:prstGeom>
+          <a:solidFill>
+            <a:srgbClr val="247E5C"/>
+          </a:solidFill>
+          <a:ln>
+            <a:noFill/>
+          </a:ln>
+        </p:spPr>
+        <p:style>
+          <a:lnRef idx="1">
+            <a:schemeClr val="accent1"/>
+          </a:lnRef>
+          <a:fillRef idx="3">
+            <a:schemeClr val="accent1"/>
+          </a:fillRef>
+          <a:effectRef idx="2">
+            <a:schemeClr val="accent1"/>
+          </a:effectRef>
+          <a:fontRef idx="minor">
+            <a:schemeClr val="lt1"/>
+          </a:fontRef>
+        </p:style>
+        <p:txBody>
+          <a:bodyPr rtlCol="0" anchor="ctr"/>
+          <a:lstStyle/>
+          <a:p>
+            <a:pPr algn="ctr"/>
+          </a:p>
+        </p:txBody>
+      </p:sp>
+      <p:sp>
+        <p:nvSpPr>
+          <p:cNvPr id="10" name="TextBox 9"/>
           <p:cNvSpPr txBox="1"/>
           <p:nvPr/>
         </p:nvSpPr>
         <p:spPr>
           <a:xfrm>
-            <a:off x="8028431" y="4087368"/>
-            <a:ext cx="3063240" cy="868680"/>
+            <a:off x="1280160" y="1527048"/>
+            <a:ext cx="4224528" cy="1783080"/>
           </a:xfrm>
           <a:prstGeom prst="rect">
             <a:avLst/>
@@ -6555,13 +6770,793 @@
           <a:noFill/>
         </p:spPr>
         <p:txBody>
-          <a:bodyPr wrap="square" lIns="36576" rIns="36576" tIns="27432" bIns="27432">
+          <a:bodyPr wrap="square" lIns="45720" rIns="45720" tIns="36576" bIns="36576" anchor="t">
             <a:spAutoFit/>
           </a:bodyPr>
           <a:lstStyle/>
           <a:p>
+            <a:pPr algn="l">
+              <a:defRPr sz="1900" b="0">
+                <a:solidFill>
+                  <a:srgbClr val="1C2330"/>
+                </a:solidFill>
+                <a:latin typeface="Aptos"/>
+              </a:defRPr>
+            </a:pPr>
+            <a:r>
+              <a:t>Trabaja únicamente con datos ficticios.</a:t>
+            </a:r>
+          </a:p>
+        </p:txBody>
+      </p:sp>
+      <p:sp>
+        <p:nvSpPr>
+          <p:cNvPr id="11" name="Rounded Rectangle 10"/>
+          <p:cNvSpPr/>
+          <p:nvPr/>
+        </p:nvSpPr>
+        <p:spPr>
+          <a:xfrm>
+            <a:off x="6126479" y="1298448"/>
+            <a:ext cx="5230368" cy="2176272"/>
+          </a:xfrm>
+          <a:prstGeom prst="roundRect">
+            <a:avLst/>
+          </a:prstGeom>
+          <a:solidFill>
+            <a:srgbClr val="FFFFFF"/>
+          </a:solidFill>
+          <a:ln>
+            <a:solidFill>
+              <a:srgbClr val="E5E9EF"/>
+            </a:solidFill>
+          </a:ln>
+        </p:spPr>
+        <p:style>
+          <a:lnRef idx="1">
+            <a:schemeClr val="accent1"/>
+          </a:lnRef>
+          <a:fillRef idx="3">
+            <a:schemeClr val="accent1"/>
+          </a:fillRef>
+          <a:effectRef idx="2">
+            <a:schemeClr val="accent1"/>
+          </a:effectRef>
+          <a:fontRef idx="minor">
+            <a:schemeClr val="lt1"/>
+          </a:fontRef>
+        </p:style>
+        <p:txBody>
+          <a:bodyPr rtlCol="0" anchor="ctr"/>
+          <a:lstStyle/>
+          <a:p>
+            <a:pPr algn="ctr"/>
+          </a:p>
+        </p:txBody>
+      </p:sp>
+      <p:sp>
+        <p:nvSpPr>
+          <p:cNvPr id="12" name="Rounded Rectangle 11"/>
+          <p:cNvSpPr/>
+          <p:nvPr/>
+        </p:nvSpPr>
+        <p:spPr>
+          <a:xfrm>
+            <a:off x="6345936" y="1527048"/>
+            <a:ext cx="237744" cy="1719072"/>
+          </a:xfrm>
+          <a:prstGeom prst="roundRect">
+            <a:avLst/>
+          </a:prstGeom>
+          <a:solidFill>
+            <a:srgbClr val="C07020"/>
+          </a:solidFill>
+          <a:ln>
+            <a:noFill/>
+          </a:ln>
+        </p:spPr>
+        <p:style>
+          <a:lnRef idx="1">
+            <a:schemeClr val="accent1"/>
+          </a:lnRef>
+          <a:fillRef idx="3">
+            <a:schemeClr val="accent1"/>
+          </a:fillRef>
+          <a:effectRef idx="2">
+            <a:schemeClr val="accent1"/>
+          </a:effectRef>
+          <a:fontRef idx="minor">
+            <a:schemeClr val="lt1"/>
+          </a:fontRef>
+        </p:style>
+        <p:txBody>
+          <a:bodyPr rtlCol="0" anchor="ctr"/>
+          <a:lstStyle/>
+          <a:p>
+            <a:pPr algn="ctr"/>
+          </a:p>
+        </p:txBody>
+      </p:sp>
+      <p:sp>
+        <p:nvSpPr>
+          <p:cNvPr id="13" name="TextBox 12"/>
+          <p:cNvSpPr txBox="1"/>
+          <p:nvPr/>
+        </p:nvSpPr>
+        <p:spPr>
+          <a:xfrm>
+            <a:off x="6784847" y="1527048"/>
+            <a:ext cx="4224528" cy="1783080"/>
+          </a:xfrm>
+          <a:prstGeom prst="rect">
+            <a:avLst/>
+          </a:prstGeom>
+          <a:noFill/>
+        </p:spPr>
+        <p:txBody>
+          <a:bodyPr wrap="square" lIns="45720" rIns="45720" tIns="36576" bIns="36576" anchor="t">
+            <a:spAutoFit/>
+          </a:bodyPr>
+          <a:lstStyle/>
+          <a:p>
+            <a:pPr algn="l">
+              <a:defRPr sz="1900" b="0">
+                <a:solidFill>
+                  <a:srgbClr val="1C2330"/>
+                </a:solidFill>
+                <a:latin typeface="Aptos"/>
+              </a:defRPr>
+            </a:pPr>
+            <a:r>
+              <a:t>No escribas contraseñas, tokens, claves API ni datos personales.</a:t>
+            </a:r>
+          </a:p>
+        </p:txBody>
+      </p:sp>
+      <p:sp>
+        <p:nvSpPr>
+          <p:cNvPr id="14" name="Rounded Rectangle 13"/>
+          <p:cNvSpPr/>
+          <p:nvPr/>
+        </p:nvSpPr>
+        <p:spPr>
+          <a:xfrm>
+            <a:off x="621792" y="3675887"/>
+            <a:ext cx="5230368" cy="2176272"/>
+          </a:xfrm>
+          <a:prstGeom prst="roundRect">
+            <a:avLst/>
+          </a:prstGeom>
+          <a:solidFill>
+            <a:srgbClr val="FFFFFF"/>
+          </a:solidFill>
+          <a:ln>
+            <a:solidFill>
+              <a:srgbClr val="E5E9EF"/>
+            </a:solidFill>
+          </a:ln>
+        </p:spPr>
+        <p:style>
+          <a:lnRef idx="1">
+            <a:schemeClr val="accent1"/>
+          </a:lnRef>
+          <a:fillRef idx="3">
+            <a:schemeClr val="accent1"/>
+          </a:fillRef>
+          <a:effectRef idx="2">
+            <a:schemeClr val="accent1"/>
+          </a:effectRef>
+          <a:fontRef idx="minor">
+            <a:schemeClr val="lt1"/>
+          </a:fontRef>
+        </p:style>
+        <p:txBody>
+          <a:bodyPr rtlCol="0" anchor="ctr"/>
+          <a:lstStyle/>
+          <a:p>
+            <a:pPr algn="ctr"/>
+          </a:p>
+        </p:txBody>
+      </p:sp>
+      <p:sp>
+        <p:nvSpPr>
+          <p:cNvPr id="15" name="Rounded Rectangle 14"/>
+          <p:cNvSpPr/>
+          <p:nvPr/>
+        </p:nvSpPr>
+        <p:spPr>
+          <a:xfrm>
+            <a:off x="841248" y="3904487"/>
+            <a:ext cx="237744" cy="1719072"/>
+          </a:xfrm>
+          <a:prstGeom prst="roundRect">
+            <a:avLst/>
+          </a:prstGeom>
+          <a:solidFill>
+            <a:srgbClr val="B13A3A"/>
+          </a:solidFill>
+          <a:ln>
+            <a:noFill/>
+          </a:ln>
+        </p:spPr>
+        <p:style>
+          <a:lnRef idx="1">
+            <a:schemeClr val="accent1"/>
+          </a:lnRef>
+          <a:fillRef idx="3">
+            <a:schemeClr val="accent1"/>
+          </a:fillRef>
+          <a:effectRef idx="2">
+            <a:schemeClr val="accent1"/>
+          </a:effectRef>
+          <a:fontRef idx="minor">
+            <a:schemeClr val="lt1"/>
+          </a:fontRef>
+        </p:style>
+        <p:txBody>
+          <a:bodyPr rtlCol="0" anchor="ctr"/>
+          <a:lstStyle/>
+          <a:p>
+            <a:pPr algn="ctr"/>
+          </a:p>
+        </p:txBody>
+      </p:sp>
+      <p:sp>
+        <p:nvSpPr>
+          <p:cNvPr id="16" name="TextBox 15"/>
+          <p:cNvSpPr txBox="1"/>
+          <p:nvPr/>
+        </p:nvSpPr>
+        <p:spPr>
+          <a:xfrm>
+            <a:off x="1280160" y="3904487"/>
+            <a:ext cx="4224528" cy="1783080"/>
+          </a:xfrm>
+          <a:prstGeom prst="rect">
+            <a:avLst/>
+          </a:prstGeom>
+          <a:noFill/>
+        </p:spPr>
+        <p:txBody>
+          <a:bodyPr wrap="square" lIns="45720" rIns="45720" tIns="36576" bIns="36576" anchor="t">
+            <a:spAutoFit/>
+          </a:bodyPr>
+          <a:lstStyle/>
+          <a:p>
+            <a:pPr algn="l">
+              <a:defRPr sz="1900" b="0">
+                <a:solidFill>
+                  <a:srgbClr val="1C2330"/>
+                </a:solidFill>
+                <a:latin typeface="Aptos"/>
+              </a:defRPr>
+            </a:pPr>
+            <a:r>
+              <a:t>Si utilizas IA en un uso permitido, registra qué pediste, qué recibiste, qué cambiaste y cómo lo comprobaste.</a:t>
+            </a:r>
+          </a:p>
+        </p:txBody>
+      </p:sp>
+      <p:sp>
+        <p:nvSpPr>
+          <p:cNvPr id="17" name="Rounded Rectangle 16"/>
+          <p:cNvSpPr/>
+          <p:nvPr/>
+        </p:nvSpPr>
+        <p:spPr>
+          <a:xfrm>
+            <a:off x="6126479" y="3675887"/>
+            <a:ext cx="5230368" cy="2176272"/>
+          </a:xfrm>
+          <a:prstGeom prst="roundRect">
+            <a:avLst/>
+          </a:prstGeom>
+          <a:solidFill>
+            <a:srgbClr val="FFFFFF"/>
+          </a:solidFill>
+          <a:ln>
+            <a:solidFill>
+              <a:srgbClr val="E5E9EF"/>
+            </a:solidFill>
+          </a:ln>
+        </p:spPr>
+        <p:style>
+          <a:lnRef idx="1">
+            <a:schemeClr val="accent1"/>
+          </a:lnRef>
+          <a:fillRef idx="3">
+            <a:schemeClr val="accent1"/>
+          </a:fillRef>
+          <a:effectRef idx="2">
+            <a:schemeClr val="accent1"/>
+          </a:effectRef>
+          <a:fontRef idx="minor">
+            <a:schemeClr val="lt1"/>
+          </a:fontRef>
+        </p:style>
+        <p:txBody>
+          <a:bodyPr rtlCol="0" anchor="ctr"/>
+          <a:lstStyle/>
+          <a:p>
+            <a:pPr algn="ctr"/>
+          </a:p>
+        </p:txBody>
+      </p:sp>
+      <p:sp>
+        <p:nvSpPr>
+          <p:cNvPr id="18" name="Rounded Rectangle 17"/>
+          <p:cNvSpPr/>
+          <p:nvPr/>
+        </p:nvSpPr>
+        <p:spPr>
+          <a:xfrm>
+            <a:off x="6345936" y="3904487"/>
+            <a:ext cx="237744" cy="1719072"/>
+          </a:xfrm>
+          <a:prstGeom prst="roundRect">
+            <a:avLst/>
+          </a:prstGeom>
+          <a:solidFill>
+            <a:srgbClr val="2F5BA8"/>
+          </a:solidFill>
+          <a:ln>
+            <a:noFill/>
+          </a:ln>
+        </p:spPr>
+        <p:style>
+          <a:lnRef idx="1">
+            <a:schemeClr val="accent1"/>
+          </a:lnRef>
+          <a:fillRef idx="3">
+            <a:schemeClr val="accent1"/>
+          </a:fillRef>
+          <a:effectRef idx="2">
+            <a:schemeClr val="accent1"/>
+          </a:effectRef>
+          <a:fontRef idx="minor">
+            <a:schemeClr val="lt1"/>
+          </a:fontRef>
+        </p:style>
+        <p:txBody>
+          <a:bodyPr rtlCol="0" anchor="ctr"/>
+          <a:lstStyle/>
+          <a:p>
+            <a:pPr algn="ctr"/>
+          </a:p>
+        </p:txBody>
+      </p:sp>
+      <p:sp>
+        <p:nvSpPr>
+          <p:cNvPr id="19" name="TextBox 18"/>
+          <p:cNvSpPr txBox="1"/>
+          <p:nvPr/>
+        </p:nvSpPr>
+        <p:spPr>
+          <a:xfrm>
+            <a:off x="6784847" y="3904487"/>
+            <a:ext cx="4224528" cy="1783080"/>
+          </a:xfrm>
+          <a:prstGeom prst="rect">
+            <a:avLst/>
+          </a:prstGeom>
+          <a:noFill/>
+        </p:spPr>
+        <p:txBody>
+          <a:bodyPr wrap="square" lIns="45720" rIns="45720" tIns="36576" bIns="36576" anchor="t">
+            <a:spAutoFit/>
+          </a:bodyPr>
+          <a:lstStyle/>
+          <a:p>
+            <a:pPr algn="l">
+              <a:defRPr sz="1900" b="0">
+                <a:solidFill>
+                  <a:srgbClr val="1C2330"/>
+                </a:solidFill>
+                <a:latin typeface="Aptos"/>
+              </a:defRPr>
+            </a:pPr>
+            <a:r>
+              <a:t>Los ejemplos de Laura solo se consultan después del intento propio.</a:t>
+            </a:r>
+          </a:p>
+        </p:txBody>
+      </p:sp>
+    </p:spTree>
+  </p:cSld>
+  <p:clrMapOvr>
+    <a:masterClrMapping/>
+  </p:clrMapOvr>
+</p:sld>
+</file>
+
+<file path=ppt/slides/slide8.xml><?xml version="1.0" encoding="utf-8"?>
+<p:sld xmlns:a="http://schemas.openxmlformats.org/drawingml/2006/main" xmlns:p="http://schemas.openxmlformats.org/presentationml/2006/main" xmlns:r="http://schemas.openxmlformats.org/officeDocument/2006/relationships">
+  <p:cSld>
+    <p:spTree>
+      <p:nvGrpSpPr>
+        <p:cNvPr id="1" name=""/>
+        <p:cNvGrpSpPr/>
+        <p:nvPr/>
+      </p:nvGrpSpPr>
+      <p:grpSpPr/>
+      <p:sp>
+        <p:nvSpPr>
+          <p:cNvPr id="2" name="Rectangle 1"/>
+          <p:cNvSpPr/>
+          <p:nvPr/>
+        </p:nvSpPr>
+        <p:spPr>
+          <a:xfrm>
+            <a:off x="0" y="0"/>
+            <a:ext cx="12191695" cy="6858000"/>
+          </a:xfrm>
+          <a:prstGeom prst="rect">
+            <a:avLst/>
+          </a:prstGeom>
+          <a:solidFill>
+            <a:srgbClr val="F9F7F2"/>
+          </a:solidFill>
+          <a:ln>
+            <a:noFill/>
+          </a:ln>
+        </p:spPr>
+        <p:style>
+          <a:lnRef idx="1">
+            <a:schemeClr val="accent1"/>
+          </a:lnRef>
+          <a:fillRef idx="3">
+            <a:schemeClr val="accent1"/>
+          </a:fillRef>
+          <a:effectRef idx="2">
+            <a:schemeClr val="accent1"/>
+          </a:effectRef>
+          <a:fontRef idx="minor">
+            <a:schemeClr val="lt1"/>
+          </a:fontRef>
+        </p:style>
+        <p:txBody>
+          <a:bodyPr rtlCol="0" anchor="ctr"/>
+          <a:lstStyle/>
+          <a:p>
+            <a:pPr algn="ctr"/>
+          </a:p>
+        </p:txBody>
+      </p:sp>
+      <p:sp>
+        <p:nvSpPr>
+          <p:cNvPr id="3" name="Rectangle 2"/>
+          <p:cNvSpPr/>
+          <p:nvPr/>
+        </p:nvSpPr>
+        <p:spPr>
+          <a:xfrm>
+            <a:off x="0" y="0"/>
+            <a:ext cx="164592" cy="6858000"/>
+          </a:xfrm>
+          <a:prstGeom prst="rect">
+            <a:avLst/>
+          </a:prstGeom>
+          <a:solidFill>
+            <a:srgbClr val="2F5BA8"/>
+          </a:solidFill>
+          <a:ln>
+            <a:noFill/>
+          </a:ln>
+        </p:spPr>
+        <p:style>
+          <a:lnRef idx="1">
+            <a:schemeClr val="accent1"/>
+          </a:lnRef>
+          <a:fillRef idx="3">
+            <a:schemeClr val="accent1"/>
+          </a:fillRef>
+          <a:effectRef idx="2">
+            <a:schemeClr val="accent1"/>
+          </a:effectRef>
+          <a:fontRef idx="minor">
+            <a:schemeClr val="lt1"/>
+          </a:fontRef>
+        </p:style>
+        <p:txBody>
+          <a:bodyPr rtlCol="0" anchor="ctr"/>
+          <a:lstStyle/>
+          <a:p>
+            <a:pPr algn="ctr"/>
+          </a:p>
+        </p:txBody>
+      </p:sp>
+      <p:sp>
+        <p:nvSpPr>
+          <p:cNvPr id="4" name="TextBox 3"/>
+          <p:cNvSpPr txBox="1"/>
+          <p:nvPr/>
+        </p:nvSpPr>
+        <p:spPr>
+          <a:xfrm>
+            <a:off x="502920" y="274320"/>
+            <a:ext cx="5486400" cy="256032"/>
+          </a:xfrm>
+          <a:prstGeom prst="rect">
+            <a:avLst/>
+          </a:prstGeom>
+          <a:noFill/>
+        </p:spPr>
+        <p:txBody>
+          <a:bodyPr wrap="square" lIns="45720" rIns="45720" tIns="36576" bIns="36576" anchor="t">
+            <a:spAutoFit/>
+          </a:bodyPr>
+          <a:lstStyle/>
+          <a:p>
+            <a:pPr algn="l">
+              <a:defRPr sz="1000" b="1">
+                <a:solidFill>
+                  <a:srgbClr val="2F5BA8"/>
+                </a:solidFill>
+                <a:latin typeface="Aptos"/>
+              </a:defRPr>
+            </a:pPr>
+            <a:r>
+              <a:t>EXPLICAR Y DEFENDER</a:t>
+            </a:r>
+          </a:p>
+        </p:txBody>
+      </p:sp>
+      <p:sp>
+        <p:nvSpPr>
+          <p:cNvPr id="5" name="TextBox 4"/>
+          <p:cNvSpPr txBox="1"/>
+          <p:nvPr/>
+        </p:nvSpPr>
+        <p:spPr>
+          <a:xfrm>
+            <a:off x="502920" y="603504"/>
+            <a:ext cx="11064240" cy="530352"/>
+          </a:xfrm>
+          <a:prstGeom prst="rect">
+            <a:avLst/>
+          </a:prstGeom>
+          <a:noFill/>
+        </p:spPr>
+        <p:txBody>
+          <a:bodyPr wrap="square" lIns="45720" rIns="45720" tIns="36576" bIns="36576" anchor="t">
+            <a:spAutoFit/>
+          </a:bodyPr>
+          <a:lstStyle/>
+          <a:p>
+            <a:pPr algn="l">
+              <a:defRPr sz="2800" b="1">
+                <a:solidFill>
+                  <a:srgbClr val="1C2330"/>
+                </a:solidFill>
+                <a:latin typeface="Aptos"/>
+              </a:defRPr>
+            </a:pPr>
+            <a:r>
+              <a:t>Cierre y defensa</a:t>
+            </a:r>
+          </a:p>
+        </p:txBody>
+      </p:sp>
+      <p:sp>
+        <p:nvSpPr>
+          <p:cNvPr id="6" name="Rectangle 5"/>
+          <p:cNvSpPr/>
+          <p:nvPr/>
+        </p:nvSpPr>
+        <p:spPr>
+          <a:xfrm>
+            <a:off x="0" y="6601968"/>
+            <a:ext cx="12191695" cy="256032"/>
+          </a:xfrm>
+          <a:prstGeom prst="rect">
+            <a:avLst/>
+          </a:prstGeom>
+          <a:solidFill>
+            <a:srgbClr val="2F5BA8"/>
+          </a:solidFill>
+          <a:ln>
+            <a:noFill/>
+          </a:ln>
+        </p:spPr>
+        <p:style>
+          <a:lnRef idx="1">
+            <a:schemeClr val="accent1"/>
+          </a:lnRef>
+          <a:fillRef idx="3">
+            <a:schemeClr val="accent1"/>
+          </a:fillRef>
+          <a:effectRef idx="2">
+            <a:schemeClr val="accent1"/>
+          </a:effectRef>
+          <a:fontRef idx="minor">
+            <a:schemeClr val="lt1"/>
+          </a:fontRef>
+        </p:style>
+        <p:txBody>
+          <a:bodyPr rtlCol="0" anchor="ctr"/>
+          <a:lstStyle/>
+          <a:p>
+            <a:pPr algn="ctr"/>
+          </a:p>
+        </p:txBody>
+      </p:sp>
+      <p:sp>
+        <p:nvSpPr>
+          <p:cNvPr id="7" name="TextBox 6"/>
+          <p:cNvSpPr txBox="1"/>
+          <p:nvPr/>
+        </p:nvSpPr>
+        <p:spPr>
+          <a:xfrm>
+            <a:off x="411480" y="6629400"/>
+            <a:ext cx="11247120" cy="164592"/>
+          </a:xfrm>
+          <a:prstGeom prst="rect">
+            <a:avLst/>
+          </a:prstGeom>
+          <a:noFill/>
+        </p:spPr>
+        <p:txBody>
+          <a:bodyPr wrap="square" lIns="45720" rIns="45720" tIns="36576" bIns="36576" anchor="t">
+            <a:spAutoFit/>
+          </a:bodyPr>
+          <a:lstStyle/>
+          <a:p>
+            <a:pPr algn="l">
+              <a:defRPr sz="900" b="0">
+                <a:solidFill>
+                  <a:srgbClr val="FFFFFF"/>
+                </a:solidFill>
+                <a:latin typeface="Aptos"/>
+              </a:defRPr>
+            </a:pPr>
+            <a:r>
+              <a:t>MiniJarvis · 1.º DAW · Sesión 208 · H1</a:t>
+            </a:r>
+          </a:p>
+        </p:txBody>
+      </p:sp>
+      <p:sp>
+        <p:nvSpPr>
+          <p:cNvPr id="8" name="Rounded Rectangle 7"/>
+          <p:cNvSpPr/>
+          <p:nvPr/>
+        </p:nvSpPr>
+        <p:spPr>
+          <a:xfrm>
+            <a:off x="621792" y="1298448"/>
+            <a:ext cx="10927080" cy="1828800"/>
+          </a:xfrm>
+          <a:prstGeom prst="roundRect">
+            <a:avLst/>
+          </a:prstGeom>
+          <a:solidFill>
+            <a:srgbClr val="2F5BA8"/>
+          </a:solidFill>
+          <a:ln>
+            <a:solidFill>
+              <a:srgbClr val="2F5BA8"/>
+            </a:solidFill>
+          </a:ln>
+        </p:spPr>
+        <p:style>
+          <a:lnRef idx="1">
+            <a:schemeClr val="accent1"/>
+          </a:lnRef>
+          <a:fillRef idx="3">
+            <a:schemeClr val="accent1"/>
+          </a:fillRef>
+          <a:effectRef idx="2">
+            <a:schemeClr val="accent1"/>
+          </a:effectRef>
+          <a:fontRef idx="minor">
+            <a:schemeClr val="lt1"/>
+          </a:fontRef>
+        </p:style>
+        <p:txBody>
+          <a:bodyPr rtlCol="0" anchor="ctr"/>
+          <a:lstStyle/>
+          <a:p>
+            <a:pPr algn="ctr"/>
+          </a:p>
+        </p:txBody>
+      </p:sp>
+      <p:sp>
+        <p:nvSpPr>
+          <p:cNvPr id="9" name="TextBox 8"/>
+          <p:cNvSpPr txBox="1"/>
+          <p:nvPr/>
+        </p:nvSpPr>
+        <p:spPr>
+          <a:xfrm>
+            <a:off x="932688" y="1591056"/>
+            <a:ext cx="10241280" cy="256032"/>
+          </a:xfrm>
+          <a:prstGeom prst="rect">
+            <a:avLst/>
+          </a:prstGeom>
+          <a:noFill/>
+        </p:spPr>
+        <p:txBody>
+          <a:bodyPr wrap="square" lIns="45720" rIns="45720" tIns="36576" bIns="36576" anchor="t">
+            <a:spAutoFit/>
+          </a:bodyPr>
+          <a:lstStyle/>
+          <a:p>
+            <a:pPr algn="l">
+              <a:defRPr sz="1300" b="1">
+                <a:solidFill>
+                  <a:srgbClr val="FFFFFF"/>
+                </a:solidFill>
+                <a:latin typeface="Aptos"/>
+              </a:defRPr>
+            </a:pPr>
+            <a:r>
+              <a:t>PREGUNTA O DECISIÓN DE SALIDA</a:t>
+            </a:r>
+          </a:p>
+        </p:txBody>
+      </p:sp>
+      <p:sp>
+        <p:nvSpPr>
+          <p:cNvPr id="10" name="TextBox 9"/>
+          <p:cNvSpPr txBox="1"/>
+          <p:nvPr/>
+        </p:nvSpPr>
+        <p:spPr>
+          <a:xfrm>
+            <a:off x="932688" y="1975104"/>
+            <a:ext cx="10058400" cy="822960"/>
+          </a:xfrm>
+          <a:prstGeom prst="rect">
+            <a:avLst/>
+          </a:prstGeom>
+          <a:noFill/>
+        </p:spPr>
+        <p:txBody>
+          <a:bodyPr wrap="square" lIns="45720" rIns="45720" tIns="36576" bIns="36576" anchor="t">
+            <a:spAutoFit/>
+          </a:bodyPr>
+          <a:lstStyle/>
+          <a:p>
+            <a:pPr algn="l">
+              <a:defRPr sz="2500" b="1">
+                <a:solidFill>
+                  <a:srgbClr val="FFFFFF"/>
+                </a:solidFill>
+                <a:latin typeface="Aptos"/>
+              </a:defRPr>
+            </a:pPr>
+            <a:r>
+              <a:t>Microdefensa: señalar en el código dónde empieza el programa.</a:t>
+            </a:r>
+          </a:p>
+        </p:txBody>
+      </p:sp>
+      <p:sp>
+        <p:nvSpPr>
+          <p:cNvPr id="11" name="TextBox 10"/>
+          <p:cNvSpPr txBox="1"/>
+          <p:nvPr/>
+        </p:nvSpPr>
+        <p:spPr>
+          <a:xfrm>
+            <a:off x="749808" y="3886200"/>
+            <a:ext cx="10607040" cy="1280160"/>
+          </a:xfrm>
+          <a:prstGeom prst="rect">
+            <a:avLst/>
+          </a:prstGeom>
+          <a:noFill/>
+        </p:spPr>
+        <p:txBody>
+          <a:bodyPr wrap="square" lIns="45720" rIns="45720" tIns="36576" bIns="36576" anchor="ctr">
+            <a:spAutoFit/>
+          </a:bodyPr>
+          <a:lstStyle/>
+          <a:p>
             <a:pPr algn="ctr">
-              <a:defRPr sz="1800" b="1">
+              <a:defRPr sz="2300" b="1">
                 <a:solidFill>
                   <a:srgbClr val="247E5C"/>
                 </a:solidFill>
@@ -6569,7 +7564,7 @@
               </a:defRPr>
             </a:pPr>
             <a:r>
-              <a:t>La sesión termina cuando la evidencia existe, está comprobada y puedes defenderla.</a:t>
+              <a:t>La sesión termina cuando la evidencia existe, está comprobada y puede defenderse.</a:t>
             </a:r>
           </a:p>
         </p:txBody>

--- a/02-PROFESORADO/03-PRESENTACIONES/POR-SESION/h1/S208-estructura-minima-de-un-programa-java-presentacion.pptx
+++ b/02-PROFESORADO/03-PRESENTACIONES/POR-SESION/h1/S208-estructura-minima-de-un-programa-java-presentacion.pptx
@@ -6,13 +6,14 @@
   </p:sldMasterIdLst>
   <p:sldIdLst>
     <p:sldId id="256" r:id="rId7"/>
-    <p:sldId id="257" r:id="rId8"/>
-    <p:sldId id="258" r:id="rId9"/>
-    <p:sldId id="259" r:id="rId10"/>
-    <p:sldId id="260" r:id="rId11"/>
-    <p:sldId id="261" r:id="rId12"/>
-    <p:sldId id="262" r:id="rId13"/>
-    <p:sldId id="263" r:id="rId14"/>
+    <p:sldId id="257" r:id="rId9"/>
+    <p:sldId id="258" r:id="rId10"/>
+    <p:sldId id="259" r:id="rId11"/>
+    <p:sldId id="260" r:id="rId12"/>
+    <p:sldId id="261" r:id="rId13"/>
+    <p:sldId id="262" r:id="rId14"/>
+    <p:sldId id="263" r:id="rId15"/>
+    <p:sldId id="264" r:id="rId16"/>
   </p:sldIdLst>
   <p:sldSz cx="12191695" cy="6858000" type="screen4x3"/>
   <p:notesSz cx="6858000" cy="9144000"/>
@@ -112,6 +113,1336 @@
     </a:lvl9pPr>
   </p:defaultTextStyle>
 </p:presentation>
+</file>
+
+<file path=ppt/notesMasters/notesMaster1.xml><?xml version="1.0" encoding="utf-8"?>
+<p:notesMaster xmlns:a="http://schemas.openxmlformats.org/drawingml/2006/main" xmlns:p="http://schemas.openxmlformats.org/presentationml/2006/main" xmlns:r="http://schemas.openxmlformats.org/officeDocument/2006/relationships">
+  <p:cSld>
+    <p:bg>
+      <p:bgRef idx="1001">
+        <a:schemeClr val="bg1"/>
+      </p:bgRef>
+    </p:bg>
+    <p:spTree>
+      <p:nvGrpSpPr>
+        <p:cNvPr id="1" name=""/>
+        <p:cNvGrpSpPr/>
+        <p:nvPr/>
+      </p:nvGrpSpPr>
+      <p:grpSpPr>
+        <a:xfrm>
+          <a:off x="0" y="0"/>
+          <a:ext cx="0" cy="0"/>
+          <a:chOff x="0" y="0"/>
+          <a:chExt cx="0" cy="0"/>
+        </a:xfrm>
+      </p:grpSpPr>
+      <p:sp>
+        <p:nvSpPr>
+          <p:cNvPr id="2" name="Header Placeholder 1"/>
+          <p:cNvSpPr>
+            <a:spLocks noGrp="1"/>
+          </p:cNvSpPr>
+          <p:nvPr>
+            <p:ph type="hdr" sz="quarter"/>
+          </p:nvPr>
+        </p:nvSpPr>
+        <p:spPr>
+          <a:xfrm>
+            <a:off x="0" y="0"/>
+            <a:ext cx="2971800" cy="457200"/>
+          </a:xfrm>
+          <a:prstGeom prst="rect">
+            <a:avLst/>
+          </a:prstGeom>
+        </p:spPr>
+        <p:txBody>
+          <a:bodyPr vert="horz" lIns="91440" tIns="45720" rIns="91440" bIns="45720" rtlCol="0"/>
+          <a:lstStyle>
+            <a:lvl1pPr algn="l">
+              <a:defRPr sz="1200"/>
+            </a:lvl1pPr>
+          </a:lstStyle>
+          <a:p>
+            <a:endParaRPr lang="en-US"/>
+          </a:p>
+        </p:txBody>
+      </p:sp>
+      <p:sp>
+        <p:nvSpPr>
+          <p:cNvPr id="3" name="Date Placeholder 2"/>
+          <p:cNvSpPr>
+            <a:spLocks noGrp="1"/>
+          </p:cNvSpPr>
+          <p:nvPr>
+            <p:ph type="dt" idx="1"/>
+          </p:nvPr>
+        </p:nvSpPr>
+        <p:spPr>
+          <a:xfrm>
+            <a:off x="3884613" y="0"/>
+            <a:ext cx="2971800" cy="457200"/>
+          </a:xfrm>
+          <a:prstGeom prst="rect">
+            <a:avLst/>
+          </a:prstGeom>
+        </p:spPr>
+        <p:txBody>
+          <a:bodyPr vert="horz" lIns="91440" tIns="45720" rIns="91440" bIns="45720" rtlCol="0"/>
+          <a:lstStyle>
+            <a:lvl1pPr algn="r">
+              <a:defRPr sz="1200"/>
+            </a:lvl1pPr>
+          </a:lstStyle>
+          <a:p>
+            <a:fld id="{0F89C1C7-3DCD-1040-A9CF-14679D8B5DDD}" type="datetimeFigureOut">
+              <a:rPr lang="en-US" smtClean="0"/>
+              <a:t>10/17/16</a:t>
+            </a:fld>
+            <a:endParaRPr lang="en-US"/>
+          </a:p>
+        </p:txBody>
+      </p:sp>
+      <p:sp>
+        <p:nvSpPr>
+          <p:cNvPr id="4" name="Slide Image Placeholder 3"/>
+          <p:cNvSpPr>
+            <a:spLocks noGrp="1" noRot="1" noChangeAspect="1"/>
+          </p:cNvSpPr>
+          <p:nvPr>
+            <p:ph type="sldImg" idx="2"/>
+          </p:nvPr>
+        </p:nvSpPr>
+        <p:spPr>
+          <a:xfrm>
+            <a:off x="1143000" y="685800"/>
+            <a:ext cx="4572000" cy="3429000"/>
+          </a:xfrm>
+          <a:prstGeom prst="rect">
+            <a:avLst/>
+          </a:prstGeom>
+          <a:noFill/>
+          <a:ln w="12700">
+            <a:solidFill>
+              <a:prstClr val="black"/>
+            </a:solidFill>
+          </a:ln>
+        </p:spPr>
+        <p:txBody>
+          <a:bodyPr vert="horz" lIns="91440" tIns="45720" rIns="91440" bIns="45720" rtlCol="0" anchor="ctr"/>
+          <a:lstStyle/>
+          <a:p>
+            <a:endParaRPr lang="en-US"/>
+          </a:p>
+        </p:txBody>
+      </p:sp>
+      <p:sp>
+        <p:nvSpPr>
+          <p:cNvPr id="5" name="Notes Placeholder 4"/>
+          <p:cNvSpPr>
+            <a:spLocks noGrp="1"/>
+          </p:cNvSpPr>
+          <p:nvPr>
+            <p:ph type="body" sz="quarter" idx="3"/>
+          </p:nvPr>
+        </p:nvSpPr>
+        <p:spPr>
+          <a:xfrm>
+            <a:off x="685800" y="4343400"/>
+            <a:ext cx="5486400" cy="4114800"/>
+          </a:xfrm>
+          <a:prstGeom prst="rect">
+            <a:avLst/>
+          </a:prstGeom>
+        </p:spPr>
+        <p:txBody>
+          <a:bodyPr vert="horz" lIns="91440" tIns="45720" rIns="91440" bIns="45720" rtlCol="0"/>
+          <a:lstStyle/>
+          <a:p>
+            <a:pPr lvl="0"/>
+            <a:r>
+              <a:rPr lang="en-US" smtClean="0"/>
+              <a:t>Click to edit Master text styles</a:t>
+            </a:r>
+          </a:p>
+          <a:p>
+            <a:pPr lvl="1"/>
+            <a:r>
+              <a:rPr lang="en-US" smtClean="0"/>
+              <a:t>Second level</a:t>
+            </a:r>
+          </a:p>
+          <a:p>
+            <a:pPr lvl="2"/>
+            <a:r>
+              <a:rPr lang="en-US" smtClean="0"/>
+              <a:t>Third level</a:t>
+            </a:r>
+          </a:p>
+          <a:p>
+            <a:pPr lvl="3"/>
+            <a:r>
+              <a:rPr lang="en-US" smtClean="0"/>
+              <a:t>Fourth level</a:t>
+            </a:r>
+          </a:p>
+          <a:p>
+            <a:pPr lvl="4"/>
+            <a:r>
+              <a:rPr lang="en-US" smtClean="0"/>
+              <a:t>Fifth level</a:t>
+            </a:r>
+            <a:endParaRPr lang="en-US"/>
+          </a:p>
+        </p:txBody>
+      </p:sp>
+      <p:sp>
+        <p:nvSpPr>
+          <p:cNvPr id="6" name="Footer Placeholder 5"/>
+          <p:cNvSpPr>
+            <a:spLocks noGrp="1"/>
+          </p:cNvSpPr>
+          <p:nvPr>
+            <p:ph type="ftr" sz="quarter" idx="4"/>
+          </p:nvPr>
+        </p:nvSpPr>
+        <p:spPr>
+          <a:xfrm>
+            <a:off x="0" y="8685213"/>
+            <a:ext cx="2971800" cy="457200"/>
+          </a:xfrm>
+          <a:prstGeom prst="rect">
+            <a:avLst/>
+          </a:prstGeom>
+        </p:spPr>
+        <p:txBody>
+          <a:bodyPr vert="horz" lIns="91440" tIns="45720" rIns="91440" bIns="45720" rtlCol="0" anchor="b"/>
+          <a:lstStyle>
+            <a:lvl1pPr algn="l">
+              <a:defRPr sz="1200"/>
+            </a:lvl1pPr>
+          </a:lstStyle>
+          <a:p>
+            <a:endParaRPr lang="en-US"/>
+          </a:p>
+        </p:txBody>
+      </p:sp>
+      <p:sp>
+        <p:nvSpPr>
+          <p:cNvPr id="7" name="Slide Number Placeholder 6"/>
+          <p:cNvSpPr>
+            <a:spLocks noGrp="1"/>
+          </p:cNvSpPr>
+          <p:nvPr>
+            <p:ph type="sldNum" sz="quarter" idx="5"/>
+          </p:nvPr>
+        </p:nvSpPr>
+        <p:spPr>
+          <a:xfrm>
+            <a:off x="3884613" y="8685213"/>
+            <a:ext cx="2971800" cy="457200"/>
+          </a:xfrm>
+          <a:prstGeom prst="rect">
+            <a:avLst/>
+          </a:prstGeom>
+        </p:spPr>
+        <p:txBody>
+          <a:bodyPr vert="horz" lIns="91440" tIns="45720" rIns="91440" bIns="45720" rtlCol="0" anchor="b"/>
+          <a:lstStyle>
+            <a:lvl1pPr algn="r">
+              <a:defRPr sz="1200"/>
+            </a:lvl1pPr>
+          </a:lstStyle>
+          <a:p>
+            <a:fld id="{BB5E49A5-4136-284D-997B-48E1D791AD67}" type="slidenum">
+              <a:rPr lang="en-US" smtClean="0"/>
+              <a:t>‹#›</a:t>
+            </a:fld>
+            <a:endParaRPr lang="en-US"/>
+          </a:p>
+        </p:txBody>
+      </p:sp>
+    </p:spTree>
+    <p:extLst>
+      <p:ext uri="{BB962C8B-B14F-4D97-AF65-F5344CB8AC3E}">
+        <p14:creationId xmlns:p14="http://schemas.microsoft.com/office/powerpoint/2010/main" val="2623252185"/>
+      </p:ext>
+    </p:extLst>
+  </p:cSld>
+  <p:clrMap bg1="lt1" tx1="dk1" bg2="lt2" tx2="dk2" accent1="accent1" accent2="accent2" accent3="accent3" accent4="accent4" accent5="accent5" accent6="accent6" hlink="hlink" folHlink="folHlink"/>
+  <p:notesStyle>
+    <a:lvl1pPr marL="0" algn="l" defTabSz="457200" rtl="0" eaLnBrk="1" latinLnBrk="0" hangingPunct="1">
+      <a:defRPr sz="1200" kern="1200">
+        <a:solidFill>
+          <a:schemeClr val="tx1"/>
+        </a:solidFill>
+        <a:latin typeface="+mn-lt"/>
+        <a:ea typeface="+mn-ea"/>
+        <a:cs typeface="+mn-cs"/>
+      </a:defRPr>
+    </a:lvl1pPr>
+    <a:lvl2pPr marL="457200" algn="l" defTabSz="457200" rtl="0" eaLnBrk="1" latinLnBrk="0" hangingPunct="1">
+      <a:defRPr sz="1200" kern="1200">
+        <a:solidFill>
+          <a:schemeClr val="tx1"/>
+        </a:solidFill>
+        <a:latin typeface="+mn-lt"/>
+        <a:ea typeface="+mn-ea"/>
+        <a:cs typeface="+mn-cs"/>
+      </a:defRPr>
+    </a:lvl2pPr>
+    <a:lvl3pPr marL="914400" algn="l" defTabSz="457200" rtl="0" eaLnBrk="1" latinLnBrk="0" hangingPunct="1">
+      <a:defRPr sz="1200" kern="1200">
+        <a:solidFill>
+          <a:schemeClr val="tx1"/>
+        </a:solidFill>
+        <a:latin typeface="+mn-lt"/>
+        <a:ea typeface="+mn-ea"/>
+        <a:cs typeface="+mn-cs"/>
+      </a:defRPr>
+    </a:lvl3pPr>
+    <a:lvl4pPr marL="1371600" algn="l" defTabSz="457200" rtl="0" eaLnBrk="1" latinLnBrk="0" hangingPunct="1">
+      <a:defRPr sz="1200" kern="1200">
+        <a:solidFill>
+          <a:schemeClr val="tx1"/>
+        </a:solidFill>
+        <a:latin typeface="+mn-lt"/>
+        <a:ea typeface="+mn-ea"/>
+        <a:cs typeface="+mn-cs"/>
+      </a:defRPr>
+    </a:lvl4pPr>
+    <a:lvl5pPr marL="1828800" algn="l" defTabSz="457200" rtl="0" eaLnBrk="1" latinLnBrk="0" hangingPunct="1">
+      <a:defRPr sz="1200" kern="1200">
+        <a:solidFill>
+          <a:schemeClr val="tx1"/>
+        </a:solidFill>
+        <a:latin typeface="+mn-lt"/>
+        <a:ea typeface="+mn-ea"/>
+        <a:cs typeface="+mn-cs"/>
+      </a:defRPr>
+    </a:lvl5pPr>
+    <a:lvl6pPr marL="2286000" algn="l" defTabSz="457200" rtl="0" eaLnBrk="1" latinLnBrk="0" hangingPunct="1">
+      <a:defRPr sz="1200" kern="1200">
+        <a:solidFill>
+          <a:schemeClr val="tx1"/>
+        </a:solidFill>
+        <a:latin typeface="+mn-lt"/>
+        <a:ea typeface="+mn-ea"/>
+        <a:cs typeface="+mn-cs"/>
+      </a:defRPr>
+    </a:lvl6pPr>
+    <a:lvl7pPr marL="2743200" algn="l" defTabSz="457200" rtl="0" eaLnBrk="1" latinLnBrk="0" hangingPunct="1">
+      <a:defRPr sz="1200" kern="1200">
+        <a:solidFill>
+          <a:schemeClr val="tx1"/>
+        </a:solidFill>
+        <a:latin typeface="+mn-lt"/>
+        <a:ea typeface="+mn-ea"/>
+        <a:cs typeface="+mn-cs"/>
+      </a:defRPr>
+    </a:lvl7pPr>
+    <a:lvl8pPr marL="3200400" algn="l" defTabSz="457200" rtl="0" eaLnBrk="1" latinLnBrk="0" hangingPunct="1">
+      <a:defRPr sz="1200" kern="1200">
+        <a:solidFill>
+          <a:schemeClr val="tx1"/>
+        </a:solidFill>
+        <a:latin typeface="+mn-lt"/>
+        <a:ea typeface="+mn-ea"/>
+        <a:cs typeface="+mn-cs"/>
+      </a:defRPr>
+    </a:lvl8pPr>
+    <a:lvl9pPr marL="3657600" algn="l" defTabSz="457200" rtl="0" eaLnBrk="1" latinLnBrk="0" hangingPunct="1">
+      <a:defRPr sz="1200" kern="1200">
+        <a:solidFill>
+          <a:schemeClr val="tx1"/>
+        </a:solidFill>
+        <a:latin typeface="+mn-lt"/>
+        <a:ea typeface="+mn-ea"/>
+        <a:cs typeface="+mn-cs"/>
+      </a:defRPr>
+    </a:lvl9pPr>
+  </p:notesStyle>
+</p:notesMaster>
+</file>
+
+<file path=ppt/notesSlides/notesSlide1.xml><?xml version="1.0" encoding="utf-8"?>
+<p:notes xmlns:a="http://schemas.openxmlformats.org/drawingml/2006/main" xmlns:p="http://schemas.openxmlformats.org/presentationml/2006/main" xmlns:r="http://schemas.openxmlformats.org/officeDocument/2006/relationships">
+  <p:cSld>
+    <p:spTree>
+      <p:nvGrpSpPr>
+        <p:cNvPr id="1" name=""/>
+        <p:cNvGrpSpPr/>
+        <p:nvPr/>
+      </p:nvGrpSpPr>
+      <p:grpSpPr>
+        <a:xfrm>
+          <a:off x="0" y="0"/>
+          <a:ext cx="0" cy="0"/>
+          <a:chOff x="0" y="0"/>
+          <a:chExt cx="0" cy="0"/>
+        </a:xfrm>
+      </p:grpSpPr>
+      <p:sp>
+        <p:nvSpPr>
+          <p:cNvPr id="2" name="Slide Image Placeholder 1"/>
+          <p:cNvSpPr>
+            <a:spLocks noGrp="1"/>
+          </p:cNvSpPr>
+          <p:nvPr>
+            <p:ph type="sldImg" idx="2"/>
+          </p:nvPr>
+        </p:nvSpPr>
+        <p:spPr/>
+      </p:sp>
+      <p:sp>
+        <p:nvSpPr>
+          <p:cNvPr id="3" name="Notes Placeholder 2"/>
+          <p:cNvSpPr>
+            <a:spLocks noGrp="1"/>
+          </p:cNvSpPr>
+          <p:nvPr>
+            <p:ph type="body" idx="3" sz="quarter"/>
+          </p:nvPr>
+        </p:nvSpPr>
+        <p:spPr/>
+        <p:txBody>
+          <a:bodyPr/>
+          <a:lstStyle/>
+          <a:p>
+            <a:r>
+              <a:t>Objetivo docente: Leer, reconstruir y depurar la estructura mínima; reconocer aspectos léxicos y comentarios.</a:t>
+            </a:r>
+          </a:p>
+          <a:p>
+            <a:r>
+              <a:t>Diapositiva 1 de 9: La estructura mínima de un programa Java</a:t>
+            </a:r>
+          </a:p>
+          <a:p>
+            <a:r>
+              <a:t>Fase HEXA: Investigar — aprender lo necesario</a:t>
+            </a:r>
+          </a:p>
+          <a:p>
+            <a:r>
+              <a:t>Presenta el producto y anticipa la evidencia: Quede diagnosticada la comprensión.</a:t>
+            </a:r>
+          </a:p>
+          <a:p>
+            <a:r>
+              <a:t>Secuencia docente:</a:t>
+            </a:r>
+          </a:p>
+          <a:p>
+            <a:r>
+              <a:t>- 00:00–00:05 / D1: INVESTIGAR: Pide predecir qué líneas producen salida.</a:t>
+            </a:r>
+          </a:p>
+          <a:p>
+            <a:r>
+              <a:t>- 00:05–00:12 / D2: PÍLDORA DOCENTE 1/4: Explica que el nombre de la clase pública coincide con el archivo y que main es el punto de entrada en estos programas.</a:t>
+            </a:r>
+          </a:p>
+          <a:p>
+            <a:r>
+              <a:t>- 00:12–00:18 / D3: PÍLDORA DOCENTE 2/4: Relaciona cada regla con un error real.</a:t>
+            </a:r>
+          </a:p>
+          <a:p>
+            <a:r>
+              <a:t>- 00:18–00:23 / D4: DIAGNÓSTICO: No ejecutes aún. Pide voto y justificación.</a:t>
+            </a:r>
+          </a:p>
+          <a:p>
+            <a:r>
+              <a:t>- 00:23–00:27 / D5: DIAGNÓSTICO: Pide localizar el error antes de ejecutar.</a:t>
+            </a:r>
+          </a:p>
+          <a:p>
+            <a:r>
+              <a:t>- 00:27–00:32 / D6: PÍLDORA DOCENTE 3/4: Explica reglas mínimas y la importancia del nombre significativo.</a:t>
+            </a:r>
+          </a:p>
+          <a:p>
+            <a:r>
+              <a:t>- 00:32–00:35 / D7: PÍLDORA DOCENTE 4/4: Explica que no se ejecutan y que deben aportar intención, no repetir literalmente la instrucción.</a:t>
+            </a:r>
+          </a:p>
+          <a:p>
+            <a:r>
+              <a:t>- 00:35–00:42 / D8: ACTIVIDAD: Circula y pide verbalizar la primera marca del IDE.</a:t>
+            </a:r>
+          </a:p>
+          <a:p>
+            <a:r>
+              <a:t>- 00:42–00:45 / D9: CIERRE: Pregunta a 2–3 personas y registra dificultades comunes.</a:t>
+            </a:r>
+          </a:p>
+          <a:p>
+            <a:r>
+              <a:t>Claves docentes:</a:t>
+            </a:r>
+          </a:p>
+          <a:p>
+            <a:r>
+              <a:t>- PÍLDORA DOCENTE 1/4: Explica que el nombre de la clase pública coincide con el archivo y que main es el punto de entrada en estos programas, PÍLDORA DOCENTE 2/4: Relaciona cada regla con un error real, PÍLDORA DOCENTE 3/4: Explica reglas mínimas y la importancia del nombre significativo.</a:t>
+            </a:r>
+          </a:p>
+          <a:p>
+            <a:r>
+              <a:t>- PÍLDORA DOCENTE 4/4: Explica que no se ejecutan y que deben aportar intención, no repetir literalmente la instrucción.</a:t>
+            </a:r>
+          </a:p>
+          <a:p>
+            <a:r>
+              <a:t>Fuente docente: /mnt/compartido/Programación-26-27/Minijarvis/02-PROFESORADO/02-SESIONES/h1/S208-estructura-minima-de-un-programa-java-docente.md</a:t>
+            </a:r>
+          </a:p>
+        </p:txBody>
+      </p:sp>
+      <p:sp>
+        <p:nvSpPr>
+          <p:cNvPr id="4" name="Slide Number Placeholder 3"/>
+          <p:cNvSpPr>
+            <a:spLocks noGrp="1"/>
+          </p:cNvSpPr>
+          <p:nvPr>
+            <p:ph type="sldNum" idx="5" sz="quarter"/>
+          </p:nvPr>
+        </p:nvSpPr>
+        <p:spPr/>
+      </p:sp>
+    </p:spTree>
+  </p:cSld>
+  <p:clrMapOvr>
+    <a:masterClrMapping/>
+  </p:clrMapOvr>
+</p:notes>
+</file>
+
+<file path=ppt/notesSlides/notesSlide2.xml><?xml version="1.0" encoding="utf-8"?>
+<p:notes xmlns:a="http://schemas.openxmlformats.org/drawingml/2006/main" xmlns:p="http://schemas.openxmlformats.org/presentationml/2006/main" xmlns:r="http://schemas.openxmlformats.org/officeDocument/2006/relationships">
+  <p:cSld>
+    <p:spTree>
+      <p:nvGrpSpPr>
+        <p:cNvPr id="1" name=""/>
+        <p:cNvGrpSpPr/>
+        <p:nvPr/>
+      </p:nvGrpSpPr>
+      <p:grpSpPr>
+        <a:xfrm>
+          <a:off x="0" y="0"/>
+          <a:ext cx="0" cy="0"/>
+          <a:chOff x="0" y="0"/>
+          <a:chExt cx="0" cy="0"/>
+        </a:xfrm>
+      </p:grpSpPr>
+      <p:sp>
+        <p:nvSpPr>
+          <p:cNvPr id="2" name="Slide Image Placeholder 1"/>
+          <p:cNvSpPr>
+            <a:spLocks noGrp="1"/>
+          </p:cNvSpPr>
+          <p:nvPr>
+            <p:ph type="sldImg" idx="2"/>
+          </p:nvPr>
+        </p:nvSpPr>
+        <p:spPr/>
+      </p:sp>
+      <p:sp>
+        <p:nvSpPr>
+          <p:cNvPr id="3" name="Notes Placeholder 2"/>
+          <p:cNvSpPr>
+            <a:spLocks noGrp="1"/>
+          </p:cNvSpPr>
+          <p:nvPr>
+            <p:ph type="body" idx="3" sz="quarter"/>
+          </p:nvPr>
+        </p:nvSpPr>
+        <p:spPr/>
+        <p:txBody>
+          <a:bodyPr/>
+          <a:lstStyle/>
+          <a:p>
+            <a:r>
+              <a:t>Objetivo docente: Leer, reconstruir y depurar la estructura mínima; reconocer aspectos léxicos y comentarios.</a:t>
+            </a:r>
+          </a:p>
+          <a:p>
+            <a:r>
+              <a:t>Diapositiva 2 de 9: Qué debe conseguirse</a:t>
+            </a:r>
+          </a:p>
+          <a:p>
+            <a:r>
+              <a:t>Fase HEXA: Investigar — aprender lo necesario</a:t>
+            </a:r>
+          </a:p>
+          <a:p>
+            <a:r>
+              <a:t>- Objetivo: Leer, reconstruir y depurar la estructura mínima; reconocer aspectos léxicos y comentarios.</a:t>
+            </a:r>
+          </a:p>
+          <a:p>
+            <a:r>
+              <a:t>- Al terminar: señala la evidencia, explica qué demuestra y reproduce la prueba.</a:t>
+            </a:r>
+          </a:p>
+          <a:p>
+            <a:r>
+              <a:t>Fuente docente: /mnt/compartido/Programación-26-27/Minijarvis/02-PROFESORADO/02-SESIONES/h1/S208-estructura-minima-de-un-programa-java-docente.md</a:t>
+            </a:r>
+          </a:p>
+        </p:txBody>
+      </p:sp>
+      <p:sp>
+        <p:nvSpPr>
+          <p:cNvPr id="4" name="Slide Number Placeholder 3"/>
+          <p:cNvSpPr>
+            <a:spLocks noGrp="1"/>
+          </p:cNvSpPr>
+          <p:nvPr>
+            <p:ph type="sldNum" idx="5" sz="quarter"/>
+          </p:nvPr>
+        </p:nvSpPr>
+        <p:spPr/>
+      </p:sp>
+    </p:spTree>
+  </p:cSld>
+  <p:clrMapOvr>
+    <a:masterClrMapping/>
+  </p:clrMapOvr>
+</p:notes>
+</file>
+
+<file path=ppt/notesSlides/notesSlide3.xml><?xml version="1.0" encoding="utf-8"?>
+<p:notes xmlns:a="http://schemas.openxmlformats.org/drawingml/2006/main" xmlns:p="http://schemas.openxmlformats.org/presentationml/2006/main" xmlns:r="http://schemas.openxmlformats.org/officeDocument/2006/relationships">
+  <p:cSld>
+    <p:spTree>
+      <p:nvGrpSpPr>
+        <p:cNvPr id="1" name=""/>
+        <p:cNvGrpSpPr/>
+        <p:nvPr/>
+      </p:nvGrpSpPr>
+      <p:grpSpPr>
+        <a:xfrm>
+          <a:off x="0" y="0"/>
+          <a:ext cx="0" cy="0"/>
+          <a:chOff x="0" y="0"/>
+          <a:chExt cx="0" cy="0"/>
+        </a:xfrm>
+      </p:grpSpPr>
+      <p:sp>
+        <p:nvSpPr>
+          <p:cNvPr id="2" name="Slide Image Placeholder 1"/>
+          <p:cNvSpPr>
+            <a:spLocks noGrp="1"/>
+          </p:cNvSpPr>
+          <p:nvPr>
+            <p:ph type="sldImg" idx="2"/>
+          </p:nvPr>
+        </p:nvSpPr>
+        <p:spPr/>
+      </p:sp>
+      <p:sp>
+        <p:nvSpPr>
+          <p:cNvPr id="3" name="Notes Placeholder 2"/>
+          <p:cNvSpPr>
+            <a:spLocks noGrp="1"/>
+          </p:cNvSpPr>
+          <p:nvPr>
+            <p:ph type="body" idx="3" sz="quarter"/>
+          </p:nvPr>
+        </p:nvSpPr>
+        <p:spPr/>
+        <p:txBody>
+          <a:bodyPr/>
+          <a:lstStyle/>
+          <a:p>
+            <a:r>
+              <a:t>Objetivo docente: Leer, reconstruir y depurar la estructura mínima; reconocer aspectos léxicos y comentarios.</a:t>
+            </a:r>
+          </a:p>
+          <a:p>
+            <a:r>
+              <a:t>Diapositiva 3 de 9: Ejemplo o demostración · 1</a:t>
+            </a:r>
+          </a:p>
+          <a:p>
+            <a:r>
+              <a:t>Fase HEXA: Investigar — aprender lo necesario</a:t>
+            </a:r>
+          </a:p>
+          <a:p>
+            <a:r>
+              <a:t>Modela el ejemplo sin resolver la actividad completa; pide una predicción antes de ejecutar.</a:t>
+            </a:r>
+          </a:p>
+          <a:p>
+            <a:r>
+              <a:t>- D1 · ¿Qué líneas hacen algo visible? — public class Main {</a:t>
+            </a:r>
+          </a:p>
+          <a:p>
+            <a:r>
+              <a:t>- public static void main(String\[\] args) {</a:t>
+            </a:r>
+          </a:p>
+          <a:p>
+            <a:r>
+              <a:t>- System.out.println("Hola");</a:t>
+            </a:r>
+          </a:p>
+          <a:p>
+            <a:r>
+              <a:t>- System.out.println("MiniJarvis arranca");</a:t>
+            </a:r>
+          </a:p>
+          <a:p>
+            <a:r>
+              <a:t>- }</a:t>
+            </a:r>
+          </a:p>
+          <a:p>
+            <a:r>
+              <a:t>Fuente docente: /mnt/compartido/Programación-26-27/Minijarvis/02-PROFESORADO/02-SESIONES/h1/S208-estructura-minima-de-un-programa-java-docente.md</a:t>
+            </a:r>
+          </a:p>
+        </p:txBody>
+      </p:sp>
+      <p:sp>
+        <p:nvSpPr>
+          <p:cNvPr id="4" name="Slide Number Placeholder 3"/>
+          <p:cNvSpPr>
+            <a:spLocks noGrp="1"/>
+          </p:cNvSpPr>
+          <p:nvPr>
+            <p:ph type="sldNum" idx="5" sz="quarter"/>
+          </p:nvPr>
+        </p:nvSpPr>
+        <p:spPr/>
+      </p:sp>
+    </p:spTree>
+  </p:cSld>
+  <p:clrMapOvr>
+    <a:masterClrMapping/>
+  </p:clrMapOvr>
+</p:notes>
+</file>
+
+<file path=ppt/notesSlides/notesSlide4.xml><?xml version="1.0" encoding="utf-8"?>
+<p:notes xmlns:a="http://schemas.openxmlformats.org/drawingml/2006/main" xmlns:p="http://schemas.openxmlformats.org/presentationml/2006/main" xmlns:r="http://schemas.openxmlformats.org/officeDocument/2006/relationships">
+  <p:cSld>
+    <p:spTree>
+      <p:nvGrpSpPr>
+        <p:cNvPr id="1" name=""/>
+        <p:cNvGrpSpPr/>
+        <p:nvPr/>
+      </p:nvGrpSpPr>
+      <p:grpSpPr>
+        <a:xfrm>
+          <a:off x="0" y="0"/>
+          <a:ext cx="0" cy="0"/>
+          <a:chOff x="0" y="0"/>
+          <a:chExt cx="0" cy="0"/>
+        </a:xfrm>
+      </p:grpSpPr>
+      <p:sp>
+        <p:nvSpPr>
+          <p:cNvPr id="2" name="Slide Image Placeholder 1"/>
+          <p:cNvSpPr>
+            <a:spLocks noGrp="1"/>
+          </p:cNvSpPr>
+          <p:nvPr>
+            <p:ph type="sldImg" idx="2"/>
+          </p:nvPr>
+        </p:nvSpPr>
+        <p:spPr/>
+      </p:sp>
+      <p:sp>
+        <p:nvSpPr>
+          <p:cNvPr id="3" name="Notes Placeholder 2"/>
+          <p:cNvSpPr>
+            <a:spLocks noGrp="1"/>
+          </p:cNvSpPr>
+          <p:nvPr>
+            <p:ph type="body" idx="3" sz="quarter"/>
+          </p:nvPr>
+        </p:nvSpPr>
+        <p:spPr/>
+        <p:txBody>
+          <a:bodyPr/>
+          <a:lstStyle/>
+          <a:p>
+            <a:r>
+              <a:t>Objetivo docente: Leer, reconstruir y depurar la estructura mínima; reconocer aspectos léxicos y comentarios.</a:t>
+            </a:r>
+          </a:p>
+          <a:p>
+            <a:r>
+              <a:t>Diapositiva 4 de 9: Ejemplo o demostración · 2</a:t>
+            </a:r>
+          </a:p>
+          <a:p>
+            <a:r>
+              <a:t>Fase HEXA: Investigar — aprender lo necesario</a:t>
+            </a:r>
+          </a:p>
+          <a:p>
+            <a:r>
+              <a:t>Modela el ejemplo sin resolver la actividad completa; pide una predicción antes de ejecutar.</a:t>
+            </a:r>
+          </a:p>
+          <a:p>
+            <a:r>
+              <a:t>- D2 · Clase, archivo y main — ARCHIVO Y CLASE: Main.java</a:t>
+            </a:r>
+          </a:p>
+          <a:p>
+            <a:r>
+              <a:t>- ↕</a:t>
+            </a:r>
+          </a:p>
+          <a:p>
+            <a:r>
+              <a:t>- public class Main \| PUNTO DE ENTRADA: public static void main(String\[\] args)</a:t>
+            </a:r>
+          </a:p>
+          <a:p>
+            <a:r>
+              <a:t>Fuente docente: /mnt/compartido/Programación-26-27/Minijarvis/02-PROFESORADO/02-SESIONES/h1/S208-estructura-minima-de-un-programa-java-docente.md</a:t>
+            </a:r>
+          </a:p>
+        </p:txBody>
+      </p:sp>
+      <p:sp>
+        <p:nvSpPr>
+          <p:cNvPr id="4" name="Slide Number Placeholder 3"/>
+          <p:cNvSpPr>
+            <a:spLocks noGrp="1"/>
+          </p:cNvSpPr>
+          <p:nvPr>
+            <p:ph type="sldNum" idx="5" sz="quarter"/>
+          </p:nvPr>
+        </p:nvSpPr>
+        <p:spPr/>
+      </p:sp>
+    </p:spTree>
+  </p:cSld>
+  <p:clrMapOvr>
+    <a:masterClrMapping/>
+  </p:clrMapOvr>
+</p:notes>
+</file>
+
+<file path=ppt/notesSlides/notesSlide5.xml><?xml version="1.0" encoding="utf-8"?>
+<p:notes xmlns:a="http://schemas.openxmlformats.org/drawingml/2006/main" xmlns:p="http://schemas.openxmlformats.org/presentationml/2006/main" xmlns:r="http://schemas.openxmlformats.org/officeDocument/2006/relationships">
+  <p:cSld>
+    <p:spTree>
+      <p:nvGrpSpPr>
+        <p:cNvPr id="1" name=""/>
+        <p:cNvGrpSpPr/>
+        <p:nvPr/>
+      </p:nvGrpSpPr>
+      <p:grpSpPr>
+        <a:xfrm>
+          <a:off x="0" y="0"/>
+          <a:ext cx="0" cy="0"/>
+          <a:chOff x="0" y="0"/>
+          <a:chExt cx="0" cy="0"/>
+        </a:xfrm>
+      </p:grpSpPr>
+      <p:sp>
+        <p:nvSpPr>
+          <p:cNvPr id="2" name="Slide Image Placeholder 1"/>
+          <p:cNvSpPr>
+            <a:spLocks noGrp="1"/>
+          </p:cNvSpPr>
+          <p:nvPr>
+            <p:ph type="sldImg" idx="2"/>
+          </p:nvPr>
+        </p:nvSpPr>
+        <p:spPr/>
+      </p:sp>
+      <p:sp>
+        <p:nvSpPr>
+          <p:cNvPr id="3" name="Notes Placeholder 2"/>
+          <p:cNvSpPr>
+            <a:spLocks noGrp="1"/>
+          </p:cNvSpPr>
+          <p:nvPr>
+            <p:ph type="body" idx="3" sz="quarter"/>
+          </p:nvPr>
+        </p:nvSpPr>
+        <p:spPr/>
+        <p:txBody>
+          <a:bodyPr/>
+          <a:lstStyle/>
+          <a:p>
+            <a:r>
+              <a:t>Objetivo docente: Leer, reconstruir y depurar la estructura mínima; reconocer aspectos léxicos y comentarios.</a:t>
+            </a:r>
+          </a:p>
+          <a:p>
+            <a:r>
+              <a:t>Diapositiva 5 de 9: Actividad central · 1</a:t>
+            </a:r>
+          </a:p>
+          <a:p>
+            <a:r>
+              <a:t>Fase HEXA: Investigar — aprender lo necesario</a:t>
+            </a:r>
+          </a:p>
+          <a:p>
+            <a:r>
+              <a:t>Entrega la consigna, observa decisiones y pide una prueba reproducible.</a:t>
+            </a:r>
+          </a:p>
+          <a:p>
+            <a:r>
+              <a:t>- Predice antes de ejecutar cuando haya código.</a:t>
+            </a:r>
+          </a:p>
+          <a:p>
+            <a:r>
+              <a:t>- Realiza la micropráctica o modificación prevista.</a:t>
+            </a:r>
+          </a:p>
+          <a:p>
+            <a:r>
+              <a:t>- Prueba el caso normal y, cuando exista una decisión o conversión, también el caso alternativo o erróneo.</a:t>
+            </a:r>
+          </a:p>
+          <a:p>
+            <a:r>
+              <a:t>- Conserva el código o resultado en el repositorio o espacio indicado.</a:t>
+            </a:r>
+          </a:p>
+          <a:p>
+            <a:r>
+              <a:t>Fuente docente: /mnt/compartido/Programación-26-27/Minijarvis/02-PROFESORADO/02-SESIONES/h1/S208-estructura-minima-de-un-programa-java-docente.md</a:t>
+            </a:r>
+          </a:p>
+        </p:txBody>
+      </p:sp>
+      <p:sp>
+        <p:nvSpPr>
+          <p:cNvPr id="4" name="Slide Number Placeholder 3"/>
+          <p:cNvSpPr>
+            <a:spLocks noGrp="1"/>
+          </p:cNvSpPr>
+          <p:nvPr>
+            <p:ph type="sldNum" idx="5" sz="quarter"/>
+          </p:nvPr>
+        </p:nvSpPr>
+        <p:spPr/>
+      </p:sp>
+    </p:spTree>
+  </p:cSld>
+  <p:clrMapOvr>
+    <a:masterClrMapping/>
+  </p:clrMapOvr>
+</p:notes>
+</file>
+
+<file path=ppt/notesSlides/notesSlide6.xml><?xml version="1.0" encoding="utf-8"?>
+<p:notes xmlns:a="http://schemas.openxmlformats.org/drawingml/2006/main" xmlns:p="http://schemas.openxmlformats.org/presentationml/2006/main" xmlns:r="http://schemas.openxmlformats.org/officeDocument/2006/relationships">
+  <p:cSld>
+    <p:spTree>
+      <p:nvGrpSpPr>
+        <p:cNvPr id="1" name=""/>
+        <p:cNvGrpSpPr/>
+        <p:nvPr/>
+      </p:nvGrpSpPr>
+      <p:grpSpPr>
+        <a:xfrm>
+          <a:off x="0" y="0"/>
+          <a:ext cx="0" cy="0"/>
+          <a:chOff x="0" y="0"/>
+          <a:chExt cx="0" cy="0"/>
+        </a:xfrm>
+      </p:grpSpPr>
+      <p:sp>
+        <p:nvSpPr>
+          <p:cNvPr id="2" name="Slide Image Placeholder 1"/>
+          <p:cNvSpPr>
+            <a:spLocks noGrp="1"/>
+          </p:cNvSpPr>
+          <p:nvPr>
+            <p:ph type="sldImg" idx="2"/>
+          </p:nvPr>
+        </p:nvSpPr>
+        <p:spPr/>
+      </p:sp>
+      <p:sp>
+        <p:nvSpPr>
+          <p:cNvPr id="3" name="Notes Placeholder 2"/>
+          <p:cNvSpPr>
+            <a:spLocks noGrp="1"/>
+          </p:cNvSpPr>
+          <p:nvPr>
+            <p:ph type="body" idx="3" sz="quarter"/>
+          </p:nvPr>
+        </p:nvSpPr>
+        <p:spPr/>
+        <p:txBody>
+          <a:bodyPr/>
+          <a:lstStyle/>
+          <a:p>
+            <a:r>
+              <a:t>Objetivo docente: Leer, reconstruir y depurar la estructura mínima; reconocer aspectos léxicos y comentarios.</a:t>
+            </a:r>
+          </a:p>
+          <a:p>
+            <a:r>
+              <a:t>Diapositiva 6 de 9: Actividad central · 2</a:t>
+            </a:r>
+          </a:p>
+          <a:p>
+            <a:r>
+              <a:t>Fase HEXA: Investigar — aprender lo necesario</a:t>
+            </a:r>
+          </a:p>
+          <a:p>
+            <a:r>
+              <a:t>Entrega la consigna, observa decisiones y pide una prueba reproducible.</a:t>
+            </a:r>
+          </a:p>
+          <a:p>
+            <a:r>
+              <a:t>- Registra una sola entrada en el diario individual; no crees un informe paralelo.</a:t>
+            </a:r>
+          </a:p>
+          <a:p>
+            <a:r>
+              <a:t>- ¿Qué puedes señalar, explicar y probar al terminar este checkpoint?</a:t>
+            </a:r>
+          </a:p>
+          <a:p>
+            <a:r>
+              <a:t>Fuente docente: /mnt/compartido/Programación-26-27/Minijarvis/02-PROFESORADO/02-SESIONES/h1/S208-estructura-minima-de-un-programa-java-docente.md</a:t>
+            </a:r>
+          </a:p>
+        </p:txBody>
+      </p:sp>
+      <p:sp>
+        <p:nvSpPr>
+          <p:cNvPr id="4" name="Slide Number Placeholder 3"/>
+          <p:cNvSpPr>
+            <a:spLocks noGrp="1"/>
+          </p:cNvSpPr>
+          <p:nvPr>
+            <p:ph type="sldNum" idx="5" sz="quarter"/>
+          </p:nvPr>
+        </p:nvSpPr>
+        <p:spPr/>
+      </p:sp>
+    </p:spTree>
+  </p:cSld>
+  <p:clrMapOvr>
+    <a:masterClrMapping/>
+  </p:clrMapOvr>
+</p:notes>
+</file>
+
+<file path=ppt/notesSlides/notesSlide7.xml><?xml version="1.0" encoding="utf-8"?>
+<p:notes xmlns:a="http://schemas.openxmlformats.org/drawingml/2006/main" xmlns:p="http://schemas.openxmlformats.org/presentationml/2006/main" xmlns:r="http://schemas.openxmlformats.org/officeDocument/2006/relationships">
+  <p:cSld>
+    <p:spTree>
+      <p:nvGrpSpPr>
+        <p:cNvPr id="1" name=""/>
+        <p:cNvGrpSpPr/>
+        <p:nvPr/>
+      </p:nvGrpSpPr>
+      <p:grpSpPr>
+        <a:xfrm>
+          <a:off x="0" y="0"/>
+          <a:ext cx="0" cy="0"/>
+          <a:chOff x="0" y="0"/>
+          <a:chExt cx="0" cy="0"/>
+        </a:xfrm>
+      </p:grpSpPr>
+      <p:sp>
+        <p:nvSpPr>
+          <p:cNvPr id="2" name="Slide Image Placeholder 1"/>
+          <p:cNvSpPr>
+            <a:spLocks noGrp="1"/>
+          </p:cNvSpPr>
+          <p:nvPr>
+            <p:ph type="sldImg" idx="2"/>
+          </p:nvPr>
+        </p:nvSpPr>
+        <p:spPr/>
+      </p:sp>
+      <p:sp>
+        <p:nvSpPr>
+          <p:cNvPr id="3" name="Notes Placeholder 2"/>
+          <p:cNvSpPr>
+            <a:spLocks noGrp="1"/>
+          </p:cNvSpPr>
+          <p:nvPr>
+            <p:ph type="body" idx="3" sz="quarter"/>
+          </p:nvPr>
+        </p:nvSpPr>
+        <p:spPr/>
+        <p:txBody>
+          <a:bodyPr/>
+          <a:lstStyle/>
+          <a:p>
+            <a:r>
+              <a:t>Objetivo docente: Leer, reconstruir y depurar la estructura mínima; reconocer aspectos léxicos y comentarios.</a:t>
+            </a:r>
+          </a:p>
+          <a:p>
+            <a:r>
+              <a:t>Diapositiva 7 de 9: Evidencia y comprobación</a:t>
+            </a:r>
+          </a:p>
+          <a:p>
+            <a:r>
+              <a:t>Fase HEXA: Investigar — aprender lo necesario</a:t>
+            </a:r>
+          </a:p>
+          <a:p>
+            <a:r>
+              <a:t>Comprueba la evidencia en su fuente canónica: Quede diagnosticada la comprensión.</a:t>
+            </a:r>
+          </a:p>
+          <a:p>
+            <a:r>
+              <a:t>- conserva el código o la prueba en el lugar indicado por la sesión;</a:t>
+            </a:r>
+          </a:p>
+          <a:p>
+            <a:r>
+              <a:t>- añade una sola entrada al diario individual con prueba, bloqueo y siguiente paso;</a:t>
+            </a:r>
+          </a:p>
+          <a:p>
+            <a:r>
+              <a:t>- no copies la misma reflexión en otro documento; el Site personal seleccionará evidencias al cerrar H1.</a:t>
+            </a:r>
+          </a:p>
+          <a:p>
+            <a:r>
+              <a:t>Fuente docente: /mnt/compartido/Programación-26-27/Minijarvis/02-PROFESORADO/02-SESIONES/h1/S208-estructura-minima-de-un-programa-java-docente.md</a:t>
+            </a:r>
+          </a:p>
+        </p:txBody>
+      </p:sp>
+      <p:sp>
+        <p:nvSpPr>
+          <p:cNvPr id="4" name="Slide Number Placeholder 3"/>
+          <p:cNvSpPr>
+            <a:spLocks noGrp="1"/>
+          </p:cNvSpPr>
+          <p:nvPr>
+            <p:ph type="sldNum" idx="5" sz="quarter"/>
+          </p:nvPr>
+        </p:nvSpPr>
+        <p:spPr/>
+      </p:sp>
+    </p:spTree>
+  </p:cSld>
+  <p:clrMapOvr>
+    <a:masterClrMapping/>
+  </p:clrMapOvr>
+</p:notes>
+</file>
+
+<file path=ppt/notesSlides/notesSlide8.xml><?xml version="1.0" encoding="utf-8"?>
+<p:notes xmlns:a="http://schemas.openxmlformats.org/drawingml/2006/main" xmlns:p="http://schemas.openxmlformats.org/presentationml/2006/main" xmlns:r="http://schemas.openxmlformats.org/officeDocument/2006/relationships">
+  <p:cSld>
+    <p:spTree>
+      <p:nvGrpSpPr>
+        <p:cNvPr id="1" name=""/>
+        <p:cNvGrpSpPr/>
+        <p:nvPr/>
+      </p:nvGrpSpPr>
+      <p:grpSpPr>
+        <a:xfrm>
+          <a:off x="0" y="0"/>
+          <a:ext cx="0" cy="0"/>
+          <a:chOff x="0" y="0"/>
+          <a:chExt cx="0" cy="0"/>
+        </a:xfrm>
+      </p:grpSpPr>
+      <p:sp>
+        <p:nvSpPr>
+          <p:cNvPr id="2" name="Slide Image Placeholder 1"/>
+          <p:cNvSpPr>
+            <a:spLocks noGrp="1"/>
+          </p:cNvSpPr>
+          <p:nvPr>
+            <p:ph type="sldImg" idx="2"/>
+          </p:nvPr>
+        </p:nvSpPr>
+        <p:spPr/>
+      </p:sp>
+      <p:sp>
+        <p:nvSpPr>
+          <p:cNvPr id="3" name="Notes Placeholder 2"/>
+          <p:cNvSpPr>
+            <a:spLocks noGrp="1"/>
+          </p:cNvSpPr>
+          <p:nvPr>
+            <p:ph type="body" idx="3" sz="quarter"/>
+          </p:nvPr>
+        </p:nvSpPr>
+        <p:spPr/>
+        <p:txBody>
+          <a:bodyPr/>
+          <a:lstStyle/>
+          <a:p>
+            <a:r>
+              <a:t>Objetivo docente: Leer, reconstruir y depurar la estructura mínima; reconocer aspectos léxicos y comentarios.</a:t>
+            </a:r>
+          </a:p>
+          <a:p>
+            <a:r>
+              <a:t>Diapositiva 8 de 9: Seguridad y uso responsable</a:t>
+            </a:r>
+          </a:p>
+          <a:p>
+            <a:r>
+              <a:t>Fase HEXA: Investigar — aprender lo necesario</a:t>
+            </a:r>
+          </a:p>
+          <a:p>
+            <a:r>
+              <a:t>Recuerda estos límites antes de que el alumnado comparta o publique:</a:t>
+            </a:r>
+          </a:p>
+          <a:p>
+            <a:r>
+              <a:t>- Usa datos ficticios y no publiques credenciales ni información personal.</a:t>
+            </a:r>
+          </a:p>
+          <a:p>
+            <a:r>
+              <a:t>- Si utilizas IA de forma sustantiva, registra propósito, propuesta, cambios propios y validación en el registro de IA del hito.</a:t>
+            </a:r>
+          </a:p>
+          <a:p>
+            <a:r>
+              <a:t>Fuente docente: /mnt/compartido/Programación-26-27/Minijarvis/02-PROFESORADO/02-SESIONES/h1/S208-estructura-minima-de-un-programa-java-docente.md</a:t>
+            </a:r>
+          </a:p>
+        </p:txBody>
+      </p:sp>
+      <p:sp>
+        <p:nvSpPr>
+          <p:cNvPr id="4" name="Slide Number Placeholder 3"/>
+          <p:cNvSpPr>
+            <a:spLocks noGrp="1"/>
+          </p:cNvSpPr>
+          <p:nvPr>
+            <p:ph type="sldNum" idx="5" sz="quarter"/>
+          </p:nvPr>
+        </p:nvSpPr>
+        <p:spPr/>
+      </p:sp>
+    </p:spTree>
+  </p:cSld>
+  <p:clrMapOvr>
+    <a:masterClrMapping/>
+  </p:clrMapOvr>
+</p:notes>
+</file>
+
+<file path=ppt/notesSlides/notesSlide9.xml><?xml version="1.0" encoding="utf-8"?>
+<p:notes xmlns:a="http://schemas.openxmlformats.org/drawingml/2006/main" xmlns:p="http://schemas.openxmlformats.org/presentationml/2006/main" xmlns:r="http://schemas.openxmlformats.org/officeDocument/2006/relationships">
+  <p:cSld>
+    <p:spTree>
+      <p:nvGrpSpPr>
+        <p:cNvPr id="1" name=""/>
+        <p:cNvGrpSpPr/>
+        <p:nvPr/>
+      </p:nvGrpSpPr>
+      <p:grpSpPr>
+        <a:xfrm>
+          <a:off x="0" y="0"/>
+          <a:ext cx="0" cy="0"/>
+          <a:chOff x="0" y="0"/>
+          <a:chExt cx="0" cy="0"/>
+        </a:xfrm>
+      </p:grpSpPr>
+      <p:sp>
+        <p:nvSpPr>
+          <p:cNvPr id="2" name="Slide Image Placeholder 1"/>
+          <p:cNvSpPr>
+            <a:spLocks noGrp="1"/>
+          </p:cNvSpPr>
+          <p:nvPr>
+            <p:ph type="sldImg" idx="2"/>
+          </p:nvPr>
+        </p:nvSpPr>
+        <p:spPr/>
+      </p:sp>
+      <p:sp>
+        <p:nvSpPr>
+          <p:cNvPr id="3" name="Notes Placeholder 2"/>
+          <p:cNvSpPr>
+            <a:spLocks noGrp="1"/>
+          </p:cNvSpPr>
+          <p:nvPr>
+            <p:ph type="body" idx="3" sz="quarter"/>
+          </p:nvPr>
+        </p:nvSpPr>
+        <p:spPr/>
+        <p:txBody>
+          <a:bodyPr/>
+          <a:lstStyle/>
+          <a:p>
+            <a:r>
+              <a:t>Objetivo docente: Leer, reconstruir y depurar la estructura mínima; reconocer aspectos léxicos y comentarios.</a:t>
+            </a:r>
+          </a:p>
+          <a:p>
+            <a:r>
+              <a:t>Diapositiva 9 de 9: Cierre y defensa</a:t>
+            </a:r>
+          </a:p>
+          <a:p>
+            <a:r>
+              <a:t>Fase HEXA: Investigar — aprender lo necesario</a:t>
+            </a:r>
+          </a:p>
+          <a:p>
+            <a:r>
+              <a:t>Cierra con explicación individual, prueba observable y siguiente paso concreto.</a:t>
+            </a:r>
+          </a:p>
+          <a:p>
+            <a:r>
+              <a:t>- ¿Qué puedes señalar, explicar y probar al terminar este checkpoint?</a:t>
+            </a:r>
+          </a:p>
+          <a:p>
+            <a:r>
+              <a:t>Fuente docente: /mnt/compartido/Programación-26-27/Minijarvis/02-PROFESORADO/02-SESIONES/h1/S208-estructura-minima-de-un-programa-java-docente.md</a:t>
+            </a:r>
+          </a:p>
+        </p:txBody>
+      </p:sp>
+      <p:sp>
+        <p:nvSpPr>
+          <p:cNvPr id="4" name="Slide Number Placeholder 3"/>
+          <p:cNvSpPr>
+            <a:spLocks noGrp="1"/>
+          </p:cNvSpPr>
+          <p:nvPr>
+            <p:ph type="sldNum" idx="5" sz="quarter"/>
+          </p:nvPr>
+        </p:nvSpPr>
+        <p:spPr/>
+      </p:sp>
+    </p:spTree>
+  </p:cSld>
+  <p:clrMapOvr>
+    <a:masterClrMapping/>
+  </p:clrMapOvr>
+</p:notes>
 </file>
 
 <file path=ppt/slideLayouts/slideLayout1.xml><?xml version="1.0" encoding="utf-8"?>
@@ -3293,7 +4624,7 @@
               </a:defRPr>
             </a:pPr>
             <a:r>
-              <a:t>Estructura mínima de un programa Java</a:t>
+              <a:t>La estructura mínima de un programa Java</a:t>
             </a:r>
           </a:p>
         </p:txBody>
@@ -3329,7 +4660,7 @@
               </a:defRPr>
             </a:pPr>
             <a:r>
-              <a:t>H1 · 45 minutos</a:t>
+              <a:t>H1 — Primer MiniJarvis · Fase HEXA: Investigar — aprender lo necesario</a:t>
             </a:r>
           </a:p>
         </p:txBody>
@@ -3378,6 +4709,42 @@
         </p:nvSpPr>
         <p:spPr>
           <a:xfrm>
+            <a:off x="713232" y="4965192"/>
+            <a:ext cx="10241280" cy="594360"/>
+          </a:xfrm>
+          <a:prstGeom prst="rect">
+            <a:avLst/>
+          </a:prstGeom>
+          <a:noFill/>
+        </p:spPr>
+        <p:txBody>
+          <a:bodyPr wrap="square" lIns="45720" rIns="45720" tIns="36576" bIns="36576" anchor="t">
+            <a:spAutoFit/>
+          </a:bodyPr>
+          <a:lstStyle/>
+          <a:p>
+            <a:pPr algn="l">
+              <a:defRPr sz="1700" b="0">
+                <a:solidFill>
+                  <a:srgbClr val="D2D9E4"/>
+                </a:solidFill>
+                <a:latin typeface="Aptos"/>
+              </a:defRPr>
+            </a:pPr>
+            <a:r>
+              <a:t>Individual con contraste por parejas o equipo cuando la práctica lo requiera</a:t>
+            </a:r>
+          </a:p>
+        </p:txBody>
+      </p:sp>
+      <p:sp>
+        <p:nvSpPr>
+          <p:cNvPr id="10" name="TextBox 9"/>
+          <p:cNvSpPr txBox="1"/>
+          <p:nvPr/>
+        </p:nvSpPr>
+        <p:spPr>
+          <a:xfrm>
             <a:off x="713232" y="6272784"/>
             <a:ext cx="10607040" cy="201168"/>
           </a:xfrm>
@@ -3401,7 +4768,7 @@
               </a:defRPr>
             </a:pPr>
             <a:r>
-              <a:t>MINIJARVIS · PROGRAMACIÓN + ENTORNOS DE DESARROLLO</a:t>
+              <a:t>MINIJARVIS · PROGRAMACIÓN</a:t>
             </a:r>
           </a:p>
         </p:txBody>
@@ -3656,7 +5023,7 @@
               </a:defRPr>
             </a:pPr>
             <a:r>
-              <a:t>MiniJarvis · 1.º DAW · Sesión 208 · H1</a:t>
+              <a:t>MiniJarvis · 1.º DAW · Sesión 208 · H1 — Primer MiniJarvis</a:t>
             </a:r>
           </a:p>
         </p:txBody>
@@ -3737,7 +5104,7 @@
               </a:defRPr>
             </a:pPr>
             <a:r>
-              <a:t>Objetivo: Entender clase Main y método main.</a:t>
+              <a:t>Objetivo: Leer, reconstruir y depurar la estructura mínima; reconocer aspectos léxicos y comentarios.</a:t>
             </a:r>
           </a:p>
         </p:txBody>
@@ -3818,7 +5185,7 @@
               </a:defRPr>
             </a:pPr>
             <a:r>
-              <a:t>Evidencia: Código que compila con varios mensajes por pantalla.</a:t>
+              <a:t>Al terminar: señala la evidencia, explica qué demuestra y reproduce la prueba.</a:t>
             </a:r>
           </a:p>
         </p:txBody>
@@ -3958,7 +5325,7 @@
               </a:defRPr>
             </a:pPr>
             <a:r>
-              <a:t>RITMO DE LA SESIÓN</a:t>
+              <a:t>OBSERVAR ANTES DE ACTUAR</a:t>
             </a:r>
           </a:p>
         </p:txBody>
@@ -3994,7 +5361,7 @@
               </a:defRPr>
             </a:pPr>
             <a:r>
-              <a:t>Secuencia de aula</a:t>
+              <a:t>Ejemplo o demostración · 1</a:t>
             </a:r>
           </a:p>
         </p:txBody>
@@ -4073,27 +5440,27 @@
               </a:defRPr>
             </a:pPr>
             <a:r>
-              <a:t>MiniJarvis · 1.º DAW · Sesión 208 · H1</a:t>
-            </a:r>
-          </a:p>
-        </p:txBody>
-      </p:sp>
-      <p:sp>
-        <p:nvSpPr>
-          <p:cNvPr id="8" name="Oval 7"/>
+              <a:t>MiniJarvis · 1.º DAW · Sesión 208 · H1 — Primer MiniJarvis</a:t>
+            </a:r>
+          </a:p>
+        </p:txBody>
+      </p:sp>
+      <p:sp>
+        <p:nvSpPr>
+          <p:cNvPr id="8" name="Rounded Rectangle 7"/>
           <p:cNvSpPr/>
           <p:nvPr/>
         </p:nvSpPr>
         <p:spPr>
           <a:xfrm>
-            <a:off x="658368" y="1280160"/>
-            <a:ext cx="475488" cy="475488"/>
-          </a:xfrm>
-          <a:prstGeom prst="ellipse">
+            <a:off x="621792" y="1353312"/>
+            <a:ext cx="10927080" cy="4526280"/>
+          </a:xfrm>
+          <a:prstGeom prst="roundRect">
             <a:avLst/>
           </a:prstGeom>
           <a:solidFill>
-            <a:srgbClr val="2F5BA8"/>
+            <a:srgbClr val="121824"/>
           </a:solidFill>
           <a:ln>
             <a:noFill/>
@@ -4129,8 +5496,8 @@
         </p:nvSpPr>
         <p:spPr>
           <a:xfrm>
-            <a:off x="658368" y="1380744"/>
-            <a:ext cx="475488" cy="201168"/>
+            <a:off x="932688" y="1627632"/>
+            <a:ext cx="2057400" cy="411480"/>
           </a:xfrm>
           <a:prstGeom prst="rect">
             <a:avLst/>
@@ -4143,8 +5510,47 @@
           </a:bodyPr>
           <a:lstStyle/>
           <a:p>
-            <a:pPr algn="ctr">
+            <a:pPr algn="l">
               <a:defRPr sz="1300" b="1">
+                <a:solidFill>
+                  <a:srgbClr val="2F5BA8"/>
+                </a:solidFill>
+                <a:latin typeface="Aptos"/>
+              </a:defRPr>
+            </a:pPr>
+            <a:r>
+              <a:t>DEMOSTRACIÓN</a:t>
+            </a:r>
+          </a:p>
+        </p:txBody>
+      </p:sp>
+      <p:sp>
+        <p:nvSpPr>
+          <p:cNvPr id="10" name="TextBox 9"/>
+          <p:cNvSpPr txBox="1"/>
+          <p:nvPr/>
+        </p:nvSpPr>
+        <p:spPr>
+          <a:xfrm>
+            <a:off x="932688" y="2212848"/>
+            <a:ext cx="9966960" cy="3246120"/>
+          </a:xfrm>
+          <a:prstGeom prst="rect">
+            <a:avLst/>
+          </a:prstGeom>
+          <a:noFill/>
+        </p:spPr>
+        <p:txBody>
+          <a:bodyPr wrap="square" lIns="73152" rIns="45720" tIns="36576">
+            <a:spAutoFit/>
+          </a:bodyPr>
+          <a:lstStyle/>
+          <a:p>
+            <a:pPr>
+              <a:spcAft>
+                <a:spcPts val="900"/>
+              </a:spcAft>
+              <a:defRPr sz="2200">
                 <a:solidFill>
                   <a:srgbClr val="FFFFFF"/>
                 </a:solidFill>
@@ -4152,114 +5558,15 @@
               </a:defRPr>
             </a:pPr>
             <a:r>
-              <a:t>1</a:t>
-            </a:r>
-          </a:p>
-        </p:txBody>
-      </p:sp>
-      <p:sp>
-        <p:nvSpPr>
-          <p:cNvPr id="10" name="TextBox 9"/>
-          <p:cNvSpPr txBox="1"/>
-          <p:nvPr/>
-        </p:nvSpPr>
-        <p:spPr>
-          <a:xfrm>
-            <a:off x="1389888" y="1261872"/>
-            <a:ext cx="10058400" cy="772668"/>
-          </a:xfrm>
-          <a:prstGeom prst="rect">
-            <a:avLst/>
-          </a:prstGeom>
-          <a:noFill/>
-        </p:spPr>
-        <p:txBody>
-          <a:bodyPr wrap="square" lIns="45720" rIns="45720" tIns="36576" bIns="36576" anchor="t">
-            <a:spAutoFit/>
-          </a:bodyPr>
-          <a:lstStyle/>
-          <a:p>
-            <a:pPr algn="l">
-              <a:defRPr sz="1400" b="0">
-                <a:solidFill>
-                  <a:srgbClr val="1C2330"/>
-                </a:solidFill>
-                <a:latin typeface="Aptos"/>
-              </a:defRPr>
-            </a:pPr>
-            <a:r>
-              <a:t>0–5 min — Presentar objetivo, producto y evidencia de hoy.</a:t>
-            </a:r>
-          </a:p>
-        </p:txBody>
-      </p:sp>
-      <p:sp>
-        <p:nvSpPr>
-          <p:cNvPr id="11" name="Oval 10"/>
-          <p:cNvSpPr/>
-          <p:nvPr/>
-        </p:nvSpPr>
-        <p:spPr>
-          <a:xfrm>
-            <a:off x="658368" y="2125979"/>
-            <a:ext cx="475488" cy="475488"/>
-          </a:xfrm>
-          <a:prstGeom prst="ellipse">
-            <a:avLst/>
-          </a:prstGeom>
-          <a:solidFill>
-            <a:srgbClr val="2F5BA8"/>
-          </a:solidFill>
-          <a:ln>
-            <a:noFill/>
-          </a:ln>
-        </p:spPr>
-        <p:style>
-          <a:lnRef idx="1">
-            <a:schemeClr val="accent1"/>
-          </a:lnRef>
-          <a:fillRef idx="3">
-            <a:schemeClr val="accent1"/>
-          </a:fillRef>
-          <a:effectRef idx="2">
-            <a:schemeClr val="accent1"/>
-          </a:effectRef>
-          <a:fontRef idx="minor">
-            <a:schemeClr val="lt1"/>
-          </a:fontRef>
-        </p:style>
-        <p:txBody>
-          <a:bodyPr rtlCol="0" anchor="ctr"/>
-          <a:lstStyle/>
-          <a:p>
-            <a:pPr algn="ctr"/>
-          </a:p>
-        </p:txBody>
-      </p:sp>
-      <p:sp>
-        <p:nvSpPr>
-          <p:cNvPr id="12" name="TextBox 11"/>
-          <p:cNvSpPr txBox="1"/>
-          <p:nvPr/>
-        </p:nvSpPr>
-        <p:spPr>
-          <a:xfrm>
-            <a:off x="658368" y="2226563"/>
-            <a:ext cx="475488" cy="201168"/>
-          </a:xfrm>
-          <a:prstGeom prst="rect">
-            <a:avLst/>
-          </a:prstGeom>
-          <a:noFill/>
-        </p:spPr>
-        <p:txBody>
-          <a:bodyPr wrap="square" lIns="45720" rIns="45720" tIns="36576" bIns="36576" anchor="t">
-            <a:spAutoFit/>
-          </a:bodyPr>
-          <a:lstStyle/>
-          <a:p>
-            <a:pPr algn="ctr">
-              <a:defRPr sz="1300" b="1">
+              <a:t>•  D1 · ¿Qué líneas hacen algo visible? — public class Main {</a:t>
+            </a:r>
+          </a:p>
+          <a:p>
+            <a:pPr>
+              <a:spcAft>
+                <a:spcPts val="900"/>
+              </a:spcAft>
+              <a:defRPr sz="2200">
                 <a:solidFill>
                   <a:srgbClr val="FFFFFF"/>
                 </a:solidFill>
@@ -4267,114 +5574,15 @@
               </a:defRPr>
             </a:pPr>
             <a:r>
-              <a:t>2</a:t>
-            </a:r>
-          </a:p>
-        </p:txBody>
-      </p:sp>
-      <p:sp>
-        <p:nvSpPr>
-          <p:cNvPr id="13" name="TextBox 12"/>
-          <p:cNvSpPr txBox="1"/>
-          <p:nvPr/>
-        </p:nvSpPr>
-        <p:spPr>
-          <a:xfrm>
-            <a:off x="1389888" y="2107691"/>
-            <a:ext cx="10058400" cy="772668"/>
-          </a:xfrm>
-          <a:prstGeom prst="rect">
-            <a:avLst/>
-          </a:prstGeom>
-          <a:noFill/>
-        </p:spPr>
-        <p:txBody>
-          <a:bodyPr wrap="square" lIns="45720" rIns="45720" tIns="36576" bIns="36576" anchor="t">
-            <a:spAutoFit/>
-          </a:bodyPr>
-          <a:lstStyle/>
-          <a:p>
-            <a:pPr algn="l">
-              <a:defRPr sz="1400" b="0">
-                <a:solidFill>
-                  <a:srgbClr val="1C2330"/>
-                </a:solidFill>
-                <a:latin typeface="Aptos"/>
-              </a:defRPr>
-            </a:pPr>
-            <a:r>
-              <a:t>5–13 min — Explicación breve: Java organiza el código en clases; main es el punto de entrada.</a:t>
-            </a:r>
-          </a:p>
-        </p:txBody>
-      </p:sp>
-      <p:sp>
-        <p:nvSpPr>
-          <p:cNvPr id="14" name="Oval 13"/>
-          <p:cNvSpPr/>
-          <p:nvPr/>
-        </p:nvSpPr>
-        <p:spPr>
-          <a:xfrm>
-            <a:off x="658368" y="2971799"/>
-            <a:ext cx="475488" cy="475488"/>
-          </a:xfrm>
-          <a:prstGeom prst="ellipse">
-            <a:avLst/>
-          </a:prstGeom>
-          <a:solidFill>
-            <a:srgbClr val="2F5BA8"/>
-          </a:solidFill>
-          <a:ln>
-            <a:noFill/>
-          </a:ln>
-        </p:spPr>
-        <p:style>
-          <a:lnRef idx="1">
-            <a:schemeClr val="accent1"/>
-          </a:lnRef>
-          <a:fillRef idx="3">
-            <a:schemeClr val="accent1"/>
-          </a:fillRef>
-          <a:effectRef idx="2">
-            <a:schemeClr val="accent1"/>
-          </a:effectRef>
-          <a:fontRef idx="minor">
-            <a:schemeClr val="lt1"/>
-          </a:fontRef>
-        </p:style>
-        <p:txBody>
-          <a:bodyPr rtlCol="0" anchor="ctr"/>
-          <a:lstStyle/>
-          <a:p>
-            <a:pPr algn="ctr"/>
-          </a:p>
-        </p:txBody>
-      </p:sp>
-      <p:sp>
-        <p:nvSpPr>
-          <p:cNvPr id="15" name="TextBox 14"/>
-          <p:cNvSpPr txBox="1"/>
-          <p:nvPr/>
-        </p:nvSpPr>
-        <p:spPr>
-          <a:xfrm>
-            <a:off x="658368" y="3072383"/>
-            <a:ext cx="475488" cy="201168"/>
-          </a:xfrm>
-          <a:prstGeom prst="rect">
-            <a:avLst/>
-          </a:prstGeom>
-          <a:noFill/>
-        </p:spPr>
-        <p:txBody>
-          <a:bodyPr wrap="square" lIns="45720" rIns="45720" tIns="36576" bIns="36576" anchor="t">
-            <a:spAutoFit/>
-          </a:bodyPr>
-          <a:lstStyle/>
-          <a:p>
-            <a:pPr algn="ctr">
-              <a:defRPr sz="1300" b="1">
+              <a:t>•  public static void main(String\[\] args) {</a:t>
+            </a:r>
+          </a:p>
+          <a:p>
+            <a:pPr>
+              <a:spcAft>
+                <a:spcPts val="900"/>
+              </a:spcAft>
+              <a:defRPr sz="2200">
                 <a:solidFill>
                   <a:srgbClr val="FFFFFF"/>
                 </a:solidFill>
@@ -4382,114 +5590,15 @@
               </a:defRPr>
             </a:pPr>
             <a:r>
-              <a:t>3</a:t>
-            </a:r>
-          </a:p>
-        </p:txBody>
-      </p:sp>
-      <p:sp>
-        <p:nvSpPr>
-          <p:cNvPr id="16" name="TextBox 15"/>
-          <p:cNvSpPr txBox="1"/>
-          <p:nvPr/>
-        </p:nvSpPr>
-        <p:spPr>
-          <a:xfrm>
-            <a:off x="1389888" y="2953511"/>
-            <a:ext cx="10058400" cy="772668"/>
-          </a:xfrm>
-          <a:prstGeom prst="rect">
-            <a:avLst/>
-          </a:prstGeom>
-          <a:noFill/>
-        </p:spPr>
-        <p:txBody>
-          <a:bodyPr wrap="square" lIns="45720" rIns="45720" tIns="36576" bIns="36576" anchor="t">
-            <a:spAutoFit/>
-          </a:bodyPr>
-          <a:lstStyle/>
-          <a:p>
-            <a:pPr algn="l">
-              <a:defRPr sz="1400" b="0">
-                <a:solidFill>
-                  <a:srgbClr val="1C2330"/>
-                </a:solidFill>
-                <a:latin typeface="Aptos"/>
-              </a:defRPr>
-            </a:pPr>
-            <a:r>
-              <a:t>13–18 min — Demostración o ejemplo: Señala línea a línea public class Main y public static void main.</a:t>
-            </a:r>
-          </a:p>
-        </p:txBody>
-      </p:sp>
-      <p:sp>
-        <p:nvSpPr>
-          <p:cNvPr id="17" name="Oval 16"/>
-          <p:cNvSpPr/>
-          <p:nvPr/>
-        </p:nvSpPr>
-        <p:spPr>
-          <a:xfrm>
-            <a:off x="658368" y="3817620"/>
-            <a:ext cx="475488" cy="475488"/>
-          </a:xfrm>
-          <a:prstGeom prst="ellipse">
-            <a:avLst/>
-          </a:prstGeom>
-          <a:solidFill>
-            <a:srgbClr val="2F5BA8"/>
-          </a:solidFill>
-          <a:ln>
-            <a:noFill/>
-          </a:ln>
-        </p:spPr>
-        <p:style>
-          <a:lnRef idx="1">
-            <a:schemeClr val="accent1"/>
-          </a:lnRef>
-          <a:fillRef idx="3">
-            <a:schemeClr val="accent1"/>
-          </a:fillRef>
-          <a:effectRef idx="2">
-            <a:schemeClr val="accent1"/>
-          </a:effectRef>
-          <a:fontRef idx="minor">
-            <a:schemeClr val="lt1"/>
-          </a:fontRef>
-        </p:style>
-        <p:txBody>
-          <a:bodyPr rtlCol="0" anchor="ctr"/>
-          <a:lstStyle/>
-          <a:p>
-            <a:pPr algn="ctr"/>
-          </a:p>
-        </p:txBody>
-      </p:sp>
-      <p:sp>
-        <p:nvSpPr>
-          <p:cNvPr id="18" name="TextBox 17"/>
-          <p:cNvSpPr txBox="1"/>
-          <p:nvPr/>
-        </p:nvSpPr>
-        <p:spPr>
-          <a:xfrm>
-            <a:off x="658368" y="3918204"/>
-            <a:ext cx="475488" cy="201168"/>
-          </a:xfrm>
-          <a:prstGeom prst="rect">
-            <a:avLst/>
-          </a:prstGeom>
-          <a:noFill/>
-        </p:spPr>
-        <p:txBody>
-          <a:bodyPr wrap="square" lIns="45720" rIns="45720" tIns="36576" bIns="36576" anchor="t">
-            <a:spAutoFit/>
-          </a:bodyPr>
-          <a:lstStyle/>
-          <a:p>
-            <a:pPr algn="ctr">
-              <a:defRPr sz="1300" b="1">
+              <a:t>•  System.out.println("Hola");</a:t>
+            </a:r>
+          </a:p>
+          <a:p>
+            <a:pPr>
+              <a:spcAft>
+                <a:spcPts val="900"/>
+              </a:spcAft>
+              <a:defRPr sz="2200">
                 <a:solidFill>
                   <a:srgbClr val="FFFFFF"/>
                 </a:solidFill>
@@ -4497,114 +5606,15 @@
               </a:defRPr>
             </a:pPr>
             <a:r>
-              <a:t>4</a:t>
-            </a:r>
-          </a:p>
-        </p:txBody>
-      </p:sp>
-      <p:sp>
-        <p:nvSpPr>
-          <p:cNvPr id="19" name="TextBox 18"/>
-          <p:cNvSpPr txBox="1"/>
-          <p:nvPr/>
-        </p:nvSpPr>
-        <p:spPr>
-          <a:xfrm>
-            <a:off x="1389888" y="3799332"/>
-            <a:ext cx="10058400" cy="772668"/>
-          </a:xfrm>
-          <a:prstGeom prst="rect">
-            <a:avLst/>
-          </a:prstGeom>
-          <a:noFill/>
-        </p:spPr>
-        <p:txBody>
-          <a:bodyPr wrap="square" lIns="45720" rIns="45720" tIns="36576" bIns="36576" anchor="t">
-            <a:spAutoFit/>
-          </a:bodyPr>
-          <a:lstStyle/>
-          <a:p>
-            <a:pPr algn="l">
-              <a:defRPr sz="1400" b="0">
-                <a:solidFill>
-                  <a:srgbClr val="1C2330"/>
-                </a:solidFill>
-                <a:latin typeface="Aptos"/>
-              </a:defRPr>
-            </a:pPr>
-            <a:r>
-              <a:t>18–35 min — Trabajo del alumnado: Reescribir un programa mínimo y señalar dónde empieza.</a:t>
-            </a:r>
-          </a:p>
-        </p:txBody>
-      </p:sp>
-      <p:sp>
-        <p:nvSpPr>
-          <p:cNvPr id="20" name="Oval 19"/>
-          <p:cNvSpPr/>
-          <p:nvPr/>
-        </p:nvSpPr>
-        <p:spPr>
-          <a:xfrm>
-            <a:off x="658368" y="4663440"/>
-            <a:ext cx="475488" cy="475488"/>
-          </a:xfrm>
-          <a:prstGeom prst="ellipse">
-            <a:avLst/>
-          </a:prstGeom>
-          <a:solidFill>
-            <a:srgbClr val="2F5BA8"/>
-          </a:solidFill>
-          <a:ln>
-            <a:noFill/>
-          </a:ln>
-        </p:spPr>
-        <p:style>
-          <a:lnRef idx="1">
-            <a:schemeClr val="accent1"/>
-          </a:lnRef>
-          <a:fillRef idx="3">
-            <a:schemeClr val="accent1"/>
-          </a:fillRef>
-          <a:effectRef idx="2">
-            <a:schemeClr val="accent1"/>
-          </a:effectRef>
-          <a:fontRef idx="minor">
-            <a:schemeClr val="lt1"/>
-          </a:fontRef>
-        </p:style>
-        <p:txBody>
-          <a:bodyPr rtlCol="0" anchor="ctr"/>
-          <a:lstStyle/>
-          <a:p>
-            <a:pPr algn="ctr"/>
-          </a:p>
-        </p:txBody>
-      </p:sp>
-      <p:sp>
-        <p:nvSpPr>
-          <p:cNvPr id="21" name="TextBox 20"/>
-          <p:cNvSpPr txBox="1"/>
-          <p:nvPr/>
-        </p:nvSpPr>
-        <p:spPr>
-          <a:xfrm>
-            <a:off x="658368" y="4764024"/>
-            <a:ext cx="475488" cy="201168"/>
-          </a:xfrm>
-          <a:prstGeom prst="rect">
-            <a:avLst/>
-          </a:prstGeom>
-          <a:noFill/>
-        </p:spPr>
-        <p:txBody>
-          <a:bodyPr wrap="square" lIns="45720" rIns="45720" tIns="36576" bIns="36576" anchor="t">
-            <a:spAutoFit/>
-          </a:bodyPr>
-          <a:lstStyle/>
-          <a:p>
-            <a:pPr algn="ctr">
-              <a:defRPr sz="1300" b="1">
+              <a:t>•  System.out.println("MiniJarvis arranca");</a:t>
+            </a:r>
+          </a:p>
+          <a:p>
+            <a:pPr>
+              <a:spcAft>
+                <a:spcPts val="900"/>
+              </a:spcAft>
+              <a:defRPr sz="2200">
                 <a:solidFill>
                   <a:srgbClr val="FFFFFF"/>
                 </a:solidFill>
@@ -4612,158 +5622,7 @@
               </a:defRPr>
             </a:pPr>
             <a:r>
-              <a:t>5</a:t>
-            </a:r>
-          </a:p>
-        </p:txBody>
-      </p:sp>
-      <p:sp>
-        <p:nvSpPr>
-          <p:cNvPr id="22" name="TextBox 21"/>
-          <p:cNvSpPr txBox="1"/>
-          <p:nvPr/>
-        </p:nvSpPr>
-        <p:spPr>
-          <a:xfrm>
-            <a:off x="1389888" y="4645152"/>
-            <a:ext cx="10058400" cy="772668"/>
-          </a:xfrm>
-          <a:prstGeom prst="rect">
-            <a:avLst/>
-          </a:prstGeom>
-          <a:noFill/>
-        </p:spPr>
-        <p:txBody>
-          <a:bodyPr wrap="square" lIns="45720" rIns="45720" tIns="36576" bIns="36576" anchor="t">
-            <a:spAutoFit/>
-          </a:bodyPr>
-          <a:lstStyle/>
-          <a:p>
-            <a:pPr algn="l">
-              <a:defRPr sz="1400" b="0">
-                <a:solidFill>
-                  <a:srgbClr val="1C2330"/>
-                </a:solidFill>
-                <a:latin typeface="Aptos"/>
-              </a:defRPr>
-            </a:pPr>
-            <a:r>
-              <a:t>35–40 min — Comprobar la evidencia con una explicación o prueba breve.</a:t>
-            </a:r>
-          </a:p>
-        </p:txBody>
-      </p:sp>
-      <p:sp>
-        <p:nvSpPr>
-          <p:cNvPr id="23" name="Oval 22"/>
-          <p:cNvSpPr/>
-          <p:nvPr/>
-        </p:nvSpPr>
-        <p:spPr>
-          <a:xfrm>
-            <a:off x="658368" y="5509259"/>
-            <a:ext cx="475488" cy="475488"/>
-          </a:xfrm>
-          <a:prstGeom prst="ellipse">
-            <a:avLst/>
-          </a:prstGeom>
-          <a:solidFill>
-            <a:srgbClr val="2F5BA8"/>
-          </a:solidFill>
-          <a:ln>
-            <a:noFill/>
-          </a:ln>
-        </p:spPr>
-        <p:style>
-          <a:lnRef idx="1">
-            <a:schemeClr val="accent1"/>
-          </a:lnRef>
-          <a:fillRef idx="3">
-            <a:schemeClr val="accent1"/>
-          </a:fillRef>
-          <a:effectRef idx="2">
-            <a:schemeClr val="accent1"/>
-          </a:effectRef>
-          <a:fontRef idx="minor">
-            <a:schemeClr val="lt1"/>
-          </a:fontRef>
-        </p:style>
-        <p:txBody>
-          <a:bodyPr rtlCol="0" anchor="ctr"/>
-          <a:lstStyle/>
-          <a:p>
-            <a:pPr algn="ctr"/>
-          </a:p>
-        </p:txBody>
-      </p:sp>
-      <p:sp>
-        <p:nvSpPr>
-          <p:cNvPr id="24" name="TextBox 23"/>
-          <p:cNvSpPr txBox="1"/>
-          <p:nvPr/>
-        </p:nvSpPr>
-        <p:spPr>
-          <a:xfrm>
-            <a:off x="658368" y="5609844"/>
-            <a:ext cx="475488" cy="201168"/>
-          </a:xfrm>
-          <a:prstGeom prst="rect">
-            <a:avLst/>
-          </a:prstGeom>
-          <a:noFill/>
-        </p:spPr>
-        <p:txBody>
-          <a:bodyPr wrap="square" lIns="45720" rIns="45720" tIns="36576" bIns="36576" anchor="t">
-            <a:spAutoFit/>
-          </a:bodyPr>
-          <a:lstStyle/>
-          <a:p>
-            <a:pPr algn="ctr">
-              <a:defRPr sz="1300" b="1">
-                <a:solidFill>
-                  <a:srgbClr val="FFFFFF"/>
-                </a:solidFill>
-                <a:latin typeface="Aptos"/>
-              </a:defRPr>
-            </a:pPr>
-            <a:r>
-              <a:t>6</a:t>
-            </a:r>
-          </a:p>
-        </p:txBody>
-      </p:sp>
-      <p:sp>
-        <p:nvSpPr>
-          <p:cNvPr id="25" name="TextBox 24"/>
-          <p:cNvSpPr txBox="1"/>
-          <p:nvPr/>
-        </p:nvSpPr>
-        <p:spPr>
-          <a:xfrm>
-            <a:off x="1389888" y="5490972"/>
-            <a:ext cx="10058400" cy="772668"/>
-          </a:xfrm>
-          <a:prstGeom prst="rect">
-            <a:avLst/>
-          </a:prstGeom>
-          <a:noFill/>
-        </p:spPr>
-        <p:txBody>
-          <a:bodyPr wrap="square" lIns="45720" rIns="45720" tIns="36576" bIns="36576" anchor="t">
-            <a:spAutoFit/>
-          </a:bodyPr>
-          <a:lstStyle/>
-          <a:p>
-            <a:pPr algn="l">
-              <a:defRPr sz="1400" b="0">
-                <a:solidFill>
-                  <a:srgbClr val="1C2330"/>
-                </a:solidFill>
-                <a:latin typeface="Aptos"/>
-              </a:defRPr>
-            </a:pPr>
-            <a:r>
-              <a:t>40–45 min — Cierre: Microdefensa: señalar en el código dónde empieza el programa.</a:t>
+              <a:t>•  }</a:t>
             </a:r>
           </a:p>
         </p:txBody>
@@ -4903,7 +5762,7 @@
               </a:defRPr>
             </a:pPr>
             <a:r>
-              <a:t>COMPRENDER Y TRANSFERIR</a:t>
+              <a:t>OBSERVAR ANTES DE ACTUAR</a:t>
             </a:r>
           </a:p>
         </p:txBody>
@@ -4939,7 +5798,7 @@
               </a:defRPr>
             </a:pPr>
             <a:r>
-              <a:t>Idea clave y puesta en práctica</a:t>
+              <a:t>Ejemplo o demostración · 2</a:t>
             </a:r>
           </a:p>
         </p:txBody>
@@ -5018,7 +5877,7 @@
               </a:defRPr>
             </a:pPr>
             <a:r>
-              <a:t>MiniJarvis · 1.º DAW · Sesión 208 · H1</a:t>
+              <a:t>MiniJarvis · 1.º DAW · Sesión 208 · H1 — Primer MiniJarvis</a:t>
             </a:r>
           </a:p>
         </p:txBody>
@@ -5031,19 +5890,17 @@
         </p:nvSpPr>
         <p:spPr>
           <a:xfrm>
-            <a:off x="621792" y="1325880"/>
-            <a:ext cx="5285232" cy="4736592"/>
+            <a:off x="621792" y="1353312"/>
+            <a:ext cx="10927080" cy="4526280"/>
           </a:xfrm>
           <a:prstGeom prst="roundRect">
             <a:avLst/>
           </a:prstGeom>
           <a:solidFill>
-            <a:srgbClr val="FFFFFF"/>
+            <a:srgbClr val="121824"/>
           </a:solidFill>
           <a:ln>
-            <a:solidFill>
-              <a:srgbClr val="E5E9EF"/>
-            </a:solidFill>
+            <a:noFill/>
           </a:ln>
         </p:spPr>
         <p:style>
@@ -5077,7 +5934,7 @@
         <p:spPr>
           <a:xfrm>
             <a:off x="932688" y="1627632"/>
-            <a:ext cx="2011680" cy="329184"/>
+            <a:ext cx="2057400" cy="411480"/>
           </a:xfrm>
           <a:prstGeom prst="rect">
             <a:avLst/>
@@ -5099,7 +5956,7 @@
               </a:defRPr>
             </a:pPr>
             <a:r>
-              <a:t>IDEA CLAVE</a:t>
+              <a:t>DEMOSTRACIÓN</a:t>
             </a:r>
           </a:p>
         </p:txBody>
@@ -5112,8 +5969,8 @@
         </p:nvSpPr>
         <p:spPr>
           <a:xfrm>
-            <a:off x="932688" y="2176272"/>
-            <a:ext cx="4617720" cy="3429000"/>
+            <a:off x="932688" y="2212848"/>
+            <a:ext cx="9966960" cy="3246120"/>
           </a:xfrm>
           <a:prstGeom prst="rect">
             <a:avLst/>
@@ -5130,125 +5987,7 @@
               <a:spcAft>
                 <a:spcPts val="900"/>
               </a:spcAft>
-              <a:defRPr sz="2300">
-                <a:solidFill>
-                  <a:srgbClr val="1C2330"/>
-                </a:solidFill>
-                <a:latin typeface="Aptos"/>
-              </a:defRPr>
-            </a:pPr>
-            <a:r>
-              <a:t>•  public class Main, public static void main(String[] args) y orden de ejecución.</a:t>
-            </a:r>
-          </a:p>
-        </p:txBody>
-      </p:sp>
-      <p:sp>
-        <p:nvSpPr>
-          <p:cNvPr id="11" name="Rounded Rectangle 10"/>
-          <p:cNvSpPr/>
-          <p:nvPr/>
-        </p:nvSpPr>
-        <p:spPr>
-          <a:xfrm>
-            <a:off x="6172200" y="1325880"/>
-            <a:ext cx="5394960" cy="4736592"/>
-          </a:xfrm>
-          <a:prstGeom prst="roundRect">
-            <a:avLst/>
-          </a:prstGeom>
-          <a:solidFill>
-            <a:srgbClr val="121824"/>
-          </a:solidFill>
-          <a:ln>
-            <a:noFill/>
-          </a:ln>
-        </p:spPr>
-        <p:style>
-          <a:lnRef idx="1">
-            <a:schemeClr val="accent1"/>
-          </a:lnRef>
-          <a:fillRef idx="3">
-            <a:schemeClr val="accent1"/>
-          </a:fillRef>
-          <a:effectRef idx="2">
-            <a:schemeClr val="accent1"/>
-          </a:effectRef>
-          <a:fontRef idx="minor">
-            <a:schemeClr val="lt1"/>
-          </a:fontRef>
-        </p:style>
-        <p:txBody>
-          <a:bodyPr rtlCol="0" anchor="ctr"/>
-          <a:lstStyle/>
-          <a:p>
-            <a:pPr algn="ctr"/>
-          </a:p>
-        </p:txBody>
-      </p:sp>
-      <p:sp>
-        <p:nvSpPr>
-          <p:cNvPr id="12" name="TextBox 11"/>
-          <p:cNvSpPr txBox="1"/>
-          <p:nvPr/>
-        </p:nvSpPr>
-        <p:spPr>
-          <a:xfrm>
-            <a:off x="6492240" y="1627632"/>
-            <a:ext cx="2194560" cy="329184"/>
-          </a:xfrm>
-          <a:prstGeom prst="rect">
-            <a:avLst/>
-          </a:prstGeom>
-          <a:noFill/>
-        </p:spPr>
-        <p:txBody>
-          <a:bodyPr wrap="square" lIns="45720" rIns="45720" tIns="36576" bIns="36576" anchor="t">
-            <a:spAutoFit/>
-          </a:bodyPr>
-          <a:lstStyle/>
-          <a:p>
-            <a:pPr algn="l">
-              <a:defRPr sz="1300" b="1">
-                <a:solidFill>
-                  <a:srgbClr val="2F5BA8"/>
-                </a:solidFill>
-                <a:latin typeface="Aptos"/>
-              </a:defRPr>
-            </a:pPr>
-            <a:r>
-              <a:t>EN PRÁCTICA</a:t>
-            </a:r>
-          </a:p>
-        </p:txBody>
-      </p:sp>
-      <p:sp>
-        <p:nvSpPr>
-          <p:cNvPr id="13" name="TextBox 12"/>
-          <p:cNvSpPr txBox="1"/>
-          <p:nvPr/>
-        </p:nvSpPr>
-        <p:spPr>
-          <a:xfrm>
-            <a:off x="6492240" y="2176272"/>
-            <a:ext cx="4617720" cy="3429000"/>
-          </a:xfrm>
-          <a:prstGeom prst="rect">
-            <a:avLst/>
-          </a:prstGeom>
-          <a:noFill/>
-        </p:spPr>
-        <p:txBody>
-          <a:bodyPr wrap="square" lIns="73152" rIns="45720" tIns="36576">
-            <a:spAutoFit/>
-          </a:bodyPr>
-          <a:lstStyle/>
-          <a:p>
-            <a:pPr>
-              <a:spcAft>
-                <a:spcPts val="900"/>
-              </a:spcAft>
-              <a:defRPr sz="2300">
+              <a:defRPr sz="2200">
                 <a:solidFill>
                   <a:srgbClr val="FFFFFF"/>
                 </a:solidFill>
@@ -5256,7 +5995,39 @@
               </a:defRPr>
             </a:pPr>
             <a:r>
-              <a:t>•  Señala línea a línea public class Main y public static void main.</a:t>
+              <a:t>•  D2 · Clase, archivo y main — ARCHIVO Y CLASE: Main.java</a:t>
+            </a:r>
+          </a:p>
+          <a:p>
+            <a:pPr>
+              <a:spcAft>
+                <a:spcPts val="900"/>
+              </a:spcAft>
+              <a:defRPr sz="2200">
+                <a:solidFill>
+                  <a:srgbClr val="FFFFFF"/>
+                </a:solidFill>
+                <a:latin typeface="Aptos"/>
+              </a:defRPr>
+            </a:pPr>
+            <a:r>
+              <a:t>•  ↕</a:t>
+            </a:r>
+          </a:p>
+          <a:p>
+            <a:pPr>
+              <a:spcAft>
+                <a:spcPts val="900"/>
+              </a:spcAft>
+              <a:defRPr sz="2200">
+                <a:solidFill>
+                  <a:srgbClr val="FFFFFF"/>
+                </a:solidFill>
+                <a:latin typeface="Aptos"/>
+              </a:defRPr>
+            </a:pPr>
+            <a:r>
+              <a:t>•  public class Main \| PUNTO DE ENTRADA: public static void main(String\[\] args)</a:t>
             </a:r>
           </a:p>
         </p:txBody>
@@ -5432,7 +6203,7 @@
               </a:defRPr>
             </a:pPr>
             <a:r>
-              <a:t>Actividad central</a:t>
+              <a:t>Actividad central · 1</a:t>
             </a:r>
           </a:p>
         </p:txBody>
@@ -5511,7 +6282,7 @@
               </a:defRPr>
             </a:pPr>
             <a:r>
-              <a:t>MiniJarvis · 1.º DAW · Sesión 208 · H1</a:t>
+              <a:t>MiniJarvis · 1.º DAW · Sesión 208 · H1 — Primer MiniJarvis</a:t>
             </a:r>
           </a:p>
         </p:txBody>
@@ -5525,7 +6296,7 @@
         <p:spPr>
           <a:xfrm>
             <a:off x="658368" y="1307592"/>
-            <a:ext cx="10835640" cy="2226564"/>
+            <a:ext cx="10835640" cy="1049274"/>
           </a:xfrm>
           <a:prstGeom prst="roundRect">
             <a:avLst/>
@@ -5606,7 +6377,7 @@
         <p:spPr>
           <a:xfrm>
             <a:off x="1664208" y="1417319"/>
-            <a:ext cx="9464040" cy="2007108"/>
+            <a:ext cx="9464040" cy="829818"/>
           </a:xfrm>
           <a:prstGeom prst="rect">
             <a:avLst/>
@@ -5628,7 +6399,7 @@
               </a:defRPr>
             </a:pPr>
             <a:r>
-              <a:t>Escribir un programa mínimo sin copiar y ejecutarlo.</a:t>
+              <a:t>Predice antes de ejecutar cuando haya código.</a:t>
             </a:r>
           </a:p>
         </p:txBody>
@@ -5641,8 +6412,8 @@
         </p:nvSpPr>
         <p:spPr>
           <a:xfrm>
-            <a:off x="658368" y="3776472"/>
-            <a:ext cx="10835640" cy="2226564"/>
+            <a:off x="658368" y="2542032"/>
+            <a:ext cx="10835640" cy="1049274"/>
           </a:xfrm>
           <a:prstGeom prst="roundRect">
             <a:avLst/>
@@ -5686,7 +6457,7 @@
         </p:nvSpPr>
         <p:spPr>
           <a:xfrm>
-            <a:off x="850392" y="3922776"/>
+            <a:off x="850392" y="2688336"/>
             <a:ext cx="685800" cy="384048"/>
           </a:xfrm>
           <a:prstGeom prst="rect">
@@ -5722,8 +6493,8 @@
         </p:nvSpPr>
         <p:spPr>
           <a:xfrm>
-            <a:off x="1664208" y="3886200"/>
-            <a:ext cx="9464040" cy="2007108"/>
+            <a:off x="1664208" y="2651760"/>
+            <a:ext cx="9464040" cy="829818"/>
           </a:xfrm>
           <a:prstGeom prst="rect">
             <a:avLst/>
@@ -5745,7 +6516,241 @@
               </a:defRPr>
             </a:pPr>
             <a:r>
-              <a:t>Comprueba y registra la evidencia: Código que compila con varios mensajes por pantalla.</a:t>
+              <a:t>Realiza la micropráctica o modificación prevista.</a:t>
+            </a:r>
+          </a:p>
+        </p:txBody>
+      </p:sp>
+      <p:sp>
+        <p:nvSpPr>
+          <p:cNvPr id="14" name="Rounded Rectangle 13"/>
+          <p:cNvSpPr/>
+          <p:nvPr/>
+        </p:nvSpPr>
+        <p:spPr>
+          <a:xfrm>
+            <a:off x="658368" y="3776472"/>
+            <a:ext cx="10835640" cy="1049274"/>
+          </a:xfrm>
+          <a:prstGeom prst="roundRect">
+            <a:avLst/>
+          </a:prstGeom>
+          <a:solidFill>
+            <a:srgbClr val="FFFFFF"/>
+          </a:solidFill>
+          <a:ln>
+            <a:solidFill>
+              <a:srgbClr val="E5E9EF"/>
+            </a:solidFill>
+          </a:ln>
+        </p:spPr>
+        <p:style>
+          <a:lnRef idx="1">
+            <a:schemeClr val="accent1"/>
+          </a:lnRef>
+          <a:fillRef idx="3">
+            <a:schemeClr val="accent1"/>
+          </a:fillRef>
+          <a:effectRef idx="2">
+            <a:schemeClr val="accent1"/>
+          </a:effectRef>
+          <a:fontRef idx="minor">
+            <a:schemeClr val="lt1"/>
+          </a:fontRef>
+        </p:style>
+        <p:txBody>
+          <a:bodyPr rtlCol="0" anchor="ctr"/>
+          <a:lstStyle/>
+          <a:p>
+            <a:pPr algn="ctr"/>
+          </a:p>
+        </p:txBody>
+      </p:sp>
+      <p:sp>
+        <p:nvSpPr>
+          <p:cNvPr id="15" name="TextBox 14"/>
+          <p:cNvSpPr txBox="1"/>
+          <p:nvPr/>
+        </p:nvSpPr>
+        <p:spPr>
+          <a:xfrm>
+            <a:off x="850392" y="3922776"/>
+            <a:ext cx="685800" cy="384048"/>
+          </a:xfrm>
+          <a:prstGeom prst="rect">
+            <a:avLst/>
+          </a:prstGeom>
+          <a:noFill/>
+        </p:spPr>
+        <p:txBody>
+          <a:bodyPr wrap="square" lIns="45720" rIns="45720" tIns="36576" bIns="36576" anchor="t">
+            <a:spAutoFit/>
+          </a:bodyPr>
+          <a:lstStyle/>
+          <a:p>
+            <a:pPr algn="l">
+              <a:defRPr sz="1200" b="1">
+                <a:solidFill>
+                  <a:srgbClr val="2F5BA8"/>
+                </a:solidFill>
+                <a:latin typeface="Aptos"/>
+              </a:defRPr>
+            </a:pPr>
+            <a:r>
+              <a:t>PASO 3</a:t>
+            </a:r>
+          </a:p>
+        </p:txBody>
+      </p:sp>
+      <p:sp>
+        <p:nvSpPr>
+          <p:cNvPr id="16" name="TextBox 15"/>
+          <p:cNvSpPr txBox="1"/>
+          <p:nvPr/>
+        </p:nvSpPr>
+        <p:spPr>
+          <a:xfrm>
+            <a:off x="1664208" y="3886200"/>
+            <a:ext cx="9464040" cy="829818"/>
+          </a:xfrm>
+          <a:prstGeom prst="rect">
+            <a:avLst/>
+          </a:prstGeom>
+          <a:noFill/>
+        </p:spPr>
+        <p:txBody>
+          <a:bodyPr wrap="square" lIns="45720" rIns="45720" tIns="36576" bIns="36576" anchor="t">
+            <a:spAutoFit/>
+          </a:bodyPr>
+          <a:lstStyle/>
+          <a:p>
+            <a:pPr algn="l">
+              <a:defRPr sz="2000" b="0">
+                <a:solidFill>
+                  <a:srgbClr val="1C2330"/>
+                </a:solidFill>
+                <a:latin typeface="Aptos"/>
+              </a:defRPr>
+            </a:pPr>
+            <a:r>
+              <a:t>Prueba el caso normal y, cuando exista una decisión o conversión, también el caso alternativo o erróneo.</a:t>
+            </a:r>
+          </a:p>
+        </p:txBody>
+      </p:sp>
+      <p:sp>
+        <p:nvSpPr>
+          <p:cNvPr id="17" name="Rounded Rectangle 16"/>
+          <p:cNvSpPr/>
+          <p:nvPr/>
+        </p:nvSpPr>
+        <p:spPr>
+          <a:xfrm>
+            <a:off x="658368" y="5010912"/>
+            <a:ext cx="10835640" cy="1049274"/>
+          </a:xfrm>
+          <a:prstGeom prst="roundRect">
+            <a:avLst/>
+          </a:prstGeom>
+          <a:solidFill>
+            <a:srgbClr val="FFFFFF"/>
+          </a:solidFill>
+          <a:ln>
+            <a:solidFill>
+              <a:srgbClr val="E5E9EF"/>
+            </a:solidFill>
+          </a:ln>
+        </p:spPr>
+        <p:style>
+          <a:lnRef idx="1">
+            <a:schemeClr val="accent1"/>
+          </a:lnRef>
+          <a:fillRef idx="3">
+            <a:schemeClr val="accent1"/>
+          </a:fillRef>
+          <a:effectRef idx="2">
+            <a:schemeClr val="accent1"/>
+          </a:effectRef>
+          <a:fontRef idx="minor">
+            <a:schemeClr val="lt1"/>
+          </a:fontRef>
+        </p:style>
+        <p:txBody>
+          <a:bodyPr rtlCol="0" anchor="ctr"/>
+          <a:lstStyle/>
+          <a:p>
+            <a:pPr algn="ctr"/>
+          </a:p>
+        </p:txBody>
+      </p:sp>
+      <p:sp>
+        <p:nvSpPr>
+          <p:cNvPr id="18" name="TextBox 17"/>
+          <p:cNvSpPr txBox="1"/>
+          <p:nvPr/>
+        </p:nvSpPr>
+        <p:spPr>
+          <a:xfrm>
+            <a:off x="850392" y="5157216"/>
+            <a:ext cx="685800" cy="384048"/>
+          </a:xfrm>
+          <a:prstGeom prst="rect">
+            <a:avLst/>
+          </a:prstGeom>
+          <a:noFill/>
+        </p:spPr>
+        <p:txBody>
+          <a:bodyPr wrap="square" lIns="45720" rIns="45720" tIns="36576" bIns="36576" anchor="t">
+            <a:spAutoFit/>
+          </a:bodyPr>
+          <a:lstStyle/>
+          <a:p>
+            <a:pPr algn="l">
+              <a:defRPr sz="1200" b="1">
+                <a:solidFill>
+                  <a:srgbClr val="2F5BA8"/>
+                </a:solidFill>
+                <a:latin typeface="Aptos"/>
+              </a:defRPr>
+            </a:pPr>
+            <a:r>
+              <a:t>PASO 4</a:t>
+            </a:r>
+          </a:p>
+        </p:txBody>
+      </p:sp>
+      <p:sp>
+        <p:nvSpPr>
+          <p:cNvPr id="19" name="TextBox 18"/>
+          <p:cNvSpPr txBox="1"/>
+          <p:nvPr/>
+        </p:nvSpPr>
+        <p:spPr>
+          <a:xfrm>
+            <a:off x="1664208" y="5120640"/>
+            <a:ext cx="9464040" cy="829818"/>
+          </a:xfrm>
+          <a:prstGeom prst="rect">
+            <a:avLst/>
+          </a:prstGeom>
+          <a:noFill/>
+        </p:spPr>
+        <p:txBody>
+          <a:bodyPr wrap="square" lIns="45720" rIns="45720" tIns="36576" bIns="36576" anchor="t">
+            <a:spAutoFit/>
+          </a:bodyPr>
+          <a:lstStyle/>
+          <a:p>
+            <a:pPr algn="l">
+              <a:defRPr sz="2000" b="0">
+                <a:solidFill>
+                  <a:srgbClr val="1C2330"/>
+                </a:solidFill>
+                <a:latin typeface="Aptos"/>
+              </a:defRPr>
+            </a:pPr>
+            <a:r>
+              <a:t>Conserva el código o resultado en el repositorio o espacio indicado.</a:t>
             </a:r>
           </a:p>
         </p:txBody>
@@ -5885,7 +6890,7 @@
               </a:defRPr>
             </a:pPr>
             <a:r>
-              <a:t>COMPROBAR</a:t>
+              <a:t>APLICAR Y DECIDIR</a:t>
             </a:r>
           </a:p>
         </p:txBody>
@@ -5921,7 +6926,7 @@
               </a:defRPr>
             </a:pPr>
             <a:r>
-              <a:t>Evidencia y comprobación</a:t>
+              <a:t>Actividad central · 2</a:t>
             </a:r>
           </a:p>
         </p:txBody>
@@ -6000,7 +7005,7 @@
               </a:defRPr>
             </a:pPr>
             <a:r>
-              <a:t>MiniJarvis · 1.º DAW · Sesión 208 · H1</a:t>
+              <a:t>MiniJarvis · 1.º DAW · Sesión 208 · H1 — Primer MiniJarvis</a:t>
             </a:r>
           </a:p>
         </p:txBody>
@@ -6013,8 +7018,8 @@
         </p:nvSpPr>
         <p:spPr>
           <a:xfrm>
-            <a:off x="713232" y="1298448"/>
-            <a:ext cx="420624" cy="420624"/>
+            <a:off x="658368" y="1307592"/>
+            <a:ext cx="10835640" cy="2226564"/>
           </a:xfrm>
           <a:prstGeom prst="roundRect">
             <a:avLst/>
@@ -6024,7 +7029,7 @@
           </a:solidFill>
           <a:ln>
             <a:solidFill>
-              <a:srgbClr val="2F5BA8"/>
+              <a:srgbClr val="E5E9EF"/>
             </a:solidFill>
           </a:ln>
         </p:spPr>
@@ -6058,8 +7063,8 @@
         </p:nvSpPr>
         <p:spPr>
           <a:xfrm>
-            <a:off x="1389888" y="1280160"/>
-            <a:ext cx="9829800" cy="960120"/>
+            <a:off x="850392" y="1453895"/>
+            <a:ext cx="685800" cy="384048"/>
           </a:xfrm>
           <a:prstGeom prst="rect">
             <a:avLst/>
@@ -6073,7 +7078,43 @@
           <a:lstStyle/>
           <a:p>
             <a:pPr algn="l">
-              <a:defRPr sz="1900" b="0">
+              <a:defRPr sz="1200" b="1">
+                <a:solidFill>
+                  <a:srgbClr val="2F5BA8"/>
+                </a:solidFill>
+                <a:latin typeface="Aptos"/>
+              </a:defRPr>
+            </a:pPr>
+            <a:r>
+              <a:t>PASO 6</a:t>
+            </a:r>
+          </a:p>
+        </p:txBody>
+      </p:sp>
+      <p:sp>
+        <p:nvSpPr>
+          <p:cNvPr id="10" name="TextBox 9"/>
+          <p:cNvSpPr txBox="1"/>
+          <p:nvPr/>
+        </p:nvSpPr>
+        <p:spPr>
+          <a:xfrm>
+            <a:off x="1664208" y="1417319"/>
+            <a:ext cx="9464040" cy="2007108"/>
+          </a:xfrm>
+          <a:prstGeom prst="rect">
+            <a:avLst/>
+          </a:prstGeom>
+          <a:noFill/>
+        </p:spPr>
+        <p:txBody>
+          <a:bodyPr wrap="square" lIns="45720" rIns="45720" tIns="36576" bIns="36576" anchor="t">
+            <a:spAutoFit/>
+          </a:bodyPr>
+          <a:lstStyle/>
+          <a:p>
+            <a:pPr algn="l">
+              <a:defRPr sz="2000" b="0">
                 <a:solidFill>
                   <a:srgbClr val="1C2330"/>
                 </a:solidFill>
@@ -6081,21 +7122,21 @@
               </a:defRPr>
             </a:pPr>
             <a:r>
-              <a:t>He producido o actualizado: Código que compila con varios mensajes por pantalla.</a:t>
-            </a:r>
-          </a:p>
-        </p:txBody>
-      </p:sp>
-      <p:sp>
-        <p:nvSpPr>
-          <p:cNvPr id="10" name="Rounded Rectangle 9"/>
+              <a:t>Registra una sola entrada en el diario individual; no crees un informe paralelo.</a:t>
+            </a:r>
+          </a:p>
+        </p:txBody>
+      </p:sp>
+      <p:sp>
+        <p:nvSpPr>
+          <p:cNvPr id="11" name="Rounded Rectangle 10"/>
           <p:cNvSpPr/>
           <p:nvPr/>
         </p:nvSpPr>
         <p:spPr>
           <a:xfrm>
-            <a:off x="713232" y="2295144"/>
-            <a:ext cx="420624" cy="420624"/>
+            <a:off x="658368" y="3776472"/>
+            <a:ext cx="10835640" cy="2226564"/>
           </a:xfrm>
           <a:prstGeom prst="roundRect">
             <a:avLst/>
@@ -6105,7 +7146,7 @@
           </a:solidFill>
           <a:ln>
             <a:solidFill>
-              <a:srgbClr val="2F5BA8"/>
+              <a:srgbClr val="E5E9EF"/>
             </a:solidFill>
           </a:ln>
         </p:spPr>
@@ -6133,14 +7174,14 @@
       </p:sp>
       <p:sp>
         <p:nvSpPr>
-          <p:cNvPr id="11" name="TextBox 10"/>
+          <p:cNvPr id="12" name="TextBox 11"/>
           <p:cNvSpPr txBox="1"/>
           <p:nvPr/>
         </p:nvSpPr>
         <p:spPr>
           <a:xfrm>
-            <a:off x="1389888" y="2276856"/>
-            <a:ext cx="9829800" cy="960120"/>
+            <a:off x="850392" y="3922776"/>
+            <a:ext cx="685800" cy="384048"/>
           </a:xfrm>
           <a:prstGeom prst="rect">
             <a:avLst/>
@@ -6154,7 +7195,43 @@
           <a:lstStyle/>
           <a:p>
             <a:pPr algn="l">
-              <a:defRPr sz="1900" b="0">
+              <a:defRPr sz="1200" b="1">
+                <a:solidFill>
+                  <a:srgbClr val="2F5BA8"/>
+                </a:solidFill>
+                <a:latin typeface="Aptos"/>
+              </a:defRPr>
+            </a:pPr>
+            <a:r>
+              <a:t>PASO 7</a:t>
+            </a:r>
+          </a:p>
+        </p:txBody>
+      </p:sp>
+      <p:sp>
+        <p:nvSpPr>
+          <p:cNvPr id="13" name="TextBox 12"/>
+          <p:cNvSpPr txBox="1"/>
+          <p:nvPr/>
+        </p:nvSpPr>
+        <p:spPr>
+          <a:xfrm>
+            <a:off x="1664208" y="3886200"/>
+            <a:ext cx="9464040" cy="2007108"/>
+          </a:xfrm>
+          <a:prstGeom prst="rect">
+            <a:avLst/>
+          </a:prstGeom>
+          <a:noFill/>
+        </p:spPr>
+        <p:txBody>
+          <a:bodyPr wrap="square" lIns="45720" rIns="45720" tIns="36576" bIns="36576" anchor="t">
+            <a:spAutoFit/>
+          </a:bodyPr>
+          <a:lstStyle/>
+          <a:p>
+            <a:pPr algn="l">
+              <a:defRPr sz="2000" b="0">
                 <a:solidFill>
                   <a:srgbClr val="1C2330"/>
                 </a:solidFill>
@@ -6162,250 +7239,7 @@
               </a:defRPr>
             </a:pPr>
             <a:r>
-              <a:t>Puedo señalar dónde está.</a:t>
-            </a:r>
-          </a:p>
-        </p:txBody>
-      </p:sp>
-      <p:sp>
-        <p:nvSpPr>
-          <p:cNvPr id="12" name="Rounded Rectangle 11"/>
-          <p:cNvSpPr/>
-          <p:nvPr/>
-        </p:nvSpPr>
-        <p:spPr>
-          <a:xfrm>
-            <a:off x="713232" y="3291839"/>
-            <a:ext cx="420624" cy="420624"/>
-          </a:xfrm>
-          <a:prstGeom prst="roundRect">
-            <a:avLst/>
-          </a:prstGeom>
-          <a:solidFill>
-            <a:srgbClr val="FFFFFF"/>
-          </a:solidFill>
-          <a:ln>
-            <a:solidFill>
-              <a:srgbClr val="2F5BA8"/>
-            </a:solidFill>
-          </a:ln>
-        </p:spPr>
-        <p:style>
-          <a:lnRef idx="1">
-            <a:schemeClr val="accent1"/>
-          </a:lnRef>
-          <a:fillRef idx="3">
-            <a:schemeClr val="accent1"/>
-          </a:fillRef>
-          <a:effectRef idx="2">
-            <a:schemeClr val="accent1"/>
-          </a:effectRef>
-          <a:fontRef idx="minor">
-            <a:schemeClr val="lt1"/>
-          </a:fontRef>
-        </p:style>
-        <p:txBody>
-          <a:bodyPr rtlCol="0" anchor="ctr"/>
-          <a:lstStyle/>
-          <a:p>
-            <a:pPr algn="ctr"/>
-          </a:p>
-        </p:txBody>
-      </p:sp>
-      <p:sp>
-        <p:nvSpPr>
-          <p:cNvPr id="13" name="TextBox 12"/>
-          <p:cNvSpPr txBox="1"/>
-          <p:nvPr/>
-        </p:nvSpPr>
-        <p:spPr>
-          <a:xfrm>
-            <a:off x="1389888" y="3273551"/>
-            <a:ext cx="9829800" cy="960120"/>
-          </a:xfrm>
-          <a:prstGeom prst="rect">
-            <a:avLst/>
-          </a:prstGeom>
-          <a:noFill/>
-        </p:spPr>
-        <p:txBody>
-          <a:bodyPr wrap="square" lIns="45720" rIns="45720" tIns="36576" bIns="36576" anchor="t">
-            <a:spAutoFit/>
-          </a:bodyPr>
-          <a:lstStyle/>
-          <a:p>
-            <a:pPr algn="l">
-              <a:defRPr sz="1900" b="0">
-                <a:solidFill>
-                  <a:srgbClr val="1C2330"/>
-                </a:solidFill>
-                <a:latin typeface="Aptos"/>
-              </a:defRPr>
-            </a:pPr>
-            <a:r>
-              <a:t>Puedo explicar una decisión tomada.</a:t>
-            </a:r>
-          </a:p>
-        </p:txBody>
-      </p:sp>
-      <p:sp>
-        <p:nvSpPr>
-          <p:cNvPr id="14" name="Rounded Rectangle 13"/>
-          <p:cNvSpPr/>
-          <p:nvPr/>
-        </p:nvSpPr>
-        <p:spPr>
-          <a:xfrm>
-            <a:off x="713232" y="4288536"/>
-            <a:ext cx="420624" cy="420624"/>
-          </a:xfrm>
-          <a:prstGeom prst="roundRect">
-            <a:avLst/>
-          </a:prstGeom>
-          <a:solidFill>
-            <a:srgbClr val="FFFFFF"/>
-          </a:solidFill>
-          <a:ln>
-            <a:solidFill>
-              <a:srgbClr val="2F5BA8"/>
-            </a:solidFill>
-          </a:ln>
-        </p:spPr>
-        <p:style>
-          <a:lnRef idx="1">
-            <a:schemeClr val="accent1"/>
-          </a:lnRef>
-          <a:fillRef idx="3">
-            <a:schemeClr val="accent1"/>
-          </a:fillRef>
-          <a:effectRef idx="2">
-            <a:schemeClr val="accent1"/>
-          </a:effectRef>
-          <a:fontRef idx="minor">
-            <a:schemeClr val="lt1"/>
-          </a:fontRef>
-        </p:style>
-        <p:txBody>
-          <a:bodyPr rtlCol="0" anchor="ctr"/>
-          <a:lstStyle/>
-          <a:p>
-            <a:pPr algn="ctr"/>
-          </a:p>
-        </p:txBody>
-      </p:sp>
-      <p:sp>
-        <p:nvSpPr>
-          <p:cNvPr id="15" name="TextBox 14"/>
-          <p:cNvSpPr txBox="1"/>
-          <p:nvPr/>
-        </p:nvSpPr>
-        <p:spPr>
-          <a:xfrm>
-            <a:off x="1389888" y="4270248"/>
-            <a:ext cx="9829800" cy="960120"/>
-          </a:xfrm>
-          <a:prstGeom prst="rect">
-            <a:avLst/>
-          </a:prstGeom>
-          <a:noFill/>
-        </p:spPr>
-        <p:txBody>
-          <a:bodyPr wrap="square" lIns="45720" rIns="45720" tIns="36576" bIns="36576" anchor="t">
-            <a:spAutoFit/>
-          </a:bodyPr>
-          <a:lstStyle/>
-          <a:p>
-            <a:pPr algn="l">
-              <a:defRPr sz="1900" b="0">
-                <a:solidFill>
-                  <a:srgbClr val="1C2330"/>
-                </a:solidFill>
-                <a:latin typeface="Aptos"/>
-              </a:defRPr>
-            </a:pPr>
-            <a:r>
-              <a:t>Puedo mostrar una prueba o comprobación.</a:t>
-            </a:r>
-          </a:p>
-        </p:txBody>
-      </p:sp>
-      <p:sp>
-        <p:nvSpPr>
-          <p:cNvPr id="16" name="Rounded Rectangle 15"/>
-          <p:cNvSpPr/>
-          <p:nvPr/>
-        </p:nvSpPr>
-        <p:spPr>
-          <a:xfrm>
-            <a:off x="713232" y="5285231"/>
-            <a:ext cx="420624" cy="420624"/>
-          </a:xfrm>
-          <a:prstGeom prst="roundRect">
-            <a:avLst/>
-          </a:prstGeom>
-          <a:solidFill>
-            <a:srgbClr val="FFFFFF"/>
-          </a:solidFill>
-          <a:ln>
-            <a:solidFill>
-              <a:srgbClr val="2F5BA8"/>
-            </a:solidFill>
-          </a:ln>
-        </p:spPr>
-        <p:style>
-          <a:lnRef idx="1">
-            <a:schemeClr val="accent1"/>
-          </a:lnRef>
-          <a:fillRef idx="3">
-            <a:schemeClr val="accent1"/>
-          </a:fillRef>
-          <a:effectRef idx="2">
-            <a:schemeClr val="accent1"/>
-          </a:effectRef>
-          <a:fontRef idx="minor">
-            <a:schemeClr val="lt1"/>
-          </a:fontRef>
-        </p:style>
-        <p:txBody>
-          <a:bodyPr rtlCol="0" anchor="ctr"/>
-          <a:lstStyle/>
-          <a:p>
-            <a:pPr algn="ctr"/>
-          </a:p>
-        </p:txBody>
-      </p:sp>
-      <p:sp>
-        <p:nvSpPr>
-          <p:cNvPr id="17" name="TextBox 16"/>
-          <p:cNvSpPr txBox="1"/>
-          <p:nvPr/>
-        </p:nvSpPr>
-        <p:spPr>
-          <a:xfrm>
-            <a:off x="1389888" y="5266944"/>
-            <a:ext cx="9829800" cy="960120"/>
-          </a:xfrm>
-          <a:prstGeom prst="rect">
-            <a:avLst/>
-          </a:prstGeom>
-          <a:noFill/>
-        </p:spPr>
-        <p:txBody>
-          <a:bodyPr wrap="square" lIns="45720" rIns="45720" tIns="36576" bIns="36576" anchor="t">
-            <a:spAutoFit/>
-          </a:bodyPr>
-          <a:lstStyle/>
-          <a:p>
-            <a:pPr algn="l">
-              <a:defRPr sz="1900" b="0">
-                <a:solidFill>
-                  <a:srgbClr val="1C2330"/>
-                </a:solidFill>
-                <a:latin typeface="Aptos"/>
-              </a:defRPr>
-            </a:pPr>
-            <a:r>
-              <a:t>He registrado mi aportación individual si el trabajo era de equipo.</a:t>
+              <a:t>¿Qué puedes señalar, explicar y probar al terminar este checkpoint?</a:t>
             </a:r>
           </a:p>
         </p:txBody>
@@ -6545,7 +7379,7 @@
               </a:defRPr>
             </a:pPr>
             <a:r>
-              <a:t>LÍMITES QUE PROTEGEN EL APRENDIZAJE</a:t>
+              <a:t>COMPROBAR</a:t>
             </a:r>
           </a:p>
         </p:txBody>
@@ -6581,7 +7415,7 @@
               </a:defRPr>
             </a:pPr>
             <a:r>
-              <a:t>Seguridad y uso responsable</a:t>
+              <a:t>Evidencia y comprobación</a:t>
             </a:r>
           </a:p>
         </p:txBody>
@@ -6660,7 +7494,7 @@
               </a:defRPr>
             </a:pPr>
             <a:r>
-              <a:t>MiniJarvis · 1.º DAW · Sesión 208 · H1</a:t>
+              <a:t>MiniJarvis · 1.º DAW · Sesión 208 · H1 — Primer MiniJarvis</a:t>
             </a:r>
           </a:p>
         </p:txBody>
@@ -6673,8 +7507,8 @@
         </p:nvSpPr>
         <p:spPr>
           <a:xfrm>
-            <a:off x="621792" y="1298448"/>
-            <a:ext cx="5230368" cy="2176272"/>
+            <a:off x="713232" y="1298448"/>
+            <a:ext cx="420624" cy="420624"/>
           </a:xfrm>
           <a:prstGeom prst="roundRect">
             <a:avLst/>
@@ -6684,7 +7518,7 @@
           </a:solidFill>
           <a:ln>
             <a:solidFill>
-              <a:srgbClr val="E5E9EF"/>
+              <a:srgbClr val="2F5BA8"/>
             </a:solidFill>
           </a:ln>
         </p:spPr>
@@ -6712,57 +7546,14 @@
       </p:sp>
       <p:sp>
         <p:nvSpPr>
-          <p:cNvPr id="9" name="Rounded Rectangle 8"/>
-          <p:cNvSpPr/>
-          <p:nvPr/>
-        </p:nvSpPr>
-        <p:spPr>
-          <a:xfrm>
-            <a:off x="841248" y="1527048"/>
-            <a:ext cx="237744" cy="1719072"/>
-          </a:xfrm>
-          <a:prstGeom prst="roundRect">
-            <a:avLst/>
-          </a:prstGeom>
-          <a:solidFill>
-            <a:srgbClr val="247E5C"/>
-          </a:solidFill>
-          <a:ln>
-            <a:noFill/>
-          </a:ln>
-        </p:spPr>
-        <p:style>
-          <a:lnRef idx="1">
-            <a:schemeClr val="accent1"/>
-          </a:lnRef>
-          <a:fillRef idx="3">
-            <a:schemeClr val="accent1"/>
-          </a:fillRef>
-          <a:effectRef idx="2">
-            <a:schemeClr val="accent1"/>
-          </a:effectRef>
-          <a:fontRef idx="minor">
-            <a:schemeClr val="lt1"/>
-          </a:fontRef>
-        </p:style>
-        <p:txBody>
-          <a:bodyPr rtlCol="0" anchor="ctr"/>
-          <a:lstStyle/>
-          <a:p>
-            <a:pPr algn="ctr"/>
-          </a:p>
-        </p:txBody>
-      </p:sp>
-      <p:sp>
-        <p:nvSpPr>
-          <p:cNvPr id="10" name="TextBox 9"/>
+          <p:cNvPr id="9" name="TextBox 8"/>
           <p:cNvSpPr txBox="1"/>
           <p:nvPr/>
         </p:nvSpPr>
         <p:spPr>
           <a:xfrm>
-            <a:off x="1280160" y="1527048"/>
-            <a:ext cx="4224528" cy="1783080"/>
+            <a:off x="1389888" y="1280160"/>
+            <a:ext cx="9829800" cy="1624584"/>
           </a:xfrm>
           <a:prstGeom prst="rect">
             <a:avLst/>
@@ -6784,21 +7575,21 @@
               </a:defRPr>
             </a:pPr>
             <a:r>
-              <a:t>Trabaja únicamente con datos ficticios.</a:t>
-            </a:r>
-          </a:p>
-        </p:txBody>
-      </p:sp>
-      <p:sp>
-        <p:nvSpPr>
-          <p:cNvPr id="11" name="Rounded Rectangle 10"/>
+              <a:t>conserva el código o la prueba en el lugar indicado por la sesión;</a:t>
+            </a:r>
+          </a:p>
+        </p:txBody>
+      </p:sp>
+      <p:sp>
+        <p:nvSpPr>
+          <p:cNvPr id="10" name="Rounded Rectangle 9"/>
           <p:cNvSpPr/>
           <p:nvPr/>
         </p:nvSpPr>
         <p:spPr>
           <a:xfrm>
-            <a:off x="6126479" y="1298448"/>
-            <a:ext cx="5230368" cy="2176272"/>
+            <a:off x="713232" y="2959607"/>
+            <a:ext cx="420624" cy="420624"/>
           </a:xfrm>
           <a:prstGeom prst="roundRect">
             <a:avLst/>
@@ -6808,7 +7599,7 @@
           </a:solidFill>
           <a:ln>
             <a:solidFill>
-              <a:srgbClr val="E5E9EF"/>
+              <a:srgbClr val="2F5BA8"/>
             </a:solidFill>
           </a:ln>
         </p:spPr>
@@ -6836,57 +7627,14 @@
       </p:sp>
       <p:sp>
         <p:nvSpPr>
-          <p:cNvPr id="12" name="Rounded Rectangle 11"/>
-          <p:cNvSpPr/>
-          <p:nvPr/>
-        </p:nvSpPr>
-        <p:spPr>
-          <a:xfrm>
-            <a:off x="6345936" y="1527048"/>
-            <a:ext cx="237744" cy="1719072"/>
-          </a:xfrm>
-          <a:prstGeom prst="roundRect">
-            <a:avLst/>
-          </a:prstGeom>
-          <a:solidFill>
-            <a:srgbClr val="C07020"/>
-          </a:solidFill>
-          <a:ln>
-            <a:noFill/>
-          </a:ln>
-        </p:spPr>
-        <p:style>
-          <a:lnRef idx="1">
-            <a:schemeClr val="accent1"/>
-          </a:lnRef>
-          <a:fillRef idx="3">
-            <a:schemeClr val="accent1"/>
-          </a:fillRef>
-          <a:effectRef idx="2">
-            <a:schemeClr val="accent1"/>
-          </a:effectRef>
-          <a:fontRef idx="minor">
-            <a:schemeClr val="lt1"/>
-          </a:fontRef>
-        </p:style>
-        <p:txBody>
-          <a:bodyPr rtlCol="0" anchor="ctr"/>
-          <a:lstStyle/>
-          <a:p>
-            <a:pPr algn="ctr"/>
-          </a:p>
-        </p:txBody>
-      </p:sp>
-      <p:sp>
-        <p:nvSpPr>
-          <p:cNvPr id="13" name="TextBox 12"/>
+          <p:cNvPr id="11" name="TextBox 10"/>
           <p:cNvSpPr txBox="1"/>
           <p:nvPr/>
         </p:nvSpPr>
         <p:spPr>
           <a:xfrm>
-            <a:off x="6784847" y="1527048"/>
-            <a:ext cx="4224528" cy="1783080"/>
+            <a:off x="1389888" y="2941319"/>
+            <a:ext cx="9829800" cy="1624584"/>
           </a:xfrm>
           <a:prstGeom prst="rect">
             <a:avLst/>
@@ -6908,21 +7656,21 @@
               </a:defRPr>
             </a:pPr>
             <a:r>
-              <a:t>No escribas contraseñas, tokens, claves API ni datos personales.</a:t>
-            </a:r>
-          </a:p>
-        </p:txBody>
-      </p:sp>
-      <p:sp>
-        <p:nvSpPr>
-          <p:cNvPr id="14" name="Rounded Rectangle 13"/>
+              <a:t>añade una sola entrada al diario individual con prueba, bloqueo y siguiente paso;</a:t>
+            </a:r>
+          </a:p>
+        </p:txBody>
+      </p:sp>
+      <p:sp>
+        <p:nvSpPr>
+          <p:cNvPr id="12" name="Rounded Rectangle 11"/>
           <p:cNvSpPr/>
           <p:nvPr/>
         </p:nvSpPr>
         <p:spPr>
           <a:xfrm>
-            <a:off x="621792" y="3675887"/>
-            <a:ext cx="5230368" cy="2176272"/>
+            <a:off x="713232" y="4620767"/>
+            <a:ext cx="420624" cy="420624"/>
           </a:xfrm>
           <a:prstGeom prst="roundRect">
             <a:avLst/>
@@ -6932,7 +7680,7 @@
           </a:solidFill>
           <a:ln>
             <a:solidFill>
-              <a:srgbClr val="E5E9EF"/>
+              <a:srgbClr val="2F5BA8"/>
             </a:solidFill>
           </a:ln>
         </p:spPr>
@@ -6960,57 +7708,14 @@
       </p:sp>
       <p:sp>
         <p:nvSpPr>
-          <p:cNvPr id="15" name="Rounded Rectangle 14"/>
-          <p:cNvSpPr/>
-          <p:nvPr/>
-        </p:nvSpPr>
-        <p:spPr>
-          <a:xfrm>
-            <a:off x="841248" y="3904487"/>
-            <a:ext cx="237744" cy="1719072"/>
-          </a:xfrm>
-          <a:prstGeom prst="roundRect">
-            <a:avLst/>
-          </a:prstGeom>
-          <a:solidFill>
-            <a:srgbClr val="B13A3A"/>
-          </a:solidFill>
-          <a:ln>
-            <a:noFill/>
-          </a:ln>
-        </p:spPr>
-        <p:style>
-          <a:lnRef idx="1">
-            <a:schemeClr val="accent1"/>
-          </a:lnRef>
-          <a:fillRef idx="3">
-            <a:schemeClr val="accent1"/>
-          </a:fillRef>
-          <a:effectRef idx="2">
-            <a:schemeClr val="accent1"/>
-          </a:effectRef>
-          <a:fontRef idx="minor">
-            <a:schemeClr val="lt1"/>
-          </a:fontRef>
-        </p:style>
-        <p:txBody>
-          <a:bodyPr rtlCol="0" anchor="ctr"/>
-          <a:lstStyle/>
-          <a:p>
-            <a:pPr algn="ctr"/>
-          </a:p>
-        </p:txBody>
-      </p:sp>
-      <p:sp>
-        <p:nvSpPr>
-          <p:cNvPr id="16" name="TextBox 15"/>
+          <p:cNvPr id="13" name="TextBox 12"/>
           <p:cNvSpPr txBox="1"/>
           <p:nvPr/>
         </p:nvSpPr>
         <p:spPr>
           <a:xfrm>
-            <a:off x="1280160" y="3904487"/>
-            <a:ext cx="4224528" cy="1783080"/>
+            <a:off x="1389888" y="4602480"/>
+            <a:ext cx="9829800" cy="1624584"/>
           </a:xfrm>
           <a:prstGeom prst="rect">
             <a:avLst/>
@@ -7032,131 +7737,7 @@
               </a:defRPr>
             </a:pPr>
             <a:r>
-              <a:t>Si utilizas IA en un uso permitido, registra qué pediste, qué recibiste, qué cambiaste y cómo lo comprobaste.</a:t>
-            </a:r>
-          </a:p>
-        </p:txBody>
-      </p:sp>
-      <p:sp>
-        <p:nvSpPr>
-          <p:cNvPr id="17" name="Rounded Rectangle 16"/>
-          <p:cNvSpPr/>
-          <p:nvPr/>
-        </p:nvSpPr>
-        <p:spPr>
-          <a:xfrm>
-            <a:off x="6126479" y="3675887"/>
-            <a:ext cx="5230368" cy="2176272"/>
-          </a:xfrm>
-          <a:prstGeom prst="roundRect">
-            <a:avLst/>
-          </a:prstGeom>
-          <a:solidFill>
-            <a:srgbClr val="FFFFFF"/>
-          </a:solidFill>
-          <a:ln>
-            <a:solidFill>
-              <a:srgbClr val="E5E9EF"/>
-            </a:solidFill>
-          </a:ln>
-        </p:spPr>
-        <p:style>
-          <a:lnRef idx="1">
-            <a:schemeClr val="accent1"/>
-          </a:lnRef>
-          <a:fillRef idx="3">
-            <a:schemeClr val="accent1"/>
-          </a:fillRef>
-          <a:effectRef idx="2">
-            <a:schemeClr val="accent1"/>
-          </a:effectRef>
-          <a:fontRef idx="minor">
-            <a:schemeClr val="lt1"/>
-          </a:fontRef>
-        </p:style>
-        <p:txBody>
-          <a:bodyPr rtlCol="0" anchor="ctr"/>
-          <a:lstStyle/>
-          <a:p>
-            <a:pPr algn="ctr"/>
-          </a:p>
-        </p:txBody>
-      </p:sp>
-      <p:sp>
-        <p:nvSpPr>
-          <p:cNvPr id="18" name="Rounded Rectangle 17"/>
-          <p:cNvSpPr/>
-          <p:nvPr/>
-        </p:nvSpPr>
-        <p:spPr>
-          <a:xfrm>
-            <a:off x="6345936" y="3904487"/>
-            <a:ext cx="237744" cy="1719072"/>
-          </a:xfrm>
-          <a:prstGeom prst="roundRect">
-            <a:avLst/>
-          </a:prstGeom>
-          <a:solidFill>
-            <a:srgbClr val="2F5BA8"/>
-          </a:solidFill>
-          <a:ln>
-            <a:noFill/>
-          </a:ln>
-        </p:spPr>
-        <p:style>
-          <a:lnRef idx="1">
-            <a:schemeClr val="accent1"/>
-          </a:lnRef>
-          <a:fillRef idx="3">
-            <a:schemeClr val="accent1"/>
-          </a:fillRef>
-          <a:effectRef idx="2">
-            <a:schemeClr val="accent1"/>
-          </a:effectRef>
-          <a:fontRef idx="minor">
-            <a:schemeClr val="lt1"/>
-          </a:fontRef>
-        </p:style>
-        <p:txBody>
-          <a:bodyPr rtlCol="0" anchor="ctr"/>
-          <a:lstStyle/>
-          <a:p>
-            <a:pPr algn="ctr"/>
-          </a:p>
-        </p:txBody>
-      </p:sp>
-      <p:sp>
-        <p:nvSpPr>
-          <p:cNvPr id="19" name="TextBox 18"/>
-          <p:cNvSpPr txBox="1"/>
-          <p:nvPr/>
-        </p:nvSpPr>
-        <p:spPr>
-          <a:xfrm>
-            <a:off x="6784847" y="3904487"/>
-            <a:ext cx="4224528" cy="1783080"/>
-          </a:xfrm>
-          <a:prstGeom prst="rect">
-            <a:avLst/>
-          </a:prstGeom>
-          <a:noFill/>
-        </p:spPr>
-        <p:txBody>
-          <a:bodyPr wrap="square" lIns="45720" rIns="45720" tIns="36576" bIns="36576" anchor="t">
-            <a:spAutoFit/>
-          </a:bodyPr>
-          <a:lstStyle/>
-          <a:p>
-            <a:pPr algn="l">
-              <a:defRPr sz="1900" b="0">
-                <a:solidFill>
-                  <a:srgbClr val="1C2330"/>
-                </a:solidFill>
-                <a:latin typeface="Aptos"/>
-              </a:defRPr>
-            </a:pPr>
-            <a:r>
-              <a:t>Los ejemplos de Laura solo se consultan después del intento propio.</a:t>
+              <a:t>no copies la misma reflexión en otro documento; el Site personal seleccionará evidencias al cerrar H1.</a:t>
             </a:r>
           </a:p>
         </p:txBody>
@@ -7296,7 +7877,7 @@
               </a:defRPr>
             </a:pPr>
             <a:r>
-              <a:t>EXPLICAR Y DEFENDER</a:t>
+              <a:t>LÍMITES QUE PROTEGEN EL APRENDIZAJE</a:t>
             </a:r>
           </a:p>
         </p:txBody>
@@ -7332,7 +7913,7 @@
               </a:defRPr>
             </a:pPr>
             <a:r>
-              <a:t>Cierre y defensa</a:t>
+              <a:t>Seguridad y uso responsable</a:t>
             </a:r>
           </a:p>
         </p:txBody>
@@ -7411,7 +7992,510 @@
               </a:defRPr>
             </a:pPr>
             <a:r>
-              <a:t>MiniJarvis · 1.º DAW · Sesión 208 · H1</a:t>
+              <a:t>MiniJarvis · 1.º DAW · Sesión 208 · H1 — Primer MiniJarvis</a:t>
+            </a:r>
+          </a:p>
+        </p:txBody>
+      </p:sp>
+      <p:sp>
+        <p:nvSpPr>
+          <p:cNvPr id="8" name="Rounded Rectangle 7"/>
+          <p:cNvSpPr/>
+          <p:nvPr/>
+        </p:nvSpPr>
+        <p:spPr>
+          <a:xfrm>
+            <a:off x="621792" y="1298448"/>
+            <a:ext cx="5230368" cy="4553712"/>
+          </a:xfrm>
+          <a:prstGeom prst="roundRect">
+            <a:avLst/>
+          </a:prstGeom>
+          <a:solidFill>
+            <a:srgbClr val="FFFFFF"/>
+          </a:solidFill>
+          <a:ln>
+            <a:solidFill>
+              <a:srgbClr val="E5E9EF"/>
+            </a:solidFill>
+          </a:ln>
+        </p:spPr>
+        <p:style>
+          <a:lnRef idx="1">
+            <a:schemeClr val="accent1"/>
+          </a:lnRef>
+          <a:fillRef idx="3">
+            <a:schemeClr val="accent1"/>
+          </a:fillRef>
+          <a:effectRef idx="2">
+            <a:schemeClr val="accent1"/>
+          </a:effectRef>
+          <a:fontRef idx="minor">
+            <a:schemeClr val="lt1"/>
+          </a:fontRef>
+        </p:style>
+        <p:txBody>
+          <a:bodyPr rtlCol="0" anchor="ctr"/>
+          <a:lstStyle/>
+          <a:p>
+            <a:pPr algn="ctr"/>
+          </a:p>
+        </p:txBody>
+      </p:sp>
+      <p:sp>
+        <p:nvSpPr>
+          <p:cNvPr id="9" name="Rounded Rectangle 8"/>
+          <p:cNvSpPr/>
+          <p:nvPr/>
+        </p:nvSpPr>
+        <p:spPr>
+          <a:xfrm>
+            <a:off x="841248" y="1527048"/>
+            <a:ext cx="237744" cy="4096512"/>
+          </a:xfrm>
+          <a:prstGeom prst="roundRect">
+            <a:avLst/>
+          </a:prstGeom>
+          <a:solidFill>
+            <a:srgbClr val="247E5C"/>
+          </a:solidFill>
+          <a:ln>
+            <a:noFill/>
+          </a:ln>
+        </p:spPr>
+        <p:style>
+          <a:lnRef idx="1">
+            <a:schemeClr val="accent1"/>
+          </a:lnRef>
+          <a:fillRef idx="3">
+            <a:schemeClr val="accent1"/>
+          </a:fillRef>
+          <a:effectRef idx="2">
+            <a:schemeClr val="accent1"/>
+          </a:effectRef>
+          <a:fontRef idx="minor">
+            <a:schemeClr val="lt1"/>
+          </a:fontRef>
+        </p:style>
+        <p:txBody>
+          <a:bodyPr rtlCol="0" anchor="ctr"/>
+          <a:lstStyle/>
+          <a:p>
+            <a:pPr algn="ctr"/>
+          </a:p>
+        </p:txBody>
+      </p:sp>
+      <p:sp>
+        <p:nvSpPr>
+          <p:cNvPr id="10" name="TextBox 9"/>
+          <p:cNvSpPr txBox="1"/>
+          <p:nvPr/>
+        </p:nvSpPr>
+        <p:spPr>
+          <a:xfrm>
+            <a:off x="1280160" y="1527048"/>
+            <a:ext cx="4224528" cy="4160520"/>
+          </a:xfrm>
+          <a:prstGeom prst="rect">
+            <a:avLst/>
+          </a:prstGeom>
+          <a:noFill/>
+        </p:spPr>
+        <p:txBody>
+          <a:bodyPr wrap="square" lIns="45720" rIns="45720" tIns="36576" bIns="36576" anchor="t">
+            <a:spAutoFit/>
+          </a:bodyPr>
+          <a:lstStyle/>
+          <a:p>
+            <a:pPr algn="l">
+              <a:defRPr sz="1900" b="0">
+                <a:solidFill>
+                  <a:srgbClr val="1C2330"/>
+                </a:solidFill>
+                <a:latin typeface="Aptos"/>
+              </a:defRPr>
+            </a:pPr>
+            <a:r>
+              <a:t>Usa datos ficticios y no publiques credenciales ni información personal.</a:t>
+            </a:r>
+          </a:p>
+        </p:txBody>
+      </p:sp>
+      <p:sp>
+        <p:nvSpPr>
+          <p:cNvPr id="11" name="Rounded Rectangle 10"/>
+          <p:cNvSpPr/>
+          <p:nvPr/>
+        </p:nvSpPr>
+        <p:spPr>
+          <a:xfrm>
+            <a:off x="6126479" y="1298448"/>
+            <a:ext cx="5230368" cy="4553712"/>
+          </a:xfrm>
+          <a:prstGeom prst="roundRect">
+            <a:avLst/>
+          </a:prstGeom>
+          <a:solidFill>
+            <a:srgbClr val="FFFFFF"/>
+          </a:solidFill>
+          <a:ln>
+            <a:solidFill>
+              <a:srgbClr val="E5E9EF"/>
+            </a:solidFill>
+          </a:ln>
+        </p:spPr>
+        <p:style>
+          <a:lnRef idx="1">
+            <a:schemeClr val="accent1"/>
+          </a:lnRef>
+          <a:fillRef idx="3">
+            <a:schemeClr val="accent1"/>
+          </a:fillRef>
+          <a:effectRef idx="2">
+            <a:schemeClr val="accent1"/>
+          </a:effectRef>
+          <a:fontRef idx="minor">
+            <a:schemeClr val="lt1"/>
+          </a:fontRef>
+        </p:style>
+        <p:txBody>
+          <a:bodyPr rtlCol="0" anchor="ctr"/>
+          <a:lstStyle/>
+          <a:p>
+            <a:pPr algn="ctr"/>
+          </a:p>
+        </p:txBody>
+      </p:sp>
+      <p:sp>
+        <p:nvSpPr>
+          <p:cNvPr id="12" name="Rounded Rectangle 11"/>
+          <p:cNvSpPr/>
+          <p:nvPr/>
+        </p:nvSpPr>
+        <p:spPr>
+          <a:xfrm>
+            <a:off x="6345936" y="1527048"/>
+            <a:ext cx="237744" cy="4096512"/>
+          </a:xfrm>
+          <a:prstGeom prst="roundRect">
+            <a:avLst/>
+          </a:prstGeom>
+          <a:solidFill>
+            <a:srgbClr val="C07020"/>
+          </a:solidFill>
+          <a:ln>
+            <a:noFill/>
+          </a:ln>
+        </p:spPr>
+        <p:style>
+          <a:lnRef idx="1">
+            <a:schemeClr val="accent1"/>
+          </a:lnRef>
+          <a:fillRef idx="3">
+            <a:schemeClr val="accent1"/>
+          </a:fillRef>
+          <a:effectRef idx="2">
+            <a:schemeClr val="accent1"/>
+          </a:effectRef>
+          <a:fontRef idx="minor">
+            <a:schemeClr val="lt1"/>
+          </a:fontRef>
+        </p:style>
+        <p:txBody>
+          <a:bodyPr rtlCol="0" anchor="ctr"/>
+          <a:lstStyle/>
+          <a:p>
+            <a:pPr algn="ctr"/>
+          </a:p>
+        </p:txBody>
+      </p:sp>
+      <p:sp>
+        <p:nvSpPr>
+          <p:cNvPr id="13" name="TextBox 12"/>
+          <p:cNvSpPr txBox="1"/>
+          <p:nvPr/>
+        </p:nvSpPr>
+        <p:spPr>
+          <a:xfrm>
+            <a:off x="6784847" y="1527048"/>
+            <a:ext cx="4224528" cy="4160520"/>
+          </a:xfrm>
+          <a:prstGeom prst="rect">
+            <a:avLst/>
+          </a:prstGeom>
+          <a:noFill/>
+        </p:spPr>
+        <p:txBody>
+          <a:bodyPr wrap="square" lIns="45720" rIns="45720" tIns="36576" bIns="36576" anchor="t">
+            <a:spAutoFit/>
+          </a:bodyPr>
+          <a:lstStyle/>
+          <a:p>
+            <a:pPr algn="l">
+              <a:defRPr sz="1900" b="0">
+                <a:solidFill>
+                  <a:srgbClr val="1C2330"/>
+                </a:solidFill>
+                <a:latin typeface="Aptos"/>
+              </a:defRPr>
+            </a:pPr>
+            <a:r>
+              <a:t>Si utilizas IA de forma sustantiva, registra propósito, propuesta, cambios propios y validación en el registro de IA del hito.</a:t>
+            </a:r>
+          </a:p>
+        </p:txBody>
+      </p:sp>
+    </p:spTree>
+  </p:cSld>
+  <p:clrMapOvr>
+    <a:masterClrMapping/>
+  </p:clrMapOvr>
+</p:sld>
+</file>
+
+<file path=ppt/slides/slide9.xml><?xml version="1.0" encoding="utf-8"?>
+<p:sld xmlns:a="http://schemas.openxmlformats.org/drawingml/2006/main" xmlns:p="http://schemas.openxmlformats.org/presentationml/2006/main" xmlns:r="http://schemas.openxmlformats.org/officeDocument/2006/relationships">
+  <p:cSld>
+    <p:spTree>
+      <p:nvGrpSpPr>
+        <p:cNvPr id="1" name=""/>
+        <p:cNvGrpSpPr/>
+        <p:nvPr/>
+      </p:nvGrpSpPr>
+      <p:grpSpPr/>
+      <p:sp>
+        <p:nvSpPr>
+          <p:cNvPr id="2" name="Rectangle 1"/>
+          <p:cNvSpPr/>
+          <p:nvPr/>
+        </p:nvSpPr>
+        <p:spPr>
+          <a:xfrm>
+            <a:off x="0" y="0"/>
+            <a:ext cx="12191695" cy="6858000"/>
+          </a:xfrm>
+          <a:prstGeom prst="rect">
+            <a:avLst/>
+          </a:prstGeom>
+          <a:solidFill>
+            <a:srgbClr val="F9F7F2"/>
+          </a:solidFill>
+          <a:ln>
+            <a:noFill/>
+          </a:ln>
+        </p:spPr>
+        <p:style>
+          <a:lnRef idx="1">
+            <a:schemeClr val="accent1"/>
+          </a:lnRef>
+          <a:fillRef idx="3">
+            <a:schemeClr val="accent1"/>
+          </a:fillRef>
+          <a:effectRef idx="2">
+            <a:schemeClr val="accent1"/>
+          </a:effectRef>
+          <a:fontRef idx="minor">
+            <a:schemeClr val="lt1"/>
+          </a:fontRef>
+        </p:style>
+        <p:txBody>
+          <a:bodyPr rtlCol="0" anchor="ctr"/>
+          <a:lstStyle/>
+          <a:p>
+            <a:pPr algn="ctr"/>
+          </a:p>
+        </p:txBody>
+      </p:sp>
+      <p:sp>
+        <p:nvSpPr>
+          <p:cNvPr id="3" name="Rectangle 2"/>
+          <p:cNvSpPr/>
+          <p:nvPr/>
+        </p:nvSpPr>
+        <p:spPr>
+          <a:xfrm>
+            <a:off x="0" y="0"/>
+            <a:ext cx="164592" cy="6858000"/>
+          </a:xfrm>
+          <a:prstGeom prst="rect">
+            <a:avLst/>
+          </a:prstGeom>
+          <a:solidFill>
+            <a:srgbClr val="2F5BA8"/>
+          </a:solidFill>
+          <a:ln>
+            <a:noFill/>
+          </a:ln>
+        </p:spPr>
+        <p:style>
+          <a:lnRef idx="1">
+            <a:schemeClr val="accent1"/>
+          </a:lnRef>
+          <a:fillRef idx="3">
+            <a:schemeClr val="accent1"/>
+          </a:fillRef>
+          <a:effectRef idx="2">
+            <a:schemeClr val="accent1"/>
+          </a:effectRef>
+          <a:fontRef idx="minor">
+            <a:schemeClr val="lt1"/>
+          </a:fontRef>
+        </p:style>
+        <p:txBody>
+          <a:bodyPr rtlCol="0" anchor="ctr"/>
+          <a:lstStyle/>
+          <a:p>
+            <a:pPr algn="ctr"/>
+          </a:p>
+        </p:txBody>
+      </p:sp>
+      <p:sp>
+        <p:nvSpPr>
+          <p:cNvPr id="4" name="TextBox 3"/>
+          <p:cNvSpPr txBox="1"/>
+          <p:nvPr/>
+        </p:nvSpPr>
+        <p:spPr>
+          <a:xfrm>
+            <a:off x="502920" y="274320"/>
+            <a:ext cx="5486400" cy="256032"/>
+          </a:xfrm>
+          <a:prstGeom prst="rect">
+            <a:avLst/>
+          </a:prstGeom>
+          <a:noFill/>
+        </p:spPr>
+        <p:txBody>
+          <a:bodyPr wrap="square" lIns="45720" rIns="45720" tIns="36576" bIns="36576" anchor="t">
+            <a:spAutoFit/>
+          </a:bodyPr>
+          <a:lstStyle/>
+          <a:p>
+            <a:pPr algn="l">
+              <a:defRPr sz="1000" b="1">
+                <a:solidFill>
+                  <a:srgbClr val="2F5BA8"/>
+                </a:solidFill>
+                <a:latin typeface="Aptos"/>
+              </a:defRPr>
+            </a:pPr>
+            <a:r>
+              <a:t>EXPLICAR Y DEFENDER</a:t>
+            </a:r>
+          </a:p>
+        </p:txBody>
+      </p:sp>
+      <p:sp>
+        <p:nvSpPr>
+          <p:cNvPr id="5" name="TextBox 4"/>
+          <p:cNvSpPr txBox="1"/>
+          <p:nvPr/>
+        </p:nvSpPr>
+        <p:spPr>
+          <a:xfrm>
+            <a:off x="502920" y="603504"/>
+            <a:ext cx="11064240" cy="530352"/>
+          </a:xfrm>
+          <a:prstGeom prst="rect">
+            <a:avLst/>
+          </a:prstGeom>
+          <a:noFill/>
+        </p:spPr>
+        <p:txBody>
+          <a:bodyPr wrap="square" lIns="45720" rIns="45720" tIns="36576" bIns="36576" anchor="t">
+            <a:spAutoFit/>
+          </a:bodyPr>
+          <a:lstStyle/>
+          <a:p>
+            <a:pPr algn="l">
+              <a:defRPr sz="2800" b="1">
+                <a:solidFill>
+                  <a:srgbClr val="1C2330"/>
+                </a:solidFill>
+                <a:latin typeface="Aptos"/>
+              </a:defRPr>
+            </a:pPr>
+            <a:r>
+              <a:t>Cierre y defensa</a:t>
+            </a:r>
+          </a:p>
+        </p:txBody>
+      </p:sp>
+      <p:sp>
+        <p:nvSpPr>
+          <p:cNvPr id="6" name="Rectangle 5"/>
+          <p:cNvSpPr/>
+          <p:nvPr/>
+        </p:nvSpPr>
+        <p:spPr>
+          <a:xfrm>
+            <a:off x="0" y="6601968"/>
+            <a:ext cx="12191695" cy="256032"/>
+          </a:xfrm>
+          <a:prstGeom prst="rect">
+            <a:avLst/>
+          </a:prstGeom>
+          <a:solidFill>
+            <a:srgbClr val="2F5BA8"/>
+          </a:solidFill>
+          <a:ln>
+            <a:noFill/>
+          </a:ln>
+        </p:spPr>
+        <p:style>
+          <a:lnRef idx="1">
+            <a:schemeClr val="accent1"/>
+          </a:lnRef>
+          <a:fillRef idx="3">
+            <a:schemeClr val="accent1"/>
+          </a:fillRef>
+          <a:effectRef idx="2">
+            <a:schemeClr val="accent1"/>
+          </a:effectRef>
+          <a:fontRef idx="minor">
+            <a:schemeClr val="lt1"/>
+          </a:fontRef>
+        </p:style>
+        <p:txBody>
+          <a:bodyPr rtlCol="0" anchor="ctr"/>
+          <a:lstStyle/>
+          <a:p>
+            <a:pPr algn="ctr"/>
+          </a:p>
+        </p:txBody>
+      </p:sp>
+      <p:sp>
+        <p:nvSpPr>
+          <p:cNvPr id="7" name="TextBox 6"/>
+          <p:cNvSpPr txBox="1"/>
+          <p:nvPr/>
+        </p:nvSpPr>
+        <p:spPr>
+          <a:xfrm>
+            <a:off x="411480" y="6629400"/>
+            <a:ext cx="11247120" cy="164592"/>
+          </a:xfrm>
+          <a:prstGeom prst="rect">
+            <a:avLst/>
+          </a:prstGeom>
+          <a:noFill/>
+        </p:spPr>
+        <p:txBody>
+          <a:bodyPr wrap="square" lIns="45720" rIns="45720" tIns="36576" bIns="36576" anchor="t">
+            <a:spAutoFit/>
+          </a:bodyPr>
+          <a:lstStyle/>
+          <a:p>
+            <a:pPr algn="l">
+              <a:defRPr sz="900" b="0">
+                <a:solidFill>
+                  <a:srgbClr val="FFFFFF"/>
+                </a:solidFill>
+                <a:latin typeface="Aptos"/>
+              </a:defRPr>
+            </a:pPr>
+            <a:r>
+              <a:t>MiniJarvis · 1.º DAW · Sesión 208 · H1 — Primer MiniJarvis</a:t>
             </a:r>
           </a:p>
         </p:txBody>
@@ -7528,7 +8612,7 @@
               </a:defRPr>
             </a:pPr>
             <a:r>
-              <a:t>Microdefensa: señalar en el código dónde empieza el programa.</a:t>
+              <a:t>¿Qué puedes señalar, explicar y probar al terminar este checkpoint?</a:t>
             </a:r>
           </a:p>
         </p:txBody>
@@ -7895,4 +8979,324 @@
   </a:objectDefaults>
   <a:extraClrSchemeLst/>
 </a:theme>
+</file>
+
+<file path=ppt/theme/theme2.xml><?xml version="1.0" encoding="utf-8"?>
+<a:theme xmlns:a="http://schemas.openxmlformats.org/drawingml/2006/main" name="Office Theme">
+  <a:themeElements>
+    <a:clrScheme name="Office">
+      <a:dk1>
+        <a:sysClr val="windowText" lastClr="000000"/>
+      </a:dk1>
+      <a:lt1>
+        <a:sysClr val="window" lastClr="FFFFFF"/>
+      </a:lt1>
+      <a:dk2>
+        <a:srgbClr val="1F497D"/>
+      </a:dk2>
+      <a:lt2>
+        <a:srgbClr val="EEECE1"/>
+      </a:lt2>
+      <a:accent1>
+        <a:srgbClr val="4F81BD"/>
+      </a:accent1>
+      <a:accent2>
+        <a:srgbClr val="C0504D"/>
+      </a:accent2>
+      <a:accent3>
+        <a:srgbClr val="9BBB59"/>
+      </a:accent3>
+      <a:accent4>
+        <a:srgbClr val="8064A2"/>
+      </a:accent4>
+      <a:accent5>
+        <a:srgbClr val="4BACC6"/>
+      </a:accent5>
+      <a:accent6>
+        <a:srgbClr val="F79646"/>
+      </a:accent6>
+      <a:hlink>
+        <a:srgbClr val="0000FF"/>
+      </a:hlink>
+      <a:folHlink>
+        <a:srgbClr val="800080"/>
+      </a:folHlink>
+    </a:clrScheme>
+    <a:fontScheme name="Office">
+      <a:majorFont>
+        <a:latin typeface="Calibri"/>
+        <a:ea typeface=""/>
+        <a:cs typeface=""/>
+        <a:font script="Jpan" typeface="ＭＳ Ｐゴシック"/>
+        <a:font script="Hang" typeface="맑은 고딕"/>
+        <a:font script="Hans" typeface="宋体"/>
+        <a:font script="Hant" typeface="新細明體"/>
+        <a:font script="Arab" typeface="Times New Roman"/>
+        <a:font script="Hebr" typeface="Times New Roman"/>
+        <a:font script="Thai" typeface="Angsana New"/>
+        <a:font script="Ethi" typeface="Nyala"/>
+        <a:font script="Beng" typeface="Vrinda"/>
+        <a:font script="Gujr" typeface="Shruti"/>
+        <a:font script="Khmr" typeface="MoolBoran"/>
+        <a:font script="Knda" typeface="Tunga"/>
+        <a:font script="Guru" typeface="Raavi"/>
+        <a:font script="Cans" typeface="Euphemia"/>
+        <a:font script="Cher" typeface="Plantagenet Cherokee"/>
+        <a:font script="Yiii" typeface="Microsoft Yi Baiti"/>
+        <a:font script="Tibt" typeface="Microsoft Himalaya"/>
+        <a:font script="Thaa" typeface="MV Boli"/>
+        <a:font script="Deva" typeface="Mangal"/>
+        <a:font script="Telu" typeface="Gautami"/>
+        <a:font script="Taml" typeface="Latha"/>
+        <a:font script="Syrc" typeface="Estrangelo Edessa"/>
+        <a:font script="Orya" typeface="Kalinga"/>
+        <a:font script="Mlym" typeface="Kartika"/>
+        <a:font script="Laoo" typeface="DokChampa"/>
+        <a:font script="Sinh" typeface="Iskoola Pota"/>
+        <a:font script="Mong" typeface="Mongolian Baiti"/>
+        <a:font script="Viet" typeface="Times New Roman"/>
+        <a:font script="Uigh" typeface="Microsoft Uighur"/>
+        <a:font script="Geor" typeface="Sylfaen"/>
+      </a:majorFont>
+      <a:minorFont>
+        <a:latin typeface="Calibri"/>
+        <a:ea typeface=""/>
+        <a:cs typeface=""/>
+        <a:font script="Jpan" typeface="ＭＳ Ｐゴシック"/>
+        <a:font script="Hang" typeface="맑은 고딕"/>
+        <a:font script="Hans" typeface="宋体"/>
+        <a:font script="Hant" typeface="新細明體"/>
+        <a:font script="Arab" typeface="Arial"/>
+        <a:font script="Hebr" typeface="Arial"/>
+        <a:font script="Thai" typeface="Cordia New"/>
+        <a:font script="Ethi" typeface="Nyala"/>
+        <a:font script="Beng" typeface="Vrinda"/>
+        <a:font script="Gujr" typeface="Shruti"/>
+        <a:font script="Khmr" typeface="DaunPenh"/>
+        <a:font script="Knda" typeface="Tunga"/>
+        <a:font script="Guru" typeface="Raavi"/>
+        <a:font script="Cans" typeface="Euphemia"/>
+        <a:font script="Cher" typeface="Plantagenet Cherokee"/>
+        <a:font script="Yiii" typeface="Microsoft Yi Baiti"/>
+        <a:font script="Tibt" typeface="Microsoft Himalaya"/>
+        <a:font script="Thaa" typeface="MV Boli"/>
+        <a:font script="Deva" typeface="Mangal"/>
+        <a:font script="Telu" typeface="Gautami"/>
+        <a:font script="Taml" typeface="Latha"/>
+        <a:font script="Syrc" typeface="Estrangelo Edessa"/>
+        <a:font script="Orya" typeface="Kalinga"/>
+        <a:font script="Mlym" typeface="Kartika"/>
+        <a:font script="Laoo" typeface="DokChampa"/>
+        <a:font script="Sinh" typeface="Iskoola Pota"/>
+        <a:font script="Mong" typeface="Mongolian Baiti"/>
+        <a:font script="Viet" typeface="Arial"/>
+        <a:font script="Uigh" typeface="Microsoft Uighur"/>
+        <a:font script="Geor" typeface="Sylfaen"/>
+      </a:minorFont>
+    </a:fontScheme>
+    <a:fmtScheme name="Office">
+      <a:fillStyleLst>
+        <a:solidFill>
+          <a:schemeClr val="phClr"/>
+        </a:solidFill>
+        <a:gradFill rotWithShape="1">
+          <a:gsLst>
+            <a:gs pos="0">
+              <a:schemeClr val="phClr">
+                <a:tint val="50000"/>
+                <a:satMod val="300000"/>
+              </a:schemeClr>
+            </a:gs>
+            <a:gs pos="35000">
+              <a:schemeClr val="phClr">
+                <a:tint val="37000"/>
+                <a:satMod val="300000"/>
+              </a:schemeClr>
+            </a:gs>
+            <a:gs pos="100000">
+              <a:schemeClr val="phClr">
+                <a:tint val="15000"/>
+                <a:satMod val="350000"/>
+              </a:schemeClr>
+            </a:gs>
+          </a:gsLst>
+          <a:lin ang="16200000" scaled="1"/>
+        </a:gradFill>
+        <a:gradFill rotWithShape="1">
+          <a:gsLst>
+            <a:gs pos="0">
+              <a:schemeClr val="phClr">
+                <a:tint val="100000"/>
+                <a:shade val="100000"/>
+                <a:satMod val="130000"/>
+              </a:schemeClr>
+            </a:gs>
+            <a:gs pos="100000">
+              <a:schemeClr val="phClr">
+                <a:tint val="50000"/>
+                <a:shade val="100000"/>
+                <a:satMod val="350000"/>
+              </a:schemeClr>
+            </a:gs>
+          </a:gsLst>
+          <a:lin ang="16200000" scaled="0"/>
+        </a:gradFill>
+      </a:fillStyleLst>
+      <a:lnStyleLst>
+        <a:ln w="9525" cap="flat" cmpd="sng" algn="ctr">
+          <a:solidFill>
+            <a:schemeClr val="phClr">
+              <a:shade val="95000"/>
+              <a:satMod val="105000"/>
+            </a:schemeClr>
+          </a:solidFill>
+          <a:prstDash val="solid"/>
+        </a:ln>
+        <a:ln w="25400" cap="flat" cmpd="sng" algn="ctr">
+          <a:solidFill>
+            <a:schemeClr val="phClr"/>
+          </a:solidFill>
+          <a:prstDash val="solid"/>
+        </a:ln>
+        <a:ln w="38100" cap="flat" cmpd="sng" algn="ctr">
+          <a:solidFill>
+            <a:schemeClr val="phClr"/>
+          </a:solidFill>
+          <a:prstDash val="solid"/>
+        </a:ln>
+      </a:lnStyleLst>
+      <a:effectStyleLst>
+        <a:effectStyle>
+          <a:effectLst>
+            <a:outerShdw blurRad="40000" dist="20000" dir="5400000" rotWithShape="0">
+              <a:srgbClr val="000000">
+                <a:alpha val="38000"/>
+              </a:srgbClr>
+            </a:outerShdw>
+          </a:effectLst>
+        </a:effectStyle>
+        <a:effectStyle>
+          <a:effectLst>
+            <a:outerShdw blurRad="40000" dist="23000" dir="5400000" rotWithShape="0">
+              <a:srgbClr val="000000">
+                <a:alpha val="35000"/>
+              </a:srgbClr>
+            </a:outerShdw>
+          </a:effectLst>
+        </a:effectStyle>
+        <a:effectStyle>
+          <a:effectLst>
+            <a:outerShdw blurRad="40000" dist="23000" dir="5400000" rotWithShape="0">
+              <a:srgbClr val="000000">
+                <a:alpha val="35000"/>
+              </a:srgbClr>
+            </a:outerShdw>
+          </a:effectLst>
+          <a:scene3d>
+            <a:camera prst="orthographicFront">
+              <a:rot lat="0" lon="0" rev="0"/>
+            </a:camera>
+            <a:lightRig rig="threePt" dir="t">
+              <a:rot lat="0" lon="0" rev="1200000"/>
+            </a:lightRig>
+          </a:scene3d>
+          <a:sp3d>
+            <a:bevelT w="63500" h="25400"/>
+          </a:sp3d>
+        </a:effectStyle>
+      </a:effectStyleLst>
+      <a:bgFillStyleLst>
+        <a:solidFill>
+          <a:schemeClr val="phClr"/>
+        </a:solidFill>
+        <a:gradFill rotWithShape="1">
+          <a:gsLst>
+            <a:gs pos="0">
+              <a:schemeClr val="phClr">
+                <a:tint val="40000"/>
+                <a:satMod val="350000"/>
+              </a:schemeClr>
+            </a:gs>
+            <a:gs pos="40000">
+              <a:schemeClr val="phClr">
+                <a:tint val="45000"/>
+                <a:shade val="99000"/>
+                <a:satMod val="350000"/>
+              </a:schemeClr>
+            </a:gs>
+            <a:gs pos="100000">
+              <a:schemeClr val="phClr">
+                <a:shade val="20000"/>
+                <a:satMod val="255000"/>
+              </a:schemeClr>
+            </a:gs>
+          </a:gsLst>
+          <a:path path="circle">
+            <a:fillToRect l="50000" t="-80000" r="50000" b="180000"/>
+          </a:path>
+        </a:gradFill>
+        <a:gradFill rotWithShape="1">
+          <a:gsLst>
+            <a:gs pos="0">
+              <a:schemeClr val="phClr">
+                <a:tint val="80000"/>
+                <a:satMod val="300000"/>
+              </a:schemeClr>
+            </a:gs>
+            <a:gs pos="100000">
+              <a:schemeClr val="phClr">
+                <a:shade val="30000"/>
+                <a:satMod val="200000"/>
+              </a:schemeClr>
+            </a:gs>
+          </a:gsLst>
+          <a:path path="circle">
+            <a:fillToRect l="50000" t="50000" r="50000" b="50000"/>
+          </a:path>
+        </a:gradFill>
+      </a:bgFillStyleLst>
+    </a:fmtScheme>
+  </a:themeElements>
+  <a:objectDefaults>
+    <a:spDef>
+      <a:spPr/>
+      <a:bodyPr/>
+      <a:lstStyle/>
+      <a:style>
+        <a:lnRef idx="1">
+          <a:schemeClr val="accent1"/>
+        </a:lnRef>
+        <a:fillRef idx="3">
+          <a:schemeClr val="accent1"/>
+        </a:fillRef>
+        <a:effectRef idx="2">
+          <a:schemeClr val="accent1"/>
+        </a:effectRef>
+        <a:fontRef idx="minor">
+          <a:schemeClr val="lt1"/>
+        </a:fontRef>
+      </a:style>
+    </a:spDef>
+    <a:lnDef>
+      <a:spPr/>
+      <a:bodyPr/>
+      <a:lstStyle/>
+      <a:style>
+        <a:lnRef idx="2">
+          <a:schemeClr val="accent1"/>
+        </a:lnRef>
+        <a:fillRef idx="0">
+          <a:schemeClr val="accent1"/>
+        </a:fillRef>
+        <a:effectRef idx="1">
+          <a:schemeClr val="accent1"/>
+        </a:effectRef>
+        <a:fontRef idx="minor">
+          <a:schemeClr val="tx1"/>
+        </a:fontRef>
+      </a:style>
+    </a:lnDef>
+  </a:objectDefaults>
+  <a:extraClrSchemeLst/>
+</a:theme>
 </file>
--- a/02-PROFESORADO/03-PRESENTACIONES/POR-SESION/h1/S208-estructura-minima-de-un-programa-java-presentacion.pptx
+++ b/02-PROFESORADO/03-PRESENTACIONES/POR-SESION/h1/S208-estructura-minima-de-un-programa-java-presentacion.pptx
@@ -670,7 +670,7 @@
           </a:p>
           <a:p>
             <a:r>
-              <a:t>Diapositiva 2 de 9: Qué debe conseguirse</a:t>
+              <a:t>Diapositiva 2 de 9: Qué aprenderás y cómo lo demostrarás</a:t>
             </a:r>
           </a:p>
           <a:p>
@@ -685,7 +685,7 @@
           </a:p>
           <a:p>
             <a:r>
-              <a:t>- Al terminar: señala la evidencia, explica qué demuestra y reproduce la prueba.</a:t>
+              <a:t>- Comprobación: Quede diagnosticada la comprensión.</a:t>
             </a:r>
           </a:p>
           <a:p>
@@ -765,7 +765,7 @@
           </a:p>
           <a:p>
             <a:r>
-              <a:t>Diapositiva 3 de 9: Ejemplo o demostración · 1</a:t>
+              <a:t>Diapositiva 3 de 9: Estructura mínima completa</a:t>
             </a:r>
           </a:p>
           <a:p>
@@ -775,32 +775,52 @@
           </a:p>
           <a:p>
             <a:r>
-              <a:t>Modela el ejemplo sin resolver la actividad completa; pide una predicción antes de ejecutar.</a:t>
-            </a:r>
-          </a:p>
-          <a:p>
-            <a:r>
-              <a:t>- D1 · ¿Qué líneas hacen algo visible? — public class Main {</a:t>
-            </a:r>
-          </a:p>
-          <a:p>
-            <a:r>
-              <a:t>- public static void main(String\[\] args) {</a:t>
-            </a:r>
-          </a:p>
-          <a:p>
-            <a:r>
-              <a:t>- System.out.println("Hola");</a:t>
-            </a:r>
-          </a:p>
-          <a:p>
-            <a:r>
-              <a:t>- System.out.println("MiniJarvis arranca");</a:t>
-            </a:r>
-          </a:p>
-          <a:p>
-            <a:r>
-              <a:t>- }</a:t>
+              <a:t>Explica con predicción y ejemplo mínimo; comprueba comprensión antes de continuar.</a:t>
+            </a:r>
+          </a:p>
+          <a:p>
+            <a:r>
+              <a:t>- public class Main {</a:t>
+            </a:r>
+          </a:p>
+          <a:p>
+            <a:r>
+              <a:t>    public static void main(String[] args) {</a:t>
+            </a:r>
+          </a:p>
+          <a:p>
+            <a:r>
+              <a:t>        // Presenta la versión actual.</a:t>
+            </a:r>
+          </a:p>
+          <a:p>
+            <a:r>
+              <a:t>        System.out.println("Hola");</a:t>
+            </a:r>
+          </a:p>
+          <a:p>
+            <a:r>
+              <a:t>        System.out.println("MiniJarvis arranca");</a:t>
+            </a:r>
+          </a:p>
+          <a:p>
+            <a:r>
+              <a:t>    }</a:t>
+            </a:r>
+          </a:p>
+          <a:p>
+            <a:r>
+              <a:t>}</a:t>
+            </a:r>
+          </a:p>
+          <a:p>
+            <a:r>
+              <a:t>- Main.java coincide con public class Main.</a:t>
+            </a:r>
+          </a:p>
+          <a:p>
+            <a:r>
+              <a:t>- La ejecución comienza dentro de main.</a:t>
             </a:r>
           </a:p>
           <a:p>
@@ -880,7 +900,7 @@
           </a:p>
           <a:p>
             <a:r>
-              <a:t>Diapositiva 4 de 9: Ejemplo o demostración · 2</a:t>
+              <a:t>Diapositiva 4 de 9: Java exige precisión</a:t>
             </a:r>
           </a:p>
           <a:p>
@@ -890,22 +910,27 @@
           </a:p>
           <a:p>
             <a:r>
-              <a:t>Modela el ejemplo sin resolver la actividad completa; pide una predicción antes de ejecutar.</a:t>
-            </a:r>
-          </a:p>
-          <a:p>
-            <a:r>
-              <a:t>- D2 · Clase, archivo y main — ARCHIVO Y CLASE: Main.java</a:t>
-            </a:r>
-          </a:p>
-          <a:p>
-            <a:r>
-              <a:t>- ↕</a:t>
-            </a:r>
-          </a:p>
-          <a:p>
-            <a:r>
-              <a:t>- public class Main \| PUNTO DE ENTRADA: public static void main(String\[\] args)</a:t>
+              <a:t>Explica con predicción y ejemplo mínimo; comprueba comprensión antes de continuar.</a:t>
+            </a:r>
+          </a:p>
+          <a:p>
+            <a:r>
+              <a:t>- Distingue mayúsculas: Main, main y String son identificadores diferentes.</a:t>
+            </a:r>
+          </a:p>
+          <a:p>
+            <a:r>
+              <a:t>- Las llaves delimitan bloques; paréntesis, comillas y punto y coma tienen funciones concretas.</a:t>
+            </a:r>
+          </a:p>
+          <a:p>
+            <a:r>
+              <a:t>- Un identificador debe ser válido y comunicar intención.</a:t>
+            </a:r>
+          </a:p>
+          <a:p>
+            <a:r>
+              <a:t>- Un comentario útil explica contexto o decisión; no repite una instrucción obvia.</a:t>
             </a:r>
           </a:p>
           <a:p>
@@ -985,7 +1010,7 @@
           </a:p>
           <a:p>
             <a:r>
-              <a:t>Diapositiva 5 de 9: Actividad central · 1</a:t>
+              <a:t>Diapositiva 5 de 9: Detecta antes de compilar</a:t>
             </a:r>
           </a:p>
           <a:p>
@@ -995,27 +1020,32 @@
           </a:p>
           <a:p>
             <a:r>
-              <a:t>Entrega la consigna, observa decisiones y pide una prueba reproducible.</a:t>
-            </a:r>
-          </a:p>
-          <a:p>
-            <a:r>
-              <a:t>- Predice antes de ejecutar cuando haya código.</a:t>
-            </a:r>
-          </a:p>
-          <a:p>
-            <a:r>
-              <a:t>- Realiza la micropráctica o modificación prevista.</a:t>
-            </a:r>
-          </a:p>
-          <a:p>
-            <a:r>
-              <a:t>- Prueba el caso normal y, cuando exista una decisión o conversión, también el caso alternativo o erróneo.</a:t>
-            </a:r>
-          </a:p>
-          <a:p>
-            <a:r>
-              <a:t>- Conserva el código o resultado en el repositorio o espacio indicado.</a:t>
+              <a:t>Explica con predicción y ejemplo mínimo; comprueba comprensión antes de continuar.</a:t>
+            </a:r>
+          </a:p>
+          <a:p>
+            <a:r>
+              <a:t>- CORRECTO · String message = "Hola";</a:t>
+            </a:r>
+          </a:p>
+          <a:p>
+            <a:r>
+              <a:t>System.out.println(message);</a:t>
+            </a:r>
+          </a:p>
+          <a:p>
+            <a:r>
+              <a:t>- INCORRECTO · string message = "Hola"</a:t>
+            </a:r>
+          </a:p>
+          <a:p>
+            <a:r>
+              <a:t>System.out.println(message)</a:t>
+            </a:r>
+          </a:p>
+          <a:p>
+            <a:r>
+              <a:t>- Busca: mayúscula de String, punto y coma y equilibrio de delimitadores.</a:t>
             </a:r>
           </a:p>
           <a:p>
@@ -1095,7 +1125,7 @@
           </a:p>
           <a:p>
             <a:r>
-              <a:t>Diapositiva 6 de 9: Actividad central · 2</a:t>
+              <a:t>Diapositiva 6 de 9: Reconstruye y depura</a:t>
             </a:r>
           </a:p>
           <a:p>
@@ -1110,12 +1140,22 @@
           </a:p>
           <a:p>
             <a:r>
-              <a:t>- Registra una sola entrada en el diario individual; no crees un informe paralelo.</a:t>
-            </a:r>
-          </a:p>
-          <a:p>
-            <a:r>
-              <a:t>- ¿Qué puedes señalar, explicar y probar al terminar este checkpoint?</a:t>
+              <a:t>- Reconstruye la clase sin copiar directamente.</a:t>
+            </a:r>
+          </a:p>
+          <a:p>
+            <a:r>
+              <a:t>- Añade dos mensajes y un comentario que explique una decisión.</a:t>
+            </a:r>
+          </a:p>
+          <a:p>
+            <a:r>
+              <a:t>- Introduce un error de mayúsculas o delimitador y predice el diagnóstico.</a:t>
+            </a:r>
+          </a:p>
+          <a:p>
+            <a:r>
+              <a:t>- Compila, corrige y señala dónde comienza la ejecución.</a:t>
             </a:r>
           </a:p>
           <a:p>
@@ -1195,7 +1235,7 @@
           </a:p>
           <a:p>
             <a:r>
-              <a:t>Diapositiva 7 de 9: Evidencia y comprobación</a:t>
+              <a:t>Diapositiva 7 de 9: Comprueba la estructura</a:t>
             </a:r>
           </a:p>
           <a:p>
@@ -1210,17 +1250,22 @@
           </a:p>
           <a:p>
             <a:r>
-              <a:t>- conserva el código o la prueba en el lugar indicado por la sesión;</a:t>
-            </a:r>
-          </a:p>
-          <a:p>
-            <a:r>
-              <a:t>- añade una sola entrada al diario individual con prueba, bloqueo y siguiente paso;</a:t>
-            </a:r>
-          </a:p>
-          <a:p>
-            <a:r>
-              <a:t>- no copies la misma reflexión en otro documento; el Site personal seleccionará evidencias al cerrar H1.</a:t>
+              <a:t>- Archivo y clase pública tienen el mismo nombre.</a:t>
+            </a:r>
+          </a:p>
+          <a:p>
+            <a:r>
+              <a:t>- Las dos parejas de llaves están completas.</a:t>
+            </a:r>
+          </a:p>
+          <a:p>
+            <a:r>
+              <a:t>- Puedo señalar las instrucciones que generan salida.</a:t>
+            </a:r>
+          </a:p>
+          <a:p>
+            <a:r>
+              <a:t>- El comentario aporta información que el código no expresa solo.</a:t>
             </a:r>
           </a:p>
           <a:p>
@@ -1300,7 +1345,7 @@
           </a:p>
           <a:p>
             <a:r>
-              <a:t>Diapositiva 8 de 9: Seguridad y uso responsable</a:t>
+              <a:t>Diapositiva 8 de 9: Salida diagnóstica</a:t>
             </a:r>
           </a:p>
           <a:p>
@@ -1310,17 +1355,12 @@
           </a:p>
           <a:p>
             <a:r>
-              <a:t>Recuerda estos límites antes de que el alumnado comparta o publique:</a:t>
-            </a:r>
-          </a:p>
-          <a:p>
-            <a:r>
-              <a:t>- Usa datos ficticios y no publiques credenciales ni información personal.</a:t>
-            </a:r>
-          </a:p>
-          <a:p>
-            <a:r>
-              <a:t>- Si utilizas IA de forma sustantiva, registra propósito, propuesta, cambios propios y validación en el registro de IA del hito.</a:t>
+              <a:t>Cierra con explicación individual, prueba observable y siguiente paso concreto.</a:t>
+            </a:r>
+          </a:p>
+          <a:p>
+            <a:r>
+              <a:t>- Señala una regla sintáctica cuya ruptura impida compilar y explica por qué.</a:t>
             </a:r>
           </a:p>
           <a:p>
@@ -1400,7 +1440,7 @@
           </a:p>
           <a:p>
             <a:r>
-              <a:t>Diapositiva 9 de 9: Cierre y defensa</a:t>
+              <a:t>Diapositiva 9 de 9: Fuentes utilizadas</a:t>
             </a:r>
           </a:p>
           <a:p>
@@ -1410,12 +1450,22 @@
           </a:p>
           <a:p>
             <a:r>
-              <a:t>Cierra con explicación individual, prueba observable y siguiente paso concreto.</a:t>
-            </a:r>
-          </a:p>
-          <a:p>
-            <a:r>
-              <a:t>- ¿Qué puedes señalar, explicar y probar al terminar este checkpoint?</a:t>
+              <a:t>Indica al alumnado dónde ampliar el contenido y qué fragmentos se han adaptado.</a:t>
+            </a:r>
+          </a:p>
+          <a:p>
+            <a:r>
+              <a:t>- Libro: capítulo 01 · Tema 1: aspectos léxicos y comentarios</a:t>
+            </a:r>
+          </a:p>
+          <a:p>
+            <a:r>
+              <a:t>- Fichas S206-S215 y píldoras H1</a:t>
+            </a:r>
+          </a:p>
+          <a:p>
+            <a:r>
+              <a:t>- Ejemplos revisados y adaptados a MiniJarvis; no se copian errores ni capturas antiguas del PDF.</a:t>
             </a:r>
           </a:p>
           <a:p>
@@ -4660,7 +4710,7 @@
               </a:defRPr>
             </a:pPr>
             <a:r>
-              <a:t>H1 — Primer MiniJarvis · Fase HEXA: Investigar — aprender lo necesario</a:t>
+              <a:t>H1 — Primer MiniJarvis</a:t>
             </a:r>
           </a:p>
         </p:txBody>
@@ -4944,7 +4994,7 @@
               </a:defRPr>
             </a:pPr>
             <a:r>
-              <a:t>Qué debe conseguirse</a:t>
+              <a:t>Qué aprenderás y cómo lo demostrarás</a:t>
             </a:r>
           </a:p>
         </p:txBody>
@@ -5185,7 +5235,7 @@
               </a:defRPr>
             </a:pPr>
             <a:r>
-              <a:t>Al terminar: señala la evidencia, explica qué demuestra y reproduce la prueba.</a:t>
+              <a:t>Comprobación: Quede diagnosticada la comprensión.</a:t>
             </a:r>
           </a:p>
         </p:txBody>
@@ -5325,7 +5375,7 @@
               </a:defRPr>
             </a:pPr>
             <a:r>
-              <a:t>OBSERVAR ANTES DE ACTUAR</a:t>
+              <a:t>CÓDIGO EXPLICADO</a:t>
             </a:r>
           </a:p>
         </p:txBody>
@@ -5361,7 +5411,7 @@
               </a:defRPr>
             </a:pPr>
             <a:r>
-              <a:t>Ejemplo o demostración · 1</a:t>
+              <a:t>Estructura mínima completa</a:t>
             </a:r>
           </a:p>
         </p:txBody>
@@ -5453,8 +5503,8 @@
         </p:nvSpPr>
         <p:spPr>
           <a:xfrm>
-            <a:off x="621792" y="1353312"/>
-            <a:ext cx="10927080" cy="4526280"/>
+            <a:off x="621792" y="1325880"/>
+            <a:ext cx="7315200" cy="4709160"/>
           </a:xfrm>
           <a:prstGeom prst="roundRect">
             <a:avLst/>
@@ -5463,7 +5513,9 @@
             <a:srgbClr val="121824"/>
           </a:solidFill>
           <a:ln>
-            <a:noFill/>
+            <a:solidFill>
+              <a:srgbClr val="121824"/>
+            </a:solidFill>
           </a:ln>
         </p:spPr>
         <p:style>
@@ -5496,8 +5548,116 @@
         </p:nvSpPr>
         <p:spPr>
           <a:xfrm>
-            <a:off x="932688" y="1627632"/>
-            <a:ext cx="2057400" cy="411480"/>
+            <a:off x="822960" y="1572768"/>
+            <a:ext cx="6903720" cy="4251960"/>
+          </a:xfrm>
+          <a:prstGeom prst="rect">
+            <a:avLst/>
+          </a:prstGeom>
+          <a:noFill/>
+        </p:spPr>
+        <p:txBody>
+          <a:bodyPr wrap="none" lIns="164592" rIns="164592" tIns="109728" bIns="109728">
+            <a:spAutoFit/>
+          </a:bodyPr>
+          <a:lstStyle/>
+          <a:p>
+            <a:pPr>
+              <a:spcAft>
+                <a:spcPts val="0"/>
+              </a:spcAft>
+              <a:defRPr sz="1600">
+                <a:solidFill>
+                  <a:srgbClr val="FFFFFF"/>
+                </a:solidFill>
+                <a:latin typeface="Liberation Mono"/>
+              </a:defRPr>
+            </a:pPr>
+            <a:r>
+              <a:t>public class Main {</a:t>
+            </a:r>
+            <a:br/>
+            <a:r>
+              <a:t>    public static void main(String[] args) {</a:t>
+            </a:r>
+            <a:br/>
+            <a:r>
+              <a:t>        // Presenta la versión actual.</a:t>
+            </a:r>
+            <a:br/>
+            <a:r>
+              <a:t>        System.out.println("Hola");</a:t>
+            </a:r>
+            <a:br/>
+            <a:r>
+              <a:t>        System.out.println("MiniJarvis arranca");</a:t>
+            </a:r>
+            <a:br/>
+            <a:r>
+              <a:t>    }</a:t>
+            </a:r>
+            <a:br/>
+            <a:r>
+              <a:t>}</a:t>
+            </a:r>
+          </a:p>
+        </p:txBody>
+      </p:sp>
+      <p:sp>
+        <p:nvSpPr>
+          <p:cNvPr id="10" name="Rounded Rectangle 9"/>
+          <p:cNvSpPr/>
+          <p:nvPr/>
+        </p:nvSpPr>
+        <p:spPr>
+          <a:xfrm>
+            <a:off x="8156448" y="1325880"/>
+            <a:ext cx="3401568" cy="4709160"/>
+          </a:xfrm>
+          <a:prstGeom prst="roundRect">
+            <a:avLst/>
+          </a:prstGeom>
+          <a:solidFill>
+            <a:srgbClr val="FFFFFF"/>
+          </a:solidFill>
+          <a:ln>
+            <a:solidFill>
+              <a:srgbClr val="E5E9EF"/>
+            </a:solidFill>
+          </a:ln>
+        </p:spPr>
+        <p:style>
+          <a:lnRef idx="1">
+            <a:schemeClr val="accent1"/>
+          </a:lnRef>
+          <a:fillRef idx="3">
+            <a:schemeClr val="accent1"/>
+          </a:fillRef>
+          <a:effectRef idx="2">
+            <a:schemeClr val="accent1"/>
+          </a:effectRef>
+          <a:fontRef idx="minor">
+            <a:schemeClr val="lt1"/>
+          </a:fontRef>
+        </p:style>
+        <p:txBody>
+          <a:bodyPr rtlCol="0" anchor="ctr"/>
+          <a:lstStyle/>
+          <a:p>
+            <a:pPr algn="ctr"/>
+          </a:p>
+        </p:txBody>
+      </p:sp>
+      <p:sp>
+        <p:nvSpPr>
+          <p:cNvPr id="11" name="TextBox 10"/>
+          <p:cNvSpPr txBox="1"/>
+          <p:nvPr/>
+        </p:nvSpPr>
+        <p:spPr>
+          <a:xfrm>
+            <a:off x="8412480" y="1627632"/>
+            <a:ext cx="2880360" cy="320040"/>
           </a:xfrm>
           <a:prstGeom prst="rect">
             <a:avLst/>
@@ -5511,7 +5671,7 @@
           <a:lstStyle/>
           <a:p>
             <a:pPr algn="l">
-              <a:defRPr sz="1300" b="1">
+              <a:defRPr sz="1200" b="1">
                 <a:solidFill>
                   <a:srgbClr val="2F5BA8"/>
                 </a:solidFill>
@@ -5519,21 +5679,21 @@
               </a:defRPr>
             </a:pPr>
             <a:r>
-              <a:t>DEMOSTRACIÓN</a:t>
-            </a:r>
-          </a:p>
-        </p:txBody>
-      </p:sp>
-      <p:sp>
-        <p:nvSpPr>
-          <p:cNvPr id="10" name="TextBox 9"/>
+              <a:t>LEE Y PREDICE</a:t>
+            </a:r>
+          </a:p>
+        </p:txBody>
+      </p:sp>
+      <p:sp>
+        <p:nvSpPr>
+          <p:cNvPr id="12" name="TextBox 11"/>
           <p:cNvSpPr txBox="1"/>
           <p:nvPr/>
         </p:nvSpPr>
         <p:spPr>
           <a:xfrm>
-            <a:off x="932688" y="2212848"/>
-            <a:ext cx="9966960" cy="3246120"/>
+            <a:off x="8394192" y="2103120"/>
+            <a:ext cx="2788920" cy="3474720"/>
           </a:xfrm>
           <a:prstGeom prst="rect">
             <a:avLst/>
@@ -5550,15 +5710,15 @@
               <a:spcAft>
                 <a:spcPts val="900"/>
               </a:spcAft>
-              <a:defRPr sz="2200">
+              <a:defRPr sz="1700">
                 <a:solidFill>
-                  <a:srgbClr val="FFFFFF"/>
+                  <a:srgbClr val="1C2330"/>
                 </a:solidFill>
                 <a:latin typeface="Aptos"/>
               </a:defRPr>
             </a:pPr>
             <a:r>
-              <a:t>•  D1 · ¿Qué líneas hacen algo visible? — public class Main {</a:t>
+              <a:t>•  Main.java coincide con public class Main.</a:t>
             </a:r>
           </a:p>
           <a:p>
@@ -5566,63 +5726,15 @@
               <a:spcAft>
                 <a:spcPts val="900"/>
               </a:spcAft>
-              <a:defRPr sz="2200">
+              <a:defRPr sz="1700">
                 <a:solidFill>
-                  <a:srgbClr val="FFFFFF"/>
+                  <a:srgbClr val="1C2330"/>
                 </a:solidFill>
                 <a:latin typeface="Aptos"/>
               </a:defRPr>
             </a:pPr>
             <a:r>
-              <a:t>•  public static void main(String\[\] args) {</a:t>
-            </a:r>
-          </a:p>
-          <a:p>
-            <a:pPr>
-              <a:spcAft>
-                <a:spcPts val="900"/>
-              </a:spcAft>
-              <a:defRPr sz="2200">
-                <a:solidFill>
-                  <a:srgbClr val="FFFFFF"/>
-                </a:solidFill>
-                <a:latin typeface="Aptos"/>
-              </a:defRPr>
-            </a:pPr>
-            <a:r>
-              <a:t>•  System.out.println("Hola");</a:t>
-            </a:r>
-          </a:p>
-          <a:p>
-            <a:pPr>
-              <a:spcAft>
-                <a:spcPts val="900"/>
-              </a:spcAft>
-              <a:defRPr sz="2200">
-                <a:solidFill>
-                  <a:srgbClr val="FFFFFF"/>
-                </a:solidFill>
-                <a:latin typeface="Aptos"/>
-              </a:defRPr>
-            </a:pPr>
-            <a:r>
-              <a:t>•  System.out.println("MiniJarvis arranca");</a:t>
-            </a:r>
-          </a:p>
-          <a:p>
-            <a:pPr>
-              <a:spcAft>
-                <a:spcPts val="900"/>
-              </a:spcAft>
-              <a:defRPr sz="2200">
-                <a:solidFill>
-                  <a:srgbClr val="FFFFFF"/>
-                </a:solidFill>
-                <a:latin typeface="Aptos"/>
-              </a:defRPr>
-            </a:pPr>
-            <a:r>
-              <a:t>•  }</a:t>
+              <a:t>•  La ejecución comienza dentro de main.</a:t>
             </a:r>
           </a:p>
         </p:txBody>
@@ -5762,7 +5874,7 @@
               </a:defRPr>
             </a:pPr>
             <a:r>
-              <a:t>OBSERVAR ANTES DE ACTUAR</a:t>
+              <a:t>COMPRENDER</a:t>
             </a:r>
           </a:p>
         </p:txBody>
@@ -5798,7 +5910,7 @@
               </a:defRPr>
             </a:pPr>
             <a:r>
-              <a:t>Ejemplo o demostración · 2</a:t>
+              <a:t>Java exige precisión</a:t>
             </a:r>
           </a:p>
         </p:txBody>
@@ -5890,17 +6002,19 @@
         </p:nvSpPr>
         <p:spPr>
           <a:xfrm>
-            <a:off x="621792" y="1353312"/>
-            <a:ext cx="10927080" cy="4526280"/>
+            <a:off x="566928" y="1261872"/>
+            <a:ext cx="5212080" cy="2199132"/>
           </a:xfrm>
           <a:prstGeom prst="roundRect">
             <a:avLst/>
           </a:prstGeom>
           <a:solidFill>
-            <a:srgbClr val="121824"/>
+            <a:srgbClr val="FFFFFF"/>
           </a:solidFill>
           <a:ln>
-            <a:noFill/>
+            <a:solidFill>
+              <a:srgbClr val="E5E9EF"/>
+            </a:solidFill>
           </a:ln>
         </p:spPr>
         <p:style>
@@ -5933,8 +6047,8 @@
         </p:nvSpPr>
         <p:spPr>
           <a:xfrm>
-            <a:off x="932688" y="1627632"/>
-            <a:ext cx="2057400" cy="411480"/>
+            <a:off x="768096" y="1426463"/>
+            <a:ext cx="384048" cy="347472"/>
           </a:xfrm>
           <a:prstGeom prst="rect">
             <a:avLst/>
@@ -5948,7 +6062,7 @@
           <a:lstStyle/>
           <a:p>
             <a:pPr algn="l">
-              <a:defRPr sz="1300" b="1">
+              <a:defRPr sz="1500" b="1">
                 <a:solidFill>
                   <a:srgbClr val="2F5BA8"/>
                 </a:solidFill>
@@ -5956,7 +6070,7 @@
               </a:defRPr>
             </a:pPr>
             <a:r>
-              <a:t>DEMOSTRACIÓN</a:t>
+              <a:t>01</a:t>
             </a:r>
           </a:p>
         </p:txBody>
@@ -5969,8 +6083,8 @@
         </p:nvSpPr>
         <p:spPr>
           <a:xfrm>
-            <a:off x="932688" y="2212848"/>
-            <a:ext cx="9966960" cy="3246120"/>
+            <a:off x="1225295" y="1426463"/>
+            <a:ext cx="4434840" cy="1961388"/>
           </a:xfrm>
           <a:prstGeom prst="rect">
             <a:avLst/>
@@ -5978,56 +6092,372 @@
           <a:noFill/>
         </p:spPr>
         <p:txBody>
-          <a:bodyPr wrap="square" lIns="73152" rIns="45720" tIns="36576">
+          <a:bodyPr wrap="square" lIns="45720" rIns="45720" tIns="36576" bIns="36576" anchor="t">
             <a:spAutoFit/>
           </a:bodyPr>
           <a:lstStyle/>
           <a:p>
-            <a:pPr>
-              <a:spcAft>
-                <a:spcPts val="900"/>
-              </a:spcAft>
-              <a:defRPr sz="2200">
+            <a:pPr algn="l">
+              <a:defRPr sz="1800" b="0">
                 <a:solidFill>
-                  <a:srgbClr val="FFFFFF"/>
+                  <a:srgbClr val="1C2330"/>
                 </a:solidFill>
                 <a:latin typeface="Aptos"/>
               </a:defRPr>
             </a:pPr>
             <a:r>
-              <a:t>•  D2 · Clase, archivo y main — ARCHIVO Y CLASE: Main.java</a:t>
-            </a:r>
-          </a:p>
-          <a:p>
-            <a:pPr>
-              <a:spcAft>
-                <a:spcPts val="900"/>
-              </a:spcAft>
-              <a:defRPr sz="2200">
+              <a:t>Distingue mayúsculas: Main, main y String son identificadores diferentes.</a:t>
+            </a:r>
+          </a:p>
+        </p:txBody>
+      </p:sp>
+      <p:sp>
+        <p:nvSpPr>
+          <p:cNvPr id="11" name="Rounded Rectangle 10"/>
+          <p:cNvSpPr/>
+          <p:nvPr/>
+        </p:nvSpPr>
+        <p:spPr>
+          <a:xfrm>
+            <a:off x="6007608" y="1261872"/>
+            <a:ext cx="5212080" cy="2199132"/>
+          </a:xfrm>
+          <a:prstGeom prst="roundRect">
+            <a:avLst/>
+          </a:prstGeom>
+          <a:solidFill>
+            <a:srgbClr val="FFFFFF"/>
+          </a:solidFill>
+          <a:ln>
+            <a:solidFill>
+              <a:srgbClr val="E5E9EF"/>
+            </a:solidFill>
+          </a:ln>
+        </p:spPr>
+        <p:style>
+          <a:lnRef idx="1">
+            <a:schemeClr val="accent1"/>
+          </a:lnRef>
+          <a:fillRef idx="3">
+            <a:schemeClr val="accent1"/>
+          </a:fillRef>
+          <a:effectRef idx="2">
+            <a:schemeClr val="accent1"/>
+          </a:effectRef>
+          <a:fontRef idx="minor">
+            <a:schemeClr val="lt1"/>
+          </a:fontRef>
+        </p:style>
+        <p:txBody>
+          <a:bodyPr rtlCol="0" anchor="ctr"/>
+          <a:lstStyle/>
+          <a:p>
+            <a:pPr algn="ctr"/>
+          </a:p>
+        </p:txBody>
+      </p:sp>
+      <p:sp>
+        <p:nvSpPr>
+          <p:cNvPr id="12" name="TextBox 11"/>
+          <p:cNvSpPr txBox="1"/>
+          <p:nvPr/>
+        </p:nvSpPr>
+        <p:spPr>
+          <a:xfrm>
+            <a:off x="6208776" y="1426463"/>
+            <a:ext cx="384048" cy="347472"/>
+          </a:xfrm>
+          <a:prstGeom prst="rect">
+            <a:avLst/>
+          </a:prstGeom>
+          <a:noFill/>
+        </p:spPr>
+        <p:txBody>
+          <a:bodyPr wrap="square" lIns="45720" rIns="45720" tIns="36576" bIns="36576" anchor="t">
+            <a:spAutoFit/>
+          </a:bodyPr>
+          <a:lstStyle/>
+          <a:p>
+            <a:pPr algn="l">
+              <a:defRPr sz="1500" b="1">
                 <a:solidFill>
-                  <a:srgbClr val="FFFFFF"/>
+                  <a:srgbClr val="2F5BA8"/>
                 </a:solidFill>
                 <a:latin typeface="Aptos"/>
               </a:defRPr>
             </a:pPr>
             <a:r>
-              <a:t>•  ↕</a:t>
-            </a:r>
-          </a:p>
-          <a:p>
-            <a:pPr>
-              <a:spcAft>
-                <a:spcPts val="900"/>
-              </a:spcAft>
-              <a:defRPr sz="2200">
+              <a:t>02</a:t>
+            </a:r>
+          </a:p>
+        </p:txBody>
+      </p:sp>
+      <p:sp>
+        <p:nvSpPr>
+          <p:cNvPr id="13" name="TextBox 12"/>
+          <p:cNvSpPr txBox="1"/>
+          <p:nvPr/>
+        </p:nvSpPr>
+        <p:spPr>
+          <a:xfrm>
+            <a:off x="6665976" y="1426463"/>
+            <a:ext cx="4434840" cy="1961388"/>
+          </a:xfrm>
+          <a:prstGeom prst="rect">
+            <a:avLst/>
+          </a:prstGeom>
+          <a:noFill/>
+        </p:spPr>
+        <p:txBody>
+          <a:bodyPr wrap="square" lIns="45720" rIns="45720" tIns="36576" bIns="36576" anchor="t">
+            <a:spAutoFit/>
+          </a:bodyPr>
+          <a:lstStyle/>
+          <a:p>
+            <a:pPr algn="l">
+              <a:defRPr sz="1800" b="0">
                 <a:solidFill>
-                  <a:srgbClr val="FFFFFF"/>
+                  <a:srgbClr val="1C2330"/>
                 </a:solidFill>
                 <a:latin typeface="Aptos"/>
               </a:defRPr>
             </a:pPr>
             <a:r>
-              <a:t>•  public class Main \| PUNTO DE ENTRADA: public static void main(String\[\] args)</a:t>
+              <a:t>Las llaves delimitan bloques; paréntesis, comillas y punto y coma tienen funciones concretas.</a:t>
+            </a:r>
+          </a:p>
+        </p:txBody>
+      </p:sp>
+      <p:sp>
+        <p:nvSpPr>
+          <p:cNvPr id="14" name="Rounded Rectangle 13"/>
+          <p:cNvSpPr/>
+          <p:nvPr/>
+        </p:nvSpPr>
+        <p:spPr>
+          <a:xfrm>
+            <a:off x="566928" y="3662172"/>
+            <a:ext cx="5212080" cy="2199132"/>
+          </a:xfrm>
+          <a:prstGeom prst="roundRect">
+            <a:avLst/>
+          </a:prstGeom>
+          <a:solidFill>
+            <a:srgbClr val="FFFFFF"/>
+          </a:solidFill>
+          <a:ln>
+            <a:solidFill>
+              <a:srgbClr val="E5E9EF"/>
+            </a:solidFill>
+          </a:ln>
+        </p:spPr>
+        <p:style>
+          <a:lnRef idx="1">
+            <a:schemeClr val="accent1"/>
+          </a:lnRef>
+          <a:fillRef idx="3">
+            <a:schemeClr val="accent1"/>
+          </a:fillRef>
+          <a:effectRef idx="2">
+            <a:schemeClr val="accent1"/>
+          </a:effectRef>
+          <a:fontRef idx="minor">
+            <a:schemeClr val="lt1"/>
+          </a:fontRef>
+        </p:style>
+        <p:txBody>
+          <a:bodyPr rtlCol="0" anchor="ctr"/>
+          <a:lstStyle/>
+          <a:p>
+            <a:pPr algn="ctr"/>
+          </a:p>
+        </p:txBody>
+      </p:sp>
+      <p:sp>
+        <p:nvSpPr>
+          <p:cNvPr id="15" name="TextBox 14"/>
+          <p:cNvSpPr txBox="1"/>
+          <p:nvPr/>
+        </p:nvSpPr>
+        <p:spPr>
+          <a:xfrm>
+            <a:off x="768096" y="3826763"/>
+            <a:ext cx="384048" cy="347472"/>
+          </a:xfrm>
+          <a:prstGeom prst="rect">
+            <a:avLst/>
+          </a:prstGeom>
+          <a:noFill/>
+        </p:spPr>
+        <p:txBody>
+          <a:bodyPr wrap="square" lIns="45720" rIns="45720" tIns="36576" bIns="36576" anchor="t">
+            <a:spAutoFit/>
+          </a:bodyPr>
+          <a:lstStyle/>
+          <a:p>
+            <a:pPr algn="l">
+              <a:defRPr sz="1500" b="1">
+                <a:solidFill>
+                  <a:srgbClr val="2F5BA8"/>
+                </a:solidFill>
+                <a:latin typeface="Aptos"/>
+              </a:defRPr>
+            </a:pPr>
+            <a:r>
+              <a:t>03</a:t>
+            </a:r>
+          </a:p>
+        </p:txBody>
+      </p:sp>
+      <p:sp>
+        <p:nvSpPr>
+          <p:cNvPr id="16" name="TextBox 15"/>
+          <p:cNvSpPr txBox="1"/>
+          <p:nvPr/>
+        </p:nvSpPr>
+        <p:spPr>
+          <a:xfrm>
+            <a:off x="1225295" y="3826763"/>
+            <a:ext cx="4434840" cy="1961388"/>
+          </a:xfrm>
+          <a:prstGeom prst="rect">
+            <a:avLst/>
+          </a:prstGeom>
+          <a:noFill/>
+        </p:spPr>
+        <p:txBody>
+          <a:bodyPr wrap="square" lIns="45720" rIns="45720" tIns="36576" bIns="36576" anchor="t">
+            <a:spAutoFit/>
+          </a:bodyPr>
+          <a:lstStyle/>
+          <a:p>
+            <a:pPr algn="l">
+              <a:defRPr sz="1800" b="0">
+                <a:solidFill>
+                  <a:srgbClr val="1C2330"/>
+                </a:solidFill>
+                <a:latin typeface="Aptos"/>
+              </a:defRPr>
+            </a:pPr>
+            <a:r>
+              <a:t>Un identificador debe ser válido y comunicar intención.</a:t>
+            </a:r>
+          </a:p>
+        </p:txBody>
+      </p:sp>
+      <p:sp>
+        <p:nvSpPr>
+          <p:cNvPr id="17" name="Rounded Rectangle 16"/>
+          <p:cNvSpPr/>
+          <p:nvPr/>
+        </p:nvSpPr>
+        <p:spPr>
+          <a:xfrm>
+            <a:off x="6007608" y="3662172"/>
+            <a:ext cx="5212080" cy="2199132"/>
+          </a:xfrm>
+          <a:prstGeom prst="roundRect">
+            <a:avLst/>
+          </a:prstGeom>
+          <a:solidFill>
+            <a:srgbClr val="FFFFFF"/>
+          </a:solidFill>
+          <a:ln>
+            <a:solidFill>
+              <a:srgbClr val="E5E9EF"/>
+            </a:solidFill>
+          </a:ln>
+        </p:spPr>
+        <p:style>
+          <a:lnRef idx="1">
+            <a:schemeClr val="accent1"/>
+          </a:lnRef>
+          <a:fillRef idx="3">
+            <a:schemeClr val="accent1"/>
+          </a:fillRef>
+          <a:effectRef idx="2">
+            <a:schemeClr val="accent1"/>
+          </a:effectRef>
+          <a:fontRef idx="minor">
+            <a:schemeClr val="lt1"/>
+          </a:fontRef>
+        </p:style>
+        <p:txBody>
+          <a:bodyPr rtlCol="0" anchor="ctr"/>
+          <a:lstStyle/>
+          <a:p>
+            <a:pPr algn="ctr"/>
+          </a:p>
+        </p:txBody>
+      </p:sp>
+      <p:sp>
+        <p:nvSpPr>
+          <p:cNvPr id="18" name="TextBox 17"/>
+          <p:cNvSpPr txBox="1"/>
+          <p:nvPr/>
+        </p:nvSpPr>
+        <p:spPr>
+          <a:xfrm>
+            <a:off x="6208776" y="3826763"/>
+            <a:ext cx="384048" cy="347472"/>
+          </a:xfrm>
+          <a:prstGeom prst="rect">
+            <a:avLst/>
+          </a:prstGeom>
+          <a:noFill/>
+        </p:spPr>
+        <p:txBody>
+          <a:bodyPr wrap="square" lIns="45720" rIns="45720" tIns="36576" bIns="36576" anchor="t">
+            <a:spAutoFit/>
+          </a:bodyPr>
+          <a:lstStyle/>
+          <a:p>
+            <a:pPr algn="l">
+              <a:defRPr sz="1500" b="1">
+                <a:solidFill>
+                  <a:srgbClr val="2F5BA8"/>
+                </a:solidFill>
+                <a:latin typeface="Aptos"/>
+              </a:defRPr>
+            </a:pPr>
+            <a:r>
+              <a:t>04</a:t>
+            </a:r>
+          </a:p>
+        </p:txBody>
+      </p:sp>
+      <p:sp>
+        <p:nvSpPr>
+          <p:cNvPr id="19" name="TextBox 18"/>
+          <p:cNvSpPr txBox="1"/>
+          <p:nvPr/>
+        </p:nvSpPr>
+        <p:spPr>
+          <a:xfrm>
+            <a:off x="6665976" y="3826763"/>
+            <a:ext cx="4434840" cy="1961388"/>
+          </a:xfrm>
+          <a:prstGeom prst="rect">
+            <a:avLst/>
+          </a:prstGeom>
+          <a:noFill/>
+        </p:spPr>
+        <p:txBody>
+          <a:bodyPr wrap="square" lIns="45720" rIns="45720" tIns="36576" bIns="36576" anchor="t">
+            <a:spAutoFit/>
+          </a:bodyPr>
+          <a:lstStyle/>
+          <a:p>
+            <a:pPr algn="l">
+              <a:defRPr sz="1800" b="0">
+                <a:solidFill>
+                  <a:srgbClr val="1C2330"/>
+                </a:solidFill>
+                <a:latin typeface="Aptos"/>
+              </a:defRPr>
+            </a:pPr>
+            <a:r>
+              <a:t>Un comentario útil explica contexto o decisión; no repite una instrucción obvia.</a:t>
             </a:r>
           </a:p>
         </p:txBody>
@@ -6167,7 +6597,7 @@
               </a:defRPr>
             </a:pPr>
             <a:r>
-              <a:t>APLICAR Y DECIDIR</a:t>
+              <a:t>CONTRASTAR PARA DECIDIR</a:t>
             </a:r>
           </a:p>
         </p:txBody>
@@ -6203,7 +6633,7 @@
               </a:defRPr>
             </a:pPr>
             <a:r>
-              <a:t>Actividad central · 1</a:t>
+              <a:t>Detecta antes de compilar</a:t>
             </a:r>
           </a:p>
         </p:txBody>
@@ -6295,8 +6725,8 @@
         </p:nvSpPr>
         <p:spPr>
           <a:xfrm>
-            <a:off x="658368" y="1307592"/>
-            <a:ext cx="10835640" cy="1049274"/>
+            <a:off x="621792" y="1325880"/>
+            <a:ext cx="5230368" cy="3401568"/>
           </a:xfrm>
           <a:prstGeom prst="roundRect">
             <a:avLst/>
@@ -6306,7 +6736,7 @@
           </a:solidFill>
           <a:ln>
             <a:solidFill>
-              <a:srgbClr val="E5E9EF"/>
+              <a:srgbClr val="445B80"/>
             </a:solidFill>
           </a:ln>
         </p:spPr>
@@ -6334,14 +6764,59 @@
       </p:sp>
       <p:sp>
         <p:nvSpPr>
-          <p:cNvPr id="9" name="TextBox 8"/>
+          <p:cNvPr id="9" name="Rounded Rectangle 8"/>
+          <p:cNvSpPr/>
+          <p:nvPr/>
+        </p:nvSpPr>
+        <p:spPr>
+          <a:xfrm>
+            <a:off x="850392" y="1572768"/>
+            <a:ext cx="566928" cy="475488"/>
+          </a:xfrm>
+          <a:prstGeom prst="roundRect">
+            <a:avLst/>
+          </a:prstGeom>
+          <a:solidFill>
+            <a:srgbClr val="445B80"/>
+          </a:solidFill>
+          <a:ln>
+            <a:solidFill>
+              <a:srgbClr val="445B80"/>
+            </a:solidFill>
+          </a:ln>
+        </p:spPr>
+        <p:style>
+          <a:lnRef idx="1">
+            <a:schemeClr val="accent1"/>
+          </a:lnRef>
+          <a:fillRef idx="3">
+            <a:schemeClr val="accent1"/>
+          </a:fillRef>
+          <a:effectRef idx="2">
+            <a:schemeClr val="accent1"/>
+          </a:effectRef>
+          <a:fontRef idx="minor">
+            <a:schemeClr val="lt1"/>
+          </a:fontRef>
+        </p:style>
+        <p:txBody>
+          <a:bodyPr rtlCol="0" anchor="ctr"/>
+          <a:lstStyle/>
+          <a:p>
+            <a:pPr algn="ctr"/>
+          </a:p>
+        </p:txBody>
+      </p:sp>
+      <p:sp>
+        <p:nvSpPr>
+          <p:cNvPr id="10" name="TextBox 9"/>
           <p:cNvSpPr txBox="1"/>
           <p:nvPr/>
         </p:nvSpPr>
         <p:spPr>
           <a:xfrm>
-            <a:off x="850392" y="1453895"/>
-            <a:ext cx="685800" cy="384048"/>
+            <a:off x="850392" y="1682496"/>
+            <a:ext cx="566928" cy="182880"/>
           </a:xfrm>
           <a:prstGeom prst="rect">
             <a:avLst/>
@@ -6354,30 +6829,30 @@
           </a:bodyPr>
           <a:lstStyle/>
           <a:p>
-            <a:pPr algn="l">
-              <a:defRPr sz="1200" b="1">
+            <a:pPr algn="ctr">
+              <a:defRPr sz="1300" b="1">
                 <a:solidFill>
-                  <a:srgbClr val="2F5BA8"/>
+                  <a:srgbClr val="FFFFFF"/>
                 </a:solidFill>
                 <a:latin typeface="Aptos"/>
               </a:defRPr>
             </a:pPr>
             <a:r>
-              <a:t>PASO 1</a:t>
-            </a:r>
-          </a:p>
-        </p:txBody>
-      </p:sp>
-      <p:sp>
-        <p:nvSpPr>
-          <p:cNvPr id="10" name="TextBox 9"/>
+              <a:t>A</a:t>
+            </a:r>
+          </a:p>
+        </p:txBody>
+      </p:sp>
+      <p:sp>
+        <p:nvSpPr>
+          <p:cNvPr id="11" name="TextBox 10"/>
           <p:cNvSpPr txBox="1"/>
           <p:nvPr/>
         </p:nvSpPr>
         <p:spPr>
           <a:xfrm>
-            <a:off x="1664208" y="1417319"/>
-            <a:ext cx="9464040" cy="829818"/>
+            <a:off x="896112" y="2304288"/>
+            <a:ext cx="4663440" cy="2011680"/>
           </a:xfrm>
           <a:prstGeom prst="rect">
             <a:avLst/>
@@ -6385,35 +6860,42 @@
           <a:noFill/>
         </p:spPr>
         <p:txBody>
-          <a:bodyPr wrap="square" lIns="45720" rIns="45720" tIns="36576" bIns="36576" anchor="t">
+          <a:bodyPr wrap="none" lIns="164592" rIns="164592" tIns="109728" bIns="109728">
             <a:spAutoFit/>
           </a:bodyPr>
           <a:lstStyle/>
           <a:p>
-            <a:pPr algn="l">
-              <a:defRPr sz="2000" b="0">
+            <a:pPr>
+              <a:spcAft>
+                <a:spcPts val="0"/>
+              </a:spcAft>
+              <a:defRPr sz="1600">
                 <a:solidFill>
                   <a:srgbClr val="1C2330"/>
                 </a:solidFill>
-                <a:latin typeface="Aptos"/>
+                <a:latin typeface="Liberation Mono"/>
               </a:defRPr>
             </a:pPr>
             <a:r>
-              <a:t>Predice antes de ejecutar cuando haya código.</a:t>
-            </a:r>
-          </a:p>
-        </p:txBody>
-      </p:sp>
-      <p:sp>
-        <p:nvSpPr>
-          <p:cNvPr id="11" name="Rounded Rectangle 10"/>
+              <a:t>CORRECTO · String message = "Hola";</a:t>
+            </a:r>
+            <a:br/>
+            <a:r>
+              <a:t>System.out.println(message);</a:t>
+            </a:r>
+          </a:p>
+        </p:txBody>
+      </p:sp>
+      <p:sp>
+        <p:nvSpPr>
+          <p:cNvPr id="12" name="Rounded Rectangle 11"/>
           <p:cNvSpPr/>
           <p:nvPr/>
         </p:nvSpPr>
         <p:spPr>
           <a:xfrm>
-            <a:off x="658368" y="2542032"/>
-            <a:ext cx="10835640" cy="1049274"/>
+            <a:off x="6153912" y="1325880"/>
+            <a:ext cx="5230368" cy="3401568"/>
           </a:xfrm>
           <a:prstGeom prst="roundRect">
             <a:avLst/>
@@ -6423,7 +6905,7 @@
           </a:solidFill>
           <a:ln>
             <a:solidFill>
-              <a:srgbClr val="E5E9EF"/>
+              <a:srgbClr val="2F5BA8"/>
             </a:solidFill>
           </a:ln>
         </p:spPr>
@@ -6451,96 +6933,24 @@
       </p:sp>
       <p:sp>
         <p:nvSpPr>
-          <p:cNvPr id="12" name="TextBox 11"/>
-          <p:cNvSpPr txBox="1"/>
-          <p:nvPr/>
-        </p:nvSpPr>
-        <p:spPr>
-          <a:xfrm>
-            <a:off x="850392" y="2688336"/>
-            <a:ext cx="685800" cy="384048"/>
-          </a:xfrm>
-          <a:prstGeom prst="rect">
-            <a:avLst/>
-          </a:prstGeom>
-          <a:noFill/>
-        </p:spPr>
-        <p:txBody>
-          <a:bodyPr wrap="square" lIns="45720" rIns="45720" tIns="36576" bIns="36576" anchor="t">
-            <a:spAutoFit/>
-          </a:bodyPr>
-          <a:lstStyle/>
-          <a:p>
-            <a:pPr algn="l">
-              <a:defRPr sz="1200" b="1">
-                <a:solidFill>
-                  <a:srgbClr val="2F5BA8"/>
-                </a:solidFill>
-                <a:latin typeface="Aptos"/>
-              </a:defRPr>
-            </a:pPr>
-            <a:r>
-              <a:t>PASO 2</a:t>
-            </a:r>
-          </a:p>
-        </p:txBody>
-      </p:sp>
-      <p:sp>
-        <p:nvSpPr>
-          <p:cNvPr id="13" name="TextBox 12"/>
-          <p:cNvSpPr txBox="1"/>
-          <p:nvPr/>
-        </p:nvSpPr>
-        <p:spPr>
-          <a:xfrm>
-            <a:off x="1664208" y="2651760"/>
-            <a:ext cx="9464040" cy="829818"/>
-          </a:xfrm>
-          <a:prstGeom prst="rect">
-            <a:avLst/>
-          </a:prstGeom>
-          <a:noFill/>
-        </p:spPr>
-        <p:txBody>
-          <a:bodyPr wrap="square" lIns="45720" rIns="45720" tIns="36576" bIns="36576" anchor="t">
-            <a:spAutoFit/>
-          </a:bodyPr>
-          <a:lstStyle/>
-          <a:p>
-            <a:pPr algn="l">
-              <a:defRPr sz="2000" b="0">
-                <a:solidFill>
-                  <a:srgbClr val="1C2330"/>
-                </a:solidFill>
-                <a:latin typeface="Aptos"/>
-              </a:defRPr>
-            </a:pPr>
-            <a:r>
-              <a:t>Realiza la micropráctica o modificación prevista.</a:t>
-            </a:r>
-          </a:p>
-        </p:txBody>
-      </p:sp>
-      <p:sp>
-        <p:nvSpPr>
-          <p:cNvPr id="14" name="Rounded Rectangle 13"/>
+          <p:cNvPr id="13" name="Rounded Rectangle 12"/>
           <p:cNvSpPr/>
           <p:nvPr/>
         </p:nvSpPr>
         <p:spPr>
           <a:xfrm>
-            <a:off x="658368" y="3776472"/>
-            <a:ext cx="10835640" cy="1049274"/>
+            <a:off x="6382512" y="1572768"/>
+            <a:ext cx="566928" cy="475488"/>
           </a:xfrm>
           <a:prstGeom prst="roundRect">
             <a:avLst/>
           </a:prstGeom>
           <a:solidFill>
-            <a:srgbClr val="FFFFFF"/>
+            <a:srgbClr val="2F5BA8"/>
           </a:solidFill>
           <a:ln>
             <a:solidFill>
-              <a:srgbClr val="E5E9EF"/>
+              <a:srgbClr val="2F5BA8"/>
             </a:solidFill>
           </a:ln>
         </p:spPr>
@@ -6568,14 +6978,14 @@
       </p:sp>
       <p:sp>
         <p:nvSpPr>
-          <p:cNvPr id="15" name="TextBox 14"/>
+          <p:cNvPr id="14" name="TextBox 13"/>
           <p:cNvSpPr txBox="1"/>
           <p:nvPr/>
         </p:nvSpPr>
         <p:spPr>
           <a:xfrm>
-            <a:off x="850392" y="3922776"/>
-            <a:ext cx="685800" cy="384048"/>
+            <a:off x="6382512" y="1682496"/>
+            <a:ext cx="566928" cy="182880"/>
           </a:xfrm>
           <a:prstGeom prst="rect">
             <a:avLst/>
@@ -6588,30 +6998,30 @@
           </a:bodyPr>
           <a:lstStyle/>
           <a:p>
-            <a:pPr algn="l">
-              <a:defRPr sz="1200" b="1">
+            <a:pPr algn="ctr">
+              <a:defRPr sz="1300" b="1">
                 <a:solidFill>
-                  <a:srgbClr val="2F5BA8"/>
+                  <a:srgbClr val="FFFFFF"/>
                 </a:solidFill>
                 <a:latin typeface="Aptos"/>
               </a:defRPr>
             </a:pPr>
             <a:r>
-              <a:t>PASO 3</a:t>
-            </a:r>
-          </a:p>
-        </p:txBody>
-      </p:sp>
-      <p:sp>
-        <p:nvSpPr>
-          <p:cNvPr id="16" name="TextBox 15"/>
+              <a:t>B</a:t>
+            </a:r>
+          </a:p>
+        </p:txBody>
+      </p:sp>
+      <p:sp>
+        <p:nvSpPr>
+          <p:cNvPr id="15" name="TextBox 14"/>
           <p:cNvSpPr txBox="1"/>
           <p:nvPr/>
         </p:nvSpPr>
         <p:spPr>
           <a:xfrm>
-            <a:off x="1664208" y="3886200"/>
-            <a:ext cx="9464040" cy="829818"/>
+            <a:off x="6428232" y="2304288"/>
+            <a:ext cx="4663440" cy="2011680"/>
           </a:xfrm>
           <a:prstGeom prst="rect">
             <a:avLst/>
@@ -6619,45 +7029,52 @@
           <a:noFill/>
         </p:spPr>
         <p:txBody>
-          <a:bodyPr wrap="square" lIns="45720" rIns="45720" tIns="36576" bIns="36576" anchor="t">
+          <a:bodyPr wrap="none" lIns="164592" rIns="164592" tIns="109728" bIns="109728">
             <a:spAutoFit/>
           </a:bodyPr>
           <a:lstStyle/>
           <a:p>
-            <a:pPr algn="l">
-              <a:defRPr sz="2000" b="0">
+            <a:pPr>
+              <a:spcAft>
+                <a:spcPts val="0"/>
+              </a:spcAft>
+              <a:defRPr sz="1600">
                 <a:solidFill>
                   <a:srgbClr val="1C2330"/>
                 </a:solidFill>
-                <a:latin typeface="Aptos"/>
+                <a:latin typeface="Liberation Mono"/>
               </a:defRPr>
             </a:pPr>
             <a:r>
-              <a:t>Prueba el caso normal y, cuando exista una decisión o conversión, también el caso alternativo o erróneo.</a:t>
-            </a:r>
-          </a:p>
-        </p:txBody>
-      </p:sp>
-      <p:sp>
-        <p:nvSpPr>
-          <p:cNvPr id="17" name="Rounded Rectangle 16"/>
+              <a:t>INCORRECTO · string message = "Hola"</a:t>
+            </a:r>
+            <a:br/>
+            <a:r>
+              <a:t>System.out.println(message)</a:t>
+            </a:r>
+          </a:p>
+        </p:txBody>
+      </p:sp>
+      <p:sp>
+        <p:nvSpPr>
+          <p:cNvPr id="16" name="Rounded Rectangle 15"/>
           <p:cNvSpPr/>
           <p:nvPr/>
         </p:nvSpPr>
         <p:spPr>
           <a:xfrm>
-            <a:off x="658368" y="5010912"/>
-            <a:ext cx="10835640" cy="1049274"/>
+            <a:off x="621792" y="5010912"/>
+            <a:ext cx="10762488" cy="932688"/>
           </a:xfrm>
           <a:prstGeom prst="roundRect">
             <a:avLst/>
           </a:prstGeom>
           <a:solidFill>
-            <a:srgbClr val="FFFFFF"/>
+            <a:srgbClr val="121824"/>
           </a:solidFill>
           <a:ln>
             <a:solidFill>
-              <a:srgbClr val="E5E9EF"/>
+              <a:srgbClr val="121824"/>
             </a:solidFill>
           </a:ln>
         </p:spPr>
@@ -6685,14 +7102,14 @@
       </p:sp>
       <p:sp>
         <p:nvSpPr>
-          <p:cNvPr id="18" name="TextBox 17"/>
+          <p:cNvPr id="17" name="TextBox 16"/>
           <p:cNvSpPr txBox="1"/>
           <p:nvPr/>
         </p:nvSpPr>
         <p:spPr>
           <a:xfrm>
-            <a:off x="850392" y="5157216"/>
-            <a:ext cx="685800" cy="384048"/>
+            <a:off x="896112" y="5230368"/>
+            <a:ext cx="10204704" cy="475488"/>
           </a:xfrm>
           <a:prstGeom prst="rect">
             <a:avLst/>
@@ -6705,52 +7122,16 @@
           </a:bodyPr>
           <a:lstStyle/>
           <a:p>
-            <a:pPr algn="l">
-              <a:defRPr sz="1200" b="1">
+            <a:pPr algn="ctr">
+              <a:defRPr sz="1700" b="1">
                 <a:solidFill>
-                  <a:srgbClr val="2F5BA8"/>
+                  <a:srgbClr val="FFFFFF"/>
                 </a:solidFill>
                 <a:latin typeface="Aptos"/>
               </a:defRPr>
             </a:pPr>
             <a:r>
-              <a:t>PASO 4</a:t>
-            </a:r>
-          </a:p>
-        </p:txBody>
-      </p:sp>
-      <p:sp>
-        <p:nvSpPr>
-          <p:cNvPr id="19" name="TextBox 18"/>
-          <p:cNvSpPr txBox="1"/>
-          <p:nvPr/>
-        </p:nvSpPr>
-        <p:spPr>
-          <a:xfrm>
-            <a:off x="1664208" y="5120640"/>
-            <a:ext cx="9464040" cy="829818"/>
-          </a:xfrm>
-          <a:prstGeom prst="rect">
-            <a:avLst/>
-          </a:prstGeom>
-          <a:noFill/>
-        </p:spPr>
-        <p:txBody>
-          <a:bodyPr wrap="square" lIns="45720" rIns="45720" tIns="36576" bIns="36576" anchor="t">
-            <a:spAutoFit/>
-          </a:bodyPr>
-          <a:lstStyle/>
-          <a:p>
-            <a:pPr algn="l">
-              <a:defRPr sz="2000" b="0">
-                <a:solidFill>
-                  <a:srgbClr val="1C2330"/>
-                </a:solidFill>
-                <a:latin typeface="Aptos"/>
-              </a:defRPr>
-            </a:pPr>
-            <a:r>
-              <a:t>Conserva el código o resultado en el repositorio o espacio indicado.</a:t>
+              <a:t>Busca: mayúscula de String, punto y coma y equilibrio de delimitadores.</a:t>
             </a:r>
           </a:p>
         </p:txBody>
@@ -6926,7 +7307,7 @@
               </a:defRPr>
             </a:pPr>
             <a:r>
-              <a:t>Actividad central · 2</a:t>
+              <a:t>Reconstruye y depura</a:t>
             </a:r>
           </a:p>
         </p:txBody>
@@ -7019,7 +7400,7 @@
         <p:spPr>
           <a:xfrm>
             <a:off x="658368" y="1307592"/>
-            <a:ext cx="10835640" cy="2226564"/>
+            <a:ext cx="10835640" cy="1049274"/>
           </a:xfrm>
           <a:prstGeom prst="roundRect">
             <a:avLst/>
@@ -7086,7 +7467,7 @@
               </a:defRPr>
             </a:pPr>
             <a:r>
-              <a:t>PASO 6</a:t>
+              <a:t>PASO 1</a:t>
             </a:r>
           </a:p>
         </p:txBody>
@@ -7100,7 +7481,7 @@
         <p:spPr>
           <a:xfrm>
             <a:off x="1664208" y="1417319"/>
-            <a:ext cx="9464040" cy="2007108"/>
+            <a:ext cx="9464040" cy="829818"/>
           </a:xfrm>
           <a:prstGeom prst="rect">
             <a:avLst/>
@@ -7122,7 +7503,7 @@
               </a:defRPr>
             </a:pPr>
             <a:r>
-              <a:t>Registra una sola entrada en el diario individual; no crees un informe paralelo.</a:t>
+              <a:t>Reconstruye la clase sin copiar directamente.</a:t>
             </a:r>
           </a:p>
         </p:txBody>
@@ -7135,8 +7516,8 @@
         </p:nvSpPr>
         <p:spPr>
           <a:xfrm>
-            <a:off x="658368" y="3776472"/>
-            <a:ext cx="10835640" cy="2226564"/>
+            <a:off x="658368" y="2542032"/>
+            <a:ext cx="10835640" cy="1049274"/>
           </a:xfrm>
           <a:prstGeom prst="roundRect">
             <a:avLst/>
@@ -7180,7 +7561,7 @@
         </p:nvSpPr>
         <p:spPr>
           <a:xfrm>
-            <a:off x="850392" y="3922776"/>
+            <a:off x="850392" y="2688336"/>
             <a:ext cx="685800" cy="384048"/>
           </a:xfrm>
           <a:prstGeom prst="rect">
@@ -7203,7 +7584,7 @@
               </a:defRPr>
             </a:pPr>
             <a:r>
-              <a:t>PASO 7</a:t>
+              <a:t>PASO 2</a:t>
             </a:r>
           </a:p>
         </p:txBody>
@@ -7216,8 +7597,8 @@
         </p:nvSpPr>
         <p:spPr>
           <a:xfrm>
-            <a:off x="1664208" y="3886200"/>
-            <a:ext cx="9464040" cy="2007108"/>
+            <a:off x="1664208" y="2651760"/>
+            <a:ext cx="9464040" cy="829818"/>
           </a:xfrm>
           <a:prstGeom prst="rect">
             <a:avLst/>
@@ -7239,7 +7620,241 @@
               </a:defRPr>
             </a:pPr>
             <a:r>
-              <a:t>¿Qué puedes señalar, explicar y probar al terminar este checkpoint?</a:t>
+              <a:t>Añade dos mensajes y un comentario que explique una decisión.</a:t>
+            </a:r>
+          </a:p>
+        </p:txBody>
+      </p:sp>
+      <p:sp>
+        <p:nvSpPr>
+          <p:cNvPr id="14" name="Rounded Rectangle 13"/>
+          <p:cNvSpPr/>
+          <p:nvPr/>
+        </p:nvSpPr>
+        <p:spPr>
+          <a:xfrm>
+            <a:off x="658368" y="3776472"/>
+            <a:ext cx="10835640" cy="1049274"/>
+          </a:xfrm>
+          <a:prstGeom prst="roundRect">
+            <a:avLst/>
+          </a:prstGeom>
+          <a:solidFill>
+            <a:srgbClr val="FFFFFF"/>
+          </a:solidFill>
+          <a:ln>
+            <a:solidFill>
+              <a:srgbClr val="E5E9EF"/>
+            </a:solidFill>
+          </a:ln>
+        </p:spPr>
+        <p:style>
+          <a:lnRef idx="1">
+            <a:schemeClr val="accent1"/>
+          </a:lnRef>
+          <a:fillRef idx="3">
+            <a:schemeClr val="accent1"/>
+          </a:fillRef>
+          <a:effectRef idx="2">
+            <a:schemeClr val="accent1"/>
+          </a:effectRef>
+          <a:fontRef idx="minor">
+            <a:schemeClr val="lt1"/>
+          </a:fontRef>
+        </p:style>
+        <p:txBody>
+          <a:bodyPr rtlCol="0" anchor="ctr"/>
+          <a:lstStyle/>
+          <a:p>
+            <a:pPr algn="ctr"/>
+          </a:p>
+        </p:txBody>
+      </p:sp>
+      <p:sp>
+        <p:nvSpPr>
+          <p:cNvPr id="15" name="TextBox 14"/>
+          <p:cNvSpPr txBox="1"/>
+          <p:nvPr/>
+        </p:nvSpPr>
+        <p:spPr>
+          <a:xfrm>
+            <a:off x="850392" y="3922776"/>
+            <a:ext cx="685800" cy="384048"/>
+          </a:xfrm>
+          <a:prstGeom prst="rect">
+            <a:avLst/>
+          </a:prstGeom>
+          <a:noFill/>
+        </p:spPr>
+        <p:txBody>
+          <a:bodyPr wrap="square" lIns="45720" rIns="45720" tIns="36576" bIns="36576" anchor="t">
+            <a:spAutoFit/>
+          </a:bodyPr>
+          <a:lstStyle/>
+          <a:p>
+            <a:pPr algn="l">
+              <a:defRPr sz="1200" b="1">
+                <a:solidFill>
+                  <a:srgbClr val="2F5BA8"/>
+                </a:solidFill>
+                <a:latin typeface="Aptos"/>
+              </a:defRPr>
+            </a:pPr>
+            <a:r>
+              <a:t>PASO 3</a:t>
+            </a:r>
+          </a:p>
+        </p:txBody>
+      </p:sp>
+      <p:sp>
+        <p:nvSpPr>
+          <p:cNvPr id="16" name="TextBox 15"/>
+          <p:cNvSpPr txBox="1"/>
+          <p:nvPr/>
+        </p:nvSpPr>
+        <p:spPr>
+          <a:xfrm>
+            <a:off x="1664208" y="3886200"/>
+            <a:ext cx="9464040" cy="829818"/>
+          </a:xfrm>
+          <a:prstGeom prst="rect">
+            <a:avLst/>
+          </a:prstGeom>
+          <a:noFill/>
+        </p:spPr>
+        <p:txBody>
+          <a:bodyPr wrap="square" lIns="45720" rIns="45720" tIns="36576" bIns="36576" anchor="t">
+            <a:spAutoFit/>
+          </a:bodyPr>
+          <a:lstStyle/>
+          <a:p>
+            <a:pPr algn="l">
+              <a:defRPr sz="2000" b="0">
+                <a:solidFill>
+                  <a:srgbClr val="1C2330"/>
+                </a:solidFill>
+                <a:latin typeface="Aptos"/>
+              </a:defRPr>
+            </a:pPr>
+            <a:r>
+              <a:t>Introduce un error de mayúsculas o delimitador y predice el diagnóstico.</a:t>
+            </a:r>
+          </a:p>
+        </p:txBody>
+      </p:sp>
+      <p:sp>
+        <p:nvSpPr>
+          <p:cNvPr id="17" name="Rounded Rectangle 16"/>
+          <p:cNvSpPr/>
+          <p:nvPr/>
+        </p:nvSpPr>
+        <p:spPr>
+          <a:xfrm>
+            <a:off x="658368" y="5010912"/>
+            <a:ext cx="10835640" cy="1049274"/>
+          </a:xfrm>
+          <a:prstGeom prst="roundRect">
+            <a:avLst/>
+          </a:prstGeom>
+          <a:solidFill>
+            <a:srgbClr val="FFFFFF"/>
+          </a:solidFill>
+          <a:ln>
+            <a:solidFill>
+              <a:srgbClr val="E5E9EF"/>
+            </a:solidFill>
+          </a:ln>
+        </p:spPr>
+        <p:style>
+          <a:lnRef idx="1">
+            <a:schemeClr val="accent1"/>
+          </a:lnRef>
+          <a:fillRef idx="3">
+            <a:schemeClr val="accent1"/>
+          </a:fillRef>
+          <a:effectRef idx="2">
+            <a:schemeClr val="accent1"/>
+          </a:effectRef>
+          <a:fontRef idx="minor">
+            <a:schemeClr val="lt1"/>
+          </a:fontRef>
+        </p:style>
+        <p:txBody>
+          <a:bodyPr rtlCol="0" anchor="ctr"/>
+          <a:lstStyle/>
+          <a:p>
+            <a:pPr algn="ctr"/>
+          </a:p>
+        </p:txBody>
+      </p:sp>
+      <p:sp>
+        <p:nvSpPr>
+          <p:cNvPr id="18" name="TextBox 17"/>
+          <p:cNvSpPr txBox="1"/>
+          <p:nvPr/>
+        </p:nvSpPr>
+        <p:spPr>
+          <a:xfrm>
+            <a:off x="850392" y="5157216"/>
+            <a:ext cx="685800" cy="384048"/>
+          </a:xfrm>
+          <a:prstGeom prst="rect">
+            <a:avLst/>
+          </a:prstGeom>
+          <a:noFill/>
+        </p:spPr>
+        <p:txBody>
+          <a:bodyPr wrap="square" lIns="45720" rIns="45720" tIns="36576" bIns="36576" anchor="t">
+            <a:spAutoFit/>
+          </a:bodyPr>
+          <a:lstStyle/>
+          <a:p>
+            <a:pPr algn="l">
+              <a:defRPr sz="1200" b="1">
+                <a:solidFill>
+                  <a:srgbClr val="2F5BA8"/>
+                </a:solidFill>
+                <a:latin typeface="Aptos"/>
+              </a:defRPr>
+            </a:pPr>
+            <a:r>
+              <a:t>PASO 4</a:t>
+            </a:r>
+          </a:p>
+        </p:txBody>
+      </p:sp>
+      <p:sp>
+        <p:nvSpPr>
+          <p:cNvPr id="19" name="TextBox 18"/>
+          <p:cNvSpPr txBox="1"/>
+          <p:nvPr/>
+        </p:nvSpPr>
+        <p:spPr>
+          <a:xfrm>
+            <a:off x="1664208" y="5120640"/>
+            <a:ext cx="9464040" cy="829818"/>
+          </a:xfrm>
+          <a:prstGeom prst="rect">
+            <a:avLst/>
+          </a:prstGeom>
+          <a:noFill/>
+        </p:spPr>
+        <p:txBody>
+          <a:bodyPr wrap="square" lIns="45720" rIns="45720" tIns="36576" bIns="36576" anchor="t">
+            <a:spAutoFit/>
+          </a:bodyPr>
+          <a:lstStyle/>
+          <a:p>
+            <a:pPr algn="l">
+              <a:defRPr sz="2000" b="0">
+                <a:solidFill>
+                  <a:srgbClr val="1C2330"/>
+                </a:solidFill>
+                <a:latin typeface="Aptos"/>
+              </a:defRPr>
+            </a:pPr>
+            <a:r>
+              <a:t>Compila, corrige y señala dónde comienza la ejecución.</a:t>
             </a:r>
           </a:p>
         </p:txBody>
@@ -7415,7 +8030,7 @@
               </a:defRPr>
             </a:pPr>
             <a:r>
-              <a:t>Evidencia y comprobación</a:t>
+              <a:t>Comprueba la estructura</a:t>
             </a:r>
           </a:p>
         </p:txBody>
@@ -7553,7 +8168,7 @@
         <p:spPr>
           <a:xfrm>
             <a:off x="1389888" y="1280160"/>
-            <a:ext cx="9829800" cy="1624584"/>
+            <a:ext cx="9829800" cy="1209294"/>
           </a:xfrm>
           <a:prstGeom prst="rect">
             <a:avLst/>
@@ -7575,7 +8190,7 @@
               </a:defRPr>
             </a:pPr>
             <a:r>
-              <a:t>conserva el código o la prueba en el lugar indicado por la sesión;</a:t>
+              <a:t>Archivo y clase pública tienen el mismo nombre.</a:t>
             </a:r>
           </a:p>
         </p:txBody>
@@ -7588,7 +8203,7 @@
         </p:nvSpPr>
         <p:spPr>
           <a:xfrm>
-            <a:off x="713232" y="2959607"/>
+            <a:off x="713232" y="2544318"/>
             <a:ext cx="420624" cy="420624"/>
           </a:xfrm>
           <a:prstGeom prst="roundRect">
@@ -7633,8 +8248,8 @@
         </p:nvSpPr>
         <p:spPr>
           <a:xfrm>
-            <a:off x="1389888" y="2941319"/>
-            <a:ext cx="9829800" cy="1624584"/>
+            <a:off x="1389888" y="2526029"/>
+            <a:ext cx="9829800" cy="1209294"/>
           </a:xfrm>
           <a:prstGeom prst="rect">
             <a:avLst/>
@@ -7656,7 +8271,7 @@
               </a:defRPr>
             </a:pPr>
             <a:r>
-              <a:t>añade una sola entrada al diario individual con prueba, bloqueo y siguiente paso;</a:t>
+              <a:t>Las dos parejas de llaves están completas.</a:t>
             </a:r>
           </a:p>
         </p:txBody>
@@ -7669,7 +8284,7 @@
         </p:nvSpPr>
         <p:spPr>
           <a:xfrm>
-            <a:off x="713232" y="4620767"/>
+            <a:off x="713232" y="3790187"/>
             <a:ext cx="420624" cy="420624"/>
           </a:xfrm>
           <a:prstGeom prst="roundRect">
@@ -7714,8 +8329,8 @@
         </p:nvSpPr>
         <p:spPr>
           <a:xfrm>
-            <a:off x="1389888" y="4602480"/>
-            <a:ext cx="9829800" cy="1624584"/>
+            <a:off x="1389888" y="3771900"/>
+            <a:ext cx="9829800" cy="1209294"/>
           </a:xfrm>
           <a:prstGeom prst="rect">
             <a:avLst/>
@@ -7737,7 +8352,88 @@
               </a:defRPr>
             </a:pPr>
             <a:r>
-              <a:t>no copies la misma reflexión en otro documento; el Site personal seleccionará evidencias al cerrar H1.</a:t>
+              <a:t>Puedo señalar las instrucciones que generan salida.</a:t>
+            </a:r>
+          </a:p>
+        </p:txBody>
+      </p:sp>
+      <p:sp>
+        <p:nvSpPr>
+          <p:cNvPr id="14" name="Rounded Rectangle 13"/>
+          <p:cNvSpPr/>
+          <p:nvPr/>
+        </p:nvSpPr>
+        <p:spPr>
+          <a:xfrm>
+            <a:off x="713232" y="5036057"/>
+            <a:ext cx="420624" cy="420624"/>
+          </a:xfrm>
+          <a:prstGeom prst="roundRect">
+            <a:avLst/>
+          </a:prstGeom>
+          <a:solidFill>
+            <a:srgbClr val="FFFFFF"/>
+          </a:solidFill>
+          <a:ln>
+            <a:solidFill>
+              <a:srgbClr val="2F5BA8"/>
+            </a:solidFill>
+          </a:ln>
+        </p:spPr>
+        <p:style>
+          <a:lnRef idx="1">
+            <a:schemeClr val="accent1"/>
+          </a:lnRef>
+          <a:fillRef idx="3">
+            <a:schemeClr val="accent1"/>
+          </a:fillRef>
+          <a:effectRef idx="2">
+            <a:schemeClr val="accent1"/>
+          </a:effectRef>
+          <a:fontRef idx="minor">
+            <a:schemeClr val="lt1"/>
+          </a:fontRef>
+        </p:style>
+        <p:txBody>
+          <a:bodyPr rtlCol="0" anchor="ctr"/>
+          <a:lstStyle/>
+          <a:p>
+            <a:pPr algn="ctr"/>
+          </a:p>
+        </p:txBody>
+      </p:sp>
+      <p:sp>
+        <p:nvSpPr>
+          <p:cNvPr id="15" name="TextBox 14"/>
+          <p:cNvSpPr txBox="1"/>
+          <p:nvPr/>
+        </p:nvSpPr>
+        <p:spPr>
+          <a:xfrm>
+            <a:off x="1389888" y="5017770"/>
+            <a:ext cx="9829800" cy="1209294"/>
+          </a:xfrm>
+          <a:prstGeom prst="rect">
+            <a:avLst/>
+          </a:prstGeom>
+          <a:noFill/>
+        </p:spPr>
+        <p:txBody>
+          <a:bodyPr wrap="square" lIns="45720" rIns="45720" tIns="36576" bIns="36576" anchor="t">
+            <a:spAutoFit/>
+          </a:bodyPr>
+          <a:lstStyle/>
+          <a:p>
+            <a:pPr algn="l">
+              <a:defRPr sz="1900" b="0">
+                <a:solidFill>
+                  <a:srgbClr val="1C2330"/>
+                </a:solidFill>
+                <a:latin typeface="Aptos"/>
+              </a:defRPr>
+            </a:pPr>
+            <a:r>
+              <a:t>El comentario aporta información que el código no expresa solo.</a:t>
             </a:r>
           </a:p>
         </p:txBody>
@@ -7877,7 +8573,7 @@
               </a:defRPr>
             </a:pPr>
             <a:r>
-              <a:t>LÍMITES QUE PROTEGEN EL APRENDIZAJE</a:t>
+              <a:t>EXPLICAR Y DEFENDER</a:t>
             </a:r>
           </a:p>
         </p:txBody>
@@ -7913,7 +8609,7 @@
               </a:defRPr>
             </a:pPr>
             <a:r>
-              <a:t>Seguridad y uso responsable</a:t>
+              <a:t>Salida diagnóstica</a:t>
             </a:r>
           </a:p>
         </p:txBody>
@@ -8006,17 +8702,17 @@
         <p:spPr>
           <a:xfrm>
             <a:off x="621792" y="1298448"/>
-            <a:ext cx="5230368" cy="4553712"/>
+            <a:ext cx="10927080" cy="1828800"/>
           </a:xfrm>
           <a:prstGeom prst="roundRect">
             <a:avLst/>
           </a:prstGeom>
           <a:solidFill>
-            <a:srgbClr val="FFFFFF"/>
+            <a:srgbClr val="2F5BA8"/>
           </a:solidFill>
           <a:ln>
             <a:solidFill>
-              <a:srgbClr val="E5E9EF"/>
+              <a:srgbClr val="2F5BA8"/>
             </a:solidFill>
           </a:ln>
         </p:spPr>
@@ -8044,57 +8740,14 @@
       </p:sp>
       <p:sp>
         <p:nvSpPr>
-          <p:cNvPr id="9" name="Rounded Rectangle 8"/>
-          <p:cNvSpPr/>
-          <p:nvPr/>
-        </p:nvSpPr>
-        <p:spPr>
-          <a:xfrm>
-            <a:off x="841248" y="1527048"/>
-            <a:ext cx="237744" cy="4096512"/>
-          </a:xfrm>
-          <a:prstGeom prst="roundRect">
-            <a:avLst/>
-          </a:prstGeom>
-          <a:solidFill>
-            <a:srgbClr val="247E5C"/>
-          </a:solidFill>
-          <a:ln>
-            <a:noFill/>
-          </a:ln>
-        </p:spPr>
-        <p:style>
-          <a:lnRef idx="1">
-            <a:schemeClr val="accent1"/>
-          </a:lnRef>
-          <a:fillRef idx="3">
-            <a:schemeClr val="accent1"/>
-          </a:fillRef>
-          <a:effectRef idx="2">
-            <a:schemeClr val="accent1"/>
-          </a:effectRef>
-          <a:fontRef idx="minor">
-            <a:schemeClr val="lt1"/>
-          </a:fontRef>
-        </p:style>
-        <p:txBody>
-          <a:bodyPr rtlCol="0" anchor="ctr"/>
-          <a:lstStyle/>
-          <a:p>
-            <a:pPr algn="ctr"/>
-          </a:p>
-        </p:txBody>
-      </p:sp>
-      <p:sp>
-        <p:nvSpPr>
-          <p:cNvPr id="10" name="TextBox 9"/>
+          <p:cNvPr id="9" name="TextBox 8"/>
           <p:cNvSpPr txBox="1"/>
           <p:nvPr/>
         </p:nvSpPr>
         <p:spPr>
           <a:xfrm>
-            <a:off x="1280160" y="1527048"/>
-            <a:ext cx="4224528" cy="4160520"/>
+            <a:off x="932688" y="1591056"/>
+            <a:ext cx="10241280" cy="256032"/>
           </a:xfrm>
           <a:prstGeom prst="rect">
             <a:avLst/>
@@ -8108,117 +8761,29 @@
           <a:lstStyle/>
           <a:p>
             <a:pPr algn="l">
-              <a:defRPr sz="1900" b="0">
+              <a:defRPr sz="1300" b="1">
                 <a:solidFill>
-                  <a:srgbClr val="1C2330"/>
+                  <a:srgbClr val="FFFFFF"/>
                 </a:solidFill>
                 <a:latin typeface="Aptos"/>
               </a:defRPr>
             </a:pPr>
             <a:r>
-              <a:t>Usa datos ficticios y no publiques credenciales ni información personal.</a:t>
-            </a:r>
-          </a:p>
-        </p:txBody>
-      </p:sp>
-      <p:sp>
-        <p:nvSpPr>
-          <p:cNvPr id="11" name="Rounded Rectangle 10"/>
-          <p:cNvSpPr/>
-          <p:nvPr/>
-        </p:nvSpPr>
-        <p:spPr>
-          <a:xfrm>
-            <a:off x="6126479" y="1298448"/>
-            <a:ext cx="5230368" cy="4553712"/>
-          </a:xfrm>
-          <a:prstGeom prst="roundRect">
-            <a:avLst/>
-          </a:prstGeom>
-          <a:solidFill>
-            <a:srgbClr val="FFFFFF"/>
-          </a:solidFill>
-          <a:ln>
-            <a:solidFill>
-              <a:srgbClr val="E5E9EF"/>
-            </a:solidFill>
-          </a:ln>
-        </p:spPr>
-        <p:style>
-          <a:lnRef idx="1">
-            <a:schemeClr val="accent1"/>
-          </a:lnRef>
-          <a:fillRef idx="3">
-            <a:schemeClr val="accent1"/>
-          </a:fillRef>
-          <a:effectRef idx="2">
-            <a:schemeClr val="accent1"/>
-          </a:effectRef>
-          <a:fontRef idx="minor">
-            <a:schemeClr val="lt1"/>
-          </a:fontRef>
-        </p:style>
-        <p:txBody>
-          <a:bodyPr rtlCol="0" anchor="ctr"/>
-          <a:lstStyle/>
-          <a:p>
-            <a:pPr algn="ctr"/>
-          </a:p>
-        </p:txBody>
-      </p:sp>
-      <p:sp>
-        <p:nvSpPr>
-          <p:cNvPr id="12" name="Rounded Rectangle 11"/>
-          <p:cNvSpPr/>
-          <p:nvPr/>
-        </p:nvSpPr>
-        <p:spPr>
-          <a:xfrm>
-            <a:off x="6345936" y="1527048"/>
-            <a:ext cx="237744" cy="4096512"/>
-          </a:xfrm>
-          <a:prstGeom prst="roundRect">
-            <a:avLst/>
-          </a:prstGeom>
-          <a:solidFill>
-            <a:srgbClr val="C07020"/>
-          </a:solidFill>
-          <a:ln>
-            <a:noFill/>
-          </a:ln>
-        </p:spPr>
-        <p:style>
-          <a:lnRef idx="1">
-            <a:schemeClr val="accent1"/>
-          </a:lnRef>
-          <a:fillRef idx="3">
-            <a:schemeClr val="accent1"/>
-          </a:fillRef>
-          <a:effectRef idx="2">
-            <a:schemeClr val="accent1"/>
-          </a:effectRef>
-          <a:fontRef idx="minor">
-            <a:schemeClr val="lt1"/>
-          </a:fontRef>
-        </p:style>
-        <p:txBody>
-          <a:bodyPr rtlCol="0" anchor="ctr"/>
-          <a:lstStyle/>
-          <a:p>
-            <a:pPr algn="ctr"/>
-          </a:p>
-        </p:txBody>
-      </p:sp>
-      <p:sp>
-        <p:nvSpPr>
-          <p:cNvPr id="13" name="TextBox 12"/>
+              <a:t>PREGUNTA O DECISIÓN DE SALIDA</a:t>
+            </a:r>
+          </a:p>
+        </p:txBody>
+      </p:sp>
+      <p:sp>
+        <p:nvSpPr>
+          <p:cNvPr id="10" name="TextBox 9"/>
           <p:cNvSpPr txBox="1"/>
           <p:nvPr/>
         </p:nvSpPr>
         <p:spPr>
           <a:xfrm>
-            <a:off x="6784847" y="1527048"/>
-            <a:ext cx="4224528" cy="4160520"/>
+            <a:off x="932688" y="1975104"/>
+            <a:ext cx="10058400" cy="822960"/>
           </a:xfrm>
           <a:prstGeom prst="rect">
             <a:avLst/>
@@ -8232,15 +8797,51 @@
           <a:lstStyle/>
           <a:p>
             <a:pPr algn="l">
-              <a:defRPr sz="1900" b="0">
+              <a:defRPr sz="2500" b="1">
                 <a:solidFill>
-                  <a:srgbClr val="1C2330"/>
+                  <a:srgbClr val="FFFFFF"/>
                 </a:solidFill>
                 <a:latin typeface="Aptos"/>
               </a:defRPr>
             </a:pPr>
             <a:r>
-              <a:t>Si utilizas IA de forma sustantiva, registra propósito, propuesta, cambios propios y validación en el registro de IA del hito.</a:t>
+              <a:t>Señala una regla sintáctica cuya ruptura impida compilar y explica por qué.</a:t>
+            </a:r>
+          </a:p>
+        </p:txBody>
+      </p:sp>
+      <p:sp>
+        <p:nvSpPr>
+          <p:cNvPr id="11" name="TextBox 10"/>
+          <p:cNvSpPr txBox="1"/>
+          <p:nvPr/>
+        </p:nvSpPr>
+        <p:spPr>
+          <a:xfrm>
+            <a:off x="749808" y="3886200"/>
+            <a:ext cx="10607040" cy="1280160"/>
+          </a:xfrm>
+          <a:prstGeom prst="rect">
+            <a:avLst/>
+          </a:prstGeom>
+          <a:noFill/>
+        </p:spPr>
+        <p:txBody>
+          <a:bodyPr wrap="square" lIns="45720" rIns="45720" tIns="36576" bIns="36576" anchor="ctr">
+            <a:spAutoFit/>
+          </a:bodyPr>
+          <a:lstStyle/>
+          <a:p>
+            <a:pPr algn="ctr">
+              <a:defRPr sz="2300" b="1">
+                <a:solidFill>
+                  <a:srgbClr val="247E5C"/>
+                </a:solidFill>
+                <a:latin typeface="Aptos"/>
+              </a:defRPr>
+            </a:pPr>
+            <a:r>
+              <a:t>La sesión termina cuando la evidencia existe, está comprobada y puede defenderse.</a:t>
             </a:r>
           </a:p>
         </p:txBody>
@@ -8380,7 +8981,7 @@
               </a:defRPr>
             </a:pPr>
             <a:r>
-              <a:t>EXPLICAR Y DEFENDER</a:t>
+              <a:t>TRAZABILIDAD DEL CONTENIDO</a:t>
             </a:r>
           </a:p>
         </p:txBody>
@@ -8416,7 +9017,7 @@
               </a:defRPr>
             </a:pPr>
             <a:r>
-              <a:t>Cierre y defensa</a:t>
+              <a:t>Fuentes utilizadas</a:t>
             </a:r>
           </a:p>
         </p:txBody>
@@ -8502,59 +9103,14 @@
       </p:sp>
       <p:sp>
         <p:nvSpPr>
-          <p:cNvPr id="8" name="Rounded Rectangle 7"/>
-          <p:cNvSpPr/>
-          <p:nvPr/>
-        </p:nvSpPr>
-        <p:spPr>
-          <a:xfrm>
-            <a:off x="621792" y="1298448"/>
-            <a:ext cx="10927080" cy="1828800"/>
-          </a:xfrm>
-          <a:prstGeom prst="roundRect">
-            <a:avLst/>
-          </a:prstGeom>
-          <a:solidFill>
-            <a:srgbClr val="2F5BA8"/>
-          </a:solidFill>
-          <a:ln>
-            <a:solidFill>
-              <a:srgbClr val="2F5BA8"/>
-            </a:solidFill>
-          </a:ln>
-        </p:spPr>
-        <p:style>
-          <a:lnRef idx="1">
-            <a:schemeClr val="accent1"/>
-          </a:lnRef>
-          <a:fillRef idx="3">
-            <a:schemeClr val="accent1"/>
-          </a:fillRef>
-          <a:effectRef idx="2">
-            <a:schemeClr val="accent1"/>
-          </a:effectRef>
-          <a:fontRef idx="minor">
-            <a:schemeClr val="lt1"/>
-          </a:fontRef>
-        </p:style>
-        <p:txBody>
-          <a:bodyPr rtlCol="0" anchor="ctr"/>
-          <a:lstStyle/>
-          <a:p>
-            <a:pPr algn="ctr"/>
-          </a:p>
-        </p:txBody>
-      </p:sp>
-      <p:sp>
-        <p:nvSpPr>
-          <p:cNvPr id="9" name="TextBox 8"/>
+          <p:cNvPr id="8" name="TextBox 7"/>
           <p:cNvSpPr txBox="1"/>
           <p:nvPr/>
         </p:nvSpPr>
         <p:spPr>
           <a:xfrm>
-            <a:off x="932688" y="1591056"/>
-            <a:ext cx="10241280" cy="256032"/>
+            <a:off x="777240" y="1417320"/>
+            <a:ext cx="10515600" cy="658368"/>
           </a:xfrm>
           <a:prstGeom prst="rect">
             <a:avLst/>
@@ -8567,30 +9123,30 @@
           </a:bodyPr>
           <a:lstStyle/>
           <a:p>
-            <a:pPr algn="l">
-              <a:defRPr sz="1300" b="1">
+            <a:pPr algn="ctr">
+              <a:defRPr sz="2300" b="1">
                 <a:solidFill>
-                  <a:srgbClr val="FFFFFF"/>
+                  <a:srgbClr val="1C2330"/>
                 </a:solidFill>
                 <a:latin typeface="Aptos"/>
               </a:defRPr>
             </a:pPr>
             <a:r>
-              <a:t>PREGUNTA O DECISIÓN DE SALIDA</a:t>
-            </a:r>
-          </a:p>
-        </p:txBody>
-      </p:sp>
-      <p:sp>
-        <p:nvSpPr>
-          <p:cNvPr id="10" name="TextBox 9"/>
+              <a:t>Esta presentación selecciona y adapta contenido; no sustituye al libro ni copia el PDF completo.</a:t>
+            </a:r>
+          </a:p>
+        </p:txBody>
+      </p:sp>
+      <p:sp>
+        <p:nvSpPr>
+          <p:cNvPr id="9" name="TextBox 8"/>
           <p:cNvSpPr txBox="1"/>
           <p:nvPr/>
         </p:nvSpPr>
         <p:spPr>
           <a:xfrm>
-            <a:off x="932688" y="1975104"/>
-            <a:ext cx="10058400" cy="822960"/>
+            <a:off x="1005840" y="2468880"/>
+            <a:ext cx="10058400" cy="2331720"/>
           </a:xfrm>
           <a:prstGeom prst="rect">
             <a:avLst/>
@@ -8598,57 +9154,92 @@
           <a:noFill/>
         </p:spPr>
         <p:txBody>
-          <a:bodyPr wrap="square" lIns="45720" rIns="45720" tIns="36576" bIns="36576" anchor="t">
+          <a:bodyPr wrap="square" lIns="73152" rIns="45720" tIns="36576">
             <a:spAutoFit/>
           </a:bodyPr>
           <a:lstStyle/>
           <a:p>
-            <a:pPr algn="l">
-              <a:defRPr sz="2500" b="1">
+            <a:pPr>
+              <a:spcAft>
+                <a:spcPts val="900"/>
+              </a:spcAft>
+              <a:defRPr sz="2000">
                 <a:solidFill>
-                  <a:srgbClr val="FFFFFF"/>
+                  <a:srgbClr val="1C2330"/>
                 </a:solidFill>
                 <a:latin typeface="Aptos"/>
               </a:defRPr>
             </a:pPr>
             <a:r>
-              <a:t>¿Qué puedes señalar, explicar y probar al terminar este checkpoint?</a:t>
-            </a:r>
-          </a:p>
-        </p:txBody>
-      </p:sp>
-      <p:sp>
-        <p:nvSpPr>
-          <p:cNvPr id="11" name="TextBox 10"/>
-          <p:cNvSpPr txBox="1"/>
-          <p:nvPr/>
-        </p:nvSpPr>
-        <p:spPr>
-          <a:xfrm>
-            <a:off x="749808" y="3886200"/>
-            <a:ext cx="10607040" cy="1280160"/>
-          </a:xfrm>
-          <a:prstGeom prst="rect">
-            <a:avLst/>
-          </a:prstGeom>
-          <a:noFill/>
-        </p:spPr>
-        <p:txBody>
-          <a:bodyPr wrap="square" lIns="45720" rIns="45720" tIns="36576" bIns="36576" anchor="ctr">
-            <a:spAutoFit/>
-          </a:bodyPr>
-          <a:lstStyle/>
-          <a:p>
-            <a:pPr algn="ctr">
-              <a:defRPr sz="2300" b="1">
+              <a:t>•  Libro: capítulo 01 · Tema 1: aspectos léxicos y comentarios</a:t>
+            </a:r>
+          </a:p>
+          <a:p>
+            <a:pPr>
+              <a:spcAft>
+                <a:spcPts val="900"/>
+              </a:spcAft>
+              <a:defRPr sz="2000">
                 <a:solidFill>
-                  <a:srgbClr val="247E5C"/>
+                  <a:srgbClr val="1C2330"/>
                 </a:solidFill>
                 <a:latin typeface="Aptos"/>
               </a:defRPr>
             </a:pPr>
             <a:r>
-              <a:t>La sesión termina cuando la evidencia existe, está comprobada y puede defenderse.</a:t>
+              <a:t>•  Fichas S206-S215 y píldoras H1</a:t>
+            </a:r>
+          </a:p>
+          <a:p>
+            <a:pPr>
+              <a:spcAft>
+                <a:spcPts val="900"/>
+              </a:spcAft>
+              <a:defRPr sz="2000">
+                <a:solidFill>
+                  <a:srgbClr val="1C2330"/>
+                </a:solidFill>
+                <a:latin typeface="Aptos"/>
+              </a:defRPr>
+            </a:pPr>
+            <a:r>
+              <a:t>•  Ejemplos revisados y adaptados a MiniJarvis; no se copian errores ni capturas antiguas del PDF.</a:t>
+            </a:r>
+          </a:p>
+        </p:txBody>
+      </p:sp>
+      <p:sp>
+        <p:nvSpPr>
+          <p:cNvPr id="10" name="TextBox 9"/>
+          <p:cNvSpPr txBox="1"/>
+          <p:nvPr/>
+        </p:nvSpPr>
+        <p:spPr>
+          <a:xfrm>
+            <a:off x="960120" y="5257800"/>
+            <a:ext cx="10241280" cy="411480"/>
+          </a:xfrm>
+          <a:prstGeom prst="rect">
+            <a:avLst/>
+          </a:prstGeom>
+          <a:noFill/>
+        </p:spPr>
+        <p:txBody>
+          <a:bodyPr wrap="square" lIns="45720" rIns="45720" tIns="36576" bIns="36576" anchor="t">
+            <a:spAutoFit/>
+          </a:bodyPr>
+          <a:lstStyle/>
+          <a:p>
+            <a:pPr algn="ctr">
+              <a:defRPr sz="1800" b="1">
+                <a:solidFill>
+                  <a:srgbClr val="2F5BA8"/>
+                </a:solidFill>
+                <a:latin typeface="Aptos"/>
+              </a:defRPr>
+            </a:pPr>
+            <a:r>
+              <a:t>Consulta el libro para ampliar, practicar y repasar errores frecuentes.</a:t>
             </a:r>
           </a:p>
         </p:txBody>

--- a/02-PROFESORADO/03-PRESENTACIONES/POR-SESION/h1/S208-estructura-minima-de-un-programa-java-presentacion.pptx
+++ b/02-PROFESORADO/03-PRESENTACIONES/POR-SESION/h1/S208-estructura-minima-de-un-programa-java-presentacion.pptx
@@ -510,12 +510,12 @@
           <a:lstStyle/>
           <a:p>
             <a:r>
-              <a:t>Objetivo docente: Leer, reconstruir y depurar la estructura mínima; reconocer aspectos léxicos y comentarios.</a:t>
-            </a:r>
-          </a:p>
-          <a:p>
-            <a:r>
-              <a:t>Diapositiva 1 de 9: La estructura mínima de un programa Java</a:t>
+              <a:t>Objetivo docente: Al terminar, debes reconstruir y depurar la estructura mínima de Java: clase, main, llaves, paréntesis, comillas, punto y coma, identificadores y comentarios.</a:t>
+            </a:r>
+          </a:p>
+          <a:p>
+            <a:r>
+              <a:t>Diapositiva 1 de 9: Qué vas a aprender</a:t>
             </a:r>
           </a:p>
           <a:p>
@@ -525,7 +525,7 @@
           </a:p>
           <a:p>
             <a:r>
-              <a:t>Presenta el producto y anticipa la evidencia: Quede diagnosticada la comprensión.</a:t>
+              <a:t>Presenta el producto y anticipa la evidencia: Antes de terminar, cada persona debe conservar una evidencia de estructura mínima funcionando y una nota del error que ha provocado y corregido.</a:t>
             </a:r>
           </a:p>
           <a:p>
@@ -535,47 +535,7 @@
           </a:p>
           <a:p>
             <a:r>
-              <a:t>- 00:00–00:05 / D1: INVESTIGAR: Pide predecir qué líneas producen salida.</a:t>
-            </a:r>
-          </a:p>
-          <a:p>
-            <a:r>
-              <a:t>- 00:05–00:12 / D2: PÍLDORA DOCENTE 1/4: Explica que el nombre de la clase pública coincide con el archivo y que main es el punto de entrada en estos programas.</a:t>
-            </a:r>
-          </a:p>
-          <a:p>
-            <a:r>
-              <a:t>- 00:12–00:18 / D3: PÍLDORA DOCENTE 2/4: Relaciona cada regla con un error real.</a:t>
-            </a:r>
-          </a:p>
-          <a:p>
-            <a:r>
-              <a:t>- 00:18–00:23 / D4: DIAGNÓSTICO: No ejecutes aún. Pide voto y justificación.</a:t>
-            </a:r>
-          </a:p>
-          <a:p>
-            <a:r>
-              <a:t>- 00:23–00:27 / D5: DIAGNÓSTICO: Pide localizar el error antes de ejecutar.</a:t>
-            </a:r>
-          </a:p>
-          <a:p>
-            <a:r>
-              <a:t>- 00:27–00:32 / D6: PÍLDORA DOCENTE 3/4: Explica reglas mínimas y la importancia del nombre significativo.</a:t>
-            </a:r>
-          </a:p>
-          <a:p>
-            <a:r>
-              <a:t>- 00:32–00:35 / D7: PÍLDORA DOCENTE 4/4: Explica que no se ejecutan y que deben aportar intención, no repetir literalmente la instrucción.</a:t>
-            </a:r>
-          </a:p>
-          <a:p>
-            <a:r>
-              <a:t>- 00:35–00:42 / D8: ACTIVIDAD: Circula y pide verbalizar la primera marca del IDE.</a:t>
-            </a:r>
-          </a:p>
-          <a:p>
-            <a:r>
-              <a:t>- 00:42–00:45 / D9: CIERRE: Pregunta a 2–3 personas y registra dificultades comunes.</a:t>
+              <a:t>- 45 minutos: Reconstruid la estructura mínima sin copiar directamente. Añadid dos mensajes y un comentario útil. Luego introducid un error pequeño, leed el diagnóstico, corregidlo y ejecutad.</a:t>
             </a:r>
           </a:p>
           <a:p>
@@ -585,12 +545,122 @@
           </a:p>
           <a:p>
             <a:r>
-              <a:t>- PÍLDORA DOCENTE 1/4: Explica que el nombre de la clase pública coincide con el archivo y que main es el punto de entrada en estos programas, PÍLDORA DOCENTE 2/4: Relaciona cada regla con un error real, PÍLDORA DOCENTE 3/4: Explica reglas mínimas y la importancia del nombre significativo.</a:t>
-            </a:r>
-          </a:p>
-          <a:p>
-            <a:r>
-              <a:t>- PÍLDORA DOCENTE 4/4: Explica que no se ejecutan y que deben aportar intención, no repetir literalmente la instrucción.</a:t>
+              <a:t>- Usa esta explicación como una secuencia breve de ejemplos. No la conviertas en teoría larga: proyecta, pide predicción, corrige y haz que señalen el elemento exacto.</a:t>
+            </a:r>
+          </a:p>
+          <a:p>
+            <a:r>
+              <a:t>- En estos primeros programas, el archivo se llama Main.java, la clase pública se llama Main y el método main es el punto de entrada. Java distingue mayúsculas y necesita delimitadores: punto y coma, llaves, paréntesis y comillas.</a:t>
+            </a:r>
+          </a:p>
+          <a:p>
+            <a:r>
+              <a:t>- Ejemplo para proyectar:</a:t>
+            </a:r>
+          </a:p>
+          <a:p>
+            <a:r>
+              <a:t>- public class Main {</a:t>
+            </a:r>
+          </a:p>
+          <a:p>
+            <a:r>
+              <a:t>- public static void main(String[] argumentos) {</a:t>
+            </a:r>
+          </a:p>
+          <a:p>
+            <a:r>
+              <a:t>- System.out.println("Hola");</a:t>
+            </a:r>
+          </a:p>
+          <a:p>
+            <a:r>
+              <a:t>- }</a:t>
+            </a:r>
+          </a:p>
+          <a:p>
+            <a:r>
+              <a:t>- Pregunta al alumnado:</a:t>
+            </a:r>
+          </a:p>
+          <a:p>
+            <a:r>
+              <a:t>- Señala clase, punto de entrada, una instrucción visible, un identificador y un comentario útil.</a:t>
+            </a:r>
+          </a:p>
+          <a:p>
+            <a:r>
+              <a:t>- Error frecuente que debes cortar:</a:t>
+            </a:r>
+          </a:p>
+          <a:p>
+            <a:r>
+              <a:t>- String no es string. Main no es main. Las mayúsculas importan.</a:t>
+            </a:r>
+          </a:p>
+          <a:p>
+            <a:r>
+              <a:t>- Contrasta ahora la relación archivo-clase con este caso:</a:t>
+            </a:r>
+          </a:p>
+          <a:p>
+            <a:r>
+              <a:t>- // Archivo: Main.java</a:t>
+            </a:r>
+          </a:p>
+          <a:p>
+            <a:r>
+              <a:t>- public class MiniJarvis {</a:t>
+            </a:r>
+          </a:p>
+          <a:p>
+            <a:r>
+              <a:t>- Pregunta:</a:t>
+            </a:r>
+          </a:p>
+          <a:p>
+            <a:r>
+              <a:t>- Qué relación no se cumple aquí.</a:t>
+            </a:r>
+          </a:p>
+          <a:p>
+            <a:r>
+              <a:t>- Respuesta esperada:</a:t>
+            </a:r>
+          </a:p>
+          <a:p>
+            <a:r>
+              <a:t>- Main.java no coincide con public class MiniJarvis.</a:t>
+            </a:r>
+          </a:p>
+          <a:p>
+            <a:r>
+              <a:t>- Aclara la diferencia entre Main y main:</a:t>
+            </a:r>
+          </a:p>
+          <a:p>
+            <a:r>
+              <a:t>- System.out.println("MiniJarvis");</a:t>
+            </a:r>
+          </a:p>
+          <a:p>
+            <a:r>
+              <a:t>- Di:</a:t>
+            </a:r>
+          </a:p>
+          <a:p>
+            <a:r>
+              <a:t>- Main es el nombre de la clase. main es el método donde comienza la ejecución.</a:t>
+            </a:r>
+          </a:p>
+          <a:p>
+            <a:r>
+              <a:t>- Haz una predicción de orden:</a:t>
+            </a:r>
+          </a:p>
+          <a:p>
+            <a:r>
+              <a:t>- System.out.println("UNO");</a:t>
             </a:r>
           </a:p>
           <a:p>
@@ -665,7 +735,7 @@
           <a:lstStyle/>
           <a:p>
             <a:r>
-              <a:t>Objetivo docente: Leer, reconstruir y depurar la estructura mínima; reconocer aspectos léxicos y comentarios.</a:t>
+              <a:t>Objetivo docente: Al terminar, debes reconstruir y depurar la estructura mínima de Java: clase, main, llaves, paréntesis, comillas, punto y coma, identificadores y comentarios.</a:t>
             </a:r>
           </a:p>
           <a:p>
@@ -680,12 +750,12 @@
           </a:p>
           <a:p>
             <a:r>
-              <a:t>- Objetivo: Leer, reconstruir y depurar la estructura mínima; reconocer aspectos léxicos y comentarios.</a:t>
-            </a:r>
-          </a:p>
-          <a:p>
-            <a:r>
-              <a:t>- Comprobación: Quede diagnosticada la comprensión.</a:t>
+              <a:t>- Objetivo: Al terminar, debes reconstruir y depurar la estructura mínima de Java: clase, main, llaves, paréntesis, comillas, punto y coma, identificadores y comentarios.</a:t>
+            </a:r>
+          </a:p>
+          <a:p>
+            <a:r>
+              <a:t>- Comprobación: Antes de terminar, cada persona debe conservar una evidencia de estructura mínima funcionando y una nota del error que ha provocado y corregido.</a:t>
             </a:r>
           </a:p>
           <a:p>
@@ -760,7 +830,7 @@
           <a:lstStyle/>
           <a:p>
             <a:r>
-              <a:t>Objetivo docente: Leer, reconstruir y depurar la estructura mínima; reconocer aspectos léxicos y comentarios.</a:t>
+              <a:t>Objetivo docente: Al terminar, debes reconstruir y depurar la estructura mínima de Java: clase, main, llaves, paréntesis, comillas, punto y coma, identificadores y comentarios.</a:t>
             </a:r>
           </a:p>
           <a:p>
@@ -895,7 +965,7 @@
           <a:lstStyle/>
           <a:p>
             <a:r>
-              <a:t>Objetivo docente: Leer, reconstruir y depurar la estructura mínima; reconocer aspectos léxicos y comentarios.</a:t>
+              <a:t>Objetivo docente: Al terminar, debes reconstruir y depurar la estructura mínima de Java: clase, main, llaves, paréntesis, comillas, punto y coma, identificadores y comentarios.</a:t>
             </a:r>
           </a:p>
           <a:p>
@@ -926,6 +996,11 @@
           <a:p>
             <a:r>
               <a:t>- Un identificador debe ser válido y comunicar intención.</a:t>
+            </a:r>
+          </a:p>
+          <a:p>
+            <a:r>
+              <a:t>- // comentario de línea · /* comentario de bloque */</a:t>
             </a:r>
           </a:p>
           <a:p>
@@ -1005,7 +1080,7 @@
           <a:lstStyle/>
           <a:p>
             <a:r>
-              <a:t>Objetivo docente: Leer, reconstruir y depurar la estructura mínima; reconocer aspectos léxicos y comentarios.</a:t>
+              <a:t>Objetivo docente: Al terminar, debes reconstruir y depurar la estructura mínima de Java: clase, main, llaves, paréntesis, comillas, punto y coma, identificadores y comentarios.</a:t>
             </a:r>
           </a:p>
           <a:p>
@@ -1025,27 +1100,27 @@
           </a:p>
           <a:p>
             <a:r>
-              <a:t>- CORRECTO · String message = "Hola";</a:t>
-            </a:r>
-          </a:p>
-          <a:p>
-            <a:r>
-              <a:t>System.out.println(message);</a:t>
-            </a:r>
-          </a:p>
-          <a:p>
-            <a:r>
-              <a:t>- INCORRECTO · string message = "Hola"</a:t>
-            </a:r>
-          </a:p>
-          <a:p>
-            <a:r>
-              <a:t>System.out.println(message)</a:t>
-            </a:r>
-          </a:p>
-          <a:p>
-            <a:r>
-              <a:t>- Busca: mayúscula de String, punto y coma y equilibrio de delimitadores.</a:t>
+              <a:t>- MAYÚSCULA · System.out.println("Hola");</a:t>
+            </a:r>
+          </a:p>
+          <a:p>
+            <a:r>
+              <a:t>ERROR · system.out.println("Hola");</a:t>
+            </a:r>
+          </a:p>
+          <a:p>
+            <a:r>
+              <a:t>- PUNTO Y COMA · System.out.println("Hola");</a:t>
+            </a:r>
+          </a:p>
+          <a:p>
+            <a:r>
+              <a:t>ERROR · System.out.println("Hola")</a:t>
+            </a:r>
+          </a:p>
+          <a:p>
+            <a:r>
+              <a:t>- Compara un cambio cada vez y localiza la diferencia antes de compilar.</a:t>
             </a:r>
           </a:p>
           <a:p>
@@ -1120,7 +1195,7 @@
           <a:lstStyle/>
           <a:p>
             <a:r>
-              <a:t>Objetivo docente: Leer, reconstruir y depurar la estructura mínima; reconocer aspectos léxicos y comentarios.</a:t>
+              <a:t>Objetivo docente: Al terminar, debes reconstruir y depurar la estructura mínima de Java: clase, main, llaves, paréntesis, comillas, punto y coma, identificadores y comentarios.</a:t>
             </a:r>
           </a:p>
           <a:p>
@@ -1230,7 +1305,7 @@
           <a:lstStyle/>
           <a:p>
             <a:r>
-              <a:t>Objetivo docente: Leer, reconstruir y depurar la estructura mínima; reconocer aspectos léxicos y comentarios.</a:t>
+              <a:t>Objetivo docente: Al terminar, debes reconstruir y depurar la estructura mínima de Java: clase, main, llaves, paréntesis, comillas, punto y coma, identificadores y comentarios.</a:t>
             </a:r>
           </a:p>
           <a:p>
@@ -1245,7 +1320,7 @@
           </a:p>
           <a:p>
             <a:r>
-              <a:t>Comprueba la evidencia en su fuente canónica: Quede diagnosticada la comprensión.</a:t>
+              <a:t>Comprueba la evidencia en su fuente canónica: Antes de terminar, cada persona debe conservar una evidencia de estructura mínima funcionando y una nota del error que ha provocado y corregido.</a:t>
             </a:r>
           </a:p>
           <a:p>
@@ -1340,7 +1415,7 @@
           <a:lstStyle/>
           <a:p>
             <a:r>
-              <a:t>Objetivo docente: Leer, reconstruir y depurar la estructura mínima; reconocer aspectos léxicos y comentarios.</a:t>
+              <a:t>Objetivo docente: Al terminar, debes reconstruir y depurar la estructura mínima de Java: clase, main, llaves, paréntesis, comillas, punto y coma, identificadores y comentarios.</a:t>
             </a:r>
           </a:p>
           <a:p>
@@ -1435,12 +1510,12 @@
           <a:lstStyle/>
           <a:p>
             <a:r>
-              <a:t>Objetivo docente: Leer, reconstruir y depurar la estructura mínima; reconocer aspectos léxicos y comentarios.</a:t>
-            </a:r>
-          </a:p>
-          <a:p>
-            <a:r>
-              <a:t>Diapositiva 9 de 9: Fuentes utilizadas</a:t>
+              <a:t>Objetivo docente: Al terminar, debes reconstruir y depurar la estructura mínima de Java: clase, main, llaves, paréntesis, comillas, punto y coma, identificadores y comentarios.</a:t>
+            </a:r>
+          </a:p>
+          <a:p>
+            <a:r>
+              <a:t>Diapositiva 9 de 9: Fuentes diferenciadas</a:t>
             </a:r>
           </a:p>
           <a:p>
@@ -1455,17 +1530,17 @@
           </a:p>
           <a:p>
             <a:r>
-              <a:t>- Libro: capítulo 01 · Tema 1: aspectos léxicos y comentarios</a:t>
-            </a:r>
-          </a:p>
-          <a:p>
-            <a:r>
-              <a:t>- Fichas S206-S215 y píldoras H1</a:t>
-            </a:r>
-          </a:p>
-          <a:p>
-            <a:r>
-              <a:t>- Ejemplos revisados y adaptados a MiniJarvis; no se copian errores ni capturas antiguas del PDF.</a:t>
+              <a:t>- Libro por hitos · Capítulo 01: estructura y errores frecuentes</a:t>
+            </a:r>
+          </a:p>
+          <a:p>
+            <a:r>
+              <a:t>- PDF Tema 1 · §§2-3: léxico y comentarios</a:t>
+            </a:r>
+          </a:p>
+          <a:p>
+            <a:r>
+              <a:t>- Proyecto MiniJarvis · fichas S206-S215, píldoras H1 y criterios de evidencia</a:t>
             </a:r>
           </a:p>
           <a:p>
@@ -4674,7 +4749,7 @@
               </a:defRPr>
             </a:pPr>
             <a:r>
-              <a:t>La estructura mínima de un programa Java</a:t>
+              <a:t>Qué vas a aprender</a:t>
             </a:r>
           </a:p>
         </p:txBody>
@@ -4710,7 +4785,7 @@
               </a:defRPr>
             </a:pPr>
             <a:r>
-              <a:t>H1 — Primer MiniJarvis</a:t>
+              <a:t>H1 — Primer asistente ejecutable</a:t>
             </a:r>
           </a:p>
         </p:txBody>
@@ -4754,42 +4829,6 @@
       <p:sp>
         <p:nvSpPr>
           <p:cNvPr id="9" name="TextBox 8"/>
-          <p:cNvSpPr txBox="1"/>
-          <p:nvPr/>
-        </p:nvSpPr>
-        <p:spPr>
-          <a:xfrm>
-            <a:off x="713232" y="4965192"/>
-            <a:ext cx="10241280" cy="594360"/>
-          </a:xfrm>
-          <a:prstGeom prst="rect">
-            <a:avLst/>
-          </a:prstGeom>
-          <a:noFill/>
-        </p:spPr>
-        <p:txBody>
-          <a:bodyPr wrap="square" lIns="45720" rIns="45720" tIns="36576" bIns="36576" anchor="t">
-            <a:spAutoFit/>
-          </a:bodyPr>
-          <a:lstStyle/>
-          <a:p>
-            <a:pPr algn="l">
-              <a:defRPr sz="1700" b="0">
-                <a:solidFill>
-                  <a:srgbClr val="D2D9E4"/>
-                </a:solidFill>
-                <a:latin typeface="Aptos"/>
-              </a:defRPr>
-            </a:pPr>
-            <a:r>
-              <a:t>Individual con contraste por parejas o equipo cuando la práctica lo requiera</a:t>
-            </a:r>
-          </a:p>
-        </p:txBody>
-      </p:sp>
-      <p:sp>
-        <p:nvSpPr>
-          <p:cNvPr id="10" name="TextBox 9"/>
           <p:cNvSpPr txBox="1"/>
           <p:nvPr/>
         </p:nvSpPr>
@@ -5073,7 +5112,7 @@
               </a:defRPr>
             </a:pPr>
             <a:r>
-              <a:t>MiniJarvis · 1.º DAW · Sesión 208 · H1 — Primer MiniJarvis</a:t>
+              <a:t>MiniJarvis · 1.º DAW · Sesión 208 · H1 — Primer asistente ejecutable</a:t>
             </a:r>
           </a:p>
         </p:txBody>
@@ -5154,7 +5193,7 @@
               </a:defRPr>
             </a:pPr>
             <a:r>
-              <a:t>Objetivo: Leer, reconstruir y depurar la estructura mínima; reconocer aspectos léxicos y comentarios.</a:t>
+              <a:t>Objetivo: Al terminar, debes reconstruir y depurar la estructura mínima de Java: clase, main, llaves, paréntesis, comillas, punto y coma, identificadores y comentarios.</a:t>
             </a:r>
           </a:p>
         </p:txBody>
@@ -5235,7 +5274,7 @@
               </a:defRPr>
             </a:pPr>
             <a:r>
-              <a:t>Comprobación: Quede diagnosticada la comprensión.</a:t>
+              <a:t>Comprobación: Antes de terminar, cada persona debe conservar una evidencia de estructura mínima funcionando y una nota del error que ha provocado y corregido.</a:t>
             </a:r>
           </a:p>
         </p:txBody>
@@ -5490,7 +5529,7 @@
               </a:defRPr>
             </a:pPr>
             <a:r>
-              <a:t>MiniJarvis · 1.º DAW · Sesión 208 · H1 — Primer MiniJarvis</a:t>
+              <a:t>MiniJarvis · 1.º DAW · Sesión 208 · H1 — Primer asistente ejecutable</a:t>
             </a:r>
           </a:p>
         </p:txBody>
@@ -5989,7 +6028,7 @@
               </a:defRPr>
             </a:pPr>
             <a:r>
-              <a:t>MiniJarvis · 1.º DAW · Sesión 208 · H1 — Primer MiniJarvis</a:t>
+              <a:t>MiniJarvis · 1.º DAW · Sesión 208 · H1 — Primer asistente ejecutable</a:t>
             </a:r>
           </a:p>
         </p:txBody>
@@ -6003,7 +6042,7 @@
         <p:spPr>
           <a:xfrm>
             <a:off x="566928" y="1261872"/>
-            <a:ext cx="5212080" cy="2199132"/>
+            <a:ext cx="3398520" cy="2199132"/>
           </a:xfrm>
           <a:prstGeom prst="roundRect">
             <a:avLst/>
@@ -6084,7 +6123,7 @@
         <p:spPr>
           <a:xfrm>
             <a:off x="1225295" y="1426463"/>
-            <a:ext cx="4434840" cy="1961388"/>
+            <a:ext cx="2621280" cy="1961388"/>
           </a:xfrm>
           <a:prstGeom prst="rect">
             <a:avLst/>
@@ -6098,7 +6137,7 @@
           <a:lstStyle/>
           <a:p>
             <a:pPr algn="l">
-              <a:defRPr sz="1800" b="0">
+              <a:defRPr sz="1500" b="0">
                 <a:solidFill>
                   <a:srgbClr val="1C2330"/>
                 </a:solidFill>
@@ -6119,8 +6158,8 @@
         </p:nvSpPr>
         <p:spPr>
           <a:xfrm>
-            <a:off x="6007608" y="1261872"/>
-            <a:ext cx="5212080" cy="2199132"/>
+            <a:off x="4194048" y="1261872"/>
+            <a:ext cx="3398520" cy="2199132"/>
           </a:xfrm>
           <a:prstGeom prst="roundRect">
             <a:avLst/>
@@ -6164,7 +6203,7 @@
         </p:nvSpPr>
         <p:spPr>
           <a:xfrm>
-            <a:off x="6208776" y="1426463"/>
+            <a:off x="4395216" y="1426463"/>
             <a:ext cx="384048" cy="347472"/>
           </a:xfrm>
           <a:prstGeom prst="rect">
@@ -6200,8 +6239,8 @@
         </p:nvSpPr>
         <p:spPr>
           <a:xfrm>
-            <a:off x="6665976" y="1426463"/>
-            <a:ext cx="4434840" cy="1961388"/>
+            <a:off x="4852416" y="1426463"/>
+            <a:ext cx="2621280" cy="1961388"/>
           </a:xfrm>
           <a:prstGeom prst="rect">
             <a:avLst/>
@@ -6215,7 +6254,7 @@
           <a:lstStyle/>
           <a:p>
             <a:pPr algn="l">
-              <a:defRPr sz="1800" b="0">
+              <a:defRPr sz="1500" b="0">
                 <a:solidFill>
                   <a:srgbClr val="1C2330"/>
                 </a:solidFill>
@@ -6236,8 +6275,8 @@
         </p:nvSpPr>
         <p:spPr>
           <a:xfrm>
-            <a:off x="566928" y="3662172"/>
-            <a:ext cx="5212080" cy="2199132"/>
+            <a:off x="7821167" y="1261872"/>
+            <a:ext cx="3398520" cy="2199132"/>
           </a:xfrm>
           <a:prstGeom prst="roundRect">
             <a:avLst/>
@@ -6281,7 +6320,7 @@
         </p:nvSpPr>
         <p:spPr>
           <a:xfrm>
-            <a:off x="768096" y="3826763"/>
+            <a:off x="8022336" y="1426463"/>
             <a:ext cx="384048" cy="347472"/>
           </a:xfrm>
           <a:prstGeom prst="rect">
@@ -6317,8 +6356,8 @@
         </p:nvSpPr>
         <p:spPr>
           <a:xfrm>
-            <a:off x="1225295" y="3826763"/>
-            <a:ext cx="4434840" cy="1961388"/>
+            <a:off x="8479536" y="1426463"/>
+            <a:ext cx="2621280" cy="1961388"/>
           </a:xfrm>
           <a:prstGeom prst="rect">
             <a:avLst/>
@@ -6332,7 +6371,7 @@
           <a:lstStyle/>
           <a:p>
             <a:pPr algn="l">
-              <a:defRPr sz="1800" b="0">
+              <a:defRPr sz="1500" b="0">
                 <a:solidFill>
                   <a:srgbClr val="1C2330"/>
                 </a:solidFill>
@@ -6353,8 +6392,8 @@
         </p:nvSpPr>
         <p:spPr>
           <a:xfrm>
-            <a:off x="6007608" y="3662172"/>
-            <a:ext cx="5212080" cy="2199132"/>
+            <a:off x="566928" y="3662172"/>
+            <a:ext cx="3398520" cy="2199132"/>
           </a:xfrm>
           <a:prstGeom prst="roundRect">
             <a:avLst/>
@@ -6398,7 +6437,7 @@
         </p:nvSpPr>
         <p:spPr>
           <a:xfrm>
-            <a:off x="6208776" y="3826763"/>
+            <a:off x="768096" y="3826763"/>
             <a:ext cx="384048" cy="347472"/>
           </a:xfrm>
           <a:prstGeom prst="rect">
@@ -6434,8 +6473,8 @@
         </p:nvSpPr>
         <p:spPr>
           <a:xfrm>
-            <a:off x="6665976" y="3826763"/>
-            <a:ext cx="4434840" cy="1961388"/>
+            <a:off x="1225295" y="3826763"/>
+            <a:ext cx="2621280" cy="1961388"/>
           </a:xfrm>
           <a:prstGeom prst="rect">
             <a:avLst/>
@@ -6449,7 +6488,124 @@
           <a:lstStyle/>
           <a:p>
             <a:pPr algn="l">
-              <a:defRPr sz="1800" b="0">
+              <a:defRPr sz="1500" b="0">
+                <a:solidFill>
+                  <a:srgbClr val="1C2330"/>
+                </a:solidFill>
+                <a:latin typeface="Aptos"/>
+              </a:defRPr>
+            </a:pPr>
+            <a:r>
+              <a:t>// comentario de línea · /* comentario de bloque */</a:t>
+            </a:r>
+          </a:p>
+        </p:txBody>
+      </p:sp>
+      <p:sp>
+        <p:nvSpPr>
+          <p:cNvPr id="20" name="Rounded Rectangle 19"/>
+          <p:cNvSpPr/>
+          <p:nvPr/>
+        </p:nvSpPr>
+        <p:spPr>
+          <a:xfrm>
+            <a:off x="4194048" y="3662172"/>
+            <a:ext cx="3398520" cy="2199132"/>
+          </a:xfrm>
+          <a:prstGeom prst="roundRect">
+            <a:avLst/>
+          </a:prstGeom>
+          <a:solidFill>
+            <a:srgbClr val="FFFFFF"/>
+          </a:solidFill>
+          <a:ln>
+            <a:solidFill>
+              <a:srgbClr val="E5E9EF"/>
+            </a:solidFill>
+          </a:ln>
+        </p:spPr>
+        <p:style>
+          <a:lnRef idx="1">
+            <a:schemeClr val="accent1"/>
+          </a:lnRef>
+          <a:fillRef idx="3">
+            <a:schemeClr val="accent1"/>
+          </a:fillRef>
+          <a:effectRef idx="2">
+            <a:schemeClr val="accent1"/>
+          </a:effectRef>
+          <a:fontRef idx="minor">
+            <a:schemeClr val="lt1"/>
+          </a:fontRef>
+        </p:style>
+        <p:txBody>
+          <a:bodyPr rtlCol="0" anchor="ctr"/>
+          <a:lstStyle/>
+          <a:p>
+            <a:pPr algn="ctr"/>
+          </a:p>
+        </p:txBody>
+      </p:sp>
+      <p:sp>
+        <p:nvSpPr>
+          <p:cNvPr id="21" name="TextBox 20"/>
+          <p:cNvSpPr txBox="1"/>
+          <p:nvPr/>
+        </p:nvSpPr>
+        <p:spPr>
+          <a:xfrm>
+            <a:off x="4395216" y="3826763"/>
+            <a:ext cx="384048" cy="347472"/>
+          </a:xfrm>
+          <a:prstGeom prst="rect">
+            <a:avLst/>
+          </a:prstGeom>
+          <a:noFill/>
+        </p:spPr>
+        <p:txBody>
+          <a:bodyPr wrap="square" lIns="45720" rIns="45720" tIns="36576" bIns="36576" anchor="t">
+            <a:spAutoFit/>
+          </a:bodyPr>
+          <a:lstStyle/>
+          <a:p>
+            <a:pPr algn="l">
+              <a:defRPr sz="1500" b="1">
+                <a:solidFill>
+                  <a:srgbClr val="2F5BA8"/>
+                </a:solidFill>
+                <a:latin typeface="Aptos"/>
+              </a:defRPr>
+            </a:pPr>
+            <a:r>
+              <a:t>05</a:t>
+            </a:r>
+          </a:p>
+        </p:txBody>
+      </p:sp>
+      <p:sp>
+        <p:nvSpPr>
+          <p:cNvPr id="22" name="TextBox 21"/>
+          <p:cNvSpPr txBox="1"/>
+          <p:nvPr/>
+        </p:nvSpPr>
+        <p:spPr>
+          <a:xfrm>
+            <a:off x="4852416" y="3826763"/>
+            <a:ext cx="2621280" cy="1961388"/>
+          </a:xfrm>
+          <a:prstGeom prst="rect">
+            <a:avLst/>
+          </a:prstGeom>
+          <a:noFill/>
+        </p:spPr>
+        <p:txBody>
+          <a:bodyPr wrap="square" lIns="45720" rIns="45720" tIns="36576" bIns="36576" anchor="t">
+            <a:spAutoFit/>
+          </a:bodyPr>
+          <a:lstStyle/>
+          <a:p>
+            <a:pPr algn="l">
+              <a:defRPr sz="1500" b="0">
                 <a:solidFill>
                   <a:srgbClr val="1C2330"/>
                 </a:solidFill>
@@ -6712,7 +6868,7 @@
               </a:defRPr>
             </a:pPr>
             <a:r>
-              <a:t>MiniJarvis · 1.º DAW · Sesión 208 · H1 — Primer MiniJarvis</a:t>
+              <a:t>MiniJarvis · 1.º DAW · Sesión 208 · H1 — Primer asistente ejecutable</a:t>
             </a:r>
           </a:p>
         </p:txBody>
@@ -6877,11 +7033,11 @@
               </a:defRPr>
             </a:pPr>
             <a:r>
-              <a:t>CORRECTO · String message = "Hola";</a:t>
+              <a:t>MAYÚSCULA · System.out.println("Hola");</a:t>
             </a:r>
             <a:br/>
             <a:r>
-              <a:t>System.out.println(message);</a:t>
+              <a:t>ERROR · system.out.println("Hola");</a:t>
             </a:r>
           </a:p>
         </p:txBody>
@@ -7046,11 +7202,11 @@
               </a:defRPr>
             </a:pPr>
             <a:r>
-              <a:t>INCORRECTO · string message = "Hola"</a:t>
+              <a:t>PUNTO Y COMA · System.out.println("Hola");</a:t>
             </a:r>
             <a:br/>
             <a:r>
-              <a:t>System.out.println(message)</a:t>
+              <a:t>ERROR · System.out.println("Hola")</a:t>
             </a:r>
           </a:p>
         </p:txBody>
@@ -7131,7 +7287,7 @@
               </a:defRPr>
             </a:pPr>
             <a:r>
-              <a:t>Busca: mayúscula de String, punto y coma y equilibrio de delimitadores.</a:t>
+              <a:t>Compara un cambio cada vez y localiza la diferencia antes de compilar.</a:t>
             </a:r>
           </a:p>
         </p:txBody>
@@ -7386,7 +7542,7 @@
               </a:defRPr>
             </a:pPr>
             <a:r>
-              <a:t>MiniJarvis · 1.º DAW · Sesión 208 · H1 — Primer MiniJarvis</a:t>
+              <a:t>MiniJarvis · 1.º DAW · Sesión 208 · H1 — Primer asistente ejecutable</a:t>
             </a:r>
           </a:p>
         </p:txBody>
@@ -8109,7 +8265,7 @@
               </a:defRPr>
             </a:pPr>
             <a:r>
-              <a:t>MiniJarvis · 1.º DAW · Sesión 208 · H1 — Primer MiniJarvis</a:t>
+              <a:t>MiniJarvis · 1.º DAW · Sesión 208 · H1 — Primer asistente ejecutable</a:t>
             </a:r>
           </a:p>
         </p:txBody>
@@ -8688,7 +8844,7 @@
               </a:defRPr>
             </a:pPr>
             <a:r>
-              <a:t>MiniJarvis · 1.º DAW · Sesión 208 · H1 — Primer MiniJarvis</a:t>
+              <a:t>MiniJarvis · 1.º DAW · Sesión 208 · H1 — Primer asistente ejecutable</a:t>
             </a:r>
           </a:p>
         </p:txBody>
@@ -9017,7 +9173,7 @@
               </a:defRPr>
             </a:pPr>
             <a:r>
-              <a:t>Fuentes utilizadas</a:t>
+              <a:t>Fuentes diferenciadas</a:t>
             </a:r>
           </a:p>
         </p:txBody>
@@ -9096,7 +9252,7 @@
               </a:defRPr>
             </a:pPr>
             <a:r>
-              <a:t>MiniJarvis · 1.º DAW · Sesión 208 · H1 — Primer MiniJarvis</a:t>
+              <a:t>MiniJarvis · 1.º DAW · Sesión 208 · H1 — Primer asistente ejecutable</a:t>
             </a:r>
           </a:p>
         </p:txBody>
@@ -9171,7 +9327,7 @@
               </a:defRPr>
             </a:pPr>
             <a:r>
-              <a:t>•  Libro: capítulo 01 · Tema 1: aspectos léxicos y comentarios</a:t>
+              <a:t>•  Libro por hitos · Capítulo 01: estructura y errores frecuentes</a:t>
             </a:r>
           </a:p>
           <a:p>
@@ -9187,7 +9343,7 @@
               </a:defRPr>
             </a:pPr>
             <a:r>
-              <a:t>•  Fichas S206-S215 y píldoras H1</a:t>
+              <a:t>•  PDF Tema 1 · §§2-3: léxico y comentarios</a:t>
             </a:r>
           </a:p>
           <a:p>
@@ -9203,7 +9359,7 @@
               </a:defRPr>
             </a:pPr>
             <a:r>
-              <a:t>•  Ejemplos revisados y adaptados a MiniJarvis; no se copian errores ni capturas antiguas del PDF.</a:t>
+              <a:t>•  Proyecto MiniJarvis · fichas S206-S215, píldoras H1 y criterios de evidencia</a:t>
             </a:r>
           </a:p>
         </p:txBody>

--- a/02-PROFESORADO/03-PRESENTACIONES/POR-SESION/h1/S208-estructura-minima-de-un-programa-java-presentacion.pptx
+++ b/02-PROFESORADO/03-PRESENTACIONES/POR-SESION/h1/S208-estructura-minima-de-un-programa-java-presentacion.pptx
@@ -6081,7 +6081,7 @@
               </a:defRPr>
             </a:pPr>
             <a:r>
-              <a:t>He producido o actualizado: Código que compila con varios mensajes por pantalla.</a:t>
+              <a:t>Pueden explicar qué están intentando conseguir.</a:t>
             </a:r>
           </a:p>
         </p:txBody>
@@ -6162,7 +6162,7 @@
               </a:defRPr>
             </a:pPr>
             <a:r>
-              <a:t>Puedo señalar dónde está.</a:t>
+              <a:t>Registran una decisión, prueba o bloqueo; no muestran solo el resultado final.</a:t>
             </a:r>
           </a:p>
         </p:txBody>
@@ -6243,7 +6243,7 @@
               </a:defRPr>
             </a:pPr>
             <a:r>
-              <a:t>Puedo explicar una decisión tomada.</a:t>
+              <a:t>Todas las personas pueden describir su aportación.</a:t>
             </a:r>
           </a:p>
         </p:txBody>
@@ -6324,7 +6324,7 @@
               </a:defRPr>
             </a:pPr>
             <a:r>
-              <a:t>Puedo mostrar una prueba o comprobación.</a:t>
+              <a:t>Comprueban el producto con un criterio observable.</a:t>
             </a:r>
           </a:p>
         </p:txBody>
@@ -6405,7 +6405,7 @@
               </a:defRPr>
             </a:pPr>
             <a:r>
-              <a:t>He registrado mi aportación individual si el trabajo era de equipo.</a:t>
+              <a:t>No usan datos personales, credenciales ni respuestas de ejemplo antes del intento propio.</a:t>
             </a:r>
           </a:p>
         </p:txBody>

--- a/02-PROFESORADO/03-PRESENTACIONES/POR-SESION/h1/S208-estructura-minima-de-un-programa-java-presentacion.pptx
+++ b/02-PROFESORADO/03-PRESENTACIONES/POR-SESION/h1/S208-estructura-minima-de-un-programa-java-presentacion.pptx
@@ -3378,8 +3378,8 @@
         </p:nvSpPr>
         <p:spPr>
           <a:xfrm>
-            <a:off x="713232" y="6272784"/>
-            <a:ext cx="10607040" cy="201168"/>
+            <a:off x="713232" y="4965192"/>
+            <a:ext cx="10241280" cy="594360"/>
           </a:xfrm>
           <a:prstGeom prst="rect">
             <a:avLst/>
@@ -3393,6 +3393,42 @@
           <a:lstStyle/>
           <a:p>
             <a:pPr algn="l">
+              <a:defRPr sz="1700" b="0">
+                <a:solidFill>
+                  <a:srgbClr val="D2D9E4"/>
+                </a:solidFill>
+                <a:latin typeface="Aptos"/>
+              </a:defRPr>
+            </a:pPr>
+            <a:r>
+              <a:t>Individual</a:t>
+            </a:r>
+          </a:p>
+        </p:txBody>
+      </p:sp>
+      <p:sp>
+        <p:nvSpPr>
+          <p:cNvPr id="10" name="TextBox 9"/>
+          <p:cNvSpPr txBox="1"/>
+          <p:nvPr/>
+        </p:nvSpPr>
+        <p:spPr>
+          <a:xfrm>
+            <a:off x="713232" y="6272784"/>
+            <a:ext cx="10607040" cy="201168"/>
+          </a:xfrm>
+          <a:prstGeom prst="rect">
+            <a:avLst/>
+          </a:prstGeom>
+          <a:noFill/>
+        </p:spPr>
+        <p:txBody>
+          <a:bodyPr wrap="square" lIns="45720" rIns="45720" tIns="36576" bIns="36576" anchor="t">
+            <a:spAutoFit/>
+          </a:bodyPr>
+          <a:lstStyle/>
+          <a:p>
+            <a:pPr algn="l">
               <a:defRPr sz="1000" b="1">
                 <a:solidFill>
                   <a:srgbClr val="A0AAB9"/>
@@ -3401,7 +3437,7 @@
               </a:defRPr>
             </a:pPr>
             <a:r>
-              <a:t>MINIJARVIS · PROGRAMACIÓN + ENTORNOS DE DESARROLLO</a:t>
+              <a:t>MINIJARVIS · PROGRAMACIÓN</a:t>
             </a:r>
           </a:p>
         </p:txBody>

--- a/02-PROFESORADO/03-PRESENTACIONES/POR-SESION/h1/S208-estructura-minima-de-un-programa-java-presentacion.pptx
+++ b/02-PROFESORADO/03-PRESENTACIONES/POR-SESION/h1/S208-estructura-minima-de-un-programa-java-presentacion.pptx
@@ -6390,7 +6390,7 @@
               </a:defRPr>
             </a:pPr>
             <a:r>
-              <a:t>S208 · H1 — Primer asistente ejecutable</a:t>
+              <a:t>H1.3 · H1 — Primer asistente ejecutable</a:t>
             </a:r>
           </a:p>
         </p:txBody>
@@ -6712,7 +6712,7 @@
               </a:defRPr>
             </a:pPr>
             <a:r>
-              <a:t>S208 · H1 — Primer asistente ejecutable</a:t>
+              <a:t>H1.3 · H1 — Primer asistente ejecutable</a:t>
             </a:r>
           </a:p>
         </p:txBody>
@@ -7095,7 +7095,7 @@
               </a:defRPr>
             </a:pPr>
             <a:r>
-              <a:t>S208 · H1 — Primer asistente ejecutable</a:t>
+              <a:t>H1.3 · H1 — Primer asistente ejecutable</a:t>
             </a:r>
           </a:p>
         </p:txBody>
@@ -7354,7 +7354,7 @@
               </a:defRPr>
             </a:pPr>
             <a:r>
-              <a:t>S208 · H1 — Primer asistente ejecutable</a:t>
+              <a:t>H1.3 · H1 — Primer asistente ejecutable</a:t>
             </a:r>
           </a:p>
         </p:txBody>
@@ -7594,7 +7594,7 @@
               </a:defRPr>
             </a:pPr>
             <a:r>
-              <a:t>S208 · H1 — Primer asistente ejecutable</a:t>
+              <a:t>H1.3 · H1 — Primer asistente ejecutable</a:t>
             </a:r>
           </a:p>
         </p:txBody>
@@ -7834,7 +7834,7 @@
               </a:defRPr>
             </a:pPr>
             <a:r>
-              <a:t>S208 · H1 — Primer asistente ejecutable</a:t>
+              <a:t>H1.3 · H1 — Primer asistente ejecutable</a:t>
             </a:r>
           </a:p>
         </p:txBody>
@@ -8134,7 +8134,7 @@
               </a:defRPr>
             </a:pPr>
             <a:r>
-              <a:t>S208 · H1 — Primer asistente ejecutable</a:t>
+              <a:t>H1.3 · H1 — Primer asistente ejecutable</a:t>
             </a:r>
           </a:p>
         </p:txBody>
@@ -8480,7 +8480,7 @@
               </a:defRPr>
             </a:pPr>
             <a:r>
-              <a:t>S208 · H1 — Primer asistente ejecutable</a:t>
+              <a:t>H1.3 · H1 — Primer asistente ejecutable</a:t>
             </a:r>
           </a:p>
         </p:txBody>
@@ -8868,7 +8868,7 @@
               </a:defRPr>
             </a:pPr>
             <a:r>
-              <a:t>S208 · H1 — Primer asistente ejecutable</a:t>
+              <a:t>H1.3 · H1 — Primer asistente ejecutable</a:t>
             </a:r>
           </a:p>
         </p:txBody>
@@ -9221,7 +9221,7 @@
               </a:defRPr>
             </a:pPr>
             <a:r>
-              <a:t>S208 · H1 — Primer asistente ejecutable</a:t>
+              <a:t>H1.3 · H1 — Primer asistente ejecutable</a:t>
             </a:r>
           </a:p>
         </p:txBody>
@@ -9665,7 +9665,7 @@
               </a:defRPr>
             </a:pPr>
             <a:r>
-              <a:t>S208 · H1 — Primer asistente ejecutable</a:t>
+              <a:t>H1.3 · H1 — Primer asistente ejecutable</a:t>
             </a:r>
           </a:p>
         </p:txBody>
@@ -9861,7 +9861,7 @@
               </a:defRPr>
             </a:pPr>
             <a:r>
-              <a:t>S208 · H1 — Primer asistente ejecutable</a:t>
+              <a:t>H1.3 · H1 — Primer asistente ejecutable</a:t>
             </a:r>
           </a:p>
         </p:txBody>
@@ -10101,7 +10101,7 @@
               </a:defRPr>
             </a:pPr>
             <a:r>
-              <a:t>S208 · H1 — Primer asistente ejecutable</a:t>
+              <a:t>H1.3 · H1 — Primer asistente ejecutable</a:t>
             </a:r>
           </a:p>
         </p:txBody>
@@ -10546,7 +10546,7 @@
               </a:defRPr>
             </a:pPr>
             <a:r>
-              <a:t>S208 · H1 — Primer asistente ejecutable</a:t>
+              <a:t>H1.3 · H1 — Primer asistente ejecutable</a:t>
             </a:r>
           </a:p>
         </p:txBody>
@@ -10896,7 +10896,7 @@
               </a:defRPr>
             </a:pPr>
             <a:r>
-              <a:t>S208 · H1 — Primer asistente ejecutable</a:t>
+              <a:t>H1.3 · H1 — Primer asistente ejecutable</a:t>
             </a:r>
           </a:p>
         </p:txBody>
@@ -11092,7 +11092,7 @@
               </a:defRPr>
             </a:pPr>
             <a:r>
-              <a:t>S208 · H1 — Primer asistente ejecutable</a:t>
+              <a:t>H1.3 · H1 — Primer asistente ejecutable</a:t>
             </a:r>
           </a:p>
         </p:txBody>
@@ -11577,7 +11577,7 @@
               </a:defRPr>
             </a:pPr>
             <a:r>
-              <a:t>S208 · H1 — Primer asistente ejecutable</a:t>
+              <a:t>H1.3 · H1 — Primer asistente ejecutable</a:t>
             </a:r>
           </a:p>
         </p:txBody>
@@ -11877,7 +11877,7 @@
               </a:defRPr>
             </a:pPr>
             <a:r>
-              <a:t>S208 · H1 — Primer asistente ejecutable</a:t>
+              <a:t>H1.3 · H1 — Primer asistente ejecutable</a:t>
             </a:r>
           </a:p>
         </p:txBody>
@@ -12468,7 +12468,7 @@
               </a:defRPr>
             </a:pPr>
             <a:r>
-              <a:t>S208 · H1 — Primer asistente ejecutable</a:t>
+              <a:t>H1.3 · H1 — Primer asistente ejecutable</a:t>
             </a:r>
           </a:p>
         </p:txBody>
@@ -12706,7 +12706,7 @@
               </a:defRPr>
             </a:pPr>
             <a:r>
-              <a:t>S208 · H1 — Primer asistente ejecutable</a:t>
+              <a:t>H1.3 · H1 — Primer asistente ejecutable</a:t>
             </a:r>
           </a:p>
         </p:txBody>
@@ -12986,7 +12986,7 @@
               </a:defRPr>
             </a:pPr>
             <a:r>
-              <a:t>README / Moodle / Drive / Site: sin actualización o entrega específica en S208.</a:t>
+              <a:t>README / Moodle / Drive / Site: sin actualización o entrega específica en H1.3.</a:t>
             </a:r>
           </a:p>
         </p:txBody>
@@ -13140,7 +13140,7 @@
               </a:defRPr>
             </a:pPr>
             <a:r>
-              <a:t>S208 · H1 — Primer asistente ejecutable</a:t>
+              <a:t>H1.3 · H1 — Primer asistente ejecutable</a:t>
             </a:r>
           </a:p>
         </p:txBody>
@@ -13456,7 +13456,7 @@
               </a:defRPr>
             </a:pPr>
             <a:r>
-              <a:t>S208 · H1 — Primer asistente ejecutable</a:t>
+              <a:t>H1.3 · H1 — Primer asistente ejecutable</a:t>
             </a:r>
           </a:p>
         </p:txBody>
@@ -13848,7 +13848,7 @@
               </a:defRPr>
             </a:pPr>
             <a:r>
-              <a:t>S208 · H1 — Primer asistente ejecutable</a:t>
+              <a:t>H1.3 · H1 — Primer asistente ejecutable</a:t>
             </a:r>
           </a:p>
         </p:txBody>
@@ -14122,7 +14122,7 @@
               </a:defRPr>
             </a:pPr>
             <a:r>
-              <a:t>S208 · H1 — Primer asistente ejecutable</a:t>
+              <a:t>H1.3 · H1 — Primer asistente ejecutable</a:t>
             </a:r>
           </a:p>
         </p:txBody>
@@ -14416,7 +14416,7 @@
               </a:defRPr>
             </a:pPr>
             <a:r>
-              <a:t>S208 · H1 — Primer asistente ejecutable</a:t>
+              <a:t>H1.3 · H1 — Primer asistente ejecutable</a:t>
             </a:r>
           </a:p>
         </p:txBody>
@@ -14815,7 +14815,7 @@
               </a:defRPr>
             </a:pPr>
             <a:r>
-              <a:t>S208 · H1 — Primer asistente ejecutable</a:t>
+              <a:t>H1.3 · H1 — Primer asistente ejecutable</a:t>
             </a:r>
           </a:p>
         </p:txBody>
@@ -15207,7 +15207,7 @@
               </a:defRPr>
             </a:pPr>
             <a:r>
-              <a:t>S208 · H1 — Primer asistente ejecutable</a:t>
+              <a:t>H1.3 · H1 — Primer asistente ejecutable</a:t>
             </a:r>
           </a:p>
         </p:txBody>
@@ -15731,7 +15731,7 @@
               </a:defRPr>
             </a:pPr>
             <a:r>
-              <a:t>S208 · H1 — Primer asistente ejecutable</a:t>
+              <a:t>H1.3 · H1 — Primer asistente ejecutable</a:t>
             </a:r>
           </a:p>
         </p:txBody>
@@ -16089,7 +16089,7 @@
               </a:defRPr>
             </a:pPr>
             <a:r>
-              <a:t>S208 · H1 — Primer asistente ejecutable</a:t>
+              <a:t>H1.3 · H1 — Primer asistente ejecutable</a:t>
             </a:r>
           </a:p>
         </p:txBody>
@@ -16470,7 +16470,7 @@
               </a:defRPr>
             </a:pPr>
             <a:r>
-              <a:t>S208 · H1 — Primer asistente ejecutable</a:t>
+              <a:t>H1.3 · H1 — Primer asistente ejecutable</a:t>
             </a:r>
           </a:p>
         </p:txBody>
